--- a/lessons/btli101_xrw5fg/btli1_l3_slides.pptx
+++ b/lessons/btli101_xrw5fg/btli1_l3_slides.pptx
@@ -14,6 +14,7 @@
     <p:sldId id="262" r:id="rId8"/>
     <p:sldId id="263" r:id="rId9"/>
     <p:sldId id="264" r:id="rId10"/>
+    <p:sldId id="274" r:id="rId25"/>
     <p:sldId id="265" r:id="rId11"/>
     <p:sldId id="266" r:id="rId12"/>
     <p:sldId id="267" r:id="rId13"/>
@@ -21,6 +22,7 @@
     <p:sldId id="269" r:id="rId15"/>
     <p:sldId id="270" r:id="rId16"/>
     <p:sldId id="271" r:id="rId17"/>
+    <p:sldId id="275" r:id="rId26"/>
     <p:sldId id="272" r:id="rId18"/>
     <p:sldId id="273" r:id="rId19"/>
   </p:sldIdLst>
@@ -607,7 +609,7 @@
           <a:p>
             <a:r>
               <a:rPr lang="en-US" dirty="0"/>
-              <a:t>Tables of 4-6 for 8 min. Two questions: (1) Bakit negative ang perception ng mundo sa pagsuko? (2) Naniniwala ka kay Moody? Then 1-2 whole-room shares before bridge to GAWIN.</a:t>
+              <a:t>TANONG (dedicated slide). Tables of 4-6, ~3 min: Bakit negatibo ang perception ng mundo sa pagsuko/pagpapasakop? Surface honest answers, then 1-2 whole-room shares. (The Moody challenge is the NEXT slide.)</a:t>
             </a:r>
             <a:endParaRPr lang="en-US" dirty="0"/>
           </a:p>
@@ -2460,7 +2462,7 @@
                 <a:ea typeface="Calibri" pitchFamily="34" charset="-122"/>
                 <a:cs typeface="Calibri" pitchFamily="34" charset="-120"/>
               </a:rPr>
-              <a:t>1 / 18</a:t>
+              <a:t>1 / 20</a:t>
             </a:r>
             <a:endParaRPr lang="en-US" sz="800" dirty="0"/>
           </a:p>
@@ -2719,6 +2721,59 @@
           </a:p>
         </p:txBody>
       </p:sp>
+      <p:sp>
+        <p:nvSpPr>
+          <p:cNvPr id="90" name="TimerPill"/>
+          <p:cNvSpPr/>
+          <p:nvPr/>
+        </p:nvSpPr>
+        <p:spPr>
+          <a:xfrm>
+            <a:off x="7205472" y="118872"/>
+            <a:ext cx="1828800" cy="365760"/>
+          </a:xfrm>
+          <a:prstGeom prst="roundRect">
+            <a:avLst/>
+          </a:prstGeom>
+          <a:solidFill>
+            <a:srgbClr val="D4AF37"/>
+          </a:solidFill>
+          <a:ln>
+            <a:noFill/>
+          </a:ln>
+          <a:effectLst/>
+        </p:spPr>
+        <p:style>
+          <a:lnRef idx="1">
+            <a:schemeClr val="accent1"/>
+          </a:lnRef>
+          <a:fillRef idx="3">
+            <a:schemeClr val="accent1"/>
+          </a:fillRef>
+          <a:effectRef idx="2">
+            <a:schemeClr val="accent1"/>
+          </a:effectRef>
+          <a:fontRef idx="minor">
+            <a:schemeClr val="lt1"/>
+          </a:fontRef>
+        </p:style>
+        <p:txBody>
+          <a:bodyPr wrap="none" lIns="45720" tIns="0" rIns="45720" bIns="0" rtlCol="0" anchor="ctr"/>
+          <a:lstStyle/>
+          <a:p>
+            <a:pPr algn="ctr"/>
+            <a:r>
+              <a:rPr sz="1100" b="1">
+                <a:solidFill>
+                  <a:srgbClr val="141628"/>
+                </a:solidFill>
+                <a:latin typeface="Calibri"/>
+              </a:rPr>
+              <a:t>⏱ 55-min lesson</a:t>
+            </a:r>
+          </a:p>
+        </p:txBody>
+      </p:sp>
     </p:spTree>
   </p:cSld>
   <p:clrMapOvr>
@@ -2729,14 +2784,7 @@
 
 <file path=ppt/slides/slide10.xml><?xml version="1.0" encoding="utf-8"?>
 <p:sld xmlns:a="http://schemas.openxmlformats.org/drawingml/2006/main" xmlns:r="http://schemas.openxmlformats.org/officeDocument/2006/relationships" xmlns:p="http://schemas.openxmlformats.org/presentationml/2006/main">
-  <p:cSld name="Slide 10">
-    <p:bg>
-      <p:bgPr>
-        <a:solidFill>
-          <a:srgbClr val="0F1C34"/>
-        </a:solidFill>
-      </p:bgPr>
-    </p:bg>
+  <p:cSld>
     <p:spTree>
       <p:nvGrpSpPr>
         <p:cNvPr id="1" name=""/>
@@ -2753,8 +2801,53 @@
       </p:grpSpPr>
       <p:sp>
         <p:nvSpPr>
-          <p:cNvPr id="2" name="Text 0"/>
-          <p:cNvSpPr/>
+          <p:cNvPr id="2" name="BG"/>
+          <p:cNvSpPr/>
+          <p:nvPr/>
+        </p:nvSpPr>
+        <p:spPr>
+          <a:xfrm>
+            <a:off x="0" y="0"/>
+            <a:ext cx="9144000" cy="5143500"/>
+          </a:xfrm>
+          <a:prstGeom prst="rect">
+            <a:avLst/>
+          </a:prstGeom>
+          <a:solidFill>
+            <a:srgbClr val="0F1C34"/>
+          </a:solidFill>
+          <a:ln>
+            <a:noFill/>
+          </a:ln>
+          <a:effectLst/>
+        </p:spPr>
+        <p:style>
+          <a:lnRef idx="1">
+            <a:schemeClr val="accent1"/>
+          </a:lnRef>
+          <a:fillRef idx="3">
+            <a:schemeClr val="accent1"/>
+          </a:fillRef>
+          <a:effectRef idx="2">
+            <a:schemeClr val="accent1"/>
+          </a:effectRef>
+          <a:fontRef idx="minor">
+            <a:schemeClr val="lt1"/>
+          </a:fontRef>
+        </p:style>
+        <p:txBody>
+          <a:bodyPr rtlCol="0" anchor="ctr"/>
+          <a:lstStyle/>
+          <a:p>
+            <a:pPr algn="ctr"/>
+            <a:endParaRPr/>
+          </a:p>
+        </p:txBody>
+      </p:sp>
+      <p:sp>
+        <p:nvSpPr>
+          <p:cNvPr id="3" name="MULTIPLY"/>
+          <p:cNvSpPr txBox="1"/>
           <p:nvPr/>
         </p:nvSpPr>
         <p:spPr>
@@ -2766,34 +2859,28 @@
             <a:avLst/>
           </a:prstGeom>
           <a:noFill/>
-          <a:ln/>
-        </p:spPr>
-        <p:txBody>
-          <a:bodyPr wrap="square" lIns="0" tIns="0" rIns="0" bIns="0" rtlCol="0" anchor="ctr"/>
-          <a:lstStyle/>
-          <a:p>
-            <a:pPr indent="0" marL="0">
-              <a:buNone/>
-            </a:pPr>
-            <a:r>
-              <a:rPr lang="en-US" sz="800" b="1" spc="300" kern="0" dirty="0">
-                <a:solidFill>
-                  <a:srgbClr val="D4A84A"/>
-                </a:solidFill>
-                <a:latin typeface="Calibri" pitchFamily="34" charset="0"/>
-                <a:ea typeface="Calibri" pitchFamily="34" charset="-122"/>
-                <a:cs typeface="Calibri" pitchFamily="34" charset="-120"/>
+        </p:spPr>
+        <p:txBody>
+          <a:bodyPr wrap="square"/>
+          <a:lstStyle/>
+          <a:p>
+            <a:pPr algn="l"/>
+            <a:r>
+              <a:rPr sz="900" b="1" i="0">
+                <a:solidFill>
+                  <a:srgbClr val="808080"/>
+                </a:solidFill>
+                <a:latin typeface="Calibri"/>
               </a:rPr>
               <a:t>MULTIPLY · DISCIPLE-MAKING PIPELINE</a:t>
             </a:r>
-            <a:endParaRPr lang="en-US" sz="800" dirty="0"/>
-          </a:p>
-        </p:txBody>
-      </p:sp>
-      <p:sp>
-        <p:nvSpPr>
-          <p:cNvPr id="3" name="Text 1"/>
-          <p:cNvSpPr/>
+          </a:p>
+        </p:txBody>
+      </p:sp>
+      <p:sp>
+        <p:nvSpPr>
+          <p:cNvPr id="4" name="Footer"/>
+          <p:cNvSpPr txBox="1"/>
           <p:nvPr/>
         </p:nvSpPr>
         <p:spPr>
@@ -2805,34 +2892,28 @@
             <a:avLst/>
           </a:prstGeom>
           <a:noFill/>
-          <a:ln/>
-        </p:spPr>
-        <p:txBody>
-          <a:bodyPr wrap="square" lIns="0" tIns="0" rIns="0" bIns="0" rtlCol="0" anchor="ctr"/>
-          <a:lstStyle/>
-          <a:p>
-            <a:pPr algn="r" indent="0" marL="0">
-              <a:buNone/>
-            </a:pPr>
-            <a:r>
-              <a:rPr lang="en-US" sz="800" b="1" dirty="0">
-                <a:solidFill>
-                  <a:srgbClr val="B0B0B0"/>
-                </a:solidFill>
-                <a:latin typeface="Calibri" pitchFamily="34" charset="0"/>
-                <a:ea typeface="Calibri" pitchFamily="34" charset="-122"/>
-                <a:cs typeface="Calibri" pitchFamily="34" charset="-120"/>
-              </a:rPr>
-              <a:t>10 / 18</a:t>
-            </a:r>
-            <a:endParaRPr lang="en-US" sz="800" dirty="0"/>
-          </a:p>
-        </p:txBody>
-      </p:sp>
-      <p:sp>
-        <p:nvSpPr>
-          <p:cNvPr id="4" name="Text 2"/>
-          <p:cNvSpPr/>
+        </p:spPr>
+        <p:txBody>
+          <a:bodyPr wrap="square"/>
+          <a:lstStyle/>
+          <a:p>
+            <a:pPr algn="r"/>
+            <a:r>
+              <a:rPr sz="900" b="0" i="0">
+                <a:solidFill>
+                  <a:srgbClr val="808080"/>
+                </a:solidFill>
+                <a:latin typeface="Calibri"/>
+              </a:rPr>
+              <a:t>11 / 20</a:t>
+            </a:r>
+          </a:p>
+        </p:txBody>
+      </p:sp>
+      <p:sp>
+        <p:nvSpPr>
+          <p:cNvPr id="5" name="Header"/>
+          <p:cNvSpPr txBox="1"/>
           <p:nvPr/>
         </p:nvSpPr>
         <p:spPr>
@@ -2844,165 +2925,193 @@
             <a:avLst/>
           </a:prstGeom>
           <a:noFill/>
-          <a:ln/>
-        </p:spPr>
-        <p:txBody>
-          <a:bodyPr wrap="square" rtlCol="0" anchor="ctr"/>
-          <a:lstStyle/>
-          <a:p>
-            <a:pPr algn="ctr" indent="0" marL="0">
-              <a:buNone/>
-            </a:pPr>
-            <a:r>
-              <a:rPr lang="en-US" sz="1200" b="1" spc="400" kern="0" dirty="0">
+        </p:spPr>
+        <p:txBody>
+          <a:bodyPr wrap="square"/>
+          <a:lstStyle/>
+          <a:p>
+            <a:pPr algn="ctr"/>
+            <a:r>
+              <a:rPr sz="1500" b="1" i="0">
                 <a:solidFill>
                   <a:srgbClr val="D4A84A"/>
                 </a:solidFill>
-                <a:latin typeface="Calibri" pitchFamily="34" charset="0"/>
-                <a:ea typeface="Calibri" pitchFamily="34" charset="-122"/>
-                <a:cs typeface="Calibri" pitchFamily="34" charset="-120"/>
-              </a:rPr>
-              <a:t>💡 TALAKAY · QUESTIONS</a:t>
-            </a:r>
-            <a:endParaRPr lang="en-US" sz="1200" dirty="0"/>
-          </a:p>
-        </p:txBody>
-      </p:sp>
-      <p:sp>
-        <p:nvSpPr>
-          <p:cNvPr id="5" name="Text 3"/>
-          <p:cNvSpPr/>
-          <p:nvPr/>
-        </p:nvSpPr>
-        <p:spPr>
-          <a:xfrm>
-            <a:off x="457200" y="914400"/>
-            <a:ext cx="8229600" cy="2194560"/>
-          </a:xfrm>
-          <a:prstGeom prst="rect">
-            <a:avLst/>
-          </a:prstGeom>
-          <a:noFill/>
-          <a:ln/>
-        </p:spPr>
-        <p:txBody>
-          <a:bodyPr wrap="square" rtlCol="0" anchor="ctr"/>
-          <a:lstStyle/>
-          <a:p>
-            <a:pPr algn="ctr" indent="0" marL="0">
-              <a:buNone/>
-            </a:pPr>
-            <a:r>
-              <a:rPr lang="en-US" sz="22000" b="1" dirty="0">
-                <a:solidFill>
-                  <a:srgbClr val="E8941A"/>
-                </a:solidFill>
-                <a:latin typeface="Georgia" pitchFamily="34" charset="0"/>
-                <a:ea typeface="Georgia" pitchFamily="34" charset="-122"/>
-                <a:cs typeface="Georgia" pitchFamily="34" charset="-120"/>
-              </a:rPr>
-              <a:t>2</a:t>
-            </a:r>
-            <a:endParaRPr lang="en-US" sz="22000" dirty="0"/>
-          </a:p>
-        </p:txBody>
-      </p:sp>
-      <p:sp>
-        <p:nvSpPr>
-          <p:cNvPr id="6" name="Text 4"/>
-          <p:cNvSpPr/>
-          <p:nvPr/>
-        </p:nvSpPr>
-        <p:spPr>
-          <a:xfrm>
-            <a:off x="457200" y="3200400"/>
-            <a:ext cx="8229600" cy="365760"/>
-          </a:xfrm>
-          <a:prstGeom prst="rect">
-            <a:avLst/>
-          </a:prstGeom>
-          <a:noFill/>
-          <a:ln/>
-        </p:spPr>
-        <p:txBody>
-          <a:bodyPr wrap="square" rtlCol="0" anchor="ctr"/>
-          <a:lstStyle/>
-          <a:p>
-            <a:pPr algn="ctr" indent="0" marL="0">
-              <a:buNone/>
-            </a:pPr>
-            <a:r>
-              <a:rPr lang="en-US" sz="1400" b="1" spc="500" kern="0" dirty="0">
-                <a:solidFill>
-                  <a:srgbClr val="B0B0B0"/>
-                </a:solidFill>
-                <a:latin typeface="Calibri" pitchFamily="34" charset="0"/>
-                <a:ea typeface="Calibri" pitchFamily="34" charset="-122"/>
-                <a:cs typeface="Calibri" pitchFamily="34" charset="-120"/>
-              </a:rPr>
-              <a:t>MGA TANONG SA TABLES</a:t>
-            </a:r>
-            <a:endParaRPr lang="en-US" sz="1400" dirty="0"/>
-          </a:p>
-        </p:txBody>
-      </p:sp>
-      <p:sp>
-        <p:nvSpPr>
-          <p:cNvPr id="7" name="Text 5"/>
-          <p:cNvSpPr/>
-          <p:nvPr/>
-        </p:nvSpPr>
-        <p:spPr>
-          <a:xfrm>
-            <a:off x="457200" y="3703320"/>
-            <a:ext cx="8229600" cy="914400"/>
-          </a:xfrm>
-          <a:prstGeom prst="rect">
-            <a:avLst/>
-          </a:prstGeom>
-          <a:noFill/>
-          <a:ln/>
-        </p:spPr>
-        <p:txBody>
-          <a:bodyPr wrap="square" rtlCol="0" anchor="t"/>
-          <a:lstStyle/>
-          <a:p>
-            <a:pPr algn="ctr" indent="0" marL="0">
-              <a:lnSpc>
-                <a:spcPct val="130000"/>
-              </a:lnSpc>
-              <a:buNone/>
-            </a:pPr>
-            <a:r>
-              <a:rPr lang="en-US" sz="2000" i="1" dirty="0">
-                <a:solidFill>
-                  <a:srgbClr val="FFFFFF"/>
-                </a:solidFill>
-                <a:latin typeface="Georgia" pitchFamily="34" charset="0"/>
-                <a:ea typeface="Georgia" pitchFamily="34" charset="-122"/>
-                <a:cs typeface="Georgia" pitchFamily="34" charset="-120"/>
-              </a:rPr>
-              <a:t>Bakit hirap ang sumuko?
-</a:t>
-            </a:r>
-            <a:pPr algn="ctr" indent="0" marL="0">
-              <a:lnSpc>
-                <a:spcPct val="130000"/>
-              </a:lnSpc>
-              <a:buNone/>
-            </a:pPr>
-            <a:r>
-              <a:rPr lang="en-US" sz="2000" i="1" dirty="0">
+                <a:latin typeface="Calibri"/>
+              </a:rPr>
+              <a:t>💡 TALAKAY · TANONG</a:t>
+            </a:r>
+          </a:p>
+        </p:txBody>
+      </p:sp>
+      <p:sp>
+        <p:nvSpPr>
+          <p:cNvPr id="6" name="PGBadge"/>
+          <p:cNvSpPr/>
+          <p:nvPr/>
+        </p:nvSpPr>
+        <p:spPr>
+          <a:xfrm>
+            <a:off x="2788920" y="1024128"/>
+            <a:ext cx="3566160" cy="329184"/>
+          </a:xfrm>
+          <a:prstGeom prst="roundRect">
+            <a:avLst/>
+          </a:prstGeom>
+          <a:solidFill>
+            <a:srgbClr val="D4A84A"/>
+          </a:solidFill>
+          <a:ln>
+            <a:noFill/>
+          </a:ln>
+          <a:effectLst/>
+        </p:spPr>
+        <p:style>
+          <a:lnRef idx="1">
+            <a:schemeClr val="accent1"/>
+          </a:lnRef>
+          <a:fillRef idx="3">
+            <a:schemeClr val="accent1"/>
+          </a:fillRef>
+          <a:effectRef idx="2">
+            <a:schemeClr val="accent1"/>
+          </a:effectRef>
+          <a:fontRef idx="minor">
+            <a:schemeClr val="lt1"/>
+          </a:fontRef>
+        </p:style>
+        <p:txBody>
+          <a:bodyPr tIns="0" bIns="0" rtlCol="0" anchor="ctr"/>
+          <a:lstStyle/>
+          <a:p>
+            <a:pPr algn="ctr"/>
+            <a:r>
+              <a:rPr sz="1100" b="1" i="0">
+                <a:solidFill>
+                  <a:srgbClr val="141628"/>
+                </a:solidFill>
+                <a:latin typeface="Calibri"/>
+              </a:rPr>
+              <a:t>📋 Participant Guide Question</a:t>
+            </a:r>
+          </a:p>
+        </p:txBody>
+      </p:sp>
+      <p:sp>
+        <p:nvSpPr>
+          <p:cNvPr id="7" name="Question"/>
+          <p:cNvSpPr txBox="1"/>
+          <p:nvPr/>
+        </p:nvSpPr>
+        <p:spPr>
+          <a:xfrm>
+            <a:off x="731520" y="1783080"/>
+            <a:ext cx="7680960" cy="2194560"/>
+          </a:xfrm>
+          <a:prstGeom prst="rect">
+            <a:avLst/>
+          </a:prstGeom>
+          <a:noFill/>
+        </p:spPr>
+        <p:txBody>
+          <a:bodyPr wrap="square" anchor="ctr"/>
+          <a:lstStyle/>
+          <a:p>
+            <a:pPr algn="ctr"/>
+            <a:r>
+              <a:rPr sz="3000" b="1" i="0">
+                <a:solidFill>
+                  <a:srgbClr val="FEFCF8"/>
+                </a:solidFill>
+                <a:latin typeface="Calibri"/>
+              </a:rPr>
+              <a:t>Bakit kaya negatibo ang perception ng mundo sa salitang "pagsuko at pagpapasakop"?</a:t>
+            </a:r>
+          </a:p>
+        </p:txBody>
+      </p:sp>
+      <p:sp>
+        <p:nvSpPr>
+          <p:cNvPr id="8" name="AnswerMode"/>
+          <p:cNvSpPr txBox="1"/>
+          <p:nvPr/>
+        </p:nvSpPr>
+        <p:spPr>
+          <a:xfrm>
+            <a:off x="731520" y="4160520"/>
+            <a:ext cx="7680960" cy="548640"/>
+          </a:xfrm>
+          <a:prstGeom prst="rect">
+            <a:avLst/>
+          </a:prstGeom>
+          <a:noFill/>
+        </p:spPr>
+        <p:txBody>
+          <a:bodyPr wrap="square"/>
+          <a:lstStyle/>
+          <a:p>
+            <a:pPr algn="ctr"/>
+            <a:r>
+              <a:rPr sz="1450" b="0" i="1">
                 <a:solidFill>
                   <a:srgbClr val="D4A84A"/>
                 </a:solidFill>
-                <a:latin typeface="Georgia" pitchFamily="34" charset="0"/>
-                <a:ea typeface="Georgia" pitchFamily="34" charset="-122"/>
-                <a:cs typeface="Georgia" pitchFamily="34" charset="-120"/>
-              </a:rPr>
-              <a:t>Naniniwala ka ba kay Moody?</a:t>
-            </a:r>
-            <a:endParaRPr lang="en-US" sz="2000" dirty="0"/>
+                <a:latin typeface="Calibri"/>
+              </a:rPr>
+              <a:t>Sa tables — pag-usapan. Tapos 1–2 boluntaryong share.</a:t>
+            </a:r>
+          </a:p>
+        </p:txBody>
+      </p:sp>
+      <p:sp>
+        <p:nvSpPr>
+          <p:cNvPr id="9" name="TimerPill"/>
+          <p:cNvSpPr/>
+          <p:nvPr/>
+        </p:nvSpPr>
+        <p:spPr>
+          <a:xfrm>
+            <a:off x="7205472" y="118872"/>
+            <a:ext cx="1828800" cy="365760"/>
+          </a:xfrm>
+          <a:prstGeom prst="roundRect">
+            <a:avLst/>
+          </a:prstGeom>
+          <a:solidFill>
+            <a:srgbClr val="D4AF37"/>
+          </a:solidFill>
+          <a:ln>
+            <a:noFill/>
+          </a:ln>
+          <a:effectLst/>
+        </p:spPr>
+        <p:style>
+          <a:lnRef idx="1">
+            <a:schemeClr val="accent1"/>
+          </a:lnRef>
+          <a:fillRef idx="3">
+            <a:schemeClr val="accent1"/>
+          </a:fillRef>
+          <a:effectRef idx="2">
+            <a:schemeClr val="accent1"/>
+          </a:effectRef>
+          <a:fontRef idx="minor">
+            <a:schemeClr val="lt1"/>
+          </a:fontRef>
+        </p:style>
+        <p:txBody>
+          <a:bodyPr wrap="none" lIns="45720" tIns="0" rIns="45720" bIns="0" rtlCol="0" anchor="ctr"/>
+          <a:lstStyle/>
+          <a:p>
+            <a:pPr algn="ctr"/>
+            <a:r>
+              <a:rPr sz="1100" b="1">
+                <a:solidFill>
+                  <a:srgbClr val="141628"/>
+                </a:solidFill>
+                <a:latin typeface="Calibri"/>
+              </a:rPr>
+              <a:t>⏱ 3 min · ⌛23:00</a:t>
+            </a:r>
           </a:p>
         </p:txBody>
       </p:sp>
@@ -3110,7 +3219,7 @@
                 <a:ea typeface="Calibri" pitchFamily="34" charset="-122"/>
                 <a:cs typeface="Calibri" pitchFamily="34" charset="-120"/>
               </a:rPr>
-              <a:t>11 / 18</a:t>
+              <a:t>12 / 20</a:t>
             </a:r>
             <a:endParaRPr lang="en-US" sz="800" dirty="0"/>
           </a:p>
@@ -3316,6 +3425,59 @@
               <a:t>Naniniwala ka ba? Bakit o bakit hindi?</a:t>
             </a:r>
             <a:endParaRPr lang="en-US" sz="1400" dirty="0"/>
+          </a:p>
+        </p:txBody>
+      </p:sp>
+      <p:sp>
+        <p:nvSpPr>
+          <p:cNvPr id="90" name="TimerPill"/>
+          <p:cNvSpPr/>
+          <p:nvPr/>
+        </p:nvSpPr>
+        <p:spPr>
+          <a:xfrm>
+            <a:off x="7205472" y="118872"/>
+            <a:ext cx="1828800" cy="365760"/>
+          </a:xfrm>
+          <a:prstGeom prst="roundRect">
+            <a:avLst/>
+          </a:prstGeom>
+          <a:solidFill>
+            <a:srgbClr val="D4AF37"/>
+          </a:solidFill>
+          <a:ln>
+            <a:noFill/>
+          </a:ln>
+          <a:effectLst/>
+        </p:spPr>
+        <p:style>
+          <a:lnRef idx="1">
+            <a:schemeClr val="accent1"/>
+          </a:lnRef>
+          <a:fillRef idx="3">
+            <a:schemeClr val="accent1"/>
+          </a:fillRef>
+          <a:effectRef idx="2">
+            <a:schemeClr val="accent1"/>
+          </a:effectRef>
+          <a:fontRef idx="minor">
+            <a:schemeClr val="lt1"/>
+          </a:fontRef>
+        </p:style>
+        <p:txBody>
+          <a:bodyPr wrap="none" lIns="45720" tIns="0" rIns="45720" bIns="0" rtlCol="0" anchor="ctr"/>
+          <a:lstStyle/>
+          <a:p>
+            <a:pPr algn="ctr"/>
+            <a:r>
+              <a:rPr sz="1100" b="1">
+                <a:solidFill>
+                  <a:srgbClr val="141628"/>
+                </a:solidFill>
+                <a:latin typeface="Calibri"/>
+              </a:rPr>
+              <a:t>⏱ 3 min · ⌛26:00</a:t>
+            </a:r>
           </a:p>
         </p:txBody>
       </p:sp>
@@ -3423,7 +3585,7 @@
                 <a:ea typeface="Calibri" pitchFamily="34" charset="-122"/>
                 <a:cs typeface="Calibri" pitchFamily="34" charset="-120"/>
               </a:rPr>
-              <a:t>12 / 18</a:t>
+              <a:t>13 / 20</a:t>
             </a:r>
             <a:endParaRPr lang="en-US" sz="800" dirty="0"/>
           </a:p>
@@ -3687,6 +3849,59 @@
               <a:t>"</a:t>
             </a:r>
             <a:endParaRPr lang="en-US" sz="1800" dirty="0"/>
+          </a:p>
+        </p:txBody>
+      </p:sp>
+      <p:sp>
+        <p:nvSpPr>
+          <p:cNvPr id="90" name="TimerPill"/>
+          <p:cNvSpPr/>
+          <p:nvPr/>
+        </p:nvSpPr>
+        <p:spPr>
+          <a:xfrm>
+            <a:off x="7205472" y="118872"/>
+            <a:ext cx="1828800" cy="365760"/>
+          </a:xfrm>
+          <a:prstGeom prst="roundRect">
+            <a:avLst/>
+          </a:prstGeom>
+          <a:solidFill>
+            <a:srgbClr val="D4AF37"/>
+          </a:solidFill>
+          <a:ln>
+            <a:noFill/>
+          </a:ln>
+          <a:effectLst/>
+        </p:spPr>
+        <p:style>
+          <a:lnRef idx="1">
+            <a:schemeClr val="accent1"/>
+          </a:lnRef>
+          <a:fillRef idx="3">
+            <a:schemeClr val="accent1"/>
+          </a:fillRef>
+          <a:effectRef idx="2">
+            <a:schemeClr val="accent1"/>
+          </a:effectRef>
+          <a:fontRef idx="minor">
+            <a:schemeClr val="lt1"/>
+          </a:fontRef>
+        </p:style>
+        <p:txBody>
+          <a:bodyPr wrap="none" lIns="45720" tIns="0" rIns="45720" bIns="0" rtlCol="0" anchor="ctr"/>
+          <a:lstStyle/>
+          <a:p>
+            <a:pPr algn="ctr"/>
+            <a:r>
+              <a:rPr sz="1100" b="1">
+                <a:solidFill>
+                  <a:srgbClr val="141628"/>
+                </a:solidFill>
+                <a:latin typeface="Calibri"/>
+              </a:rPr>
+              <a:t>⏱ 2 min · ⌛28:00</a:t>
+            </a:r>
           </a:p>
         </p:txBody>
       </p:sp>
@@ -3794,7 +4009,7 @@
                 <a:ea typeface="Calibri" pitchFamily="34" charset="-122"/>
                 <a:cs typeface="Calibri" pitchFamily="34" charset="-120"/>
               </a:rPr>
-              <a:t>13 / 18</a:t>
+              <a:t>14 / 20</a:t>
             </a:r>
             <a:endParaRPr lang="en-US" sz="800" dirty="0"/>
           </a:p>
@@ -4754,6 +4969,59 @@
               <a:t>Paano magiging worship ang Mon-Sat mo?</a:t>
             </a:r>
             <a:endParaRPr lang="en-US" sz="1000" dirty="0"/>
+          </a:p>
+        </p:txBody>
+      </p:sp>
+      <p:sp>
+        <p:nvSpPr>
+          <p:cNvPr id="90" name="TimerPill"/>
+          <p:cNvSpPr/>
+          <p:nvPr/>
+        </p:nvSpPr>
+        <p:spPr>
+          <a:xfrm>
+            <a:off x="7205472" y="118872"/>
+            <a:ext cx="1828800" cy="365760"/>
+          </a:xfrm>
+          <a:prstGeom prst="roundRect">
+            <a:avLst/>
+          </a:prstGeom>
+          <a:solidFill>
+            <a:srgbClr val="D4AF37"/>
+          </a:solidFill>
+          <a:ln>
+            <a:noFill/>
+          </a:ln>
+          <a:effectLst/>
+        </p:spPr>
+        <p:style>
+          <a:lnRef idx="1">
+            <a:schemeClr val="accent1"/>
+          </a:lnRef>
+          <a:fillRef idx="3">
+            <a:schemeClr val="accent1"/>
+          </a:fillRef>
+          <a:effectRef idx="2">
+            <a:schemeClr val="accent1"/>
+          </a:effectRef>
+          <a:fontRef idx="minor">
+            <a:schemeClr val="lt1"/>
+          </a:fontRef>
+        </p:style>
+        <p:txBody>
+          <a:bodyPr wrap="none" lIns="45720" tIns="0" rIns="45720" bIns="0" rtlCol="0" anchor="ctr"/>
+          <a:lstStyle/>
+          <a:p>
+            <a:pPr algn="ctr"/>
+            <a:r>
+              <a:rPr sz="1100" b="1">
+                <a:solidFill>
+                  <a:srgbClr val="141628"/>
+                </a:solidFill>
+                <a:latin typeface="Calibri"/>
+              </a:rPr>
+              <a:t>⏱ 9 min · ⌛37:00</a:t>
+            </a:r>
           </a:p>
         </p:txBody>
       </p:sp>
@@ -4861,7 +5129,7 @@
                 <a:ea typeface="Calibri" pitchFamily="34" charset="-122"/>
                 <a:cs typeface="Calibri" pitchFamily="34" charset="-120"/>
               </a:rPr>
-              <a:t>14 / 18</a:t>
+              <a:t>15 / 20</a:t>
             </a:r>
             <a:endParaRPr lang="en-US" sz="800" dirty="0"/>
           </a:p>
@@ -5082,6 +5350,59 @@
               <a:t>iyan ang pagsuko."</a:t>
             </a:r>
             <a:endParaRPr lang="en-US" sz="2200" dirty="0"/>
+          </a:p>
+        </p:txBody>
+      </p:sp>
+      <p:sp>
+        <p:nvSpPr>
+          <p:cNvPr id="90" name="TimerPill"/>
+          <p:cNvSpPr/>
+          <p:nvPr/>
+        </p:nvSpPr>
+        <p:spPr>
+          <a:xfrm>
+            <a:off x="7205472" y="118872"/>
+            <a:ext cx="1828800" cy="365760"/>
+          </a:xfrm>
+          <a:prstGeom prst="roundRect">
+            <a:avLst/>
+          </a:prstGeom>
+          <a:solidFill>
+            <a:srgbClr val="D4AF37"/>
+          </a:solidFill>
+          <a:ln>
+            <a:noFill/>
+          </a:ln>
+          <a:effectLst/>
+        </p:spPr>
+        <p:style>
+          <a:lnRef idx="1">
+            <a:schemeClr val="accent1"/>
+          </a:lnRef>
+          <a:fillRef idx="3">
+            <a:schemeClr val="accent1"/>
+          </a:fillRef>
+          <a:effectRef idx="2">
+            <a:schemeClr val="accent1"/>
+          </a:effectRef>
+          <a:fontRef idx="minor">
+            <a:schemeClr val="lt1"/>
+          </a:fontRef>
+        </p:style>
+        <p:txBody>
+          <a:bodyPr wrap="none" lIns="45720" tIns="0" rIns="45720" bIns="0" rtlCol="0" anchor="ctr"/>
+          <a:lstStyle/>
+          <a:p>
+            <a:pPr algn="ctr"/>
+            <a:r>
+              <a:rPr sz="1100" b="1">
+                <a:solidFill>
+                  <a:srgbClr val="141628"/>
+                </a:solidFill>
+                <a:latin typeface="Calibri"/>
+              </a:rPr>
+              <a:t>⏱ 2 min · ⌛39:00</a:t>
+            </a:r>
           </a:p>
         </p:txBody>
       </p:sp>
@@ -5189,7 +5510,7 @@
                 <a:ea typeface="Calibri" pitchFamily="34" charset="-122"/>
                 <a:cs typeface="Calibri" pitchFamily="34" charset="-120"/>
               </a:rPr>
-              <a:t>15 / 18</a:t>
+              <a:t>16 / 20</a:t>
             </a:r>
             <a:endParaRPr lang="en-US" sz="800" dirty="0"/>
           </a:p>
@@ -5535,6 +5856,59 @@
               <a:t> Look at it weekly.</a:t>
             </a:r>
             <a:endParaRPr lang="en-US" sz="1200" dirty="0"/>
+          </a:p>
+        </p:txBody>
+      </p:sp>
+      <p:sp>
+        <p:nvSpPr>
+          <p:cNvPr id="90" name="TimerPill"/>
+          <p:cNvSpPr/>
+          <p:nvPr/>
+        </p:nvSpPr>
+        <p:spPr>
+          <a:xfrm>
+            <a:off x="7205472" y="118872"/>
+            <a:ext cx="1828800" cy="365760"/>
+          </a:xfrm>
+          <a:prstGeom prst="roundRect">
+            <a:avLst/>
+          </a:prstGeom>
+          <a:solidFill>
+            <a:srgbClr val="D4AF37"/>
+          </a:solidFill>
+          <a:ln>
+            <a:noFill/>
+          </a:ln>
+          <a:effectLst/>
+        </p:spPr>
+        <p:style>
+          <a:lnRef idx="1">
+            <a:schemeClr val="accent1"/>
+          </a:lnRef>
+          <a:fillRef idx="3">
+            <a:schemeClr val="accent1"/>
+          </a:fillRef>
+          <a:effectRef idx="2">
+            <a:schemeClr val="accent1"/>
+          </a:effectRef>
+          <a:fontRef idx="minor">
+            <a:schemeClr val="lt1"/>
+          </a:fontRef>
+        </p:style>
+        <p:txBody>
+          <a:bodyPr wrap="none" lIns="45720" tIns="0" rIns="45720" bIns="0" rtlCol="0" anchor="ctr"/>
+          <a:lstStyle/>
+          <a:p>
+            <a:pPr algn="ctr"/>
+            <a:r>
+              <a:rPr sz="1100" b="1">
+                <a:solidFill>
+                  <a:srgbClr val="141628"/>
+                </a:solidFill>
+                <a:latin typeface="Calibri"/>
+              </a:rPr>
+              <a:t>⏱ 8 min · ⌛47:00</a:t>
+            </a:r>
           </a:p>
         </p:txBody>
       </p:sp>
@@ -5642,7 +6016,7 @@
                 <a:ea typeface="Calibri" pitchFamily="34" charset="-122"/>
                 <a:cs typeface="Calibri" pitchFamily="34" charset="-120"/>
               </a:rPr>
-              <a:t>16 / 18</a:t>
+              <a:t>17 / 20</a:t>
             </a:r>
             <a:endParaRPr lang="en-US" sz="800" dirty="0"/>
           </a:p>
@@ -5900,6 +6274,59 @@
               <a:t>O the joy of full salvation!</a:t>
             </a:r>
             <a:endParaRPr lang="en-US" sz="3000" dirty="0"/>
+          </a:p>
+        </p:txBody>
+      </p:sp>
+      <p:sp>
+        <p:nvSpPr>
+          <p:cNvPr id="90" name="TimerPill"/>
+          <p:cNvSpPr/>
+          <p:nvPr/>
+        </p:nvSpPr>
+        <p:spPr>
+          <a:xfrm>
+            <a:off x="7205472" y="118872"/>
+            <a:ext cx="1828800" cy="365760"/>
+          </a:xfrm>
+          <a:prstGeom prst="roundRect">
+            <a:avLst/>
+          </a:prstGeom>
+          <a:solidFill>
+            <a:srgbClr val="D4AF37"/>
+          </a:solidFill>
+          <a:ln>
+            <a:noFill/>
+          </a:ln>
+          <a:effectLst/>
+        </p:spPr>
+        <p:style>
+          <a:lnRef idx="1">
+            <a:schemeClr val="accent1"/>
+          </a:lnRef>
+          <a:fillRef idx="3">
+            <a:schemeClr val="accent1"/>
+          </a:fillRef>
+          <a:effectRef idx="2">
+            <a:schemeClr val="accent1"/>
+          </a:effectRef>
+          <a:fontRef idx="minor">
+            <a:schemeClr val="lt1"/>
+          </a:fontRef>
+        </p:style>
+        <p:txBody>
+          <a:bodyPr wrap="none" lIns="45720" tIns="0" rIns="45720" bIns="0" rtlCol="0" anchor="ctr"/>
+          <a:lstStyle/>
+          <a:p>
+            <a:pPr algn="ctr"/>
+            <a:r>
+              <a:rPr sz="1100" b="1">
+                <a:solidFill>
+                  <a:srgbClr val="141628"/>
+                </a:solidFill>
+                <a:latin typeface="Calibri"/>
+              </a:rPr>
+              <a:t>⏱ 4 min · ⌛51:00</a:t>
+            </a:r>
           </a:p>
         </p:txBody>
       </p:sp>
@@ -6007,7 +6434,7 @@
                 <a:ea typeface="Calibri" pitchFamily="34" charset="-122"/>
                 <a:cs typeface="Calibri" pitchFamily="34" charset="-120"/>
               </a:rPr>
-              <a:t>17 / 18</a:t>
+              <a:t>19 / 20</a:t>
             </a:r>
             <a:endParaRPr lang="en-US" sz="800" dirty="0"/>
           </a:p>
@@ -6301,6 +6728,59 @@
               <a:t>Anong surrendered action ang makikita niya?</a:t>
             </a:r>
             <a:endParaRPr lang="en-US" sz="1200" dirty="0"/>
+          </a:p>
+        </p:txBody>
+      </p:sp>
+      <p:sp>
+        <p:nvSpPr>
+          <p:cNvPr id="90" name="TimerPill"/>
+          <p:cNvSpPr/>
+          <p:nvPr/>
+        </p:nvSpPr>
+        <p:spPr>
+          <a:xfrm>
+            <a:off x="7205472" y="118872"/>
+            <a:ext cx="1828800" cy="365760"/>
+          </a:xfrm>
+          <a:prstGeom prst="roundRect">
+            <a:avLst/>
+          </a:prstGeom>
+          <a:solidFill>
+            <a:srgbClr val="D4AF37"/>
+          </a:solidFill>
+          <a:ln>
+            <a:noFill/>
+          </a:ln>
+          <a:effectLst/>
+        </p:spPr>
+        <p:style>
+          <a:lnRef idx="1">
+            <a:schemeClr val="accent1"/>
+          </a:lnRef>
+          <a:fillRef idx="3">
+            <a:schemeClr val="accent1"/>
+          </a:fillRef>
+          <a:effectRef idx="2">
+            <a:schemeClr val="accent1"/>
+          </a:effectRef>
+          <a:fontRef idx="minor">
+            <a:schemeClr val="lt1"/>
+          </a:fontRef>
+        </p:style>
+        <p:txBody>
+          <a:bodyPr wrap="none" lIns="45720" tIns="0" rIns="45720" bIns="0" rtlCol="0" anchor="ctr"/>
+          <a:lstStyle/>
+          <a:p>
+            <a:pPr algn="ctr"/>
+            <a:r>
+              <a:rPr sz="1100" b="1">
+                <a:solidFill>
+                  <a:srgbClr val="141628"/>
+                </a:solidFill>
+                <a:latin typeface="Calibri"/>
+              </a:rPr>
+              <a:t>⏱ 1 min · ⌛54:00</a:t>
+            </a:r>
           </a:p>
         </p:txBody>
       </p:sp>
@@ -6408,7 +6888,7 @@
                 <a:ea typeface="Calibri" pitchFamily="34" charset="-122"/>
                 <a:cs typeface="Calibri" pitchFamily="34" charset="-120"/>
               </a:rPr>
-              <a:t>18 / 18</a:t>
+              <a:t>20 / 20</a:t>
             </a:r>
             <a:endParaRPr lang="en-US" sz="800" dirty="0"/>
           </a:p>
@@ -6629,6 +7109,400 @@
               <a:t>O the joy of full salvation!</a:t>
             </a:r>
             <a:endParaRPr lang="en-US" sz="2800" dirty="0"/>
+          </a:p>
+        </p:txBody>
+      </p:sp>
+      <p:sp>
+        <p:nvSpPr>
+          <p:cNvPr id="90" name="TimerPill"/>
+          <p:cNvSpPr/>
+          <p:nvPr/>
+        </p:nvSpPr>
+        <p:spPr>
+          <a:xfrm>
+            <a:off x="7205472" y="118872"/>
+            <a:ext cx="1828800" cy="365760"/>
+          </a:xfrm>
+          <a:prstGeom prst="roundRect">
+            <a:avLst/>
+          </a:prstGeom>
+          <a:solidFill>
+            <a:srgbClr val="D4AF37"/>
+          </a:solidFill>
+          <a:ln>
+            <a:noFill/>
+          </a:ln>
+          <a:effectLst/>
+        </p:spPr>
+        <p:style>
+          <a:lnRef idx="1">
+            <a:schemeClr val="accent1"/>
+          </a:lnRef>
+          <a:fillRef idx="3">
+            <a:schemeClr val="accent1"/>
+          </a:fillRef>
+          <a:effectRef idx="2">
+            <a:schemeClr val="accent1"/>
+          </a:effectRef>
+          <a:fontRef idx="minor">
+            <a:schemeClr val="lt1"/>
+          </a:fontRef>
+        </p:style>
+        <p:txBody>
+          <a:bodyPr wrap="none" lIns="45720" tIns="0" rIns="45720" bIns="0" rtlCol="0" anchor="ctr"/>
+          <a:lstStyle/>
+          <a:p>
+            <a:pPr algn="ctr"/>
+            <a:r>
+              <a:rPr sz="1100" b="1">
+                <a:solidFill>
+                  <a:srgbClr val="141628"/>
+                </a:solidFill>
+                <a:latin typeface="Calibri"/>
+              </a:rPr>
+              <a:t>⏱ 1 min · ⌛55:00</a:t>
+            </a:r>
+          </a:p>
+        </p:txBody>
+      </p:sp>
+    </p:spTree>
+  </p:cSld>
+  <p:clrMapOvr>
+    <a:masterClrMapping/>
+  </p:clrMapOvr>
+</p:sld>
+</file>
+
+<file path=ppt/slides/slide19.xml><?xml version="1.0" encoding="utf-8"?>
+<p:sld xmlns:a="http://schemas.openxmlformats.org/drawingml/2006/main" xmlns:r="http://schemas.openxmlformats.org/officeDocument/2006/relationships" xmlns:p="http://schemas.openxmlformats.org/presentationml/2006/main">
+  <p:cSld>
+    <p:spTree>
+      <p:nvGrpSpPr>
+        <p:cNvPr id="1" name=""/>
+        <p:cNvGrpSpPr/>
+        <p:nvPr/>
+      </p:nvGrpSpPr>
+      <p:grpSpPr>
+        <a:xfrm>
+          <a:off x="0" y="0"/>
+          <a:ext cx="0" cy="0"/>
+          <a:chOff x="0" y="0"/>
+          <a:chExt cx="0" cy="0"/>
+        </a:xfrm>
+      </p:grpSpPr>
+      <p:sp>
+        <p:nvSpPr>
+          <p:cNvPr id="2" name="BG"/>
+          <p:cNvSpPr/>
+          <p:nvPr/>
+        </p:nvSpPr>
+        <p:spPr>
+          <a:xfrm>
+            <a:off x="0" y="0"/>
+            <a:ext cx="9144000" cy="5143500"/>
+          </a:xfrm>
+          <a:prstGeom prst="rect">
+            <a:avLst/>
+          </a:prstGeom>
+          <a:solidFill>
+            <a:srgbClr val="FEFCF8"/>
+          </a:solidFill>
+          <a:ln>
+            <a:noFill/>
+          </a:ln>
+          <a:effectLst/>
+        </p:spPr>
+        <p:style>
+          <a:lnRef idx="1">
+            <a:schemeClr val="accent1"/>
+          </a:lnRef>
+          <a:fillRef idx="3">
+            <a:schemeClr val="accent1"/>
+          </a:fillRef>
+          <a:effectRef idx="2">
+            <a:schemeClr val="accent1"/>
+          </a:effectRef>
+          <a:fontRef idx="minor">
+            <a:schemeClr val="lt1"/>
+          </a:fontRef>
+        </p:style>
+        <p:txBody>
+          <a:bodyPr rtlCol="0" anchor="ctr"/>
+          <a:lstStyle/>
+          <a:p>
+            <a:pPr algn="ctr"/>
+            <a:endParaRPr/>
+          </a:p>
+        </p:txBody>
+      </p:sp>
+      <p:sp>
+        <p:nvSpPr>
+          <p:cNvPr id="3" name="MULTIPLY"/>
+          <p:cNvSpPr txBox="1"/>
+          <p:nvPr/>
+        </p:nvSpPr>
+        <p:spPr>
+          <a:xfrm>
+            <a:off x="365760" y="137160"/>
+            <a:ext cx="5486400" cy="228600"/>
+          </a:xfrm>
+          <a:prstGeom prst="rect">
+            <a:avLst/>
+          </a:prstGeom>
+          <a:noFill/>
+        </p:spPr>
+        <p:txBody>
+          <a:bodyPr wrap="square"/>
+          <a:lstStyle/>
+          <a:p>
+            <a:pPr algn="l"/>
+            <a:r>
+              <a:rPr sz="900" b="1" i="0">
+                <a:solidFill>
+                  <a:srgbClr val="808080"/>
+                </a:solidFill>
+                <a:latin typeface="Calibri"/>
+              </a:rPr>
+              <a:t>MULTIPLY · DISCIPLE-MAKING PIPELINE</a:t>
+            </a:r>
+          </a:p>
+        </p:txBody>
+      </p:sp>
+      <p:sp>
+        <p:nvSpPr>
+          <p:cNvPr id="4" name="Footer"/>
+          <p:cNvSpPr txBox="1"/>
+          <p:nvPr/>
+        </p:nvSpPr>
+        <p:spPr>
+          <a:xfrm>
+            <a:off x="7772400" y="4846320"/>
+            <a:ext cx="1188720" cy="228600"/>
+          </a:xfrm>
+          <a:prstGeom prst="rect">
+            <a:avLst/>
+          </a:prstGeom>
+          <a:noFill/>
+        </p:spPr>
+        <p:txBody>
+          <a:bodyPr wrap="square"/>
+          <a:lstStyle/>
+          <a:p>
+            <a:pPr algn="r"/>
+            <a:r>
+              <a:rPr sz="900" b="0" i="0">
+                <a:solidFill>
+                  <a:srgbClr val="808080"/>
+                </a:solidFill>
+                <a:latin typeface="Calibri"/>
+              </a:rPr>
+              <a:t>10 / 20</a:t>
+            </a:r>
+          </a:p>
+        </p:txBody>
+      </p:sp>
+      <p:sp>
+        <p:nvSpPr>
+          <p:cNvPr id="5" name="Header"/>
+          <p:cNvSpPr txBox="1"/>
+          <p:nvPr/>
+        </p:nvSpPr>
+        <p:spPr>
+          <a:xfrm>
+            <a:off x="457200" y="457200"/>
+            <a:ext cx="8229600" cy="365760"/>
+          </a:xfrm>
+          <a:prstGeom prst="rect">
+            <a:avLst/>
+          </a:prstGeom>
+          <a:noFill/>
+        </p:spPr>
+        <p:txBody>
+          <a:bodyPr wrap="square"/>
+          <a:lstStyle/>
+          <a:p>
+            <a:pPr algn="ctr"/>
+            <a:r>
+              <a:rPr sz="1500" b="1" i="0">
+                <a:solidFill>
+                  <a:srgbClr val="C97A1A"/>
+                </a:solidFill>
+                <a:latin typeface="Calibri"/>
+              </a:rPr>
+              <a:t>📖 TUKLAS · TANONG</a:t>
+            </a:r>
+          </a:p>
+        </p:txBody>
+      </p:sp>
+      <p:sp>
+        <p:nvSpPr>
+          <p:cNvPr id="6" name="PGBadge"/>
+          <p:cNvSpPr/>
+          <p:nvPr/>
+        </p:nvSpPr>
+        <p:spPr>
+          <a:xfrm>
+            <a:off x="2788920" y="1024128"/>
+            <a:ext cx="3566160" cy="329184"/>
+          </a:xfrm>
+          <a:prstGeom prst="roundRect">
+            <a:avLst/>
+          </a:prstGeom>
+          <a:solidFill>
+            <a:srgbClr val="D4A84A"/>
+          </a:solidFill>
+          <a:ln>
+            <a:noFill/>
+          </a:ln>
+          <a:effectLst/>
+        </p:spPr>
+        <p:style>
+          <a:lnRef idx="1">
+            <a:schemeClr val="accent1"/>
+          </a:lnRef>
+          <a:fillRef idx="3">
+            <a:schemeClr val="accent1"/>
+          </a:fillRef>
+          <a:effectRef idx="2">
+            <a:schemeClr val="accent1"/>
+          </a:effectRef>
+          <a:fontRef idx="minor">
+            <a:schemeClr val="lt1"/>
+          </a:fontRef>
+        </p:style>
+        <p:txBody>
+          <a:bodyPr tIns="0" bIns="0" rtlCol="0" anchor="ctr"/>
+          <a:lstStyle/>
+          <a:p>
+            <a:pPr algn="ctr"/>
+            <a:r>
+              <a:rPr sz="1100" b="1" i="0">
+                <a:solidFill>
+                  <a:srgbClr val="141628"/>
+                </a:solidFill>
+                <a:latin typeface="Calibri"/>
+              </a:rPr>
+              <a:t>📋 Participant Guide Question</a:t>
+            </a:r>
+          </a:p>
+        </p:txBody>
+      </p:sp>
+      <p:sp>
+        <p:nvSpPr>
+          <p:cNvPr id="7" name="Question"/>
+          <p:cNvSpPr txBox="1"/>
+          <p:nvPr/>
+        </p:nvSpPr>
+        <p:spPr>
+          <a:xfrm>
+            <a:off x="731520" y="1783080"/>
+            <a:ext cx="7680960" cy="2194560"/>
+          </a:xfrm>
+          <a:prstGeom prst="rect">
+            <a:avLst/>
+          </a:prstGeom>
+          <a:noFill/>
+        </p:spPr>
+        <p:txBody>
+          <a:bodyPr wrap="square" anchor="ctr"/>
+          <a:lstStyle/>
+          <a:p>
+            <a:pPr algn="ctr"/>
+            <a:r>
+              <a:rPr sz="3000" b="1" i="0">
+                <a:solidFill>
+                  <a:srgbClr val="1B2A4A"/>
+                </a:solidFill>
+                <a:latin typeface="Calibri"/>
+              </a:rPr>
+              <a:t>Ano ang pangunahing dahilan kung bakit hirap ang isang mananampalataya na sumuko sa Panginoon?</a:t>
+            </a:r>
+          </a:p>
+        </p:txBody>
+      </p:sp>
+      <p:sp>
+        <p:nvSpPr>
+          <p:cNvPr id="8" name="AnswerMode"/>
+          <p:cNvSpPr txBox="1"/>
+          <p:nvPr/>
+        </p:nvSpPr>
+        <p:spPr>
+          <a:xfrm>
+            <a:off x="731520" y="4160520"/>
+            <a:ext cx="7680960" cy="548640"/>
+          </a:xfrm>
+          <a:prstGeom prst="rect">
+            <a:avLst/>
+          </a:prstGeom>
+          <a:noFill/>
+        </p:spPr>
+        <p:txBody>
+          <a:bodyPr wrap="square"/>
+          <a:lstStyle/>
+          <a:p>
+            <a:pPr algn="ctr"/>
+            <a:r>
+              <a:rPr sz="1450" b="0" i="1">
+                <a:solidFill>
+                  <a:srgbClr val="B8882A"/>
+                </a:solidFill>
+                <a:latin typeface="Calibri"/>
+              </a:rPr>
+              <a:t>Tahimik na isulat sa Participant Guide — 90 segundo.</a:t>
+            </a:r>
+          </a:p>
+        </p:txBody>
+      </p:sp>
+      <p:sp>
+        <p:nvSpPr>
+          <p:cNvPr id="9" name="TimerPill"/>
+          <p:cNvSpPr/>
+          <p:nvPr/>
+        </p:nvSpPr>
+        <p:spPr>
+          <a:xfrm>
+            <a:off x="7205472" y="118872"/>
+            <a:ext cx="1828800" cy="365760"/>
+          </a:xfrm>
+          <a:prstGeom prst="roundRect">
+            <a:avLst/>
+          </a:prstGeom>
+          <a:solidFill>
+            <a:srgbClr val="D4AF37"/>
+          </a:solidFill>
+          <a:ln>
+            <a:noFill/>
+          </a:ln>
+          <a:effectLst/>
+        </p:spPr>
+        <p:style>
+          <a:lnRef idx="1">
+            <a:schemeClr val="accent1"/>
+          </a:lnRef>
+          <a:fillRef idx="3">
+            <a:schemeClr val="accent1"/>
+          </a:fillRef>
+          <a:effectRef idx="2">
+            <a:schemeClr val="accent1"/>
+          </a:effectRef>
+          <a:fontRef idx="minor">
+            <a:schemeClr val="lt1"/>
+          </a:fontRef>
+        </p:style>
+        <p:txBody>
+          <a:bodyPr wrap="none" lIns="45720" tIns="0" rIns="45720" bIns="0" rtlCol="0" anchor="ctr"/>
+          <a:lstStyle/>
+          <a:p>
+            <a:pPr algn="ctr"/>
+            <a:r>
+              <a:rPr sz="1100" b="1">
+                <a:solidFill>
+                  <a:srgbClr val="141628"/>
+                </a:solidFill>
+                <a:latin typeface="Calibri"/>
+              </a:rPr>
+              <a:t>⏱ 3 min · ⌛20:00</a:t>
+            </a:r>
           </a:p>
         </p:txBody>
       </p:sp>
@@ -6736,7 +7610,7 @@
                 <a:ea typeface="Calibri" pitchFamily="34" charset="-122"/>
                 <a:cs typeface="Calibri" pitchFamily="34" charset="-120"/>
               </a:rPr>
-              <a:t>2 / 18</a:t>
+              <a:t>2 / 20</a:t>
             </a:r>
             <a:endParaRPr lang="en-US" sz="800" dirty="0"/>
           </a:p>
@@ -6918,6 +7792,400 @@
               <a:t>Ilang chapters na kayo? Sino dito ay umabot ng Day 14?</a:t>
             </a:r>
             <a:endParaRPr lang="en-US" sz="1400" dirty="0"/>
+          </a:p>
+        </p:txBody>
+      </p:sp>
+      <p:sp>
+        <p:nvSpPr>
+          <p:cNvPr id="90" name="TimerPill"/>
+          <p:cNvSpPr/>
+          <p:nvPr/>
+        </p:nvSpPr>
+        <p:spPr>
+          <a:xfrm>
+            <a:off x="7205472" y="118872"/>
+            <a:ext cx="1828800" cy="365760"/>
+          </a:xfrm>
+          <a:prstGeom prst="roundRect">
+            <a:avLst/>
+          </a:prstGeom>
+          <a:solidFill>
+            <a:srgbClr val="D4AF37"/>
+          </a:solidFill>
+          <a:ln>
+            <a:noFill/>
+          </a:ln>
+          <a:effectLst/>
+        </p:spPr>
+        <p:style>
+          <a:lnRef idx="1">
+            <a:schemeClr val="accent1"/>
+          </a:lnRef>
+          <a:fillRef idx="3">
+            <a:schemeClr val="accent1"/>
+          </a:fillRef>
+          <a:effectRef idx="2">
+            <a:schemeClr val="accent1"/>
+          </a:effectRef>
+          <a:fontRef idx="minor">
+            <a:schemeClr val="lt1"/>
+          </a:fontRef>
+        </p:style>
+        <p:txBody>
+          <a:bodyPr wrap="none" lIns="45720" tIns="0" rIns="45720" bIns="0" rtlCol="0" anchor="ctr"/>
+          <a:lstStyle/>
+          <a:p>
+            <a:pPr algn="ctr"/>
+            <a:r>
+              <a:rPr sz="1100" b="1">
+                <a:solidFill>
+                  <a:srgbClr val="141628"/>
+                </a:solidFill>
+                <a:latin typeface="Calibri"/>
+              </a:rPr>
+              <a:t>⏱ 2 min · ⌛2:00</a:t>
+            </a:r>
+          </a:p>
+        </p:txBody>
+      </p:sp>
+    </p:spTree>
+  </p:cSld>
+  <p:clrMapOvr>
+    <a:masterClrMapping/>
+  </p:clrMapOvr>
+</p:sld>
+</file>
+
+<file path=ppt/slides/slide20.xml><?xml version="1.0" encoding="utf-8"?>
+<p:sld xmlns:a="http://schemas.openxmlformats.org/drawingml/2006/main" xmlns:r="http://schemas.openxmlformats.org/officeDocument/2006/relationships" xmlns:p="http://schemas.openxmlformats.org/presentationml/2006/main">
+  <p:cSld>
+    <p:spTree>
+      <p:nvGrpSpPr>
+        <p:cNvPr id="1" name=""/>
+        <p:cNvGrpSpPr/>
+        <p:nvPr/>
+      </p:nvGrpSpPr>
+      <p:grpSpPr>
+        <a:xfrm>
+          <a:off x="0" y="0"/>
+          <a:ext cx="0" cy="0"/>
+          <a:chOff x="0" y="0"/>
+          <a:chExt cx="0" cy="0"/>
+        </a:xfrm>
+      </p:grpSpPr>
+      <p:sp>
+        <p:nvSpPr>
+          <p:cNvPr id="2" name="BG"/>
+          <p:cNvSpPr/>
+          <p:nvPr/>
+        </p:nvSpPr>
+        <p:spPr>
+          <a:xfrm>
+            <a:off x="0" y="0"/>
+            <a:ext cx="9144000" cy="5143500"/>
+          </a:xfrm>
+          <a:prstGeom prst="rect">
+            <a:avLst/>
+          </a:prstGeom>
+          <a:solidFill>
+            <a:srgbClr val="0F1C34"/>
+          </a:solidFill>
+          <a:ln>
+            <a:noFill/>
+          </a:ln>
+          <a:effectLst/>
+        </p:spPr>
+        <p:style>
+          <a:lnRef idx="1">
+            <a:schemeClr val="accent1"/>
+          </a:lnRef>
+          <a:fillRef idx="3">
+            <a:schemeClr val="accent1"/>
+          </a:fillRef>
+          <a:effectRef idx="2">
+            <a:schemeClr val="accent1"/>
+          </a:effectRef>
+          <a:fontRef idx="minor">
+            <a:schemeClr val="lt1"/>
+          </a:fontRef>
+        </p:style>
+        <p:txBody>
+          <a:bodyPr rtlCol="0" anchor="ctr"/>
+          <a:lstStyle/>
+          <a:p>
+            <a:pPr algn="ctr"/>
+            <a:endParaRPr/>
+          </a:p>
+        </p:txBody>
+      </p:sp>
+      <p:sp>
+        <p:nvSpPr>
+          <p:cNvPr id="3" name="MULTIPLY"/>
+          <p:cNvSpPr txBox="1"/>
+          <p:nvPr/>
+        </p:nvSpPr>
+        <p:spPr>
+          <a:xfrm>
+            <a:off x="365760" y="137160"/>
+            <a:ext cx="5486400" cy="228600"/>
+          </a:xfrm>
+          <a:prstGeom prst="rect">
+            <a:avLst/>
+          </a:prstGeom>
+          <a:noFill/>
+        </p:spPr>
+        <p:txBody>
+          <a:bodyPr wrap="square"/>
+          <a:lstStyle/>
+          <a:p>
+            <a:pPr algn="l"/>
+            <a:r>
+              <a:rPr sz="900" b="1" i="0">
+                <a:solidFill>
+                  <a:srgbClr val="808080"/>
+                </a:solidFill>
+                <a:latin typeface="Calibri"/>
+              </a:rPr>
+              <a:t>MULTIPLY · DISCIPLE-MAKING PIPELINE</a:t>
+            </a:r>
+          </a:p>
+        </p:txBody>
+      </p:sp>
+      <p:sp>
+        <p:nvSpPr>
+          <p:cNvPr id="4" name="Footer"/>
+          <p:cNvSpPr txBox="1"/>
+          <p:nvPr/>
+        </p:nvSpPr>
+        <p:spPr>
+          <a:xfrm>
+            <a:off x="7772400" y="4846320"/>
+            <a:ext cx="1188720" cy="228600"/>
+          </a:xfrm>
+          <a:prstGeom prst="rect">
+            <a:avLst/>
+          </a:prstGeom>
+          <a:noFill/>
+        </p:spPr>
+        <p:txBody>
+          <a:bodyPr wrap="square"/>
+          <a:lstStyle/>
+          <a:p>
+            <a:pPr algn="r"/>
+            <a:r>
+              <a:rPr sz="900" b="0" i="0">
+                <a:solidFill>
+                  <a:srgbClr val="808080"/>
+                </a:solidFill>
+                <a:latin typeface="Calibri"/>
+              </a:rPr>
+              <a:t>18 / 20</a:t>
+            </a:r>
+          </a:p>
+        </p:txBody>
+      </p:sp>
+      <p:sp>
+        <p:nvSpPr>
+          <p:cNvPr id="5" name="Header"/>
+          <p:cNvSpPr txBox="1"/>
+          <p:nvPr/>
+        </p:nvSpPr>
+        <p:spPr>
+          <a:xfrm>
+            <a:off x="457200" y="457200"/>
+            <a:ext cx="8229600" cy="365760"/>
+          </a:xfrm>
+          <a:prstGeom prst="rect">
+            <a:avLst/>
+          </a:prstGeom>
+          <a:noFill/>
+        </p:spPr>
+        <p:txBody>
+          <a:bodyPr wrap="square"/>
+          <a:lstStyle/>
+          <a:p>
+            <a:pPr algn="ctr"/>
+            <a:r>
+              <a:rPr sz="1500" b="1" i="0">
+                <a:solidFill>
+                  <a:srgbClr val="D4A84A"/>
+                </a:solidFill>
+                <a:latin typeface="Calibri"/>
+              </a:rPr>
+              <a:t>🎵 DALHIN · TANONG</a:t>
+            </a:r>
+          </a:p>
+        </p:txBody>
+      </p:sp>
+      <p:sp>
+        <p:nvSpPr>
+          <p:cNvPr id="6" name="PGBadge"/>
+          <p:cNvSpPr/>
+          <p:nvPr/>
+        </p:nvSpPr>
+        <p:spPr>
+          <a:xfrm>
+            <a:off x="2788920" y="1024128"/>
+            <a:ext cx="3566160" cy="329184"/>
+          </a:xfrm>
+          <a:prstGeom prst="roundRect">
+            <a:avLst/>
+          </a:prstGeom>
+          <a:solidFill>
+            <a:srgbClr val="D4A84A"/>
+          </a:solidFill>
+          <a:ln>
+            <a:noFill/>
+          </a:ln>
+          <a:effectLst/>
+        </p:spPr>
+        <p:style>
+          <a:lnRef idx="1">
+            <a:schemeClr val="accent1"/>
+          </a:lnRef>
+          <a:fillRef idx="3">
+            <a:schemeClr val="accent1"/>
+          </a:fillRef>
+          <a:effectRef idx="2">
+            <a:schemeClr val="accent1"/>
+          </a:effectRef>
+          <a:fontRef idx="minor">
+            <a:schemeClr val="lt1"/>
+          </a:fontRef>
+        </p:style>
+        <p:txBody>
+          <a:bodyPr tIns="0" bIns="0" rtlCol="0" anchor="ctr"/>
+          <a:lstStyle/>
+          <a:p>
+            <a:pPr algn="ctr"/>
+            <a:r>
+              <a:rPr sz="1100" b="1" i="0">
+                <a:solidFill>
+                  <a:srgbClr val="141628"/>
+                </a:solidFill>
+                <a:latin typeface="Calibri"/>
+              </a:rPr>
+              <a:t>📋 Participant Guide Question</a:t>
+            </a:r>
+          </a:p>
+        </p:txBody>
+      </p:sp>
+      <p:sp>
+        <p:nvSpPr>
+          <p:cNvPr id="7" name="Question"/>
+          <p:cNvSpPr txBox="1"/>
+          <p:nvPr/>
+        </p:nvSpPr>
+        <p:spPr>
+          <a:xfrm>
+            <a:off x="731520" y="1783080"/>
+            <a:ext cx="7680960" cy="2194560"/>
+          </a:xfrm>
+          <a:prstGeom prst="rect">
+            <a:avLst/>
+          </a:prstGeom>
+          <a:noFill/>
+        </p:spPr>
+        <p:txBody>
+          <a:bodyPr wrap="square" anchor="ctr"/>
+          <a:lstStyle/>
+          <a:p>
+            <a:pPr algn="ctr"/>
+            <a:r>
+              <a:rPr sz="3000" b="1" i="0">
+                <a:solidFill>
+                  <a:srgbClr val="FEFCF8"/>
+                </a:solidFill>
+                <a:latin typeface="Calibri"/>
+              </a:rPr>
+              <a:t>Anong linya ng himno ang pinakatumama sa'yo? Bakit?</a:t>
+            </a:r>
+          </a:p>
+        </p:txBody>
+      </p:sp>
+      <p:sp>
+        <p:nvSpPr>
+          <p:cNvPr id="8" name="AnswerMode"/>
+          <p:cNvSpPr txBox="1"/>
+          <p:nvPr/>
+        </p:nvSpPr>
+        <p:spPr>
+          <a:xfrm>
+            <a:off x="731520" y="4160520"/>
+            <a:ext cx="7680960" cy="548640"/>
+          </a:xfrm>
+          <a:prstGeom prst="rect">
+            <a:avLst/>
+          </a:prstGeom>
+          <a:noFill/>
+        </p:spPr>
+        <p:txBody>
+          <a:bodyPr wrap="square"/>
+          <a:lstStyle/>
+          <a:p>
+            <a:pPr algn="ctr"/>
+            <a:r>
+              <a:rPr sz="1450" b="0" i="1">
+                <a:solidFill>
+                  <a:srgbClr val="D4A84A"/>
+                </a:solidFill>
+                <a:latin typeface="Calibri"/>
+              </a:rPr>
+              <a:t>I-underline sa Participant Guide — tapos 1–2 boluntaryong share.</a:t>
+            </a:r>
+          </a:p>
+        </p:txBody>
+      </p:sp>
+      <p:sp>
+        <p:nvSpPr>
+          <p:cNvPr id="9" name="TimerPill"/>
+          <p:cNvSpPr/>
+          <p:nvPr/>
+        </p:nvSpPr>
+        <p:spPr>
+          <a:xfrm>
+            <a:off x="7205472" y="118872"/>
+            <a:ext cx="1828800" cy="365760"/>
+          </a:xfrm>
+          <a:prstGeom prst="roundRect">
+            <a:avLst/>
+          </a:prstGeom>
+          <a:solidFill>
+            <a:srgbClr val="D4AF37"/>
+          </a:solidFill>
+          <a:ln>
+            <a:noFill/>
+          </a:ln>
+          <a:effectLst/>
+        </p:spPr>
+        <p:style>
+          <a:lnRef idx="1">
+            <a:schemeClr val="accent1"/>
+          </a:lnRef>
+          <a:fillRef idx="3">
+            <a:schemeClr val="accent1"/>
+          </a:fillRef>
+          <a:effectRef idx="2">
+            <a:schemeClr val="accent1"/>
+          </a:effectRef>
+          <a:fontRef idx="minor">
+            <a:schemeClr val="lt1"/>
+          </a:fontRef>
+        </p:style>
+        <p:txBody>
+          <a:bodyPr wrap="none" lIns="45720" tIns="0" rIns="45720" bIns="0" rtlCol="0" anchor="ctr"/>
+          <a:lstStyle/>
+          <a:p>
+            <a:pPr algn="ctr"/>
+            <a:r>
+              <a:rPr sz="1100" b="1">
+                <a:solidFill>
+                  <a:srgbClr val="141628"/>
+                </a:solidFill>
+                <a:latin typeface="Calibri"/>
+              </a:rPr>
+              <a:t>⏱ 2 min · ⌛53:00</a:t>
+            </a:r>
           </a:p>
         </p:txBody>
       </p:sp>
@@ -7025,7 +8293,7 @@
                 <a:ea typeface="Calibri" pitchFamily="34" charset="-122"/>
                 <a:cs typeface="Calibri" pitchFamily="34" charset="-120"/>
               </a:rPr>
-              <a:t>3 / 18</a:t>
+              <a:t>3 / 20</a:t>
             </a:r>
             <a:endParaRPr lang="en-US" sz="800" dirty="0"/>
           </a:p>
@@ -7168,6 +8436,59 @@
               <a:t>Daang libong buhay.</a:t>
             </a:r>
             <a:endParaRPr lang="en-US" sz="2200" dirty="0"/>
+          </a:p>
+        </p:txBody>
+      </p:sp>
+      <p:sp>
+        <p:nvSpPr>
+          <p:cNvPr id="90" name="TimerPill"/>
+          <p:cNvSpPr/>
+          <p:nvPr/>
+        </p:nvSpPr>
+        <p:spPr>
+          <a:xfrm>
+            <a:off x="7205472" y="118872"/>
+            <a:ext cx="1828800" cy="365760"/>
+          </a:xfrm>
+          <a:prstGeom prst="roundRect">
+            <a:avLst/>
+          </a:prstGeom>
+          <a:solidFill>
+            <a:srgbClr val="D4AF37"/>
+          </a:solidFill>
+          <a:ln>
+            <a:noFill/>
+          </a:ln>
+          <a:effectLst/>
+        </p:spPr>
+        <p:style>
+          <a:lnRef idx="1">
+            <a:schemeClr val="accent1"/>
+          </a:lnRef>
+          <a:fillRef idx="3">
+            <a:schemeClr val="accent1"/>
+          </a:fillRef>
+          <a:effectRef idx="2">
+            <a:schemeClr val="accent1"/>
+          </a:effectRef>
+          <a:fontRef idx="minor">
+            <a:schemeClr val="lt1"/>
+          </a:fontRef>
+        </p:style>
+        <p:txBody>
+          <a:bodyPr wrap="none" lIns="45720" tIns="0" rIns="45720" bIns="0" rtlCol="0" anchor="ctr"/>
+          <a:lstStyle/>
+          <a:p>
+            <a:pPr algn="ctr"/>
+            <a:r>
+              <a:rPr sz="1100" b="1">
+                <a:solidFill>
+                  <a:srgbClr val="141628"/>
+                </a:solidFill>
+                <a:latin typeface="Calibri"/>
+              </a:rPr>
+              <a:t>⏱ 1 min · ⌛3:00</a:t>
+            </a:r>
           </a:p>
         </p:txBody>
       </p:sp>
@@ -7275,7 +8596,7 @@
                 <a:ea typeface="Calibri" pitchFamily="34" charset="-122"/>
                 <a:cs typeface="Calibri" pitchFamily="34" charset="-120"/>
               </a:rPr>
-              <a:t>4 / 18</a:t>
+              <a:t>4 / 20</a:t>
             </a:r>
             <a:endParaRPr lang="en-US" sz="800" dirty="0"/>
           </a:p>
@@ -7727,6 +9048,59 @@
               <a:t>"The world's most tragic case of mistranslation"</a:t>
             </a:r>
             <a:endParaRPr lang="en-US" sz="1300" dirty="0"/>
+          </a:p>
+        </p:txBody>
+      </p:sp>
+      <p:sp>
+        <p:nvSpPr>
+          <p:cNvPr id="90" name="TimerPill"/>
+          <p:cNvSpPr/>
+          <p:nvPr/>
+        </p:nvSpPr>
+        <p:spPr>
+          <a:xfrm>
+            <a:off x="7205472" y="118872"/>
+            <a:ext cx="1828800" cy="365760"/>
+          </a:xfrm>
+          <a:prstGeom prst="roundRect">
+            <a:avLst/>
+          </a:prstGeom>
+          <a:solidFill>
+            <a:srgbClr val="D4AF37"/>
+          </a:solidFill>
+          <a:ln>
+            <a:noFill/>
+          </a:ln>
+          <a:effectLst/>
+        </p:spPr>
+        <p:style>
+          <a:lnRef idx="1">
+            <a:schemeClr val="accent1"/>
+          </a:lnRef>
+          <a:fillRef idx="3">
+            <a:schemeClr val="accent1"/>
+          </a:fillRef>
+          <a:effectRef idx="2">
+            <a:schemeClr val="accent1"/>
+          </a:effectRef>
+          <a:fontRef idx="minor">
+            <a:schemeClr val="lt1"/>
+          </a:fontRef>
+        </p:style>
+        <p:txBody>
+          <a:bodyPr wrap="none" lIns="45720" tIns="0" rIns="45720" bIns="0" rtlCol="0" anchor="ctr"/>
+          <a:lstStyle/>
+          <a:p>
+            <a:pPr algn="ctr"/>
+            <a:r>
+              <a:rPr sz="1100" b="1">
+                <a:solidFill>
+                  <a:srgbClr val="141628"/>
+                </a:solidFill>
+                <a:latin typeface="Calibri"/>
+              </a:rPr>
+              <a:t>⏱ 3 min · ⌛6:00</a:t>
+            </a:r>
           </a:p>
         </p:txBody>
       </p:sp>
@@ -7740,14 +9114,7 @@
 
 <file path=ppt/slides/slide5.xml><?xml version="1.0" encoding="utf-8"?>
 <p:sld xmlns:a="http://schemas.openxmlformats.org/drawingml/2006/main" xmlns:r="http://schemas.openxmlformats.org/officeDocument/2006/relationships" xmlns:p="http://schemas.openxmlformats.org/presentationml/2006/main">
-  <p:cSld name="Slide 5">
-    <p:bg>
-      <p:bgPr>
-        <a:solidFill>
-          <a:srgbClr val="FEFCF8"/>
-        </a:solidFill>
-      </p:bgPr>
-    </p:bg>
+  <p:cSld>
     <p:spTree>
       <p:nvGrpSpPr>
         <p:cNvPr id="1" name=""/>
@@ -7764,8 +9131,53 @@
       </p:grpSpPr>
       <p:sp>
         <p:nvSpPr>
-          <p:cNvPr id="2" name="Text 0"/>
-          <p:cNvSpPr/>
+          <p:cNvPr id="2" name="BG"/>
+          <p:cNvSpPr/>
+          <p:nvPr/>
+        </p:nvSpPr>
+        <p:spPr>
+          <a:xfrm>
+            <a:off x="0" y="0"/>
+            <a:ext cx="9144000" cy="5143500"/>
+          </a:xfrm>
+          <a:prstGeom prst="rect">
+            <a:avLst/>
+          </a:prstGeom>
+          <a:solidFill>
+            <a:srgbClr val="FEFCF8"/>
+          </a:solidFill>
+          <a:ln>
+            <a:noFill/>
+          </a:ln>
+          <a:effectLst/>
+        </p:spPr>
+        <p:style>
+          <a:lnRef idx="1">
+            <a:schemeClr val="accent1"/>
+          </a:lnRef>
+          <a:fillRef idx="3">
+            <a:schemeClr val="accent1"/>
+          </a:fillRef>
+          <a:effectRef idx="2">
+            <a:schemeClr val="accent1"/>
+          </a:effectRef>
+          <a:fontRef idx="minor">
+            <a:schemeClr val="lt1"/>
+          </a:fontRef>
+        </p:style>
+        <p:txBody>
+          <a:bodyPr rtlCol="0" anchor="ctr"/>
+          <a:lstStyle/>
+          <a:p>
+            <a:pPr algn="ctr"/>
+            <a:endParaRPr/>
+          </a:p>
+        </p:txBody>
+      </p:sp>
+      <p:sp>
+        <p:nvSpPr>
+          <p:cNvPr id="3" name="MULTIPLY"/>
+          <p:cNvSpPr txBox="1"/>
           <p:nvPr/>
         </p:nvSpPr>
         <p:spPr>
@@ -7777,34 +9189,28 @@
             <a:avLst/>
           </a:prstGeom>
           <a:noFill/>
-          <a:ln/>
-        </p:spPr>
-        <p:txBody>
-          <a:bodyPr wrap="square" lIns="0" tIns="0" rIns="0" bIns="0" rtlCol="0" anchor="ctr"/>
-          <a:lstStyle/>
-          <a:p>
-            <a:pPr indent="0" marL="0">
-              <a:buNone/>
-            </a:pPr>
-            <a:r>
-              <a:rPr lang="en-US" sz="800" b="1" spc="300" kern="0" dirty="0">
-                <a:solidFill>
-                  <a:srgbClr val="666666"/>
-                </a:solidFill>
-                <a:latin typeface="Calibri" pitchFamily="34" charset="0"/>
-                <a:ea typeface="Calibri" pitchFamily="34" charset="-122"/>
-                <a:cs typeface="Calibri" pitchFamily="34" charset="-120"/>
+        </p:spPr>
+        <p:txBody>
+          <a:bodyPr wrap="square"/>
+          <a:lstStyle/>
+          <a:p>
+            <a:pPr algn="l"/>
+            <a:r>
+              <a:rPr sz="900" b="1" i="0">
+                <a:solidFill>
+                  <a:srgbClr val="808080"/>
+                </a:solidFill>
+                <a:latin typeface="Calibri"/>
               </a:rPr>
               <a:t>MULTIPLY · DISCIPLE-MAKING PIPELINE</a:t>
             </a:r>
-            <a:endParaRPr lang="en-US" sz="800" dirty="0"/>
-          </a:p>
-        </p:txBody>
-      </p:sp>
-      <p:sp>
-        <p:nvSpPr>
-          <p:cNvPr id="3" name="Text 1"/>
-          <p:cNvSpPr/>
+          </a:p>
+        </p:txBody>
+      </p:sp>
+      <p:sp>
+        <p:nvSpPr>
+          <p:cNvPr id="4" name="Footer"/>
+          <p:cNvSpPr txBox="1"/>
           <p:nvPr/>
         </p:nvSpPr>
         <p:spPr>
@@ -7816,34 +9222,28 @@
             <a:avLst/>
           </a:prstGeom>
           <a:noFill/>
-          <a:ln/>
-        </p:spPr>
-        <p:txBody>
-          <a:bodyPr wrap="square" lIns="0" tIns="0" rIns="0" bIns="0" rtlCol="0" anchor="ctr"/>
-          <a:lstStyle/>
-          <a:p>
-            <a:pPr algn="r" indent="0" marL="0">
-              <a:buNone/>
-            </a:pPr>
-            <a:r>
-              <a:rPr lang="en-US" sz="800" b="1" dirty="0">
-                <a:solidFill>
-                  <a:srgbClr val="C0C0C0"/>
-                </a:solidFill>
-                <a:latin typeface="Calibri" pitchFamily="34" charset="0"/>
-                <a:ea typeface="Calibri" pitchFamily="34" charset="-122"/>
-                <a:cs typeface="Calibri" pitchFamily="34" charset="-120"/>
-              </a:rPr>
-              <a:t>5 / 18</a:t>
-            </a:r>
-            <a:endParaRPr lang="en-US" sz="800" dirty="0"/>
-          </a:p>
-        </p:txBody>
-      </p:sp>
-      <p:sp>
-        <p:nvSpPr>
-          <p:cNvPr id="4" name="Text 2"/>
-          <p:cNvSpPr/>
+        </p:spPr>
+        <p:txBody>
+          <a:bodyPr wrap="square"/>
+          <a:lstStyle/>
+          <a:p>
+            <a:pPr algn="r"/>
+            <a:r>
+              <a:rPr sz="900" b="0" i="0">
+                <a:solidFill>
+                  <a:srgbClr val="808080"/>
+                </a:solidFill>
+                <a:latin typeface="Calibri"/>
+              </a:rPr>
+              <a:t>5 / 20</a:t>
+            </a:r>
+          </a:p>
+        </p:txBody>
+      </p:sp>
+      <p:sp>
+        <p:nvSpPr>
+          <p:cNvPr id="5" name="Header"/>
+          <p:cNvSpPr txBox="1"/>
           <p:nvPr/>
         </p:nvSpPr>
         <p:spPr>
@@ -7855,165 +9255,193 @@
             <a:avLst/>
           </a:prstGeom>
           <a:noFill/>
-          <a:ln/>
-        </p:spPr>
-        <p:txBody>
-          <a:bodyPr wrap="square" rtlCol="0" anchor="ctr"/>
-          <a:lstStyle/>
-          <a:p>
-            <a:pPr algn="ctr" indent="0" marL="0">
-              <a:buNone/>
-            </a:pPr>
-            <a:r>
-              <a:rPr lang="en-US" sz="1200" b="1" spc="400" kern="0" dirty="0">
+        </p:spPr>
+        <p:txBody>
+          <a:bodyPr wrap="square"/>
+          <a:lstStyle/>
+          <a:p>
+            <a:pPr algn="ctr"/>
+            <a:r>
+              <a:rPr sz="1500" b="1" i="0">
                 <a:solidFill>
                   <a:srgbClr val="C97A1A"/>
                 </a:solidFill>
-                <a:latin typeface="Calibri" pitchFamily="34" charset="0"/>
-                <a:ea typeface="Calibri" pitchFamily="34" charset="-122"/>
-                <a:cs typeface="Calibri" pitchFamily="34" charset="-120"/>
-              </a:rPr>
-              <a:t>⚡ PUKAW · ANG TANONG</a:t>
-            </a:r>
-            <a:endParaRPr lang="en-US" sz="1200" dirty="0"/>
-          </a:p>
-        </p:txBody>
-      </p:sp>
-      <p:sp>
-        <p:nvSpPr>
-          <p:cNvPr id="5" name="Text 3"/>
-          <p:cNvSpPr/>
-          <p:nvPr/>
-        </p:nvSpPr>
-        <p:spPr>
-          <a:xfrm>
-            <a:off x="457200" y="1188720"/>
-            <a:ext cx="8229600" cy="457200"/>
-          </a:xfrm>
-          <a:prstGeom prst="rect">
-            <a:avLst/>
-          </a:prstGeom>
-          <a:noFill/>
-          <a:ln/>
-        </p:spPr>
-        <p:txBody>
-          <a:bodyPr wrap="square" rtlCol="0" anchor="ctr"/>
-          <a:lstStyle/>
-          <a:p>
-            <a:pPr algn="ctr" indent="0" marL="0">
-              <a:buNone/>
-            </a:pPr>
-            <a:r>
-              <a:rPr lang="en-US" sz="1600" i="1" dirty="0">
-                <a:solidFill>
-                  <a:srgbClr val="6A6660"/>
-                </a:solidFill>
-                <a:latin typeface="Calibri" pitchFamily="34" charset="0"/>
-                <a:ea typeface="Calibri" pitchFamily="34" charset="-122"/>
-                <a:cs typeface="Calibri" pitchFamily="34" charset="-120"/>
-              </a:rPr>
-              <a:t>Sa konteksto ng Christian life mo...</a:t>
-            </a:r>
-            <a:endParaRPr lang="en-US" sz="1600" dirty="0"/>
-          </a:p>
-        </p:txBody>
-      </p:sp>
-      <p:sp>
-        <p:nvSpPr>
-          <p:cNvPr id="6" name="Text 4"/>
-          <p:cNvSpPr/>
-          <p:nvPr/>
-        </p:nvSpPr>
-        <p:spPr>
-          <a:xfrm>
-            <a:off x="457200" y="1828800"/>
-            <a:ext cx="8229600" cy="2286000"/>
-          </a:xfrm>
-          <a:prstGeom prst="rect">
-            <a:avLst/>
-          </a:prstGeom>
-          <a:noFill/>
-          <a:ln/>
-        </p:spPr>
-        <p:txBody>
-          <a:bodyPr wrap="square" rtlCol="0" anchor="ctr"/>
-          <a:lstStyle/>
-          <a:p>
-            <a:pPr algn="ctr" indent="0" marL="0">
-              <a:lnSpc>
-                <a:spcPct val="125000"/>
-              </a:lnSpc>
-              <a:buNone/>
-            </a:pPr>
-            <a:r>
-              <a:rPr lang="en-US" sz="4000" b="1" dirty="0">
+                <a:latin typeface="Calibri"/>
+              </a:rPr>
+              <a:t>⚡ PUKAW · TANONG</a:t>
+            </a:r>
+          </a:p>
+        </p:txBody>
+      </p:sp>
+      <p:sp>
+        <p:nvSpPr>
+          <p:cNvPr id="6" name="PGBadge"/>
+          <p:cNvSpPr/>
+          <p:nvPr/>
+        </p:nvSpPr>
+        <p:spPr>
+          <a:xfrm>
+            <a:off x="2788920" y="1024128"/>
+            <a:ext cx="3566160" cy="329184"/>
+          </a:xfrm>
+          <a:prstGeom prst="roundRect">
+            <a:avLst/>
+          </a:prstGeom>
+          <a:solidFill>
+            <a:srgbClr val="D4A84A"/>
+          </a:solidFill>
+          <a:ln>
+            <a:noFill/>
+          </a:ln>
+          <a:effectLst/>
+        </p:spPr>
+        <p:style>
+          <a:lnRef idx="1">
+            <a:schemeClr val="accent1"/>
+          </a:lnRef>
+          <a:fillRef idx="3">
+            <a:schemeClr val="accent1"/>
+          </a:fillRef>
+          <a:effectRef idx="2">
+            <a:schemeClr val="accent1"/>
+          </a:effectRef>
+          <a:fontRef idx="minor">
+            <a:schemeClr val="lt1"/>
+          </a:fontRef>
+        </p:style>
+        <p:txBody>
+          <a:bodyPr tIns="0" bIns="0" rtlCol="0" anchor="ctr"/>
+          <a:lstStyle/>
+          <a:p>
+            <a:pPr algn="ctr"/>
+            <a:r>
+              <a:rPr sz="1100" b="1" i="0">
+                <a:solidFill>
+                  <a:srgbClr val="141628"/>
+                </a:solidFill>
+                <a:latin typeface="Calibri"/>
+              </a:rPr>
+              <a:t>📋 Participant Guide Question</a:t>
+            </a:r>
+          </a:p>
+        </p:txBody>
+      </p:sp>
+      <p:sp>
+        <p:nvSpPr>
+          <p:cNvPr id="7" name="Question"/>
+          <p:cNvSpPr txBox="1"/>
+          <p:nvPr/>
+        </p:nvSpPr>
+        <p:spPr>
+          <a:xfrm>
+            <a:off x="731520" y="1783080"/>
+            <a:ext cx="7680960" cy="2194560"/>
+          </a:xfrm>
+          <a:prstGeom prst="rect">
+            <a:avLst/>
+          </a:prstGeom>
+          <a:noFill/>
+        </p:spPr>
+        <p:txBody>
+          <a:bodyPr wrap="square" anchor="ctr"/>
+          <a:lstStyle/>
+          <a:p>
+            <a:pPr algn="ctr"/>
+            <a:r>
+              <a:rPr sz="3000" b="1" i="0">
                 <a:solidFill>
                   <a:srgbClr val="1B2A4A"/>
                 </a:solidFill>
-                <a:latin typeface="Georgia" pitchFamily="34" charset="0"/>
-                <a:ea typeface="Georgia" pitchFamily="34" charset="-122"/>
-                <a:cs typeface="Georgia" pitchFamily="34" charset="-120"/>
-              </a:rPr>
-              <a:t>Ano ang pakahulugan mo</a:t>
-            </a:r>
-            <a:endParaRPr lang="en-US" sz="4000" dirty="0"/>
-          </a:p>
-          <a:p>
-            <a:pPr algn="ctr" indent="0" marL="0">
-              <a:lnSpc>
-                <a:spcPct val="125000"/>
-              </a:lnSpc>
-              <a:buNone/>
-            </a:pPr>
-            <a:r>
-              <a:rPr lang="en-US" sz="4000" b="1" dirty="0">
-                <a:solidFill>
-                  <a:srgbClr val="1B2A4A"/>
-                </a:solidFill>
-                <a:latin typeface="Georgia" pitchFamily="34" charset="0"/>
-                <a:ea typeface="Georgia" pitchFamily="34" charset="-122"/>
-                <a:cs typeface="Georgia" pitchFamily="34" charset="-120"/>
-              </a:rPr>
-              <a:t>sa salitang </a:t>
-            </a:r>
-            <a:endParaRPr lang="en-US" sz="4000" dirty="0"/>
-          </a:p>
-          <a:p>
-            <a:pPr algn="ctr" indent="0" marL="0">
-              <a:lnSpc>
-                <a:spcPct val="125000"/>
-              </a:lnSpc>
-              <a:buNone/>
-            </a:pPr>
-            <a:r>
-              <a:rPr lang="en-US" sz="4000" b="1" i="1" dirty="0">
-                <a:solidFill>
-                  <a:srgbClr val="C97A1A"/>
-                </a:solidFill>
-                <a:latin typeface="Georgia" pitchFamily="34" charset="0"/>
-                <a:ea typeface="Georgia" pitchFamily="34" charset="-122"/>
-                <a:cs typeface="Georgia" pitchFamily="34" charset="-120"/>
-              </a:rPr>
-              <a:t>"unconditional surrender"</a:t>
-            </a:r>
-            <a:pPr algn="ctr" indent="0" marL="0">
-              <a:lnSpc>
-                <a:spcPct val="125000"/>
-              </a:lnSpc>
-              <a:buNone/>
-            </a:pPr>
-            <a:r>
-              <a:rPr lang="en-US" sz="4000" b="1" dirty="0">
-                <a:solidFill>
-                  <a:srgbClr val="1B2A4A"/>
-                </a:solidFill>
-                <a:latin typeface="Georgia" pitchFamily="34" charset="0"/>
-                <a:ea typeface="Georgia" pitchFamily="34" charset="-122"/>
-                <a:cs typeface="Georgia" pitchFamily="34" charset="-120"/>
-              </a:rPr>
-              <a:t>?</a:t>
-            </a:r>
-            <a:endParaRPr lang="en-US" sz="4000" dirty="0"/>
+                <a:latin typeface="Calibri"/>
+              </a:rPr>
+              <a:t>Ano ang pakahulugan mo sa salitang "unconditional surrender"?</a:t>
+            </a:r>
+          </a:p>
+        </p:txBody>
+      </p:sp>
+      <p:sp>
+        <p:nvSpPr>
+          <p:cNvPr id="8" name="AnswerMode"/>
+          <p:cNvSpPr txBox="1"/>
+          <p:nvPr/>
+        </p:nvSpPr>
+        <p:spPr>
+          <a:xfrm>
+            <a:off x="731520" y="4160520"/>
+            <a:ext cx="7680960" cy="548640"/>
+          </a:xfrm>
+          <a:prstGeom prst="rect">
+            <a:avLst/>
+          </a:prstGeom>
+          <a:noFill/>
+        </p:spPr>
+        <p:txBody>
+          <a:bodyPr wrap="square"/>
+          <a:lstStyle/>
+          <a:p>
+            <a:pPr algn="ctr"/>
+            <a:r>
+              <a:rPr sz="1450" b="0" i="1">
+                <a:solidFill>
+                  <a:srgbClr val="B8882A"/>
+                </a:solidFill>
+                <a:latin typeface="Calibri"/>
+              </a:rPr>
+              <a:t>Isulat sa Participant Guide — tapos 1–2 boluntaryong share.</a:t>
+            </a:r>
+          </a:p>
+        </p:txBody>
+      </p:sp>
+      <p:sp>
+        <p:nvSpPr>
+          <p:cNvPr id="9" name="TimerPill"/>
+          <p:cNvSpPr/>
+          <p:nvPr/>
+        </p:nvSpPr>
+        <p:spPr>
+          <a:xfrm>
+            <a:off x="7205472" y="118872"/>
+            <a:ext cx="1828800" cy="365760"/>
+          </a:xfrm>
+          <a:prstGeom prst="roundRect">
+            <a:avLst/>
+          </a:prstGeom>
+          <a:solidFill>
+            <a:srgbClr val="D4AF37"/>
+          </a:solidFill>
+          <a:ln>
+            <a:noFill/>
+          </a:ln>
+          <a:effectLst/>
+        </p:spPr>
+        <p:style>
+          <a:lnRef idx="1">
+            <a:schemeClr val="accent1"/>
+          </a:lnRef>
+          <a:fillRef idx="3">
+            <a:schemeClr val="accent1"/>
+          </a:fillRef>
+          <a:effectRef idx="2">
+            <a:schemeClr val="accent1"/>
+          </a:effectRef>
+          <a:fontRef idx="minor">
+            <a:schemeClr val="lt1"/>
+          </a:fontRef>
+        </p:style>
+        <p:txBody>
+          <a:bodyPr wrap="none" lIns="45720" tIns="0" rIns="45720" bIns="0" rtlCol="0" anchor="ctr"/>
+          <a:lstStyle/>
+          <a:p>
+            <a:pPr algn="ctr"/>
+            <a:r>
+              <a:rPr sz="1100" b="1">
+                <a:solidFill>
+                  <a:srgbClr val="141628"/>
+                </a:solidFill>
+                <a:latin typeface="Calibri"/>
+              </a:rPr>
+              <a:t>⏱ 3 min · ⌛9:00</a:t>
+            </a:r>
           </a:p>
         </p:txBody>
       </p:sp>
@@ -8121,7 +9549,7 @@
                 <a:ea typeface="Calibri" pitchFamily="34" charset="-122"/>
                 <a:cs typeface="Calibri" pitchFamily="34" charset="-120"/>
               </a:rPr>
-              <a:t>6 / 18</a:t>
+              <a:t>6 / 20</a:t>
             </a:r>
             <a:endParaRPr lang="en-US" sz="800" dirty="0"/>
           </a:p>
@@ -8312,6 +9740,59 @@
               <a:t>."</a:t>
             </a:r>
             <a:endParaRPr lang="en-US" sz="3200" dirty="0"/>
+          </a:p>
+        </p:txBody>
+      </p:sp>
+      <p:sp>
+        <p:nvSpPr>
+          <p:cNvPr id="90" name="TimerPill"/>
+          <p:cNvSpPr/>
+          <p:nvPr/>
+        </p:nvSpPr>
+        <p:spPr>
+          <a:xfrm>
+            <a:off x="7205472" y="118872"/>
+            <a:ext cx="1828800" cy="365760"/>
+          </a:xfrm>
+          <a:prstGeom prst="roundRect">
+            <a:avLst/>
+          </a:prstGeom>
+          <a:solidFill>
+            <a:srgbClr val="D4AF37"/>
+          </a:solidFill>
+          <a:ln>
+            <a:noFill/>
+          </a:ln>
+          <a:effectLst/>
+        </p:spPr>
+        <p:style>
+          <a:lnRef idx="1">
+            <a:schemeClr val="accent1"/>
+          </a:lnRef>
+          <a:fillRef idx="3">
+            <a:schemeClr val="accent1"/>
+          </a:fillRef>
+          <a:effectRef idx="2">
+            <a:schemeClr val="accent1"/>
+          </a:effectRef>
+          <a:fontRef idx="minor">
+            <a:schemeClr val="lt1"/>
+          </a:fontRef>
+        </p:style>
+        <p:txBody>
+          <a:bodyPr wrap="none" lIns="45720" tIns="0" rIns="45720" bIns="0" rtlCol="0" anchor="ctr"/>
+          <a:lstStyle/>
+          <a:p>
+            <a:pPr algn="ctr"/>
+            <a:r>
+              <a:rPr sz="1100" b="1">
+                <a:solidFill>
+                  <a:srgbClr val="141628"/>
+                </a:solidFill>
+                <a:latin typeface="Calibri"/>
+              </a:rPr>
+              <a:t>⏱ 2 min · ⌛11:00</a:t>
+            </a:r>
           </a:p>
         </p:txBody>
       </p:sp>
@@ -8419,7 +9900,7 @@
                 <a:ea typeface="Calibri" pitchFamily="34" charset="-122"/>
                 <a:cs typeface="Calibri" pitchFamily="34" charset="-120"/>
               </a:rPr>
-              <a:t>7 / 18</a:t>
+              <a:t>7 / 20</a:t>
             </a:r>
             <a:endParaRPr lang="en-US" sz="800" dirty="0"/>
           </a:p>
@@ -8696,6 +10177,59 @@
               <a:t>EXCLUSIVELY</a:t>
             </a:r>
             <a:endParaRPr lang="en-US" sz="1700" dirty="0"/>
+          </a:p>
+        </p:txBody>
+      </p:sp>
+      <p:sp>
+        <p:nvSpPr>
+          <p:cNvPr id="90" name="TimerPill"/>
+          <p:cNvSpPr/>
+          <p:nvPr/>
+        </p:nvSpPr>
+        <p:spPr>
+          <a:xfrm>
+            <a:off x="7205472" y="118872"/>
+            <a:ext cx="1828800" cy="365760"/>
+          </a:xfrm>
+          <a:prstGeom prst="roundRect">
+            <a:avLst/>
+          </a:prstGeom>
+          <a:solidFill>
+            <a:srgbClr val="D4AF37"/>
+          </a:solidFill>
+          <a:ln>
+            <a:noFill/>
+          </a:ln>
+          <a:effectLst/>
+        </p:spPr>
+        <p:style>
+          <a:lnRef idx="1">
+            <a:schemeClr val="accent1"/>
+          </a:lnRef>
+          <a:fillRef idx="3">
+            <a:schemeClr val="accent1"/>
+          </a:fillRef>
+          <a:effectRef idx="2">
+            <a:schemeClr val="accent1"/>
+          </a:effectRef>
+          <a:fontRef idx="minor">
+            <a:schemeClr val="lt1"/>
+          </a:fontRef>
+        </p:style>
+        <p:txBody>
+          <a:bodyPr wrap="none" lIns="45720" tIns="0" rIns="45720" bIns="0" rtlCol="0" anchor="ctr"/>
+          <a:lstStyle/>
+          <a:p>
+            <a:pPr algn="ctr"/>
+            <a:r>
+              <a:rPr sz="1100" b="1">
+                <a:solidFill>
+                  <a:srgbClr val="141628"/>
+                </a:solidFill>
+                <a:latin typeface="Calibri"/>
+              </a:rPr>
+              <a:t>⏱ 2 min · ⌛13:00</a:t>
+            </a:r>
           </a:p>
         </p:txBody>
       </p:sp>
@@ -8803,7 +10337,7 @@
                 <a:ea typeface="Calibri" pitchFamily="34" charset="-122"/>
                 <a:cs typeface="Calibri" pitchFamily="34" charset="-120"/>
               </a:rPr>
-              <a:t>8 / 18</a:t>
+              <a:t>8 / 20</a:t>
             </a:r>
             <a:endParaRPr lang="en-US" sz="800" dirty="0"/>
           </a:p>
@@ -8999,6 +10533,59 @@
               <a:t> Kaya't gamitin ninyo ang inyong katawan upang maparangalan ang Diyos."</a:t>
             </a:r>
             <a:endParaRPr lang="en-US" sz="2200" dirty="0"/>
+          </a:p>
+        </p:txBody>
+      </p:sp>
+      <p:sp>
+        <p:nvSpPr>
+          <p:cNvPr id="90" name="TimerPill"/>
+          <p:cNvSpPr/>
+          <p:nvPr/>
+        </p:nvSpPr>
+        <p:spPr>
+          <a:xfrm>
+            <a:off x="7205472" y="118872"/>
+            <a:ext cx="1828800" cy="365760"/>
+          </a:xfrm>
+          <a:prstGeom prst="roundRect">
+            <a:avLst/>
+          </a:prstGeom>
+          <a:solidFill>
+            <a:srgbClr val="D4AF37"/>
+          </a:solidFill>
+          <a:ln>
+            <a:noFill/>
+          </a:ln>
+          <a:effectLst/>
+        </p:spPr>
+        <p:style>
+          <a:lnRef idx="1">
+            <a:schemeClr val="accent1"/>
+          </a:lnRef>
+          <a:fillRef idx="3">
+            <a:schemeClr val="accent1"/>
+          </a:fillRef>
+          <a:effectRef idx="2">
+            <a:schemeClr val="accent1"/>
+          </a:effectRef>
+          <a:fontRef idx="minor">
+            <a:schemeClr val="lt1"/>
+          </a:fontRef>
+        </p:style>
+        <p:txBody>
+          <a:bodyPr wrap="none" lIns="45720" tIns="0" rIns="45720" bIns="0" rtlCol="0" anchor="ctr"/>
+          <a:lstStyle/>
+          <a:p>
+            <a:pPr algn="ctr"/>
+            <a:r>
+              <a:rPr sz="1100" b="1">
+                <a:solidFill>
+                  <a:srgbClr val="141628"/>
+                </a:solidFill>
+                <a:latin typeface="Calibri"/>
+              </a:rPr>
+              <a:t>⏱ 2 min · ⌛15:00</a:t>
+            </a:r>
           </a:p>
         </p:txBody>
       </p:sp>
@@ -9106,7 +10693,7 @@
                 <a:ea typeface="Calibri" pitchFamily="34" charset="-122"/>
                 <a:cs typeface="Calibri" pitchFamily="34" charset="-120"/>
               </a:rPr>
-              <a:t>9 / 18</a:t>
+              <a:t>9 / 20</a:t>
             </a:r>
             <a:endParaRPr lang="en-US" sz="800" dirty="0"/>
           </a:p>
@@ -9478,6 +11065,59 @@
               <a:t>"Hindi mo puwedeng sabihin na sumusuko ka ng hindi sumusunod."</a:t>
             </a:r>
             <a:endParaRPr lang="en-US" sz="1400" dirty="0"/>
+          </a:p>
+        </p:txBody>
+      </p:sp>
+      <p:sp>
+        <p:nvSpPr>
+          <p:cNvPr id="90" name="TimerPill"/>
+          <p:cNvSpPr/>
+          <p:nvPr/>
+        </p:nvSpPr>
+        <p:spPr>
+          <a:xfrm>
+            <a:off x="7205472" y="118872"/>
+            <a:ext cx="1828800" cy="365760"/>
+          </a:xfrm>
+          <a:prstGeom prst="roundRect">
+            <a:avLst/>
+          </a:prstGeom>
+          <a:solidFill>
+            <a:srgbClr val="D4AF37"/>
+          </a:solidFill>
+          <a:ln>
+            <a:noFill/>
+          </a:ln>
+          <a:effectLst/>
+        </p:spPr>
+        <p:style>
+          <a:lnRef idx="1">
+            <a:schemeClr val="accent1"/>
+          </a:lnRef>
+          <a:fillRef idx="3">
+            <a:schemeClr val="accent1"/>
+          </a:fillRef>
+          <a:effectRef idx="2">
+            <a:schemeClr val="accent1"/>
+          </a:effectRef>
+          <a:fontRef idx="minor">
+            <a:schemeClr val="lt1"/>
+          </a:fontRef>
+        </p:style>
+        <p:txBody>
+          <a:bodyPr wrap="none" lIns="45720" tIns="0" rIns="45720" bIns="0" rtlCol="0" anchor="ctr"/>
+          <a:lstStyle/>
+          <a:p>
+            <a:pPr algn="ctr"/>
+            <a:r>
+              <a:rPr sz="1100" b="1">
+                <a:solidFill>
+                  <a:srgbClr val="141628"/>
+                </a:solidFill>
+                <a:latin typeface="Calibri"/>
+              </a:rPr>
+              <a:t>⏱ 2 min · ⌛17:00</a:t>
+            </a:r>
           </a:p>
         </p:txBody>
       </p:sp>

--- a/lessons/btli101_xrw5fg/btli1_l3_slides.pptx
+++ b/lessons/btli101_xrw5fg/btli1_l3_slides.pptx
@@ -4,6 +4,9 @@
   <p:sldMasterIdLst>
     <p:sldMasterId id="2147483648" r:id="rId1"/>
   </p:sldMasterIdLst>
+  <p:notesMasterIdLst>
+    <p:notesMasterId r:id="rId22"/>
+  </p:notesMasterIdLst>
   <p:sldIdLst>
     <p:sldId id="256" r:id="rId2"/>
     <p:sldId id="257" r:id="rId3"/>
@@ -14,22 +17,19 @@
     <p:sldId id="262" r:id="rId8"/>
     <p:sldId id="263" r:id="rId9"/>
     <p:sldId id="264" r:id="rId10"/>
-    <p:sldId id="274" r:id="rId25"/>
-    <p:sldId id="265" r:id="rId11"/>
-    <p:sldId id="266" r:id="rId12"/>
-    <p:sldId id="267" r:id="rId13"/>
-    <p:sldId id="268" r:id="rId14"/>
-    <p:sldId id="269" r:id="rId15"/>
-    <p:sldId id="270" r:id="rId16"/>
-    <p:sldId id="271" r:id="rId17"/>
-    <p:sldId id="275" r:id="rId26"/>
-    <p:sldId id="272" r:id="rId18"/>
-    <p:sldId id="273" r:id="rId19"/>
+    <p:sldId id="274" r:id="rId11"/>
+    <p:sldId id="265" r:id="rId12"/>
+    <p:sldId id="266" r:id="rId13"/>
+    <p:sldId id="267" r:id="rId14"/>
+    <p:sldId id="268" r:id="rId15"/>
+    <p:sldId id="269" r:id="rId16"/>
+    <p:sldId id="270" r:id="rId17"/>
+    <p:sldId id="271" r:id="rId18"/>
+    <p:sldId id="275" r:id="rId19"/>
+    <p:sldId id="272" r:id="rId20"/>
+    <p:sldId id="273" r:id="rId21"/>
   </p:sldIdLst>
-  <p:notesMasterIdLst>
-    <p:notesMasterId r:id="rId20"/>
-  </p:notesMasterIdLst>
-  <p:sldSz cx="9144000" cy="5143500"/>
+  <p:sldSz cx="9144000" cy="5143500" type="screen16x9"/>
   <p:notesSz cx="5143500" cy="9144000"/>
   <p:defaultTextStyle>
     <a:lvl1pPr marL="0" algn="l" defTabSz="914400" rtl="0" eaLnBrk="1" latinLnBrk="0" hangingPunct="1">
@@ -123,6 +123,11 @@
       </a:defRPr>
     </a:lvl9pPr>
   </p:defaultTextStyle>
+  <p:extLst>
+    <p:ext uri="{EFAFB233-063F-42B5-8137-9DF3F51BA10A}">
+      <p15:sldGuideLst xmlns:p15="http://schemas.microsoft.com/office/powerpoint/2012/main"/>
+    </p:ext>
+  </p:extLst>
 </p:presentation>
 </file>
 
@@ -148,234 +153,10 @@
           <a:chExt cx="0" cy="0"/>
         </a:xfrm>
       </p:grpSpPr>
-      <p:sp>
-        <p:nvSpPr>
-          <p:cNvPr id="2" name="Header Placeholder 1"/>
-          <p:cNvSpPr>
-            <a:spLocks noGrp="1"/>
-          </p:cNvSpPr>
-          <p:nvPr>
-            <p:ph type="hdr" sz="quarter"/>
-          </p:nvPr>
-        </p:nvSpPr>
-        <p:spPr>
-          <a:xfrm>
-            <a:off x="0" y="0"/>
-            <a:ext cx="2971800" cy="458788"/>
-          </a:xfrm>
-          <a:prstGeom prst="rect">
-            <a:avLst/>
-          </a:prstGeom>
-        </p:spPr>
-        <p:txBody>
-          <a:bodyPr vert="horz" lIns="91440" tIns="45720" rIns="91440" bIns="45720" rtlCol="0"/>
-          <a:lstStyle>
-            <a:lvl1pPr algn="l">
-              <a:defRPr sz="1200"/>
-            </a:lvl1pPr>
-          </a:lstStyle>
-          <a:p>
-            <a:endParaRPr lang="en-US"/>
-          </a:p>
-        </p:txBody>
-      </p:sp>
-      <p:sp>
-        <p:nvSpPr>
-          <p:cNvPr id="3" name="Date Placeholder 2"/>
-          <p:cNvSpPr>
-            <a:spLocks noGrp="1"/>
-          </p:cNvSpPr>
-          <p:nvPr>
-            <p:ph type="dt" idx="1"/>
-          </p:nvPr>
-        </p:nvSpPr>
-        <p:spPr>
-          <a:xfrm>
-            <a:off x="3884613" y="0"/>
-            <a:ext cx="2971800" cy="458788"/>
-          </a:xfrm>
-          <a:prstGeom prst="rect">
-            <a:avLst/>
-          </a:prstGeom>
-        </p:spPr>
-        <p:txBody>
-          <a:bodyPr vert="horz" lIns="91440" tIns="45720" rIns="91440" bIns="45720" rtlCol="0"/>
-          <a:lstStyle>
-            <a:lvl1pPr algn="r">
-              <a:defRPr sz="1200"/>
-            </a:lvl1pPr>
-          </a:lstStyle>
-          <a:p>
-            <a:fld id="{5282F153-3F37-0F45-9E97-73ACFA13230C}" type="datetimeFigureOut">
-              <a:rPr lang="en-US"/>
-              <a:t>7/23/19</a:t>
-            </a:fld>
-            <a:endParaRPr lang="en-US"/>
-          </a:p>
-        </p:txBody>
-      </p:sp>
-      <p:sp>
-        <p:nvSpPr>
-          <p:cNvPr id="4" name="Slide Image Placeholder 3"/>
-          <p:cNvSpPr>
-            <a:spLocks noGrp="1" noRot="1" noChangeAspect="1"/>
-          </p:cNvSpPr>
-          <p:nvPr>
-            <p:ph type="sldImg" idx="2"/>
-          </p:nvPr>
-        </p:nvSpPr>
-        <p:spPr>
-          <a:xfrm>
-            <a:off x="685800" y="1143000"/>
-            <a:ext cx="5486400" cy="3086100"/>
-          </a:xfrm>
-          <a:prstGeom prst="rect">
-            <a:avLst/>
-          </a:prstGeom>
-          <a:noFill/>
-          <a:ln w="12700">
-            <a:solidFill>
-              <a:prstClr val="black"/>
-            </a:solidFill>
-          </a:ln>
-        </p:spPr>
-        <p:txBody>
-          <a:bodyPr vert="horz" lIns="91440" tIns="45720" rIns="91440" bIns="45720" rtlCol="0" anchor="ctr"/>
-          <a:lstStyle/>
-          <a:p>
-            <a:endParaRPr lang="en-US"/>
-          </a:p>
-        </p:txBody>
-      </p:sp>
-      <p:sp>
-        <p:nvSpPr>
-          <p:cNvPr id="5" name="Notes Placeholder 4"/>
-          <p:cNvSpPr>
-            <a:spLocks noGrp="1"/>
-          </p:cNvSpPr>
-          <p:nvPr>
-            <p:ph type="body" sz="quarter" idx="3"/>
-          </p:nvPr>
-        </p:nvSpPr>
-        <p:spPr>
-          <a:xfrm>
-            <a:off x="685800" y="4400550"/>
-            <a:ext cx="5486400" cy="3600450"/>
-          </a:xfrm>
-          <a:prstGeom prst="rect">
-            <a:avLst/>
-          </a:prstGeom>
-        </p:spPr>
-        <p:txBody>
-          <a:bodyPr vert="horz" lIns="91440" tIns="45720" rIns="91440" bIns="45720" rtlCol="0"/>
-          <a:lstStyle/>
-          <a:p>
-            <a:pPr lvl="0"/>
-            <a:r>
-              <a:rPr lang="en-US"/>
-              <a:t>Click to edit Master text styles</a:t>
-            </a:r>
-          </a:p>
-          <a:p>
-            <a:pPr lvl="1"/>
-            <a:r>
-              <a:rPr lang="en-US"/>
-              <a:t>Second level</a:t>
-            </a:r>
-          </a:p>
-          <a:p>
-            <a:pPr lvl="2"/>
-            <a:r>
-              <a:rPr lang="en-US"/>
-              <a:t>Third level</a:t>
-            </a:r>
-          </a:p>
-          <a:p>
-            <a:pPr lvl="3"/>
-            <a:r>
-              <a:rPr lang="en-US"/>
-              <a:t>Fourth level</a:t>
-            </a:r>
-          </a:p>
-          <a:p>
-            <a:pPr lvl="4"/>
-            <a:r>
-              <a:rPr lang="en-US"/>
-              <a:t>Fifth level</a:t>
-            </a:r>
-          </a:p>
-        </p:txBody>
-      </p:sp>
-      <p:sp>
-        <p:nvSpPr>
-          <p:cNvPr id="6" name="Footer Placeholder 5"/>
-          <p:cNvSpPr>
-            <a:spLocks noGrp="1"/>
-          </p:cNvSpPr>
-          <p:nvPr>
-            <p:ph type="ftr" sz="quarter" idx="4"/>
-          </p:nvPr>
-        </p:nvSpPr>
-        <p:spPr>
-          <a:xfrm>
-            <a:off x="0" y="8685213"/>
-            <a:ext cx="2971800" cy="458787"/>
-          </a:xfrm>
-          <a:prstGeom prst="rect">
-            <a:avLst/>
-          </a:prstGeom>
-        </p:spPr>
-        <p:txBody>
-          <a:bodyPr vert="horz" lIns="91440" tIns="45720" rIns="91440" bIns="45720" rtlCol="0" anchor="b"/>
-          <a:lstStyle>
-            <a:lvl1pPr algn="l">
-              <a:defRPr sz="1200"/>
-            </a:lvl1pPr>
-          </a:lstStyle>
-          <a:p>
-            <a:endParaRPr lang="en-US"/>
-          </a:p>
-        </p:txBody>
-      </p:sp>
-      <p:sp>
-        <p:nvSpPr>
-          <p:cNvPr id="7" name="Slide Number Placeholder 6"/>
-          <p:cNvSpPr>
-            <a:spLocks noGrp="1"/>
-          </p:cNvSpPr>
-          <p:nvPr>
-            <p:ph type="sldNum" sz="quarter" idx="5"/>
-          </p:nvPr>
-        </p:nvSpPr>
-        <p:spPr>
-          <a:xfrm>
-            <a:off x="3884613" y="8685213"/>
-            <a:ext cx="2971800" cy="458787"/>
-          </a:xfrm>
-          <a:prstGeom prst="rect">
-            <a:avLst/>
-          </a:prstGeom>
-        </p:spPr>
-        <p:txBody>
-          <a:bodyPr vert="horz" lIns="91440" tIns="45720" rIns="91440" bIns="45720" rtlCol="0" anchor="b"/>
-          <a:lstStyle>
-            <a:lvl1pPr algn="r">
-              <a:defRPr sz="1200"/>
-            </a:lvl1pPr>
-          </a:lstStyle>
-          <a:p>
-            <a:fld id="{CE5E9CC1-C706-0F49-92D6-E571CC5EEA8F}" type="slidenum">
-              <a:rPr lang="en-US"/>
-              <a:t>‹#›</a:t>
-            </a:fld>
-            <a:endParaRPr lang="en-US"/>
-          </a:p>
-        </p:txBody>
-      </p:sp>
     </p:spTree>
     <p:extLst>
       <p:ext uri="{BB962C8B-B14F-4D97-AF65-F5344CB8AC3E}">
-        <p14:creationId xmlns:p14="http://schemas.microsoft.com/office/powerpoint/2010/main" val="1024086991"/>
+        <p14:creationId xmlns:p14="http://schemas.microsoft.com/office/powerpoint/2010/main" val="4023857858"/>
       </p:ext>
     </p:extLst>
   </p:cSld>
@@ -523,7 +304,6 @@
               <a:rPr lang="en-US" dirty="0"/>
               <a:t>OPENING. L3 is heavier than L1/L2 — set tone immediately. This is "the what now" lesson after a month of L1 prayer + L2 Bible meditation. The character anchor is Joy because Romans 12:1 grounds surrender in mercy received, not gritted-teeth restraint. Pause before clicking forward — let Pagsuko sit.</a:t>
             </a:r>
-            <a:endParaRPr lang="en-US" dirty="0"/>
           </a:p>
         </p:txBody>
       </p:sp>
@@ -590,7 +370,21 @@
             <p:ph type="sldImg"/>
           </p:nvPr>
         </p:nvSpPr>
-        <p:spPr/>
+        <p:spPr>
+          <a:xfrm>
+            <a:off x="-171450" y="1143000"/>
+            <a:ext cx="5486400" cy="3086100"/>
+          </a:xfrm>
+          <a:prstGeom prst="rect">
+            <a:avLst/>
+          </a:prstGeom>
+          <a:noFill/>
+          <a:ln w="12700">
+            <a:solidFill>
+              <a:prstClr val="black"/>
+            </a:solidFill>
+          </a:ln>
+        </p:spPr>
       </p:sp>
       <p:sp>
         <p:nvSpPr>
@@ -602,46 +396,97 @@
             <p:ph type="body" idx="1"/>
           </p:nvPr>
         </p:nvSpPr>
-        <p:spPr/>
+        <p:spPr>
+          <a:xfrm>
+            <a:off x="514350" y="4400550"/>
+            <a:ext cx="4114800" cy="3600450"/>
+          </a:xfrm>
+          <a:prstGeom prst="rect">
+            <a:avLst/>
+          </a:prstGeom>
+        </p:spPr>
         <p:txBody>
           <a:bodyPr/>
           <a:lstStyle/>
           <a:p>
             <a:r>
-              <a:rPr lang="en-US" dirty="0"/>
-              <a:t>TANONG (dedicated slide). Tables of 4-6, ~3 min: Bakit negatibo ang perception ng mundo sa pagsuko/pagpapasakop? Surface honest answers, then 1-2 whole-room shares. (The Moody challenge is the NEXT slide.)</a:t>
-            </a:r>
-            <a:endParaRPr lang="en-US" dirty="0"/>
-          </a:p>
-        </p:txBody>
-      </p:sp>
-      <p:sp>
-        <p:nvSpPr>
-          <p:cNvPr id="4" name="Slide Number Placeholder 3"/>
-          <p:cNvSpPr>
-            <a:spLocks noGrp="1"/>
-          </p:cNvSpPr>
-          <p:nvPr>
-            <p:ph type="sldNum" sz="quarter" idx="10"/>
-          </p:nvPr>
-        </p:nvSpPr>
-        <p:spPr/>
-        <p:txBody>
-          <a:bodyPr/>
-          <a:lstStyle/>
-          <a:p>
-            <a:fld id="{F7021451-1387-4CA6-816F-3879F97B5CBC}" type="slidenum">
-              <a:rPr lang="en-US"/>
-              <a:t>10</a:t>
-            </a:fld>
-            <a:endParaRPr lang="en-US"/>
+              <a:rPr lang="en-US" sz="2200" dirty="0"/>
+              <a:t>Pastoral framing of Q1: The world equates surrender with weakness because the world's value system is "</a:t>
+            </a:r>
+            <a:r>
+              <a:rPr lang="en-US" sz="2200" dirty="0" err="1"/>
+              <a:t>langong-lango</a:t>
+            </a:r>
+            <a:r>
+              <a:rPr lang="en-US" sz="2200" dirty="0"/>
+              <a:t> </a:t>
+            </a:r>
+            <a:r>
+              <a:rPr lang="en-US" sz="2200" dirty="0" err="1"/>
+              <a:t>sa</a:t>
+            </a:r>
+            <a:r>
+              <a:rPr lang="en-US" sz="2200" dirty="0"/>
+              <a:t> </a:t>
+            </a:r>
+            <a:r>
+              <a:rPr lang="en-US" sz="2200" dirty="0" err="1"/>
+              <a:t>paghamig</a:t>
+            </a:r>
+            <a:r>
+              <a:rPr lang="en-US" sz="2200" dirty="0"/>
+              <a:t> ng </a:t>
+            </a:r>
+            <a:r>
+              <a:rPr lang="en-US" sz="2200" dirty="0" err="1"/>
+              <a:t>pansariling</a:t>
+            </a:r>
+            <a:r>
+              <a:rPr lang="en-US" sz="2200" dirty="0"/>
+              <a:t> </a:t>
+            </a:r>
+            <a:r>
+              <a:rPr lang="en-US" sz="2200" dirty="0" err="1"/>
+              <a:t>karapatan</a:t>
+            </a:r>
+            <a:r>
+              <a:rPr lang="en-US" sz="2200" dirty="0"/>
+              <a:t> at </a:t>
+            </a:r>
+            <a:r>
+              <a:rPr lang="en-US" sz="2200" dirty="0" err="1"/>
+              <a:t>kalayaan</a:t>
+            </a:r>
+            <a:r>
+              <a:rPr lang="en-US" sz="2200" dirty="0"/>
+              <a:t>" — drunk on personal rights and freedom. </a:t>
+            </a:r>
+          </a:p>
+          <a:p>
+            <a:r>
+              <a:rPr lang="en-US" sz="2200" dirty="0"/>
+              <a:t>In that logic, surrender = loss of agency. </a:t>
+            </a:r>
+          </a:p>
+          <a:p>
+            <a:r>
+              <a:rPr lang="en-US" sz="2200" dirty="0"/>
+              <a:t>The gospel turns that on its head: the surrendered life is the only truly free life. </a:t>
+            </a:r>
+          </a:p>
+          <a:p>
+            <a:r>
+              <a:rPr lang="en-US" sz="2200" dirty="0"/>
+              <a:t>Quote Augustine if useful: "You have made us for yourself, O Lord, and our hearts are restless until they rest in You."</a:t>
+            </a:r>
+            <a:endParaRPr lang="en-PH" sz="2200" dirty="0"/>
           </a:p>
         </p:txBody>
       </p:sp>
     </p:spTree>
     <p:extLst>
       <p:ext uri="{BB962C8B-B14F-4D97-AF65-F5344CB8AC3E}">
-        <p14:creationId xmlns:p14="http://schemas.microsoft.com/office/powerpoint/2010/main" val="1024086991"/>
+        <p14:creationId xmlns:p14="http://schemas.microsoft.com/office/powerpoint/2010/main" val="2840237933"/>
       </p:ext>
     </p:extLst>
   </p:cSld>
@@ -696,10 +541,21 @@
           <a:lstStyle/>
           <a:p>
             <a:r>
-              <a:rPr lang="en-US" dirty="0"/>
-              <a:t>Moody quote is bait — the kind of disciple who thinks surrender is limitation reads this and the trap springs. The alternative — your own grip — is the limitation. Yielding opens to a wider life.</a:t>
-            </a:r>
-            <a:endParaRPr lang="en-US" dirty="0"/>
+              <a:rPr lang="en-US" sz="2200" dirty="0"/>
+              <a:t>TANONG (dedicated slide). Tables of 4-6, ~3 min: </a:t>
+            </a:r>
+          </a:p>
+          <a:p>
+            <a:r>
+              <a:rPr lang="en-US" sz="2200" dirty="0"/>
+              <a:t>Bakit negatibo ang perception ng mundo sa pagsuko/pagpapasakop? </a:t>
+            </a:r>
+          </a:p>
+          <a:p>
+            <a:r>
+              <a:rPr lang="en-US" sz="2200" dirty="0"/>
+              <a:t>Surface honest answers, then 1-2 whole-room shares. (The Moody challenge is the NEXT slide.)</a:t>
+            </a:r>
           </a:p>
         </p:txBody>
       </p:sp>
@@ -784,10 +640,21 @@
           <a:lstStyle/>
           <a:p>
             <a:r>
-              <a:rPr lang="en-US" dirty="0"/>
-              <a:t>Read aloud once. Note the three highlighted phrases — they are the three sangkap. Foundation (mercy received) → Response (offer self) → Outflow (worship-as-life).</a:t>
-            </a:r>
-            <a:endParaRPr lang="en-US" dirty="0"/>
+              <a:rPr lang="en-US" sz="2200" dirty="0"/>
+              <a:t>Moody quote is bait — the kind of disciple who thinks surrender is limitation reads this and the trap springs. </a:t>
+            </a:r>
+          </a:p>
+          <a:p>
+            <a:r>
+              <a:rPr lang="en-US" sz="2200" dirty="0"/>
+              <a:t>The alternative — your own grip — is the limitation. </a:t>
+            </a:r>
+          </a:p>
+          <a:p>
+            <a:r>
+              <a:rPr lang="en-US" sz="2200" dirty="0"/>
+              <a:t>Yielding opens to a wider life.</a:t>
+            </a:r>
           </a:p>
         </p:txBody>
       </p:sp>
@@ -872,10 +739,18 @@
           <a:lstStyle/>
           <a:p>
             <a:r>
-              <a:rPr lang="en-US" dirty="0"/>
-              <a:t>Walk through one sangkap at a time. Pause between each. ~2 min per sangkap for silent writing in the participant booklet. Interns model at tables. Watch for "everything-but-this" pax who can name in abstract but not in specific.</a:t>
-            </a:r>
-            <a:endParaRPr lang="en-US" dirty="0"/>
+              <a:rPr lang="en-US" sz="2200" dirty="0"/>
+              <a:t>Read aloud once. Note the three highlighted phrases — they are the three sangkap. </a:t>
+            </a:r>
+          </a:p>
+          <a:p>
+            <a:r>
+              <a:rPr lang="en-US" sz="2200" dirty="0"/>
+              <a:t>Foundation (mercy received) → Response (offer self) → Outflow (worship-as-life).</a:t>
+            </a:r>
+          </a:p>
+          <a:p>
+            <a:endParaRPr lang="en-US" sz="2200" dirty="0"/>
           </a:p>
         </p:txBody>
       </p:sp>
@@ -960,10 +835,913 @@
           <a:lstStyle/>
           <a:p>
             <a:r>
-              <a:rPr lang="en-US" dirty="0"/>
-              <a:t>Slow down. Read the story aloud. Then transition to slide 15 — the ritual. Hand out blank papers and pens BEFORE clicking forward.</a:t>
-            </a:r>
-            <a:endParaRPr lang="en-US" dirty="0"/>
+              <a:rPr lang="en-US" sz="2200" dirty="0"/>
+              <a:t>Walk through one sangkap at a time. Pause between each. ~2 min per sangkap for silent writing in the participant booklet. Interns model at tables. </a:t>
+            </a:r>
+          </a:p>
+          <a:p>
+            <a:r>
+              <a:rPr lang="en-US" sz="2200" dirty="0"/>
+              <a:t>Watch for "everything-but-this" pax who can name in abstract but not in specific.</a:t>
+            </a:r>
+          </a:p>
+          <a:p>
+            <a:endParaRPr lang="en-US" sz="2200" dirty="0"/>
+          </a:p>
+          <a:p>
+            <a:r>
+              <a:rPr lang="en-US" sz="2200" dirty="0" err="1"/>
+              <a:t>Masaganang</a:t>
+            </a:r>
+            <a:r>
+              <a:rPr lang="en-US" sz="2200" dirty="0"/>
+              <a:t> Habag ng Dios</a:t>
+            </a:r>
+          </a:p>
+          <a:p>
+            <a:r>
+              <a:rPr lang="en-US" sz="2200" dirty="0"/>
+              <a:t>"</a:t>
+            </a:r>
+            <a:r>
+              <a:rPr lang="en-US" sz="2200" dirty="0" err="1"/>
+              <a:t>alang-alang</a:t>
+            </a:r>
+            <a:r>
+              <a:rPr lang="en-US" sz="2200" dirty="0"/>
+              <a:t> </a:t>
+            </a:r>
+            <a:r>
+              <a:rPr lang="en-US" sz="2200" dirty="0" err="1"/>
+              <a:t>sa</a:t>
+            </a:r>
+            <a:r>
+              <a:rPr lang="en-US" sz="2200" dirty="0"/>
+              <a:t> </a:t>
+            </a:r>
+            <a:r>
+              <a:rPr lang="en-US" sz="2200" dirty="0" err="1"/>
+              <a:t>masaganang</a:t>
+            </a:r>
+            <a:r>
+              <a:rPr lang="en-US" sz="2200" dirty="0"/>
+              <a:t> </a:t>
+            </a:r>
+            <a:r>
+              <a:rPr lang="en-US" sz="2200" dirty="0" err="1"/>
+              <a:t>habag</a:t>
+            </a:r>
+            <a:r>
+              <a:rPr lang="en-US" sz="2200" dirty="0"/>
+              <a:t> ng </a:t>
+            </a:r>
+            <a:r>
+              <a:rPr lang="en-US" sz="2200" dirty="0" err="1"/>
+              <a:t>Diyos</a:t>
+            </a:r>
+            <a:r>
+              <a:rPr lang="en-US" sz="2200" dirty="0"/>
+              <a:t> </a:t>
+            </a:r>
+            <a:r>
+              <a:rPr lang="en-US" sz="2200" dirty="0" err="1"/>
+              <a:t>sa</a:t>
+            </a:r>
+            <a:r>
+              <a:rPr lang="en-US" sz="2200" dirty="0"/>
+              <a:t> </a:t>
+            </a:r>
+            <a:r>
+              <a:rPr lang="en-US" sz="2200" dirty="0" err="1"/>
+              <a:t>atin</a:t>
+            </a:r>
+            <a:r>
+              <a:rPr lang="en-US" sz="2200" dirty="0"/>
+              <a:t>..."</a:t>
+            </a:r>
+          </a:p>
+          <a:p>
+            <a:r>
+              <a:rPr lang="en-US" sz="2200" dirty="0"/>
+              <a:t>The foundation — mercy already received. </a:t>
+            </a:r>
+          </a:p>
+          <a:p>
+            <a:r>
+              <a:rPr lang="en-US" sz="2200" dirty="0"/>
+              <a:t>Apostle Paul addresses believers, not unbelievers (Rom 5:10 + 8:7 — the unbeliever cannot consecrate because their mind is set on the flesh). </a:t>
+            </a:r>
+          </a:p>
+          <a:p>
+            <a:r>
+              <a:rPr lang="en-US" sz="2200" dirty="0"/>
+              <a:t>Surrender is the response of someone who has already received mercy.</a:t>
+            </a:r>
+          </a:p>
+          <a:p>
+            <a:endParaRPr lang="en-US" sz="2200" dirty="0"/>
+          </a:p>
+          <a:p>
+            <a:r>
+              <a:rPr lang="en-US" sz="2200" dirty="0"/>
+              <a:t>Pax prompt: "Anong specific mercy ng Dios ang </a:t>
+            </a:r>
+            <a:r>
+              <a:rPr lang="en-US" sz="2200" dirty="0" err="1"/>
+              <a:t>naranasan</a:t>
+            </a:r>
+            <a:r>
+              <a:rPr lang="en-US" sz="2200" dirty="0"/>
+              <a:t> </a:t>
+            </a:r>
+            <a:r>
+              <a:rPr lang="en-US" sz="2200" dirty="0" err="1"/>
+              <a:t>mo</a:t>
+            </a:r>
+            <a:r>
+              <a:rPr lang="en-US" sz="2200" dirty="0"/>
+              <a:t> </a:t>
+            </a:r>
+            <a:r>
+              <a:rPr lang="en-US" sz="2200" dirty="0" err="1"/>
+              <a:t>ngayong</a:t>
+            </a:r>
+            <a:r>
+              <a:rPr lang="en-US" sz="2200" dirty="0"/>
+              <a:t> </a:t>
+            </a:r>
+            <a:r>
+              <a:rPr lang="en-US" sz="2200" dirty="0" err="1"/>
+              <a:t>taon</a:t>
+            </a:r>
+            <a:r>
+              <a:rPr lang="en-US" sz="2200" dirty="0"/>
+              <a:t>? Hindi generic. </a:t>
+            </a:r>
+            <a:r>
+              <a:rPr lang="en-US" sz="2200" dirty="0" err="1"/>
+              <a:t>Pangalanan</a:t>
+            </a:r>
+            <a:r>
+              <a:rPr lang="en-US" sz="2200" dirty="0"/>
+              <a:t>."</a:t>
+            </a:r>
+          </a:p>
+          <a:p>
+            <a:endParaRPr lang="en-US" sz="2200" dirty="0"/>
+          </a:p>
+          <a:p>
+            <a:r>
+              <a:rPr lang="en-US" sz="2200" b="1" dirty="0"/>
+              <a:t>NOTE:</a:t>
+            </a:r>
+          </a:p>
+          <a:p>
+            <a:r>
+              <a:rPr lang="en-US" sz="2200" dirty="0"/>
+              <a:t>If a pax struggles: ask "</a:t>
+            </a:r>
+            <a:r>
+              <a:rPr lang="en-US" sz="2200" dirty="0" err="1"/>
+              <a:t>sino</a:t>
+            </a:r>
+            <a:r>
+              <a:rPr lang="en-US" sz="2200" dirty="0"/>
+              <a:t> </a:t>
+            </a:r>
+            <a:r>
+              <a:rPr lang="en-US" sz="2200" dirty="0" err="1"/>
+              <a:t>sa</a:t>
+            </a:r>
+            <a:r>
+              <a:rPr lang="en-US" sz="2200" dirty="0"/>
+              <a:t> </a:t>
+            </a:r>
+            <a:r>
+              <a:rPr lang="en-US" sz="2200" dirty="0" err="1"/>
+              <a:t>pamilya</a:t>
+            </a:r>
+            <a:r>
+              <a:rPr lang="en-US" sz="2200" dirty="0"/>
+              <a:t> </a:t>
+            </a:r>
+            <a:r>
+              <a:rPr lang="en-US" sz="2200" dirty="0" err="1"/>
+              <a:t>mo</a:t>
+            </a:r>
+            <a:r>
+              <a:rPr lang="en-US" sz="2200" dirty="0"/>
+              <a:t> ay </a:t>
+            </a:r>
+            <a:r>
+              <a:rPr lang="en-US" sz="2200" dirty="0" err="1"/>
+              <a:t>buhay</a:t>
+            </a:r>
+            <a:r>
+              <a:rPr lang="en-US" sz="2200" dirty="0"/>
+              <a:t> pa </a:t>
+            </a:r>
+            <a:r>
+              <a:rPr lang="en-US" sz="2200" dirty="0" err="1"/>
+              <a:t>ngayon</a:t>
+            </a:r>
+            <a:r>
+              <a:rPr lang="en-US" sz="2200" dirty="0"/>
+              <a:t> </a:t>
+            </a:r>
+            <a:r>
+              <a:rPr lang="en-US" sz="2200" dirty="0" err="1"/>
+              <a:t>na</a:t>
+            </a:r>
+            <a:r>
+              <a:rPr lang="en-US" sz="2200" dirty="0"/>
+              <a:t> </a:t>
+            </a:r>
+            <a:r>
+              <a:rPr lang="en-US" sz="2200" dirty="0" err="1"/>
+              <a:t>hindi</a:t>
+            </a:r>
+            <a:r>
+              <a:rPr lang="en-US" sz="2200" dirty="0"/>
+              <a:t> </a:t>
+            </a:r>
+            <a:r>
+              <a:rPr lang="en-US" sz="2200" dirty="0" err="1"/>
+              <a:t>mo</a:t>
+            </a:r>
+            <a:r>
+              <a:rPr lang="en-US" sz="2200" dirty="0"/>
+              <a:t> </a:t>
+            </a:r>
+            <a:r>
+              <a:rPr lang="en-US" sz="2200" dirty="0" err="1"/>
+              <a:t>inakalang</a:t>
+            </a:r>
+            <a:r>
+              <a:rPr lang="en-US" sz="2200" dirty="0"/>
+              <a:t> </a:t>
+            </a:r>
+            <a:r>
+              <a:rPr lang="en-US" sz="2200" dirty="0" err="1"/>
+              <a:t>aabot</a:t>
+            </a:r>
+            <a:r>
+              <a:rPr lang="en-US" sz="2200" dirty="0"/>
+              <a:t> ng </a:t>
+            </a:r>
+            <a:r>
+              <a:rPr lang="en-US" sz="2200" dirty="0" err="1"/>
+              <a:t>ganitong</a:t>
+            </a:r>
+            <a:r>
+              <a:rPr lang="en-US" sz="2200" dirty="0"/>
+              <a:t> </a:t>
+            </a:r>
+            <a:r>
+              <a:rPr lang="en-US" sz="2200" dirty="0" err="1"/>
+              <a:t>taon</a:t>
+            </a:r>
+            <a:r>
+              <a:rPr lang="en-US" sz="2200" dirty="0"/>
+              <a:t>?" </a:t>
+            </a:r>
+          </a:p>
+          <a:p>
+            <a:r>
+              <a:rPr lang="en-US" sz="2200" dirty="0"/>
+              <a:t>Start where they are.</a:t>
+            </a:r>
+          </a:p>
+          <a:p>
+            <a:r>
+              <a:rPr lang="en-US" sz="2200" dirty="0"/>
+              <a:t>---------------</a:t>
+            </a:r>
+          </a:p>
+          <a:p>
+            <a:r>
+              <a:rPr lang="en-US" sz="2200" dirty="0"/>
+              <a:t>Malayang Handog ng Tao</a:t>
+            </a:r>
+          </a:p>
+          <a:p>
+            <a:r>
+              <a:rPr lang="en-US" sz="2200" dirty="0"/>
+              <a:t>"</a:t>
+            </a:r>
+            <a:r>
+              <a:rPr lang="en-US" sz="2200" dirty="0" err="1"/>
+              <a:t>ialay</a:t>
+            </a:r>
+            <a:r>
+              <a:rPr lang="en-US" sz="2200" dirty="0"/>
+              <a:t> </a:t>
+            </a:r>
+            <a:r>
+              <a:rPr lang="en-US" sz="2200" dirty="0" err="1"/>
+              <a:t>ninyo</a:t>
+            </a:r>
+            <a:r>
+              <a:rPr lang="en-US" sz="2200" dirty="0"/>
+              <a:t> ang </a:t>
+            </a:r>
+            <a:r>
+              <a:rPr lang="en-US" sz="2200" dirty="0" err="1"/>
+              <a:t>inyong</a:t>
+            </a:r>
+            <a:r>
+              <a:rPr lang="en-US" sz="2200" dirty="0"/>
+              <a:t> </a:t>
+            </a:r>
+            <a:r>
+              <a:rPr lang="en-US" sz="2200" dirty="0" err="1"/>
+              <a:t>sarili</a:t>
+            </a:r>
+            <a:r>
+              <a:rPr lang="en-US" sz="2200" dirty="0"/>
+              <a:t> </a:t>
+            </a:r>
+            <a:r>
+              <a:rPr lang="en-US" sz="2200" dirty="0" err="1"/>
+              <a:t>bilang</a:t>
+            </a:r>
+            <a:r>
+              <a:rPr lang="en-US" sz="2200" dirty="0"/>
+              <a:t> </a:t>
+            </a:r>
+            <a:r>
+              <a:rPr lang="en-US" sz="2200" dirty="0" err="1"/>
+              <a:t>isang</a:t>
+            </a:r>
+            <a:r>
+              <a:rPr lang="en-US" sz="2200" dirty="0"/>
+              <a:t> </a:t>
+            </a:r>
+            <a:r>
+              <a:rPr lang="en-US" sz="2200" dirty="0" err="1"/>
+              <a:t>handog</a:t>
+            </a:r>
+            <a:r>
+              <a:rPr lang="en-US" sz="2200" dirty="0"/>
+              <a:t> </a:t>
+            </a:r>
+            <a:r>
+              <a:rPr lang="en-US" sz="2200" dirty="0" err="1"/>
+              <a:t>na</a:t>
+            </a:r>
+            <a:r>
+              <a:rPr lang="en-US" sz="2200" dirty="0"/>
+              <a:t> </a:t>
+            </a:r>
+            <a:r>
+              <a:rPr lang="en-US" sz="2200" dirty="0" err="1"/>
+              <a:t>buháy</a:t>
+            </a:r>
+            <a:r>
+              <a:rPr lang="en-US" sz="2200" dirty="0"/>
+              <a:t>..."</a:t>
+            </a:r>
+          </a:p>
+          <a:p>
+            <a:r>
+              <a:rPr lang="en-US" sz="2200" dirty="0"/>
+              <a:t>The response — free-will offering. </a:t>
+            </a:r>
+          </a:p>
+          <a:p>
+            <a:r>
+              <a:rPr lang="en-US" sz="2200" dirty="0"/>
+              <a:t>Not coerced (Paul uses "</a:t>
+            </a:r>
+            <a:r>
+              <a:rPr lang="en-US" sz="2200" dirty="0" err="1"/>
+              <a:t>nakikiusap</a:t>
+            </a:r>
+            <a:r>
+              <a:rPr lang="en-US" sz="2200" dirty="0"/>
+              <a:t>" — appealing, not commanding). </a:t>
+            </a:r>
+          </a:p>
+          <a:p>
+            <a:r>
+              <a:rPr lang="en-US" sz="2200" dirty="0"/>
+              <a:t>Not 50-50. </a:t>
+            </a:r>
+          </a:p>
+          <a:p>
+            <a:r>
+              <a:rPr lang="en-US" sz="2200" dirty="0"/>
+              <a:t>The OT sacrifices were dead; this is the New Testament version where the sacrifice lives. </a:t>
+            </a:r>
+          </a:p>
+          <a:p>
+            <a:r>
+              <a:rPr lang="en-US" sz="2200" dirty="0"/>
+              <a:t>2 Cor 5:14 — "ang </a:t>
+            </a:r>
+            <a:r>
+              <a:rPr lang="en-US" sz="2200" dirty="0" err="1"/>
+              <a:t>pag-ibig</a:t>
+            </a:r>
+            <a:r>
+              <a:rPr lang="en-US" sz="2200" dirty="0"/>
+              <a:t> </a:t>
+            </a:r>
+            <a:r>
+              <a:rPr lang="en-US" sz="2200" dirty="0" err="1"/>
+              <a:t>ni</a:t>
+            </a:r>
+            <a:r>
+              <a:rPr lang="en-US" sz="2200" dirty="0"/>
+              <a:t> Cristo ay </a:t>
+            </a:r>
+            <a:r>
+              <a:rPr lang="en-US" sz="2200" dirty="0" err="1"/>
+              <a:t>pumipilit</a:t>
+            </a:r>
+            <a:r>
+              <a:rPr lang="en-US" sz="2200" dirty="0"/>
+              <a:t> </a:t>
+            </a:r>
+            <a:r>
+              <a:rPr lang="en-US" sz="2200" dirty="0" err="1"/>
+              <a:t>sa</a:t>
+            </a:r>
+            <a:r>
+              <a:rPr lang="en-US" sz="2200" dirty="0"/>
+              <a:t> amin" — Christ's love is the pressure, not external rule.</a:t>
+            </a:r>
+          </a:p>
+          <a:p>
+            <a:endParaRPr lang="en-US" sz="2200" dirty="0"/>
+          </a:p>
+          <a:p>
+            <a:r>
+              <a:rPr lang="en-US" sz="2200" b="1" dirty="0"/>
+              <a:t>NOTE:</a:t>
+            </a:r>
+          </a:p>
+          <a:p>
+            <a:r>
+              <a:rPr lang="en-US" sz="2200" dirty="0"/>
+              <a:t>Pax prompt: "Anong specific </a:t>
+            </a:r>
+            <a:r>
+              <a:rPr lang="en-US" sz="2200" dirty="0" err="1"/>
+              <a:t>bahagi</a:t>
+            </a:r>
+            <a:r>
+              <a:rPr lang="en-US" sz="2200" dirty="0"/>
+              <a:t> ng </a:t>
+            </a:r>
+            <a:r>
+              <a:rPr lang="en-US" sz="2200" dirty="0" err="1"/>
+              <a:t>buhay</a:t>
+            </a:r>
+            <a:r>
+              <a:rPr lang="en-US" sz="2200" dirty="0"/>
+              <a:t> </a:t>
+            </a:r>
+            <a:r>
+              <a:rPr lang="en-US" sz="2200" dirty="0" err="1"/>
+              <a:t>mo</a:t>
+            </a:r>
+            <a:r>
+              <a:rPr lang="en-US" sz="2200" dirty="0"/>
+              <a:t> </a:t>
+            </a:r>
+            <a:r>
+              <a:rPr lang="en-US" sz="2200" dirty="0" err="1"/>
+              <a:t>ngayon</a:t>
+            </a:r>
+            <a:r>
+              <a:rPr lang="en-US" sz="2200" dirty="0"/>
+              <a:t> ang </a:t>
+            </a:r>
+            <a:r>
+              <a:rPr lang="en-US" sz="2200" dirty="0" err="1"/>
+              <a:t>inihahandog</a:t>
+            </a:r>
+            <a:r>
+              <a:rPr lang="en-US" sz="2200" dirty="0"/>
+              <a:t> </a:t>
+            </a:r>
+            <a:r>
+              <a:rPr lang="en-US" sz="2200" dirty="0" err="1"/>
+              <a:t>mo</a:t>
+            </a:r>
+            <a:r>
+              <a:rPr lang="en-US" sz="2200" dirty="0"/>
+              <a:t>? </a:t>
+            </a:r>
+            <a:r>
+              <a:rPr lang="en-US" sz="2200" dirty="0" err="1"/>
+              <a:t>Pangalanan</a:t>
+            </a:r>
+            <a:r>
+              <a:rPr lang="en-US" sz="2200" dirty="0"/>
+              <a:t> ang isa. Hindi 'lahat' — </a:t>
+            </a:r>
+            <a:r>
+              <a:rPr lang="en-US" sz="2200" dirty="0" err="1"/>
+              <a:t>pumili</a:t>
+            </a:r>
+            <a:r>
+              <a:rPr lang="en-US" sz="2200" dirty="0"/>
+              <a:t> ng isa kung </a:t>
+            </a:r>
+            <a:r>
+              <a:rPr lang="en-US" sz="2200" dirty="0" err="1"/>
+              <a:t>saan</a:t>
+            </a:r>
+            <a:r>
+              <a:rPr lang="en-US" sz="2200" dirty="0"/>
+              <a:t> ka may </a:t>
+            </a:r>
+            <a:r>
+              <a:rPr lang="en-US" sz="2200" dirty="0" err="1"/>
+              <a:t>hawak</a:t>
+            </a:r>
+            <a:r>
+              <a:rPr lang="en-US" sz="2200" dirty="0"/>
+              <a:t> pa."</a:t>
+            </a:r>
+          </a:p>
+          <a:p>
+            <a:pPr marL="0" marR="0" lvl="0" indent="0" algn="l" defTabSz="914400" rtl="0" eaLnBrk="1" fontAlgn="auto" latinLnBrk="0" hangingPunct="1">
+              <a:lnSpc>
+                <a:spcPct val="100000"/>
+              </a:lnSpc>
+              <a:spcBef>
+                <a:spcPts val="0"/>
+              </a:spcBef>
+              <a:spcAft>
+                <a:spcPts val="0"/>
+              </a:spcAft>
+              <a:buClrTx/>
+              <a:buSzTx/>
+              <a:buFontTx/>
+              <a:buNone/>
+              <a:tabLst/>
+              <a:defRPr/>
+            </a:pPr>
+            <a:r>
+              <a:rPr lang="en-US" sz="2200" dirty="0"/>
+              <a:t>Watch for "everything-but-this" pax — those who name surrender abstractly but won't name a specific area. Gentle prompt: "Sa lahat ng bagay </a:t>
+            </a:r>
+            <a:r>
+              <a:rPr lang="en-US" sz="2200" dirty="0" err="1"/>
+              <a:t>sa</a:t>
+            </a:r>
+            <a:r>
+              <a:rPr lang="en-US" sz="2200" dirty="0"/>
+              <a:t> </a:t>
+            </a:r>
+            <a:r>
+              <a:rPr lang="en-US" sz="2200" dirty="0" err="1"/>
+              <a:t>buhay</a:t>
+            </a:r>
+            <a:r>
+              <a:rPr lang="en-US" sz="2200" dirty="0"/>
+              <a:t> </a:t>
+            </a:r>
+            <a:r>
+              <a:rPr lang="en-US" sz="2200" dirty="0" err="1"/>
+              <a:t>mo</a:t>
+            </a:r>
+            <a:r>
+              <a:rPr lang="en-US" sz="2200" dirty="0"/>
+              <a:t>, </a:t>
+            </a:r>
+            <a:r>
+              <a:rPr lang="en-US" sz="2200" dirty="0" err="1"/>
+              <a:t>alin</a:t>
+            </a:r>
+            <a:r>
+              <a:rPr lang="en-US" sz="2200" dirty="0"/>
+              <a:t> ang </a:t>
+            </a:r>
+            <a:r>
+              <a:rPr lang="en-US" sz="2200" dirty="0" err="1"/>
+              <a:t>pinaka-mahirap</a:t>
+            </a:r>
+            <a:r>
+              <a:rPr lang="en-US" sz="2200" dirty="0"/>
+              <a:t> </a:t>
+            </a:r>
+            <a:r>
+              <a:rPr lang="en-US" sz="2200" dirty="0" err="1"/>
+              <a:t>isuko</a:t>
+            </a:r>
+            <a:r>
+              <a:rPr lang="en-US" sz="2200" dirty="0"/>
+              <a:t>?"</a:t>
+            </a:r>
+          </a:p>
+          <a:p>
+            <a:r>
+              <a:rPr lang="en-US" sz="2200" dirty="0"/>
+              <a:t>----------------</a:t>
+            </a:r>
+          </a:p>
+          <a:p>
+            <a:r>
+              <a:rPr lang="en-US" sz="2200" dirty="0" err="1"/>
+              <a:t>Malugod</a:t>
+            </a:r>
+            <a:r>
+              <a:rPr lang="en-US" sz="2200" dirty="0"/>
+              <a:t> </a:t>
+            </a:r>
+            <a:r>
+              <a:rPr lang="en-US" sz="2200" dirty="0" err="1"/>
+              <a:t>na</a:t>
+            </a:r>
+            <a:r>
+              <a:rPr lang="en-US" sz="2200" dirty="0"/>
+              <a:t> </a:t>
+            </a:r>
+            <a:r>
+              <a:rPr lang="en-US" sz="2200" dirty="0" err="1"/>
+              <a:t>Pagsamba</a:t>
+            </a:r>
+            <a:r>
+              <a:rPr lang="en-US" sz="2200" dirty="0"/>
+              <a:t> at </a:t>
+            </a:r>
+            <a:r>
+              <a:rPr lang="en-US" sz="2200" dirty="0" err="1"/>
+              <a:t>Paglilingkod</a:t>
+            </a:r>
+            <a:endParaRPr lang="en-US" sz="2200" dirty="0"/>
+          </a:p>
+          <a:p>
+            <a:r>
+              <a:rPr lang="en-US" sz="2200" dirty="0"/>
+              <a:t>"banal at </a:t>
+            </a:r>
+            <a:r>
+              <a:rPr lang="en-US" sz="2200" dirty="0" err="1"/>
+              <a:t>kalugud-lugod</a:t>
+            </a:r>
+            <a:r>
+              <a:rPr lang="en-US" sz="2200" dirty="0"/>
+              <a:t> </a:t>
+            </a:r>
+            <a:r>
+              <a:rPr lang="en-US" sz="2200" dirty="0" err="1"/>
+              <a:t>sa</a:t>
+            </a:r>
+            <a:r>
+              <a:rPr lang="en-US" sz="2200" dirty="0"/>
+              <a:t> </a:t>
+            </a:r>
+            <a:r>
+              <a:rPr lang="en-US" sz="2200" dirty="0" err="1"/>
+              <a:t>Diyos</a:t>
+            </a:r>
+            <a:r>
+              <a:rPr lang="en-US" sz="2200" dirty="0"/>
+              <a:t>. Ito ang </a:t>
+            </a:r>
+            <a:r>
+              <a:rPr lang="en-US" sz="2200" dirty="0" err="1"/>
+              <a:t>karapat-dapat</a:t>
+            </a:r>
+            <a:r>
+              <a:rPr lang="en-US" sz="2200" dirty="0"/>
+              <a:t> </a:t>
+            </a:r>
+            <a:r>
+              <a:rPr lang="en-US" sz="2200" dirty="0" err="1"/>
+              <a:t>na</a:t>
+            </a:r>
+            <a:r>
+              <a:rPr lang="en-US" sz="2200" dirty="0"/>
+              <a:t> </a:t>
+            </a:r>
+            <a:r>
+              <a:rPr lang="en-US" sz="2200" dirty="0" err="1"/>
+              <a:t>pagsamba</a:t>
+            </a:r>
+            <a:r>
+              <a:rPr lang="en-US" sz="2200" dirty="0"/>
+              <a:t> </a:t>
+            </a:r>
+            <a:r>
+              <a:rPr lang="en-US" sz="2200" dirty="0" err="1"/>
+              <a:t>ninyo</a:t>
+            </a:r>
+            <a:r>
+              <a:rPr lang="en-US" sz="2200" dirty="0"/>
+              <a:t>..."</a:t>
+            </a:r>
+          </a:p>
+          <a:p>
+            <a:r>
+              <a:rPr lang="en-US" sz="2200" dirty="0"/>
+              <a:t>The outflow — Monday-Saturday becomes worship. </a:t>
+            </a:r>
+          </a:p>
+          <a:p>
+            <a:r>
+              <a:rPr lang="en-US" sz="2200" dirty="0"/>
+              <a:t>Worship is not just slow songs and Sunday service. </a:t>
+            </a:r>
+          </a:p>
+          <a:p>
+            <a:r>
+              <a:rPr lang="en-US" sz="2200" dirty="0"/>
+              <a:t>Worship is the whole life given. "Kayo </a:t>
+            </a:r>
+            <a:r>
+              <a:rPr lang="en-US" sz="2200" dirty="0" err="1"/>
+              <a:t>nga</a:t>
+            </a:r>
+            <a:r>
+              <a:rPr lang="en-US" sz="2200" dirty="0"/>
+              <a:t>, kung </a:t>
+            </a:r>
+            <a:r>
+              <a:rPr lang="en-US" sz="2200" dirty="0" err="1"/>
+              <a:t>kayo'y</a:t>
+            </a:r>
+            <a:r>
+              <a:rPr lang="en-US" sz="2200" dirty="0"/>
+              <a:t> </a:t>
+            </a:r>
+            <a:r>
+              <a:rPr lang="en-US" sz="2200" dirty="0" err="1"/>
+              <a:t>kumakain</a:t>
+            </a:r>
+            <a:r>
+              <a:rPr lang="en-US" sz="2200" dirty="0"/>
+              <a:t> o </a:t>
+            </a:r>
+            <a:r>
+              <a:rPr lang="en-US" sz="2200" dirty="0" err="1"/>
+              <a:t>umiinom</a:t>
+            </a:r>
+            <a:r>
+              <a:rPr lang="en-US" sz="2200" dirty="0"/>
+              <a:t>, o </a:t>
+            </a:r>
+            <a:r>
+              <a:rPr lang="en-US" sz="2200" dirty="0" err="1"/>
+              <a:t>anuman</a:t>
+            </a:r>
+            <a:r>
+              <a:rPr lang="en-US" sz="2200" dirty="0"/>
+              <a:t> ang </a:t>
+            </a:r>
+            <a:r>
+              <a:rPr lang="en-US" sz="2200" dirty="0" err="1"/>
+              <a:t>ginagawa</a:t>
+            </a:r>
+            <a:r>
+              <a:rPr lang="en-US" sz="2200" dirty="0"/>
+              <a:t> </a:t>
+            </a:r>
+            <a:r>
+              <a:rPr lang="en-US" sz="2200" dirty="0" err="1"/>
+              <a:t>ninyo</a:t>
+            </a:r>
+            <a:r>
+              <a:rPr lang="en-US" sz="2200" dirty="0"/>
+              <a:t>, </a:t>
+            </a:r>
+            <a:r>
+              <a:rPr lang="en-US" sz="2200" dirty="0" err="1"/>
+              <a:t>gawin</a:t>
+            </a:r>
+            <a:r>
+              <a:rPr lang="en-US" sz="2200" dirty="0"/>
+              <a:t> </a:t>
+            </a:r>
+            <a:r>
+              <a:rPr lang="en-US" sz="2200" dirty="0" err="1"/>
+              <a:t>ninyo</a:t>
+            </a:r>
+            <a:r>
+              <a:rPr lang="en-US" sz="2200" dirty="0"/>
+              <a:t> ang lahat </a:t>
+            </a:r>
+            <a:r>
+              <a:rPr lang="en-US" sz="2200" dirty="0" err="1"/>
+              <a:t>sa</a:t>
+            </a:r>
+            <a:r>
+              <a:rPr lang="en-US" sz="2200" dirty="0"/>
+              <a:t> </a:t>
+            </a:r>
+            <a:r>
+              <a:rPr lang="en-US" sz="2200" dirty="0" err="1"/>
+              <a:t>ikararangal</a:t>
+            </a:r>
+            <a:r>
+              <a:rPr lang="en-US" sz="2200" dirty="0"/>
+              <a:t> ng </a:t>
+            </a:r>
+            <a:r>
+              <a:rPr lang="en-US" sz="2200" dirty="0" err="1"/>
+              <a:t>Diyos</a:t>
+            </a:r>
+            <a:r>
+              <a:rPr lang="en-US" sz="2200" dirty="0"/>
+              <a:t>" (1 Cor 10:31).</a:t>
+            </a:r>
+          </a:p>
+          <a:p>
+            <a:endParaRPr lang="en-US" sz="2200" dirty="0"/>
+          </a:p>
+          <a:p>
+            <a:r>
+              <a:rPr lang="en-US" sz="2200" b="1" dirty="0"/>
+              <a:t>NOTE:</a:t>
+            </a:r>
+          </a:p>
+          <a:p>
+            <a:r>
+              <a:rPr lang="en-US" sz="2200" dirty="0"/>
+              <a:t>Pax prompt: "Paano </a:t>
+            </a:r>
+            <a:r>
+              <a:rPr lang="en-US" sz="2200" dirty="0" err="1"/>
+              <a:t>magiging</a:t>
+            </a:r>
+            <a:r>
+              <a:rPr lang="en-US" sz="2200" dirty="0"/>
+              <a:t> worship ang Monday-Saturday </a:t>
+            </a:r>
+            <a:r>
+              <a:rPr lang="en-US" sz="2200" dirty="0" err="1"/>
+              <a:t>mo</a:t>
+            </a:r>
+            <a:r>
+              <a:rPr lang="en-US" sz="2200" dirty="0"/>
+              <a:t> </a:t>
+            </a:r>
+            <a:r>
+              <a:rPr lang="en-US" sz="2200" dirty="0" err="1"/>
+              <a:t>ngayong</a:t>
+            </a:r>
+            <a:r>
+              <a:rPr lang="en-US" sz="2200" dirty="0"/>
+              <a:t> </a:t>
+            </a:r>
+            <a:r>
+              <a:rPr lang="en-US" sz="2200" dirty="0" err="1"/>
+              <a:t>linggo</a:t>
+            </a:r>
+            <a:r>
+              <a:rPr lang="en-US" sz="2200" dirty="0"/>
+              <a:t>? </a:t>
+            </a:r>
+          </a:p>
+          <a:p>
+            <a:r>
+              <a:rPr lang="en-US" sz="2200" dirty="0"/>
+              <a:t>Hindi </a:t>
+            </a:r>
+            <a:r>
+              <a:rPr lang="en-US" sz="2200" dirty="0" err="1"/>
+              <a:t>sa</a:t>
+            </a:r>
+            <a:r>
+              <a:rPr lang="en-US" sz="2200" dirty="0"/>
+              <a:t> Sunday lang. </a:t>
+            </a:r>
+          </a:p>
+          <a:p>
+            <a:r>
+              <a:rPr lang="en-US" sz="2200" dirty="0"/>
+              <a:t>Isa lang. </a:t>
+            </a:r>
+          </a:p>
+          <a:p>
+            <a:r>
+              <a:rPr lang="en-US" sz="2200" dirty="0"/>
+              <a:t>Specific."</a:t>
+            </a:r>
+          </a:p>
+          <a:p>
+            <a:endParaRPr lang="en-US" sz="2200" dirty="0"/>
+          </a:p>
+          <a:p>
+            <a:r>
+              <a:rPr lang="en-US" sz="2200" b="1" dirty="0"/>
+              <a:t>Connection to EOLO: </a:t>
+            </a:r>
+            <a:r>
+              <a:rPr lang="en-US" sz="2200" dirty="0"/>
+              <a:t>Worship made visible to the watching world is the most evangelistic life. </a:t>
+            </a:r>
+          </a:p>
+          <a:p>
+            <a:r>
+              <a:rPr lang="en-US" sz="2200" dirty="0"/>
+              <a:t>This is the bridge to DALHIN.</a:t>
+            </a:r>
           </a:p>
         </p:txBody>
       </p:sp>
@@ -1049,8 +1827,22 @@
           <a:p>
             <a:r>
               <a:rPr lang="en-US" dirty="0"/>
-              <a:t>THE EMOTIONAL CLIMAX. Play quiet instrumental music. Pax write a short prayer (optional) and sign. HOLD 90 SECONDS OF SILENCE after most have signed. Do not rush. Tissues at every table — silently. The Holy Spirit is the one doing the work; your job is to not get in the way.</a:t>
-            </a:r>
+              <a:t>Slow down. Read the story aloud. </a:t>
+            </a:r>
+          </a:p>
+          <a:p>
+            <a:r>
+              <a:rPr lang="en-US" dirty="0"/>
+              <a:t>Then transition to slide 15 — the ritual. </a:t>
+            </a:r>
+          </a:p>
+          <a:p>
+            <a:r>
+              <a:rPr lang="en-US" dirty="0"/>
+              <a:t>Hand out blank papers and pens BEFORE clicking forward.</a:t>
+            </a:r>
+          </a:p>
+          <a:p>
             <a:endParaRPr lang="en-US" dirty="0"/>
           </a:p>
         </p:txBody>
@@ -1137,9 +1929,8 @@
           <a:p>
             <a:r>
               <a:rPr lang="en-US" dirty="0"/>
-              <a:t>Sing together. Or play YouTube Bk8sQDgKf08. Let the climax line "O the joy of full salvation!" ring. This is where Joy character anchor lands. Surrender → joy is the gospel logic.</a:t>
-            </a:r>
-            <a:endParaRPr lang="en-US" dirty="0"/>
+              <a:t>THE EMOTIONAL CLIMAX. Play quiet instrumental music. Pax write a short prayer (optional) and sign. HOLD 90 SECONDS OF SILENCE after most have signed. Do not rush. Tissues at every table — silently. The Holy Spirit is the one doing the work; your job is to not get in the way.</a:t>
+            </a:r>
           </a:p>
         </p:txBody>
       </p:sp>
@@ -1225,9 +2016,26 @@
           <a:p>
             <a:r>
               <a:rPr lang="en-US" dirty="0"/>
-              <a:t>The bridge from internal posture to external witness. L3 is internal. EOLO becomes WHO WATCHES YOUR MONDAY-SATURDAY. Not extroverted activity — visible life. 60-sec silent reflection. No share required.</a:t>
-            </a:r>
-            <a:endParaRPr lang="en-US" dirty="0"/>
+              <a:t>Sing together. Or play YouTube Bk8sQDgKf08. </a:t>
+            </a:r>
+          </a:p>
+          <a:p>
+            <a:r>
+              <a:rPr lang="en-US" dirty="0"/>
+              <a:t>Let the climax line "O the joy of full salvation!" ring. </a:t>
+            </a:r>
+          </a:p>
+          <a:p>
+            <a:r>
+              <a:rPr lang="en-US" dirty="0"/>
+              <a:t>This is where Joy character anchor lands. </a:t>
+            </a:r>
+          </a:p>
+          <a:p>
+            <a:r>
+              <a:rPr lang="en-US" dirty="0"/>
+              <a:t>Surrender → joy is the gospel logic.</a:t>
+            </a:r>
           </a:p>
         </p:txBody>
       </p:sp>
@@ -1313,9 +2121,8 @@
           <a:p>
             <a:r>
               <a:rPr lang="en-US" dirty="0"/>
-              <a:t>Close with Romans 12:1 + hymn climax line. One-line prayer. Tease L4 = Personal Holiness — pagkatapos mong sumuko (L3), anong klaseng buhay ang tinawag mong ialay?</a:t>
-            </a:r>
-            <a:endParaRPr lang="en-US" dirty="0"/>
+              <a:t>The bridge from internal posture to external witness. L3 is internal. EOLO becomes WHO WATCHES YOUR MONDAY-SATURDAY. Not extroverted activity — visible life. 60-sec silent reflection. No share required.</a:t>
+            </a:r>
           </a:p>
         </p:txBody>
       </p:sp>
@@ -1336,7 +2143,94 @@
           <a:p>
             <a:fld id="{F7021451-1387-4CA6-816F-3879F97B5CBC}" type="slidenum">
               <a:rPr lang="en-US"/>
-              <a:t>18</a:t>
+              <a:t>19</a:t>
+            </a:fld>
+            <a:endParaRPr lang="en-US"/>
+          </a:p>
+        </p:txBody>
+      </p:sp>
+    </p:spTree>
+    <p:extLst>
+      <p:ext uri="{BB962C8B-B14F-4D97-AF65-F5344CB8AC3E}">
+        <p14:creationId xmlns:p14="http://schemas.microsoft.com/office/powerpoint/2010/main" val="1024086991"/>
+      </p:ext>
+    </p:extLst>
+  </p:cSld>
+  <p:clrMapOvr>
+    <a:masterClrMapping/>
+  </p:clrMapOvr>
+</p:notes>
+</file>
+
+<file path=ppt/notesSlides/notesSlide19.xml><?xml version="1.0" encoding="utf-8"?>
+<p:notes xmlns:a="http://schemas.openxmlformats.org/drawingml/2006/main" xmlns:r="http://schemas.openxmlformats.org/officeDocument/2006/relationships" xmlns:p="http://schemas.openxmlformats.org/presentationml/2006/main">
+  <p:cSld>
+    <p:spTree>
+      <p:nvGrpSpPr>
+        <p:cNvPr id="1" name=""/>
+        <p:cNvGrpSpPr/>
+        <p:nvPr/>
+      </p:nvGrpSpPr>
+      <p:grpSpPr>
+        <a:xfrm>
+          <a:off x="0" y="0"/>
+          <a:ext cx="0" cy="0"/>
+          <a:chOff x="0" y="0"/>
+          <a:chExt cx="0" cy="0"/>
+        </a:xfrm>
+      </p:grpSpPr>
+      <p:sp>
+        <p:nvSpPr>
+          <p:cNvPr id="2" name="Slide Image Placeholder 1"/>
+          <p:cNvSpPr>
+            <a:spLocks noGrp="1" noRot="1" noChangeAspect="1"/>
+          </p:cNvSpPr>
+          <p:nvPr>
+            <p:ph type="sldImg"/>
+          </p:nvPr>
+        </p:nvSpPr>
+        <p:spPr/>
+      </p:sp>
+      <p:sp>
+        <p:nvSpPr>
+          <p:cNvPr id="3" name="Notes Placeholder 2"/>
+          <p:cNvSpPr>
+            <a:spLocks noGrp="1"/>
+          </p:cNvSpPr>
+          <p:nvPr>
+            <p:ph type="body" idx="1"/>
+          </p:nvPr>
+        </p:nvSpPr>
+        <p:spPr/>
+        <p:txBody>
+          <a:bodyPr/>
+          <a:lstStyle/>
+          <a:p>
+            <a:r>
+              <a:rPr lang="en-US" dirty="0"/>
+              <a:t>Close with Romans 12:1 + hymn climax line. One-line prayer. Tease L4 = Personal Holiness — pagkatapos mong sumuko (L3), anong klaseng buhay ang tinawag mong ialay?</a:t>
+            </a:r>
+          </a:p>
+        </p:txBody>
+      </p:sp>
+      <p:sp>
+        <p:nvSpPr>
+          <p:cNvPr id="4" name="Slide Number Placeholder 3"/>
+          <p:cNvSpPr>
+            <a:spLocks noGrp="1"/>
+          </p:cNvSpPr>
+          <p:nvPr>
+            <p:ph type="sldNum" sz="quarter" idx="10"/>
+          </p:nvPr>
+        </p:nvSpPr>
+        <p:spPr/>
+        <p:txBody>
+          <a:bodyPr/>
+          <a:lstStyle/>
+          <a:p>
+            <a:fld id="{F7021451-1387-4CA6-816F-3879F97B5CBC}" type="slidenum">
+              <a:rPr lang="en-US"/>
+              <a:t>20</a:t>
             </a:fld>
             <a:endParaRPr lang="en-US"/>
           </a:p>
@@ -1400,10 +2294,98 @@
           <a:lstStyle/>
           <a:p>
             <a:r>
-              <a:rPr lang="en-US" dirty="0"/>
-              <a:t>STAND. Eye contact. 30-day S.O.A.P.S callback. Celebrate anyone past Day 14 publicly — name them. This is the bridge from L2 (faithfulness) into L3 (joyful surrender). After a month of hearing God, the only honest response is yielding.</a:t>
-            </a:r>
-            <a:endParaRPr lang="en-US" dirty="0"/>
+              <a:rPr lang="en-US" sz="2200" dirty="0"/>
+              <a:t>STAND. Eye contact. 30-day S.O.A.P.S callback. Celebrate anyone past Day 14 publicly — name them. </a:t>
+            </a:r>
+          </a:p>
+          <a:p>
+            <a:r>
+              <a:rPr lang="en-US" sz="2200" dirty="0"/>
+              <a:t>This is the bridge from L2 (faithfulness) into L3 (joyful surrender). </a:t>
+            </a:r>
+          </a:p>
+          <a:p>
+            <a:r>
+              <a:rPr lang="en-US" sz="2200" dirty="0"/>
+              <a:t>After a month of hearing God, the only honest response is yielding.</a:t>
+            </a:r>
+          </a:p>
+          <a:p>
+            <a:r>
+              <a:rPr lang="en-PH" sz="2200" b="0" i="0" kern="1200" dirty="0">
+                <a:solidFill>
+                  <a:schemeClr val="tx1"/>
+                </a:solidFill>
+                <a:effectLst/>
+                <a:latin typeface="+mn-lt"/>
+                <a:ea typeface="+mn-ea"/>
+                <a:cs typeface="+mn-cs"/>
+              </a:rPr>
+              <a:t>PASTORAL NOTE:</a:t>
+            </a:r>
+          </a:p>
+          <a:p>
+            <a:r>
+              <a:rPr lang="en-PH" sz="2200" b="0" i="0" kern="1200" dirty="0">
+                <a:solidFill>
+                  <a:schemeClr val="tx1"/>
+                </a:solidFill>
+                <a:effectLst/>
+                <a:latin typeface="+mn-lt"/>
+                <a:ea typeface="+mn-ea"/>
+                <a:cs typeface="+mn-cs"/>
+              </a:rPr>
+              <a:t>L1 was talking to God. L2 was listening to God. </a:t>
+            </a:r>
+            <a:r>
+              <a:rPr lang="en-PH" sz="2200" b="0" i="1" kern="1200" dirty="0">
+                <a:solidFill>
+                  <a:schemeClr val="tx1"/>
+                </a:solidFill>
+                <a:effectLst/>
+                <a:latin typeface="+mn-lt"/>
+                <a:ea typeface="+mn-ea"/>
+                <a:cs typeface="+mn-cs"/>
+              </a:rPr>
+              <a:t>L3 is the question both lessons lead to: "what now?"</a:t>
+            </a:r>
+            <a:r>
+              <a:rPr lang="en-PH" sz="2200" b="0" i="0" kern="1200" dirty="0">
+                <a:solidFill>
+                  <a:schemeClr val="tx1"/>
+                </a:solidFill>
+                <a:effectLst/>
+                <a:latin typeface="+mn-lt"/>
+                <a:ea typeface="+mn-ea"/>
+                <a:cs typeface="+mn-cs"/>
+              </a:rPr>
+              <a:t> The callback isn't decoration — it's the bridge. After hearing God for a month, the only honest response is the one Romans 12:1 names — surrender as </a:t>
+            </a:r>
+            <a:r>
+              <a:rPr lang="en-PH" sz="2200" b="1" i="0" kern="1200" dirty="0">
+                <a:solidFill>
+                  <a:schemeClr val="tx1"/>
+                </a:solidFill>
+                <a:effectLst/>
+                <a:latin typeface="+mn-lt"/>
+                <a:ea typeface="+mn-ea"/>
+                <a:cs typeface="+mn-cs"/>
+              </a:rPr>
+              <a:t>responsive love to mercy received</a:t>
+            </a:r>
+            <a:r>
+              <a:rPr lang="en-PH" sz="2200" b="0" i="0" kern="1200" dirty="0">
+                <a:solidFill>
+                  <a:schemeClr val="tx1"/>
+                </a:solidFill>
+                <a:effectLst/>
+                <a:latin typeface="+mn-lt"/>
+                <a:ea typeface="+mn-ea"/>
+                <a:cs typeface="+mn-cs"/>
+              </a:rPr>
+              <a:t>.</a:t>
+            </a:r>
+            <a:endParaRPr lang="en-US" sz="2200" dirty="0"/>
           </a:p>
         </p:txBody>
       </p:sp>
@@ -1488,10 +2470,9 @@
           <a:lstStyle/>
           <a:p>
             <a:r>
-              <a:rPr lang="en-US" dirty="0"/>
+              <a:rPr lang="en-US" sz="2200" dirty="0"/>
               <a:t>Tone shift. Dark slide. SLOW DOWN here. Read "Mokusatsu" aloud, slowly. The single word that will unfold into 200,000 dead. Do not rush. Do not joke. Hold the gravity.</a:t>
             </a:r>
-            <a:endParaRPr lang="en-US" dirty="0"/>
           </a:p>
         </p:txBody>
       </p:sp>
@@ -1576,10 +2557,39 @@
           <a:lstStyle/>
           <a:p>
             <a:r>
-              <a:rPr lang="en-US" dirty="0"/>
-              <a:t>Tell the story slowly. After "Hiroshima. Nagasaki." — pause. Let the audience absorb. After "200,000+" — pause again, 5 seconds of silence. Do NOT show graphic images of the bombings. The text alone carries the weight. Then pivot to the question on slide 5.</a:t>
-            </a:r>
-            <a:endParaRPr lang="en-US" dirty="0"/>
+              <a:rPr lang="en-US" sz="2200" dirty="0"/>
+              <a:t>Tell the story slowly. After "Hiroshima. Nagasaki." — pause. </a:t>
+            </a:r>
+          </a:p>
+          <a:p>
+            <a:r>
+              <a:rPr lang="en-US" sz="2200" dirty="0"/>
+              <a:t>Let the audience absorb. </a:t>
+            </a:r>
+          </a:p>
+          <a:p>
+            <a:r>
+              <a:rPr lang="en-US" sz="2200" dirty="0"/>
+              <a:t>After "200,000+" — pause again, 5 seconds of silence. </a:t>
+            </a:r>
+          </a:p>
+          <a:p>
+            <a:r>
+              <a:rPr lang="en-US" sz="2200" dirty="0"/>
+              <a:t>Do NOT show graphic images of the bombings. </a:t>
+            </a:r>
+          </a:p>
+          <a:p>
+            <a:r>
+              <a:rPr lang="en-US" sz="2200" dirty="0"/>
+              <a:t>The text alone carries the weight. </a:t>
+            </a:r>
+          </a:p>
+          <a:p>
+            <a:r>
+              <a:rPr lang="en-US" sz="2200" dirty="0"/>
+              <a:t>Then pivot to the question on slide 5.</a:t>
+            </a:r>
           </a:p>
         </p:txBody>
       </p:sp>
@@ -1664,10 +2674,27 @@
           <a:lstStyle/>
           <a:p>
             <a:r>
-              <a:rPr lang="en-US" dirty="0"/>
-              <a:t>The pivot question. Let it sit. Pax write initial reaction in booklet. ~2 minutes silent reflection. Then 1-2 voluntary shares.</a:t>
-            </a:r>
-            <a:endParaRPr lang="en-US" dirty="0"/>
+              <a:rPr lang="en-US" sz="2200" dirty="0"/>
+              <a:t>The pivot question. </a:t>
+            </a:r>
+          </a:p>
+          <a:p>
+            <a:r>
+              <a:rPr lang="en-US" sz="2200" dirty="0"/>
+              <a:t>Let it sit. </a:t>
+            </a:r>
+          </a:p>
+          <a:p>
+            <a:r>
+              <a:rPr lang="en-US" sz="2200" dirty="0"/>
+              <a:t>Pax write initial reaction in booklet. ~2 minutes silent reflection. </a:t>
+            </a:r>
+          </a:p>
+          <a:p>
+            <a:r>
+              <a:rPr lang="en-US" sz="2200" dirty="0"/>
+              <a:t>Then 1-2 voluntary shares.</a:t>
+            </a:r>
           </a:p>
         </p:txBody>
       </p:sp>
@@ -1755,7 +2782,6 @@
               <a:rPr lang="en-US" dirty="0"/>
               <a:t>The thesis of L3. Read slowly. The parallel — Kaniyang/ating — is intentional. God yielded to us first (Phil 2 self-emptying); now we yield to Him.</a:t>
             </a:r>
-            <a:endParaRPr lang="en-US" dirty="0"/>
           </a:p>
         </p:txBody>
       </p:sp>
@@ -1840,10 +2866,114 @@
           <a:lstStyle/>
           <a:p>
             <a:r>
-              <a:rPr lang="en-US" dirty="0"/>
-              <a:t>Surrender carries baggage — feels like defeat. Consecration is the better word — setting apart, welcoming home. The Lord is not occupying conquered territory. He is welcoming home what was always His.</a:t>
-            </a:r>
-            <a:endParaRPr lang="en-US" dirty="0"/>
+              <a:rPr lang="en-US" sz="2200" dirty="0"/>
+              <a:t>The English "surrender" carries baggage — feels like defeat. </a:t>
+            </a:r>
+          </a:p>
+          <a:p>
+            <a:r>
+              <a:rPr lang="en-US" sz="2200" dirty="0"/>
+              <a:t>The better word: CONSECRATION. "</a:t>
+            </a:r>
+            <a:r>
+              <a:rPr lang="en-US" sz="2200" dirty="0" err="1"/>
+              <a:t>Itinatalaga</a:t>
+            </a:r>
+            <a:r>
+              <a:rPr lang="en-US" sz="2200" dirty="0"/>
+              <a:t> </a:t>
+            </a:r>
+            <a:r>
+              <a:rPr lang="en-US" sz="2200" dirty="0" err="1"/>
+              <a:t>mo</a:t>
+            </a:r>
+            <a:r>
+              <a:rPr lang="en-US" sz="2200" dirty="0"/>
+              <a:t> ang </a:t>
+            </a:r>
+            <a:r>
+              <a:rPr lang="en-US" sz="2200" dirty="0" err="1"/>
+              <a:t>iyong</a:t>
+            </a:r>
+            <a:r>
+              <a:rPr lang="en-US" sz="2200" dirty="0"/>
+              <a:t> </a:t>
+            </a:r>
+            <a:r>
+              <a:rPr lang="en-US" sz="2200" dirty="0" err="1"/>
+              <a:t>buong</a:t>
+            </a:r>
+            <a:r>
+              <a:rPr lang="en-US" sz="2200" dirty="0"/>
+              <a:t> </a:t>
+            </a:r>
+            <a:r>
+              <a:rPr lang="en-US" sz="2200" dirty="0" err="1"/>
+              <a:t>buhay</a:t>
+            </a:r>
+            <a:r>
+              <a:rPr lang="en-US" sz="2200" dirty="0"/>
+              <a:t> para </a:t>
+            </a:r>
+            <a:r>
+              <a:rPr lang="en-US" sz="2200" dirty="0" err="1"/>
+              <a:t>sa</a:t>
+            </a:r>
+            <a:r>
+              <a:rPr lang="en-US" sz="2200" dirty="0"/>
+              <a:t> </a:t>
+            </a:r>
+            <a:r>
+              <a:rPr lang="en-US" sz="2200" dirty="0" err="1"/>
+              <a:t>paglilingkod</a:t>
+            </a:r>
+            <a:r>
+              <a:rPr lang="en-US" sz="2200" dirty="0"/>
+              <a:t> at </a:t>
+            </a:r>
+            <a:r>
+              <a:rPr lang="en-US" sz="2200" dirty="0" err="1"/>
+              <a:t>pagsamba</a:t>
+            </a:r>
+            <a:r>
+              <a:rPr lang="en-US" sz="2200" dirty="0"/>
+              <a:t> </a:t>
+            </a:r>
+            <a:r>
+              <a:rPr lang="en-US" sz="2200" dirty="0" err="1"/>
+              <a:t>sa</a:t>
+            </a:r>
+            <a:r>
+              <a:rPr lang="en-US" sz="2200" dirty="0"/>
+              <a:t> Dios. Sa Kaniya ka lang — ABSOLUTELY, COMPLETELY, EXCLUSIVELY."</a:t>
+            </a:r>
+          </a:p>
+          <a:p>
+            <a:endParaRPr lang="en-US" sz="2200" dirty="0"/>
+          </a:p>
+          <a:p>
+            <a:r>
+              <a:rPr lang="en-US" sz="2200" dirty="0"/>
+              <a:t>Why is consecration the better word? </a:t>
+            </a:r>
+          </a:p>
+          <a:p>
+            <a:r>
+              <a:rPr lang="en-US" sz="2200" dirty="0"/>
+              <a:t>Because surrender suggests force; consecration suggests setting apart. </a:t>
+            </a:r>
+          </a:p>
+          <a:p>
+            <a:r>
+              <a:rPr lang="en-US" sz="2200" dirty="0"/>
+              <a:t>The Lord is not occupying conquered territory. </a:t>
+            </a:r>
+          </a:p>
+          <a:p>
+            <a:r>
+              <a:rPr lang="en-US" sz="2200" dirty="0"/>
+              <a:t>He is welcoming home what was always His.</a:t>
+            </a:r>
           </a:p>
         </p:txBody>
       </p:sp>
@@ -1929,9 +3059,290 @@
           <a:p>
             <a:r>
               <a:rPr lang="en-US" dirty="0"/>
-              <a:t>Read aloud. The phrase "binili na kayo sa isang halaga" — emphasize. The price has been paid. Surrender is not adding a price; it is acknowledging the price already paid.</a:t>
-            </a:r>
+              <a:t>Read aloud. </a:t>
+            </a:r>
+          </a:p>
+          <a:p>
+            <a:r>
+              <a:rPr lang="en-US" dirty="0"/>
+              <a:t>The phrase "binili na kayo sa isang halaga" — emphasize. </a:t>
+            </a:r>
+          </a:p>
+          <a:p>
+            <a:r>
+              <a:rPr lang="en-US" dirty="0"/>
+              <a:t>The price has been paid. </a:t>
+            </a:r>
+          </a:p>
+          <a:p>
+            <a:r>
+              <a:rPr lang="en-US" dirty="0"/>
+              <a:t>Surrender is not adding a price; it is acknowledging the price already paid.</a:t>
+            </a:r>
+          </a:p>
+          <a:p>
             <a:endParaRPr lang="en-US" dirty="0"/>
+          </a:p>
+          <a:p>
+            <a:r>
+              <a:rPr lang="en-US" dirty="0"/>
+              <a:t>Roma 14:7-8</a:t>
+            </a:r>
+          </a:p>
+          <a:p>
+            <a:r>
+              <a:rPr lang="en-US" dirty="0"/>
+              <a:t>"Walang </a:t>
+            </a:r>
+            <a:r>
+              <a:rPr lang="en-US" dirty="0" err="1"/>
+              <a:t>sinuman</a:t>
+            </a:r>
+            <a:r>
+              <a:rPr lang="en-US" dirty="0"/>
+              <a:t> </a:t>
+            </a:r>
+            <a:r>
+              <a:rPr lang="en-US" dirty="0" err="1"/>
+              <a:t>sa</a:t>
+            </a:r>
+            <a:r>
+              <a:rPr lang="en-US" dirty="0"/>
+              <a:t> </a:t>
+            </a:r>
+            <a:r>
+              <a:rPr lang="en-US" dirty="0" err="1"/>
+              <a:t>atin</a:t>
+            </a:r>
+            <a:r>
+              <a:rPr lang="en-US" dirty="0"/>
+              <a:t> ang </a:t>
+            </a:r>
+            <a:r>
+              <a:rPr lang="en-US" dirty="0" err="1"/>
+              <a:t>nabubuhay</a:t>
+            </a:r>
+            <a:r>
+              <a:rPr lang="en-US" dirty="0"/>
+              <a:t> o </a:t>
+            </a:r>
+            <a:r>
+              <a:rPr lang="en-US" dirty="0" err="1"/>
+              <a:t>namamatay</a:t>
+            </a:r>
+            <a:r>
+              <a:rPr lang="en-US" dirty="0"/>
+              <a:t> para </a:t>
+            </a:r>
+            <a:r>
+              <a:rPr lang="en-US" dirty="0" err="1"/>
+              <a:t>sa</a:t>
+            </a:r>
+            <a:r>
+              <a:rPr lang="en-US" dirty="0"/>
+              <a:t> </a:t>
+            </a:r>
+            <a:r>
+              <a:rPr lang="en-US" dirty="0" err="1"/>
+              <a:t>sarili</a:t>
+            </a:r>
+            <a:r>
+              <a:rPr lang="en-US" dirty="0"/>
+              <a:t> </a:t>
+            </a:r>
+            <a:r>
+              <a:rPr lang="en-US" dirty="0" err="1"/>
+              <a:t>lamang</a:t>
+            </a:r>
+            <a:r>
+              <a:rPr lang="en-US" dirty="0"/>
+              <a:t>... Kaya </a:t>
+            </a:r>
+            <a:r>
+              <a:rPr lang="en-US" dirty="0" err="1"/>
+              <a:t>nga</a:t>
+            </a:r>
+            <a:r>
+              <a:rPr lang="en-US" dirty="0"/>
+              <a:t>, </a:t>
+            </a:r>
+            <a:r>
+              <a:rPr lang="en-US" dirty="0" err="1"/>
+              <a:t>sa</a:t>
+            </a:r>
+            <a:r>
+              <a:rPr lang="en-US" dirty="0"/>
+              <a:t> mabuhay o </a:t>
+            </a:r>
+            <a:r>
+              <a:rPr lang="en-US" dirty="0" err="1"/>
+              <a:t>sa</a:t>
+            </a:r>
+            <a:r>
+              <a:rPr lang="en-US" dirty="0"/>
+              <a:t> </a:t>
+            </a:r>
+            <a:r>
+              <a:rPr lang="en-US" dirty="0" err="1"/>
+              <a:t>mamatay</a:t>
+            </a:r>
+            <a:r>
+              <a:rPr lang="en-US" dirty="0"/>
+              <a:t>, </a:t>
+            </a:r>
+            <a:r>
+              <a:rPr lang="en-US" dirty="0" err="1"/>
+              <a:t>tayo'y</a:t>
+            </a:r>
+            <a:r>
+              <a:rPr lang="en-US" dirty="0"/>
+              <a:t> </a:t>
+            </a:r>
+            <a:r>
+              <a:rPr lang="en-US" dirty="0" err="1"/>
+              <a:t>sa</a:t>
+            </a:r>
+            <a:r>
+              <a:rPr lang="en-US" dirty="0"/>
+              <a:t> </a:t>
+            </a:r>
+            <a:r>
+              <a:rPr lang="en-US" dirty="0" err="1"/>
+              <a:t>Panginoon</a:t>
+            </a:r>
+            <a:r>
+              <a:rPr lang="en-US" dirty="0"/>
+              <a:t>.“</a:t>
+            </a:r>
+          </a:p>
+          <a:p>
+            <a:endParaRPr lang="en-US" dirty="0"/>
+          </a:p>
+          <a:p>
+            <a:r>
+              <a:rPr lang="en-US" dirty="0"/>
+              <a:t>Pastoral framing: "</a:t>
+            </a:r>
+            <a:r>
+              <a:rPr lang="en-US" dirty="0" err="1"/>
+              <a:t>Karapat-dapat</a:t>
+            </a:r>
+            <a:r>
+              <a:rPr lang="en-US" dirty="0"/>
+              <a:t> lang </a:t>
+            </a:r>
+            <a:r>
+              <a:rPr lang="en-US" dirty="0" err="1"/>
+              <a:t>na</a:t>
+            </a:r>
+            <a:r>
+              <a:rPr lang="en-US" dirty="0"/>
+              <a:t> </a:t>
+            </a:r>
+            <a:r>
+              <a:rPr lang="en-US" dirty="0" err="1"/>
+              <a:t>sumuko</a:t>
+            </a:r>
+            <a:r>
+              <a:rPr lang="en-US" dirty="0"/>
+              <a:t> tayo </a:t>
+            </a:r>
+            <a:r>
+              <a:rPr lang="en-US" dirty="0" err="1"/>
+              <a:t>sa</a:t>
+            </a:r>
+            <a:r>
+              <a:rPr lang="en-US" dirty="0"/>
+              <a:t> Kaniya </a:t>
+            </a:r>
+            <a:r>
+              <a:rPr lang="en-US" dirty="0" err="1"/>
+              <a:t>na</a:t>
+            </a:r>
+            <a:r>
+              <a:rPr lang="en-US" dirty="0"/>
+              <a:t> </a:t>
+            </a:r>
+            <a:r>
+              <a:rPr lang="en-US" dirty="0" err="1"/>
+              <a:t>nagligtas</a:t>
+            </a:r>
+            <a:r>
+              <a:rPr lang="en-US" dirty="0"/>
+              <a:t>, </a:t>
+            </a:r>
+            <a:r>
+              <a:rPr lang="en-US" dirty="0" err="1"/>
+              <a:t>nagpalaya</a:t>
+            </a:r>
+            <a:r>
+              <a:rPr lang="en-US" dirty="0"/>
+              <a:t>, at </a:t>
+            </a:r>
+            <a:r>
+              <a:rPr lang="en-US" dirty="0" err="1"/>
+              <a:t>nagmamahal</a:t>
+            </a:r>
+            <a:r>
+              <a:rPr lang="en-US" dirty="0"/>
+              <a:t> </a:t>
+            </a:r>
+            <a:r>
+              <a:rPr lang="en-US" dirty="0" err="1"/>
+              <a:t>sa</a:t>
+            </a:r>
+            <a:r>
+              <a:rPr lang="en-US" dirty="0"/>
+              <a:t> </a:t>
+            </a:r>
+            <a:r>
+              <a:rPr lang="en-US" dirty="0" err="1"/>
+              <a:t>atin</a:t>
+            </a:r>
+            <a:r>
+              <a:rPr lang="en-US" dirty="0"/>
+              <a:t>. </a:t>
+            </a:r>
+            <a:r>
+              <a:rPr lang="en-US" dirty="0" err="1"/>
+              <a:t>Sumuko</a:t>
+            </a:r>
+            <a:r>
+              <a:rPr lang="en-US" dirty="0"/>
+              <a:t> tayo </a:t>
+            </a:r>
+            <a:r>
+              <a:rPr lang="en-US" dirty="0" err="1"/>
+              <a:t>dahil</a:t>
+            </a:r>
+            <a:r>
+              <a:rPr lang="en-US" dirty="0"/>
+              <a:t> </a:t>
+            </a:r>
+            <a:r>
+              <a:rPr lang="en-US" dirty="0" err="1"/>
+              <a:t>ni</a:t>
+            </a:r>
+            <a:r>
+              <a:rPr lang="en-US" dirty="0"/>
+              <a:t> </a:t>
+            </a:r>
+            <a:r>
+              <a:rPr lang="en-US" dirty="0" err="1"/>
+              <a:t>minsan</a:t>
+            </a:r>
+            <a:r>
+              <a:rPr lang="en-US" dirty="0"/>
+              <a:t> ay 'di Niya tayo </a:t>
+            </a:r>
+            <a:r>
+              <a:rPr lang="en-US" dirty="0" err="1"/>
+              <a:t>sinukuan</a:t>
+            </a:r>
+            <a:r>
+              <a:rPr lang="en-US" dirty="0"/>
+              <a:t>."</a:t>
+            </a:r>
           </a:p>
         </p:txBody>
       </p:sp>
@@ -2016,10 +3427,230 @@
           <a:lstStyle/>
           <a:p>
             <a:r>
-              <a:rPr lang="en-US" dirty="0"/>
-              <a:t>The binary question. There is no third option. Pax may try to say "I am working on it" — that's pagsuway with a strategy. The disciple sumusunod even when imperfectly. The non-disciple sumusuway and calls it humility.</a:t>
-            </a:r>
-            <a:endParaRPr lang="en-US" dirty="0"/>
+              <a:rPr lang="en-US" sz="2200" dirty="0"/>
+              <a:t>The sharp question: "Hindi </a:t>
+            </a:r>
+            <a:r>
+              <a:rPr lang="en-US" sz="2200" dirty="0" err="1"/>
+              <a:t>mo</a:t>
+            </a:r>
+            <a:r>
+              <a:rPr lang="en-US" sz="2200" dirty="0"/>
+              <a:t> </a:t>
+            </a:r>
+            <a:r>
+              <a:rPr lang="en-US" sz="2200" dirty="0" err="1"/>
+              <a:t>puwedeng</a:t>
+            </a:r>
+            <a:r>
+              <a:rPr lang="en-US" sz="2200" dirty="0"/>
+              <a:t> </a:t>
+            </a:r>
+            <a:r>
+              <a:rPr lang="en-US" sz="2200" dirty="0" err="1"/>
+              <a:t>sabihin</a:t>
+            </a:r>
+            <a:r>
+              <a:rPr lang="en-US" sz="2200" dirty="0"/>
+              <a:t> </a:t>
+            </a:r>
+            <a:r>
+              <a:rPr lang="en-US" sz="2200" dirty="0" err="1"/>
+              <a:t>na</a:t>
+            </a:r>
+            <a:r>
+              <a:rPr lang="en-US" sz="2200" dirty="0"/>
+              <a:t> </a:t>
+            </a:r>
+            <a:r>
+              <a:rPr lang="en-US" sz="2200" dirty="0" err="1"/>
+              <a:t>ikaw</a:t>
+            </a:r>
+            <a:r>
+              <a:rPr lang="en-US" sz="2200" dirty="0"/>
+              <a:t> ay </a:t>
+            </a:r>
+            <a:r>
+              <a:rPr lang="en-US" sz="2200" dirty="0" err="1"/>
+              <a:t>sumusuko</a:t>
+            </a:r>
+            <a:r>
+              <a:rPr lang="en-US" sz="2200" dirty="0"/>
+              <a:t> ng </a:t>
+            </a:r>
+            <a:r>
+              <a:rPr lang="en-US" sz="2200" dirty="0" err="1"/>
+              <a:t>hindi</a:t>
+            </a:r>
+            <a:r>
+              <a:rPr lang="en-US" sz="2200" dirty="0"/>
+              <a:t> ka </a:t>
+            </a:r>
+            <a:r>
+              <a:rPr lang="en-US" sz="2200" dirty="0" err="1"/>
+              <a:t>sumusunod</a:t>
+            </a:r>
+            <a:r>
+              <a:rPr lang="en-US" sz="2200" dirty="0"/>
+              <a:t>. </a:t>
+            </a:r>
+          </a:p>
+          <a:p>
+            <a:r>
+              <a:rPr lang="en-US" sz="2200" dirty="0"/>
+              <a:t>It's either </a:t>
+            </a:r>
+            <a:r>
+              <a:rPr lang="en-US" sz="2200" dirty="0" err="1"/>
+              <a:t>sumusunod</a:t>
+            </a:r>
+            <a:r>
+              <a:rPr lang="en-US" sz="2200" dirty="0"/>
+              <a:t> o </a:t>
+            </a:r>
+            <a:r>
+              <a:rPr lang="en-US" sz="2200" dirty="0" err="1"/>
+              <a:t>sumusuway</a:t>
+            </a:r>
+            <a:r>
+              <a:rPr lang="en-US" sz="2200" dirty="0"/>
+              <a:t>. </a:t>
+            </a:r>
+          </a:p>
+          <a:p>
+            <a:r>
+              <a:rPr lang="en-US" sz="2200" dirty="0" err="1"/>
+              <a:t>Tumatalima</a:t>
+            </a:r>
+            <a:r>
+              <a:rPr lang="en-US" sz="2200" dirty="0"/>
+              <a:t> o </a:t>
+            </a:r>
+            <a:r>
+              <a:rPr lang="en-US" sz="2200" dirty="0" err="1"/>
+              <a:t>tumatalikod</a:t>
+            </a:r>
+            <a:r>
+              <a:rPr lang="en-US" sz="2200" dirty="0"/>
+              <a:t>. </a:t>
+            </a:r>
+          </a:p>
+          <a:p>
+            <a:r>
+              <a:rPr lang="en-US" sz="2200" dirty="0"/>
+              <a:t>Alin ka </a:t>
+            </a:r>
+            <a:r>
+              <a:rPr lang="en-US" sz="2200" dirty="0" err="1"/>
+              <a:t>sa</a:t>
+            </a:r>
+            <a:r>
+              <a:rPr lang="en-US" sz="2200" dirty="0"/>
+              <a:t> </a:t>
+            </a:r>
+            <a:r>
+              <a:rPr lang="en-US" sz="2200" dirty="0" err="1"/>
+              <a:t>dalawa</a:t>
+            </a:r>
+            <a:r>
+              <a:rPr lang="en-US" sz="2200" dirty="0"/>
+              <a:t>?"</a:t>
+            </a:r>
+          </a:p>
+          <a:p>
+            <a:endParaRPr lang="en-US" sz="2200" dirty="0"/>
+          </a:p>
+          <a:p>
+            <a:r>
+              <a:rPr lang="en-US" sz="2200" dirty="0"/>
+              <a:t>🎯 Pastoral Note — Why Joy is the Character Anchor</a:t>
+            </a:r>
+          </a:p>
+          <a:p>
+            <a:r>
+              <a:rPr lang="en-US" sz="2200" dirty="0"/>
+              <a:t>Surrender without joy becomes legalism. </a:t>
+            </a:r>
+          </a:p>
+          <a:p>
+            <a:r>
+              <a:rPr lang="en-US" sz="2200" dirty="0"/>
+              <a:t>Surrender with joy is what Romans 12:1 actually teaches — "</a:t>
+            </a:r>
+            <a:r>
+              <a:rPr lang="en-US" sz="2200" dirty="0" err="1"/>
+              <a:t>alang-alang</a:t>
+            </a:r>
+            <a:r>
+              <a:rPr lang="en-US" sz="2200" dirty="0"/>
+              <a:t> </a:t>
+            </a:r>
+            <a:r>
+              <a:rPr lang="en-US" sz="2200" dirty="0" err="1"/>
+              <a:t>sa</a:t>
+            </a:r>
+            <a:r>
+              <a:rPr lang="en-US" sz="2200" dirty="0"/>
+              <a:t> </a:t>
+            </a:r>
+            <a:r>
+              <a:rPr lang="en-US" sz="2200" dirty="0" err="1"/>
+              <a:t>masaganang</a:t>
+            </a:r>
+            <a:r>
+              <a:rPr lang="en-US" sz="2200" dirty="0"/>
+              <a:t> </a:t>
+            </a:r>
+            <a:r>
+              <a:rPr lang="en-US" sz="2200" dirty="0" err="1"/>
+              <a:t>habag</a:t>
+            </a:r>
+            <a:r>
+              <a:rPr lang="en-US" sz="2200" dirty="0"/>
+              <a:t>" means BECAUSE of mercy received, not IN ORDER TO RECEIVE mercy. </a:t>
+            </a:r>
+          </a:p>
+          <a:p>
+            <a:r>
+              <a:rPr lang="en-US" sz="2200" dirty="0"/>
+              <a:t>The disciple surrenders joyfully because they're already loved. </a:t>
+            </a:r>
+          </a:p>
+          <a:p>
+            <a:r>
+              <a:rPr lang="en-US" sz="2200" dirty="0"/>
+              <a:t>Make this distinction explicit if a participant frames surrender as duty.</a:t>
+            </a:r>
+          </a:p>
+          <a:p>
+            <a:r>
+              <a:rPr lang="en-US" sz="2200" dirty="0"/>
+              <a:t>The binary question. </a:t>
+            </a:r>
+          </a:p>
+          <a:p>
+            <a:r>
+              <a:rPr lang="en-US" sz="2200" dirty="0"/>
+              <a:t>There is no third option. </a:t>
+            </a:r>
+          </a:p>
+          <a:p>
+            <a:r>
+              <a:rPr lang="en-US" sz="2200" dirty="0"/>
+              <a:t>Participant may try to say "I am working on it" — that's pagsuway with a strategy. </a:t>
+            </a:r>
+          </a:p>
+          <a:p>
+            <a:r>
+              <a:rPr lang="en-US" sz="2200" dirty="0"/>
+              <a:t>The disciple sumusunod even when imperfectly. </a:t>
+            </a:r>
+          </a:p>
+          <a:p>
+            <a:r>
+              <a:rPr lang="en-US" sz="2200" dirty="0"/>
+              <a:t>The non-disciple sumusuway and calls it humility.</a:t>
+            </a:r>
           </a:p>
         </p:txBody>
       </p:sp>
@@ -2092,6 +3723,11 @@
 <file path=ppt/slideMasters/slideMaster1.xml><?xml version="1.0" encoding="utf-8"?>
 <p:sldMaster xmlns:a="http://schemas.openxmlformats.org/drawingml/2006/main" xmlns:r="http://schemas.openxmlformats.org/officeDocument/2006/relationships" xmlns:p="http://schemas.openxmlformats.org/presentationml/2006/main">
   <p:cSld>
+    <p:bg>
+      <p:bgRef idx="1001">
+        <a:schemeClr val="bg1"/>
+      </p:bgRef>
+    </p:bg>
     <p:spTree>
       <p:nvGrpSpPr>
         <p:cNvPr id="1" name=""/>
@@ -2374,6 +4010,7 @@
         <a:solidFill>
           <a:srgbClr val="0F1C34"/>
         </a:solidFill>
+        <a:effectLst/>
       </p:bgPr>
     </p:bg>
     <p:spTree>
@@ -2411,11 +4048,11 @@
           <a:bodyPr wrap="square" lIns="0" tIns="0" rIns="0" bIns="0" rtlCol="0" anchor="ctr"/>
           <a:lstStyle/>
           <a:p>
-            <a:pPr indent="0" marL="0">
-              <a:buNone/>
-            </a:pPr>
-            <a:r>
-              <a:rPr lang="en-US" sz="800" b="1" spc="300" kern="0" dirty="0">
+            <a:pPr marL="0" indent="0">
+              <a:buNone/>
+            </a:pPr>
+            <a:r>
+              <a:rPr lang="en-US" sz="800" b="1" kern="0" spc="300" dirty="0">
                 <a:solidFill>
                   <a:srgbClr val="E8941A"/>
                 </a:solidFill>
@@ -2450,7 +4087,7 @@
           <a:bodyPr wrap="square" lIns="0" tIns="0" rIns="0" bIns="0" rtlCol="0" anchor="ctr"/>
           <a:lstStyle/>
           <a:p>
-            <a:pPr algn="r" indent="0" marL="0">
+            <a:pPr marL="0" indent="0" algn="r">
               <a:buNone/>
             </a:pPr>
             <a:r>
@@ -2489,11 +4126,11 @@
           <a:bodyPr wrap="square" rtlCol="0" anchor="ctr"/>
           <a:lstStyle/>
           <a:p>
-            <a:pPr algn="ctr" indent="0" marL="0">
-              <a:buNone/>
-            </a:pPr>
-            <a:r>
-              <a:rPr lang="en-US" sz="1600" b="1" spc="500" kern="0" dirty="0">
+            <a:pPr marL="0" indent="0" algn="ctr">
+              <a:buNone/>
+            </a:pPr>
+            <a:r>
+              <a:rPr lang="en-US" sz="1600" b="1" kern="0" spc="500" dirty="0">
                 <a:solidFill>
                   <a:srgbClr val="E8941A"/>
                 </a:solidFill>
@@ -2528,7 +4165,7 @@
           <a:bodyPr wrap="square" rtlCol="0" anchor="ctr"/>
           <a:lstStyle/>
           <a:p>
-            <a:pPr algn="ctr" indent="0" marL="0">
+            <a:pPr marL="0" indent="0" algn="ctr">
               <a:buNone/>
             </a:pPr>
             <a:r>
@@ -2567,7 +4204,7 @@
           <a:bodyPr wrap="square" rtlCol="0" anchor="ctr"/>
           <a:lstStyle/>
           <a:p>
-            <a:pPr algn="ctr" indent="0" marL="0">
+            <a:pPr marL="0" indent="0" algn="ctr">
               <a:buNone/>
             </a:pPr>
             <a:r>
@@ -2613,6 +4250,13 @@
             <a:prstDash val="solid"/>
           </a:ln>
         </p:spPr>
+        <p:txBody>
+          <a:bodyPr/>
+          <a:lstStyle/>
+          <a:p>
+            <a:endParaRPr lang="en-PH"/>
+          </a:p>
+        </p:txBody>
       </p:sp>
       <p:sp>
         <p:nvSpPr>
@@ -2635,7 +4279,7 @@
           <a:bodyPr wrap="square" lIns="0" tIns="0" rIns="0" bIns="0" rtlCol="0" anchor="ctr"/>
           <a:lstStyle/>
           <a:p>
-            <a:pPr algn="ctr" indent="0" marL="0">
+            <a:pPr marL="0" indent="0" algn="ctr">
               <a:buNone/>
             </a:pPr>
             <a:r>
@@ -2681,6 +4325,13 @@
             <a:prstDash val="solid"/>
           </a:ln>
         </p:spPr>
+        <p:txBody>
+          <a:bodyPr/>
+          <a:lstStyle/>
+          <a:p>
+            <a:endParaRPr lang="en-PH"/>
+          </a:p>
+        </p:txBody>
       </p:sp>
       <p:sp>
         <p:nvSpPr>
@@ -2703,7 +4354,7 @@
           <a:bodyPr wrap="square" lIns="0" tIns="0" rIns="0" bIns="0" rtlCol="0" anchor="ctr"/>
           <a:lstStyle/>
           <a:p>
-            <a:pPr algn="ctr" indent="0" marL="0">
+            <a:pPr marL="0" indent="0" algn="ctr">
               <a:buNone/>
             </a:pPr>
             <a:r>
@@ -2814,7 +4465,7 @@
             <a:avLst/>
           </a:prstGeom>
           <a:solidFill>
-            <a:srgbClr val="0F1C34"/>
+            <a:srgbClr val="FEFCF8"/>
           </a:solidFill>
           <a:ln>
             <a:noFill/>
@@ -2905,7 +4556,7 @@
                 </a:solidFill>
                 <a:latin typeface="Calibri"/>
               </a:rPr>
-              <a:t>11 / 20</a:t>
+              <a:t>10 / 20</a:t>
             </a:r>
           </a:p>
         </p:txBody>
@@ -2934,11 +4585,11 @@
             <a:r>
               <a:rPr sz="1500" b="1" i="0">
                 <a:solidFill>
-                  <a:srgbClr val="D4A84A"/>
+                  <a:srgbClr val="C97A1A"/>
                 </a:solidFill>
                 <a:latin typeface="Calibri"/>
               </a:rPr>
-              <a:t>💡 TALAKAY · TANONG</a:t>
+              <a:t>📖 TUKLAS · TANONG</a:t>
             </a:r>
           </a:p>
         </p:txBody>
@@ -3020,11 +4671,11 @@
             <a:r>
               <a:rPr sz="3000" b="1" i="0">
                 <a:solidFill>
-                  <a:srgbClr val="FEFCF8"/>
+                  <a:srgbClr val="1B2A4A"/>
                 </a:solidFill>
                 <a:latin typeface="Calibri"/>
               </a:rPr>
-              <a:t>Bakit kaya negatibo ang perception ng mundo sa salitang "pagsuko at pagpapasakop"?</a:t>
+              <a:t>Ano ang pangunahing dahilan kung bakit hirap ang isang mananampalataya na sumuko sa Panginoon?</a:t>
             </a:r>
           </a:p>
         </p:txBody>
@@ -3053,11 +4704,11 @@
             <a:r>
               <a:rPr sz="1450" b="0" i="1">
                 <a:solidFill>
-                  <a:srgbClr val="D4A84A"/>
+                  <a:srgbClr val="B8882A"/>
                 </a:solidFill>
                 <a:latin typeface="Calibri"/>
               </a:rPr>
-              <a:t>Sa tables — pag-usapan. Tapos 1–2 boluntaryong share.</a:t>
+              <a:t>Tahimik na isulat sa Participant Guide — 90 segundo.</a:t>
             </a:r>
           </a:p>
         </p:txBody>
@@ -3110,7 +4761,7 @@
                 </a:solidFill>
                 <a:latin typeface="Calibri"/>
               </a:rPr>
-              <a:t>⏱ 3 min · ⌛23:00</a:t>
+              <a:t>⏱ 3 min · ⌛20:00</a:t>
             </a:r>
           </a:p>
         </p:txBody>
@@ -3125,12 +4776,354 @@
 
 <file path=ppt/slides/slide11.xml><?xml version="1.0" encoding="utf-8"?>
 <p:sld xmlns:a="http://schemas.openxmlformats.org/drawingml/2006/main" xmlns:r="http://schemas.openxmlformats.org/officeDocument/2006/relationships" xmlns:p="http://schemas.openxmlformats.org/presentationml/2006/main">
+  <p:cSld>
+    <p:spTree>
+      <p:nvGrpSpPr>
+        <p:cNvPr id="1" name=""/>
+        <p:cNvGrpSpPr/>
+        <p:nvPr/>
+      </p:nvGrpSpPr>
+      <p:grpSpPr>
+        <a:xfrm>
+          <a:off x="0" y="0"/>
+          <a:ext cx="0" cy="0"/>
+          <a:chOff x="0" y="0"/>
+          <a:chExt cx="0" cy="0"/>
+        </a:xfrm>
+      </p:grpSpPr>
+      <p:sp>
+        <p:nvSpPr>
+          <p:cNvPr id="2" name="BG"/>
+          <p:cNvSpPr/>
+          <p:nvPr/>
+        </p:nvSpPr>
+        <p:spPr>
+          <a:xfrm>
+            <a:off x="0" y="0"/>
+            <a:ext cx="9144000" cy="5143500"/>
+          </a:xfrm>
+          <a:prstGeom prst="rect">
+            <a:avLst/>
+          </a:prstGeom>
+          <a:solidFill>
+            <a:srgbClr val="0F1C34"/>
+          </a:solidFill>
+          <a:ln>
+            <a:noFill/>
+          </a:ln>
+          <a:effectLst/>
+        </p:spPr>
+        <p:style>
+          <a:lnRef idx="1">
+            <a:schemeClr val="accent1"/>
+          </a:lnRef>
+          <a:fillRef idx="3">
+            <a:schemeClr val="accent1"/>
+          </a:fillRef>
+          <a:effectRef idx="2">
+            <a:schemeClr val="accent1"/>
+          </a:effectRef>
+          <a:fontRef idx="minor">
+            <a:schemeClr val="lt1"/>
+          </a:fontRef>
+        </p:style>
+        <p:txBody>
+          <a:bodyPr rtlCol="0" anchor="ctr"/>
+          <a:lstStyle/>
+          <a:p>
+            <a:pPr algn="ctr"/>
+            <a:endParaRPr/>
+          </a:p>
+        </p:txBody>
+      </p:sp>
+      <p:sp>
+        <p:nvSpPr>
+          <p:cNvPr id="3" name="MULTIPLY"/>
+          <p:cNvSpPr txBox="1"/>
+          <p:nvPr/>
+        </p:nvSpPr>
+        <p:spPr>
+          <a:xfrm>
+            <a:off x="365760" y="137160"/>
+            <a:ext cx="5486400" cy="228600"/>
+          </a:xfrm>
+          <a:prstGeom prst="rect">
+            <a:avLst/>
+          </a:prstGeom>
+          <a:noFill/>
+        </p:spPr>
+        <p:txBody>
+          <a:bodyPr wrap="square"/>
+          <a:lstStyle/>
+          <a:p>
+            <a:pPr algn="l"/>
+            <a:r>
+              <a:rPr sz="900" b="1" i="0">
+                <a:solidFill>
+                  <a:srgbClr val="808080"/>
+                </a:solidFill>
+                <a:latin typeface="Calibri"/>
+              </a:rPr>
+              <a:t>MULTIPLY · DISCIPLE-MAKING PIPELINE</a:t>
+            </a:r>
+          </a:p>
+        </p:txBody>
+      </p:sp>
+      <p:sp>
+        <p:nvSpPr>
+          <p:cNvPr id="4" name="Footer"/>
+          <p:cNvSpPr txBox="1"/>
+          <p:nvPr/>
+        </p:nvSpPr>
+        <p:spPr>
+          <a:xfrm>
+            <a:off x="7772400" y="4846320"/>
+            <a:ext cx="1188720" cy="228600"/>
+          </a:xfrm>
+          <a:prstGeom prst="rect">
+            <a:avLst/>
+          </a:prstGeom>
+          <a:noFill/>
+        </p:spPr>
+        <p:txBody>
+          <a:bodyPr wrap="square"/>
+          <a:lstStyle/>
+          <a:p>
+            <a:pPr algn="r"/>
+            <a:r>
+              <a:rPr sz="900" b="0" i="0">
+                <a:solidFill>
+                  <a:srgbClr val="808080"/>
+                </a:solidFill>
+                <a:latin typeface="Calibri"/>
+              </a:rPr>
+              <a:t>11 / 20</a:t>
+            </a:r>
+          </a:p>
+        </p:txBody>
+      </p:sp>
+      <p:sp>
+        <p:nvSpPr>
+          <p:cNvPr id="5" name="Header"/>
+          <p:cNvSpPr txBox="1"/>
+          <p:nvPr/>
+        </p:nvSpPr>
+        <p:spPr>
+          <a:xfrm>
+            <a:off x="457200" y="457200"/>
+            <a:ext cx="8229600" cy="365760"/>
+          </a:xfrm>
+          <a:prstGeom prst="rect">
+            <a:avLst/>
+          </a:prstGeom>
+          <a:noFill/>
+        </p:spPr>
+        <p:txBody>
+          <a:bodyPr wrap="square"/>
+          <a:lstStyle/>
+          <a:p>
+            <a:pPr algn="ctr"/>
+            <a:r>
+              <a:rPr sz="1500" b="1" i="0">
+                <a:solidFill>
+                  <a:srgbClr val="D4A84A"/>
+                </a:solidFill>
+                <a:latin typeface="Calibri"/>
+              </a:rPr>
+              <a:t>💡 TALAKAY · TANONG</a:t>
+            </a:r>
+          </a:p>
+        </p:txBody>
+      </p:sp>
+      <p:sp>
+        <p:nvSpPr>
+          <p:cNvPr id="6" name="PGBadge"/>
+          <p:cNvSpPr/>
+          <p:nvPr/>
+        </p:nvSpPr>
+        <p:spPr>
+          <a:xfrm>
+            <a:off x="2788920" y="1024128"/>
+            <a:ext cx="3566160" cy="329184"/>
+          </a:xfrm>
+          <a:prstGeom prst="roundRect">
+            <a:avLst/>
+          </a:prstGeom>
+          <a:solidFill>
+            <a:srgbClr val="D4A84A"/>
+          </a:solidFill>
+          <a:ln>
+            <a:noFill/>
+          </a:ln>
+          <a:effectLst/>
+        </p:spPr>
+        <p:style>
+          <a:lnRef idx="1">
+            <a:schemeClr val="accent1"/>
+          </a:lnRef>
+          <a:fillRef idx="3">
+            <a:schemeClr val="accent1"/>
+          </a:fillRef>
+          <a:effectRef idx="2">
+            <a:schemeClr val="accent1"/>
+          </a:effectRef>
+          <a:fontRef idx="minor">
+            <a:schemeClr val="lt1"/>
+          </a:fontRef>
+        </p:style>
+        <p:txBody>
+          <a:bodyPr tIns="0" bIns="0" rtlCol="0" anchor="ctr"/>
+          <a:lstStyle/>
+          <a:p>
+            <a:pPr algn="ctr"/>
+            <a:r>
+              <a:rPr sz="1100" b="1" i="0">
+                <a:solidFill>
+                  <a:srgbClr val="141628"/>
+                </a:solidFill>
+                <a:latin typeface="Calibri"/>
+              </a:rPr>
+              <a:t>📋 Participant Guide Question</a:t>
+            </a:r>
+          </a:p>
+        </p:txBody>
+      </p:sp>
+      <p:sp>
+        <p:nvSpPr>
+          <p:cNvPr id="7" name="Question"/>
+          <p:cNvSpPr txBox="1"/>
+          <p:nvPr/>
+        </p:nvSpPr>
+        <p:spPr>
+          <a:xfrm>
+            <a:off x="731520" y="1783080"/>
+            <a:ext cx="7680960" cy="2194560"/>
+          </a:xfrm>
+          <a:prstGeom prst="rect">
+            <a:avLst/>
+          </a:prstGeom>
+          <a:noFill/>
+        </p:spPr>
+        <p:txBody>
+          <a:bodyPr wrap="square" anchor="ctr"/>
+          <a:lstStyle/>
+          <a:p>
+            <a:pPr algn="ctr"/>
+            <a:r>
+              <a:rPr sz="3000" b="1" i="0">
+                <a:solidFill>
+                  <a:srgbClr val="FEFCF8"/>
+                </a:solidFill>
+                <a:latin typeface="Calibri"/>
+              </a:rPr>
+              <a:t>Bakit kaya negatibo ang perception ng mundo sa salitang "pagsuko at pagpapasakop"?</a:t>
+            </a:r>
+          </a:p>
+        </p:txBody>
+      </p:sp>
+      <p:sp>
+        <p:nvSpPr>
+          <p:cNvPr id="8" name="AnswerMode"/>
+          <p:cNvSpPr txBox="1"/>
+          <p:nvPr/>
+        </p:nvSpPr>
+        <p:spPr>
+          <a:xfrm>
+            <a:off x="731520" y="4160520"/>
+            <a:ext cx="7680960" cy="548640"/>
+          </a:xfrm>
+          <a:prstGeom prst="rect">
+            <a:avLst/>
+          </a:prstGeom>
+          <a:noFill/>
+        </p:spPr>
+        <p:txBody>
+          <a:bodyPr wrap="square"/>
+          <a:lstStyle/>
+          <a:p>
+            <a:pPr algn="ctr"/>
+            <a:r>
+              <a:rPr sz="1450" b="0" i="1">
+                <a:solidFill>
+                  <a:srgbClr val="D4A84A"/>
+                </a:solidFill>
+                <a:latin typeface="Calibri"/>
+              </a:rPr>
+              <a:t>Sa tables — pag-usapan. Tapos 1–2 boluntaryong share.</a:t>
+            </a:r>
+          </a:p>
+        </p:txBody>
+      </p:sp>
+      <p:sp>
+        <p:nvSpPr>
+          <p:cNvPr id="9" name="TimerPill"/>
+          <p:cNvSpPr/>
+          <p:nvPr/>
+        </p:nvSpPr>
+        <p:spPr>
+          <a:xfrm>
+            <a:off x="7205472" y="118872"/>
+            <a:ext cx="1828800" cy="365760"/>
+          </a:xfrm>
+          <a:prstGeom prst="roundRect">
+            <a:avLst/>
+          </a:prstGeom>
+          <a:solidFill>
+            <a:srgbClr val="D4AF37"/>
+          </a:solidFill>
+          <a:ln>
+            <a:noFill/>
+          </a:ln>
+          <a:effectLst/>
+        </p:spPr>
+        <p:style>
+          <a:lnRef idx="1">
+            <a:schemeClr val="accent1"/>
+          </a:lnRef>
+          <a:fillRef idx="3">
+            <a:schemeClr val="accent1"/>
+          </a:fillRef>
+          <a:effectRef idx="2">
+            <a:schemeClr val="accent1"/>
+          </a:effectRef>
+          <a:fontRef idx="minor">
+            <a:schemeClr val="lt1"/>
+          </a:fontRef>
+        </p:style>
+        <p:txBody>
+          <a:bodyPr wrap="none" lIns="45720" tIns="0" rIns="45720" bIns="0" rtlCol="0" anchor="ctr"/>
+          <a:lstStyle/>
+          <a:p>
+            <a:pPr algn="ctr"/>
+            <a:r>
+              <a:rPr sz="1100" b="1">
+                <a:solidFill>
+                  <a:srgbClr val="141628"/>
+                </a:solidFill>
+                <a:latin typeface="Calibri"/>
+              </a:rPr>
+              <a:t>⏱ 3 min · ⌛23:00</a:t>
+            </a:r>
+          </a:p>
+        </p:txBody>
+      </p:sp>
+    </p:spTree>
+  </p:cSld>
+  <p:clrMapOvr>
+    <a:masterClrMapping/>
+  </p:clrMapOvr>
+</p:sld>
+</file>
+
+<file path=ppt/slides/slide12.xml><?xml version="1.0" encoding="utf-8"?>
+<p:sld xmlns:a="http://schemas.openxmlformats.org/drawingml/2006/main" xmlns:r="http://schemas.openxmlformats.org/officeDocument/2006/relationships" xmlns:p="http://schemas.openxmlformats.org/presentationml/2006/main">
   <p:cSld name="Slide 11">
     <p:bg>
       <p:bgPr>
         <a:solidFill>
           <a:srgbClr val="0F1C34"/>
         </a:solidFill>
+        <a:effectLst/>
       </p:bgPr>
     </p:bg>
     <p:spTree>
@@ -3168,11 +5161,11 @@
           <a:bodyPr wrap="square" lIns="0" tIns="0" rIns="0" bIns="0" rtlCol="0" anchor="ctr"/>
           <a:lstStyle/>
           <a:p>
-            <a:pPr indent="0" marL="0">
-              <a:buNone/>
-            </a:pPr>
-            <a:r>
-              <a:rPr lang="en-US" sz="800" b="1" spc="300" kern="0" dirty="0">
+            <a:pPr marL="0" indent="0">
+              <a:buNone/>
+            </a:pPr>
+            <a:r>
+              <a:rPr lang="en-US" sz="800" b="1" kern="0" spc="300" dirty="0">
                 <a:solidFill>
                   <a:srgbClr val="D4A84A"/>
                 </a:solidFill>
@@ -3207,7 +5200,7 @@
           <a:bodyPr wrap="square" lIns="0" tIns="0" rIns="0" bIns="0" rtlCol="0" anchor="ctr"/>
           <a:lstStyle/>
           <a:p>
-            <a:pPr algn="r" indent="0" marL="0">
+            <a:pPr marL="0" indent="0" algn="r">
               <a:buNone/>
             </a:pPr>
             <a:r>
@@ -3246,11 +5239,11 @@
           <a:bodyPr wrap="square" rtlCol="0" anchor="ctr"/>
           <a:lstStyle/>
           <a:p>
-            <a:pPr algn="ctr" indent="0" marL="0">
-              <a:buNone/>
-            </a:pPr>
-            <a:r>
-              <a:rPr lang="en-US" sz="1200" b="1" spc="400" kern="0" dirty="0">
+            <a:pPr marL="0" indent="0" algn="ctr">
+              <a:buNone/>
+            </a:pPr>
+            <a:r>
+              <a:rPr lang="en-US" sz="1200" b="1" kern="0" spc="400" dirty="0">
                 <a:solidFill>
                   <a:srgbClr val="D4A84A"/>
                 </a:solidFill>
@@ -3285,7 +5278,7 @@
           <a:bodyPr wrap="square" rtlCol="0" anchor="ctr"/>
           <a:lstStyle/>
           <a:p>
-            <a:pPr algn="ctr" indent="0" marL="0">
+            <a:pPr marL="0" indent="0" algn="ctr">
               <a:lnSpc>
                 <a:spcPct val="135000"/>
               </a:lnSpc>
@@ -3303,7 +5296,21 @@
               <a:t>"Isuko mo sa Dios ang iyong buhay;
 </a:t>
             </a:r>
-            <a:pPr algn="ctr" indent="0" marL="0">
+            <a:r>
+              <a:rPr lang="en-US" sz="3000" i="1" dirty="0">
+                <a:solidFill>
+                  <a:srgbClr val="D4A84A"/>
+                </a:solidFill>
+                <a:latin typeface="Georgia" pitchFamily="34" charset="0"/>
+                <a:ea typeface="Georgia" pitchFamily="34" charset="-122"/>
+                <a:cs typeface="Georgia" pitchFamily="34" charset="-120"/>
+              </a:rPr>
+              <a:t>mas marami Siyang magagawa riyan</a:t>
+            </a:r>
+            <a:endParaRPr lang="en-US" sz="3000" dirty="0"/>
+          </a:p>
+          <a:p>
+            <a:pPr marL="0" indent="0" algn="ctr">
               <a:lnSpc>
                 <a:spcPct val="135000"/>
               </a:lnSpc>
@@ -3312,38 +5319,12 @@
             <a:r>
               <a:rPr lang="en-US" sz="3000" i="1" dirty="0">
                 <a:solidFill>
-                  <a:srgbClr val="D4A84A"/>
+                  <a:srgbClr val="FFFFFF"/>
                 </a:solidFill>
                 <a:latin typeface="Georgia" pitchFamily="34" charset="0"/>
                 <a:ea typeface="Georgia" pitchFamily="34" charset="-122"/>
                 <a:cs typeface="Georgia" pitchFamily="34" charset="-120"/>
               </a:rPr>
-              <a:t>mas marami Siyang magagawa riyan</a:t>
-            </a:r>
-            <a:pPr algn="ctr" indent="0" marL="0">
-              <a:lnSpc>
-                <a:spcPct val="135000"/>
-              </a:lnSpc>
-              <a:buNone/>
-            </a:pPr>
-            <a:endParaRPr lang="en-US" sz="3000" dirty="0"/>
-          </a:p>
-          <a:p>
-            <a:pPr algn="ctr" indent="0" marL="0">
-              <a:lnSpc>
-                <a:spcPct val="135000"/>
-              </a:lnSpc>
-              <a:buNone/>
-            </a:pPr>
-            <a:r>
-              <a:rPr lang="en-US" sz="3000" i="1" dirty="0">
-                <a:solidFill>
-                  <a:srgbClr val="FFFFFF"/>
-                </a:solidFill>
-                <a:latin typeface="Georgia" pitchFamily="34" charset="0"/>
-                <a:ea typeface="Georgia" pitchFamily="34" charset="-122"/>
-                <a:cs typeface="Georgia" pitchFamily="34" charset="-120"/>
-              </a:rPr>
               <a:t>kesa sa'yo."</a:t>
             </a:r>
             <a:endParaRPr lang="en-US" sz="3000" dirty="0"/>
@@ -3371,11 +5352,11 @@
           <a:bodyPr wrap="square" rtlCol="0" anchor="ctr"/>
           <a:lstStyle/>
           <a:p>
-            <a:pPr algn="ctr" indent="0" marL="0">
-              <a:buNone/>
-            </a:pPr>
-            <a:r>
-              <a:rPr lang="en-US" sz="1400" b="1" spc="500" kern="0" dirty="0">
+            <a:pPr marL="0" indent="0" algn="ctr">
+              <a:buNone/>
+            </a:pPr>
+            <a:r>
+              <a:rPr lang="en-US" sz="1400" b="1" kern="0" spc="500" dirty="0">
                 <a:solidFill>
                   <a:srgbClr val="D4A84A"/>
                 </a:solidFill>
@@ -3410,7 +5391,7 @@
           <a:bodyPr wrap="square" rtlCol="0" anchor="ctr"/>
           <a:lstStyle/>
           <a:p>
-            <a:pPr algn="ctr" indent="0" marL="0">
+            <a:pPr marL="0" indent="0" algn="ctr">
               <a:buNone/>
             </a:pPr>
             <a:r>
@@ -3489,7 +5470,7 @@
 </p:sld>
 </file>
 
-<file path=ppt/slides/slide12.xml><?xml version="1.0" encoding="utf-8"?>
+<file path=ppt/slides/slide13.xml><?xml version="1.0" encoding="utf-8"?>
 <p:sld xmlns:a="http://schemas.openxmlformats.org/drawingml/2006/main" xmlns:r="http://schemas.openxmlformats.org/officeDocument/2006/relationships" xmlns:p="http://schemas.openxmlformats.org/presentationml/2006/main">
   <p:cSld name="Slide 12">
     <p:bg>
@@ -3497,6 +5478,7 @@
         <a:solidFill>
           <a:srgbClr val="0F1C34"/>
         </a:solidFill>
+        <a:effectLst/>
       </p:bgPr>
     </p:bg>
     <p:spTree>
@@ -3534,11 +5516,11 @@
           <a:bodyPr wrap="square" lIns="0" tIns="0" rIns="0" bIns="0" rtlCol="0" anchor="ctr"/>
           <a:lstStyle/>
           <a:p>
-            <a:pPr indent="0" marL="0">
-              <a:buNone/>
-            </a:pPr>
-            <a:r>
-              <a:rPr lang="en-US" sz="800" b="1" spc="300" kern="0" dirty="0">
+            <a:pPr marL="0" indent="0">
+              <a:buNone/>
+            </a:pPr>
+            <a:r>
+              <a:rPr lang="en-US" sz="800" b="1" kern="0" spc="300" dirty="0">
                 <a:solidFill>
                   <a:srgbClr val="D4A84A"/>
                 </a:solidFill>
@@ -3573,7 +5555,7 @@
           <a:bodyPr wrap="square" lIns="0" tIns="0" rIns="0" bIns="0" rtlCol="0" anchor="ctr"/>
           <a:lstStyle/>
           <a:p>
-            <a:pPr algn="r" indent="0" marL="0">
+            <a:pPr marL="0" indent="0" algn="r">
               <a:buNone/>
             </a:pPr>
             <a:r>
@@ -3612,11 +5594,11 @@
           <a:bodyPr wrap="square" rtlCol="0" anchor="ctr"/>
           <a:lstStyle/>
           <a:p>
-            <a:pPr algn="ctr" indent="0" marL="0">
-              <a:buNone/>
-            </a:pPr>
-            <a:r>
-              <a:rPr lang="en-US" sz="1100" b="1" spc="400" kern="0" dirty="0">
+            <a:pPr marL="0" indent="0" algn="ctr">
+              <a:buNone/>
+            </a:pPr>
+            <a:r>
+              <a:rPr lang="en-US" sz="1100" b="1" kern="0" spc="400" dirty="0">
                 <a:solidFill>
                   <a:srgbClr val="D4A84A"/>
                 </a:solidFill>
@@ -3651,11 +5633,11 @@
           <a:bodyPr wrap="square" rtlCol="0" anchor="ctr"/>
           <a:lstStyle/>
           <a:p>
-            <a:pPr algn="ctr" indent="0" marL="0">
-              <a:buNone/>
-            </a:pPr>
-            <a:r>
-              <a:rPr lang="en-US" sz="1100" b="1" spc="400" kern="0" dirty="0">
+            <a:pPr marL="0" indent="0" algn="ctr">
+              <a:buNone/>
+            </a:pPr>
+            <a:r>
+              <a:rPr lang="en-US" sz="1100" b="1" kern="0" spc="400" dirty="0">
                 <a:solidFill>
                   <a:srgbClr val="D4A84A"/>
                 </a:solidFill>
@@ -3690,7 +5672,7 @@
           <a:bodyPr wrap="square" rtlCol="0" anchor="ctr"/>
           <a:lstStyle/>
           <a:p>
-            <a:pPr algn="ctr" indent="0" marL="0">
+            <a:pPr marL="0" indent="0" algn="ctr">
               <a:buNone/>
             </a:pPr>
             <a:r>
@@ -3729,7 +5711,7 @@
           <a:bodyPr wrap="square" rtlCol="0" anchor="ctr"/>
           <a:lstStyle/>
           <a:p>
-            <a:pPr algn="ctr" indent="0" marL="0">
+            <a:pPr marL="0" indent="0" algn="ctr">
               <a:lnSpc>
                 <a:spcPct val="150000"/>
               </a:lnSpc>
@@ -3746,12 +5728,6 @@
               </a:rPr>
               <a:t>"Kaya nga, mga kapatid, </a:t>
             </a:r>
-            <a:pPr algn="ctr" indent="0" marL="0">
-              <a:lnSpc>
-                <a:spcPct val="150000"/>
-              </a:lnSpc>
-              <a:buNone/>
-            </a:pPr>
             <a:r>
               <a:rPr lang="en-US" sz="1800" b="1" i="1" dirty="0">
                 <a:solidFill>
@@ -3763,12 +5739,6 @@
               </a:rPr>
               <a:t>alang-alang sa masaganang habag ng Diyos sa atin,</a:t>
             </a:r>
-            <a:pPr algn="ctr" indent="0" marL="0">
-              <a:lnSpc>
-                <a:spcPct val="150000"/>
-              </a:lnSpc>
-              <a:buNone/>
-            </a:pPr>
             <a:r>
               <a:rPr lang="en-US" sz="1800" i="1" dirty="0">
                 <a:solidFill>
@@ -3780,12 +5750,6 @@
               </a:rPr>
               <a:t> ako'y nakikiusap sa inyo na </a:t>
             </a:r>
-            <a:pPr algn="ctr" indent="0" marL="0">
-              <a:lnSpc>
-                <a:spcPct val="150000"/>
-              </a:lnSpc>
-              <a:buNone/>
-            </a:pPr>
             <a:r>
               <a:rPr lang="en-US" sz="1800" b="1" i="1" dirty="0">
                 <a:solidFill>
@@ -3797,12 +5761,6 @@
               </a:rPr>
               <a:t>ialay ninyo ang inyong sarili bilang isang handog na buháy,</a:t>
             </a:r>
-            <a:pPr algn="ctr" indent="0" marL="0">
-              <a:lnSpc>
-                <a:spcPct val="150000"/>
-              </a:lnSpc>
-              <a:buNone/>
-            </a:pPr>
             <a:r>
               <a:rPr lang="en-US" sz="1800" i="1" dirty="0">
                 <a:solidFill>
@@ -3814,12 +5772,6 @@
               </a:rPr>
               <a:t> banal at </a:t>
             </a:r>
-            <a:pPr algn="ctr" indent="0" marL="0">
-              <a:lnSpc>
-                <a:spcPct val="150000"/>
-              </a:lnSpc>
-              <a:buNone/>
-            </a:pPr>
             <a:r>
               <a:rPr lang="en-US" sz="1800" b="1" i="1" dirty="0">
                 <a:solidFill>
@@ -3831,12 +5783,6 @@
               </a:rPr>
               <a:t>kalugud-lugod sa Diyos. Ito ang karapat-dapat na pagsamba.</a:t>
             </a:r>
-            <a:pPr algn="ctr" indent="0" marL="0">
-              <a:lnSpc>
-                <a:spcPct val="150000"/>
-              </a:lnSpc>
-              <a:buNone/>
-            </a:pPr>
             <a:r>
               <a:rPr lang="en-US" sz="1800" i="1" dirty="0">
                 <a:solidFill>
@@ -3913,7 +5859,7 @@
 </p:sld>
 </file>
 
-<file path=ppt/slides/slide13.xml><?xml version="1.0" encoding="utf-8"?>
+<file path=ppt/slides/slide14.xml><?xml version="1.0" encoding="utf-8"?>
 <p:sld xmlns:a="http://schemas.openxmlformats.org/drawingml/2006/main" xmlns:r="http://schemas.openxmlformats.org/officeDocument/2006/relationships" xmlns:p="http://schemas.openxmlformats.org/presentationml/2006/main">
   <p:cSld name="Slide 13">
     <p:bg>
@@ -3921,6 +5867,7 @@
         <a:solidFill>
           <a:srgbClr val="0F1C34"/>
         </a:solidFill>
+        <a:effectLst/>
       </p:bgPr>
     </p:bg>
     <p:spTree>
@@ -3958,11 +5905,11 @@
           <a:bodyPr wrap="square" lIns="0" tIns="0" rIns="0" bIns="0" rtlCol="0" anchor="ctr"/>
           <a:lstStyle/>
           <a:p>
-            <a:pPr indent="0" marL="0">
-              <a:buNone/>
-            </a:pPr>
-            <a:r>
-              <a:rPr lang="en-US" sz="800" b="1" spc="300" kern="0" dirty="0">
+            <a:pPr marL="0" indent="0">
+              <a:buNone/>
+            </a:pPr>
+            <a:r>
+              <a:rPr lang="en-US" sz="800" b="1" kern="0" spc="300" dirty="0">
                 <a:solidFill>
                   <a:srgbClr val="D4A84A"/>
                 </a:solidFill>
@@ -3997,7 +5944,7 @@
           <a:bodyPr wrap="square" lIns="0" tIns="0" rIns="0" bIns="0" rtlCol="0" anchor="ctr"/>
           <a:lstStyle/>
           <a:p>
-            <a:pPr algn="r" indent="0" marL="0">
+            <a:pPr marL="0" indent="0" algn="r">
               <a:buNone/>
             </a:pPr>
             <a:r>
@@ -4036,11 +5983,11 @@
           <a:bodyPr wrap="square" rtlCol="0" anchor="ctr"/>
           <a:lstStyle/>
           <a:p>
-            <a:pPr algn="ctr" indent="0" marL="0">
-              <a:buNone/>
-            </a:pPr>
-            <a:r>
-              <a:rPr lang="en-US" sz="1100" b="1" spc="400" kern="0" dirty="0">
+            <a:pPr marL="0" indent="0" algn="ctr">
+              <a:buNone/>
+            </a:pPr>
+            <a:r>
+              <a:rPr lang="en-US" sz="1100" b="1" kern="0" spc="400" dirty="0">
                 <a:solidFill>
                   <a:srgbClr val="D4A84A"/>
                 </a:solidFill>
@@ -4075,7 +6022,7 @@
           <a:bodyPr wrap="square" rtlCol="0" anchor="ctr"/>
           <a:lstStyle/>
           <a:p>
-            <a:pPr algn="ctr" indent="0" marL="0">
+            <a:pPr marL="0" indent="0" algn="ctr">
               <a:buNone/>
             </a:pPr>
             <a:r>
@@ -4114,7 +6061,7 @@
           <a:bodyPr wrap="square" rtlCol="0" anchor="ctr"/>
           <a:lstStyle/>
           <a:p>
-            <a:pPr algn="ctr" indent="0" marL="0">
+            <a:pPr marL="0" indent="0" algn="ctr">
               <a:buNone/>
             </a:pPr>
             <a:r>
@@ -4158,6 +6105,13 @@
             <a:prstDash val="solid"/>
           </a:ln>
         </p:spPr>
+        <p:txBody>
+          <a:bodyPr/>
+          <a:lstStyle/>
+          <a:p>
+            <a:endParaRPr lang="en-PH"/>
+          </a:p>
+        </p:txBody>
       </p:sp>
       <p:sp>
         <p:nvSpPr>
@@ -4183,6 +6137,13 @@
             <a:prstDash val="solid"/>
           </a:ln>
         </p:spPr>
+        <p:txBody>
+          <a:bodyPr/>
+          <a:lstStyle/>
+          <a:p>
+            <a:endParaRPr lang="en-PH"/>
+          </a:p>
+        </p:txBody>
       </p:sp>
       <p:sp>
         <p:nvSpPr>
@@ -4205,7 +6166,7 @@
           <a:bodyPr wrap="square" lIns="0" tIns="0" rIns="0" bIns="0" rtlCol="0" anchor="ctr"/>
           <a:lstStyle/>
           <a:p>
-            <a:pPr algn="ctr" indent="0" marL="0">
+            <a:pPr marL="0" indent="0" algn="ctr">
               <a:buNone/>
             </a:pPr>
             <a:r>
@@ -4244,7 +6205,7 @@
           <a:bodyPr wrap="square" lIns="0" tIns="0" rIns="0" bIns="0" rtlCol="0" anchor="t"/>
           <a:lstStyle/>
           <a:p>
-            <a:pPr algn="ctr" indent="0" marL="0">
+            <a:pPr marL="0" indent="0" algn="ctr">
               <a:lnSpc>
                 <a:spcPct val="115000"/>
               </a:lnSpc>
@@ -4264,7 +6225,7 @@
             <a:endParaRPr lang="en-US" sz="1400" dirty="0"/>
           </a:p>
           <a:p>
-            <a:pPr algn="ctr" indent="0" marL="0">
+            <a:pPr marL="0" indent="0" algn="ctr">
               <a:lnSpc>
                 <a:spcPct val="115000"/>
               </a:lnSpc>
@@ -4306,7 +6267,7 @@
           <a:bodyPr wrap="square" lIns="0" tIns="0" rIns="0" bIns="0" rtlCol="0" anchor="ctr"/>
           <a:lstStyle/>
           <a:p>
-            <a:pPr algn="ctr" indent="0" marL="0">
+            <a:pPr marL="0" indent="0" algn="ctr">
               <a:buNone/>
             </a:pPr>
             <a:r>
@@ -4345,7 +6306,7 @@
           <a:bodyPr wrap="square" lIns="0" tIns="0" rIns="0" bIns="0" rtlCol="0" anchor="t"/>
           <a:lstStyle/>
           <a:p>
-            <a:pPr algn="ctr" indent="0" marL="0">
+            <a:pPr marL="0" indent="0" algn="ctr">
               <a:lnSpc>
                 <a:spcPct val="135000"/>
               </a:lnSpc>
@@ -4362,36 +6323,30 @@
               </a:rPr>
               <a:t>Pundasyon</a:t>
             </a:r>
-            <a:pPr algn="ctr" indent="0" marL="0">
+            <a:r>
+              <a:rPr lang="en-US" sz="1000" dirty="0">
+                <a:solidFill>
+                  <a:srgbClr val="4A4640"/>
+                </a:solidFill>
+                <a:latin typeface="Calibri" pitchFamily="34" charset="0"/>
+                <a:ea typeface="Calibri" pitchFamily="34" charset="-122"/>
+                <a:cs typeface="Calibri" pitchFamily="34" charset="-120"/>
+              </a:rPr>
+              <a:t> — mercy already received.</a:t>
+            </a:r>
+            <a:endParaRPr lang="en-US" sz="1000" dirty="0"/>
+          </a:p>
+          <a:p>
+            <a:pPr marL="0" indent="0" algn="ctr">
               <a:lnSpc>
                 <a:spcPct val="135000"/>
               </a:lnSpc>
               <a:buNone/>
             </a:pPr>
-            <a:r>
-              <a:rPr lang="en-US" sz="1000" dirty="0">
-                <a:solidFill>
-                  <a:srgbClr val="4A4640"/>
-                </a:solidFill>
-                <a:latin typeface="Calibri" pitchFamily="34" charset="0"/>
-                <a:ea typeface="Calibri" pitchFamily="34" charset="-122"/>
-                <a:cs typeface="Calibri" pitchFamily="34" charset="-120"/>
-              </a:rPr>
-              <a:t> — mercy already received.</a:t>
-            </a:r>
             <a:endParaRPr lang="en-US" sz="1000" dirty="0"/>
           </a:p>
           <a:p>
-            <a:pPr algn="ctr" indent="0" marL="0">
-              <a:lnSpc>
-                <a:spcPct val="135000"/>
-              </a:lnSpc>
-              <a:buNone/>
-            </a:pPr>
-            <a:endParaRPr lang="en-US" sz="1000" dirty="0"/>
-          </a:p>
-          <a:p>
-            <a:pPr algn="ctr" indent="0" marL="0">
+            <a:pPr marL="0" indent="0" algn="ctr">
               <a:lnSpc>
                 <a:spcPct val="135000"/>
               </a:lnSpc>
@@ -4438,6 +6393,13 @@
             <a:prstDash val="solid"/>
           </a:ln>
         </p:spPr>
+        <p:txBody>
+          <a:bodyPr/>
+          <a:lstStyle/>
+          <a:p>
+            <a:endParaRPr lang="en-PH"/>
+          </a:p>
+        </p:txBody>
       </p:sp>
       <p:sp>
         <p:nvSpPr>
@@ -4463,6 +6425,13 @@
             <a:prstDash val="solid"/>
           </a:ln>
         </p:spPr>
+        <p:txBody>
+          <a:bodyPr/>
+          <a:lstStyle/>
+          <a:p>
+            <a:endParaRPr lang="en-PH"/>
+          </a:p>
+        </p:txBody>
       </p:sp>
       <p:sp>
         <p:nvSpPr>
@@ -4485,7 +6454,7 @@
           <a:bodyPr wrap="square" lIns="0" tIns="0" rIns="0" bIns="0" rtlCol="0" anchor="ctr"/>
           <a:lstStyle/>
           <a:p>
-            <a:pPr algn="ctr" indent="0" marL="0">
+            <a:pPr marL="0" indent="0" algn="ctr">
               <a:buNone/>
             </a:pPr>
             <a:r>
@@ -4524,7 +6493,7 @@
           <a:bodyPr wrap="square" lIns="0" tIns="0" rIns="0" bIns="0" rtlCol="0" anchor="t"/>
           <a:lstStyle/>
           <a:p>
-            <a:pPr algn="ctr" indent="0" marL="0">
+            <a:pPr marL="0" indent="0" algn="ctr">
               <a:lnSpc>
                 <a:spcPct val="115000"/>
               </a:lnSpc>
@@ -4544,7 +6513,7 @@
             <a:endParaRPr lang="en-US" sz="1400" dirty="0"/>
           </a:p>
           <a:p>
-            <a:pPr algn="ctr" indent="0" marL="0">
+            <a:pPr marL="0" indent="0" algn="ctr">
               <a:lnSpc>
                 <a:spcPct val="115000"/>
               </a:lnSpc>
@@ -4586,7 +6555,7 @@
           <a:bodyPr wrap="square" lIns="0" tIns="0" rIns="0" bIns="0" rtlCol="0" anchor="ctr"/>
           <a:lstStyle/>
           <a:p>
-            <a:pPr algn="ctr" indent="0" marL="0">
+            <a:pPr marL="0" indent="0" algn="ctr">
               <a:buNone/>
             </a:pPr>
             <a:r>
@@ -4625,7 +6594,7 @@
           <a:bodyPr wrap="square" lIns="0" tIns="0" rIns="0" bIns="0" rtlCol="0" anchor="t"/>
           <a:lstStyle/>
           <a:p>
-            <a:pPr algn="ctr" indent="0" marL="0">
+            <a:pPr marL="0" indent="0" algn="ctr">
               <a:lnSpc>
                 <a:spcPct val="135000"/>
               </a:lnSpc>
@@ -4642,36 +6611,30 @@
               </a:rPr>
               <a:t>Tugon</a:t>
             </a:r>
-            <a:pPr algn="ctr" indent="0" marL="0">
+            <a:r>
+              <a:rPr lang="en-US" sz="1000" dirty="0">
+                <a:solidFill>
+                  <a:srgbClr val="4A4640"/>
+                </a:solidFill>
+                <a:latin typeface="Calibri" pitchFamily="34" charset="0"/>
+                <a:ea typeface="Calibri" pitchFamily="34" charset="-122"/>
+                <a:cs typeface="Calibri" pitchFamily="34" charset="-120"/>
+              </a:rPr>
+              <a:t> — hindi 50-50. Buong-buo.</a:t>
+            </a:r>
+            <a:endParaRPr lang="en-US" sz="1000" dirty="0"/>
+          </a:p>
+          <a:p>
+            <a:pPr marL="0" indent="0" algn="ctr">
               <a:lnSpc>
                 <a:spcPct val="135000"/>
               </a:lnSpc>
               <a:buNone/>
             </a:pPr>
-            <a:r>
-              <a:rPr lang="en-US" sz="1000" dirty="0">
-                <a:solidFill>
-                  <a:srgbClr val="4A4640"/>
-                </a:solidFill>
-                <a:latin typeface="Calibri" pitchFamily="34" charset="0"/>
-                <a:ea typeface="Calibri" pitchFamily="34" charset="-122"/>
-                <a:cs typeface="Calibri" pitchFamily="34" charset="-120"/>
-              </a:rPr>
-              <a:t> — hindi 50-50. Buong-buo.</a:t>
-            </a:r>
             <a:endParaRPr lang="en-US" sz="1000" dirty="0"/>
           </a:p>
           <a:p>
-            <a:pPr algn="ctr" indent="0" marL="0">
-              <a:lnSpc>
-                <a:spcPct val="135000"/>
-              </a:lnSpc>
-              <a:buNone/>
-            </a:pPr>
-            <a:endParaRPr lang="en-US" sz="1000" dirty="0"/>
-          </a:p>
-          <a:p>
-            <a:pPr algn="ctr" indent="0" marL="0">
+            <a:pPr marL="0" indent="0" algn="ctr">
               <a:lnSpc>
                 <a:spcPct val="135000"/>
               </a:lnSpc>
@@ -4718,6 +6681,13 @@
             <a:prstDash val="solid"/>
           </a:ln>
         </p:spPr>
+        <p:txBody>
+          <a:bodyPr/>
+          <a:lstStyle/>
+          <a:p>
+            <a:endParaRPr lang="en-PH"/>
+          </a:p>
+        </p:txBody>
       </p:sp>
       <p:sp>
         <p:nvSpPr>
@@ -4743,6 +6713,13 @@
             <a:prstDash val="solid"/>
           </a:ln>
         </p:spPr>
+        <p:txBody>
+          <a:bodyPr/>
+          <a:lstStyle/>
+          <a:p>
+            <a:endParaRPr lang="en-PH"/>
+          </a:p>
+        </p:txBody>
       </p:sp>
       <p:sp>
         <p:nvSpPr>
@@ -4765,7 +6742,7 @@
           <a:bodyPr wrap="square" lIns="0" tIns="0" rIns="0" bIns="0" rtlCol="0" anchor="ctr"/>
           <a:lstStyle/>
           <a:p>
-            <a:pPr algn="ctr" indent="0" marL="0">
+            <a:pPr marL="0" indent="0" algn="ctr">
               <a:buNone/>
             </a:pPr>
             <a:r>
@@ -4804,7 +6781,7 @@
           <a:bodyPr wrap="square" lIns="0" tIns="0" rIns="0" bIns="0" rtlCol="0" anchor="t"/>
           <a:lstStyle/>
           <a:p>
-            <a:pPr algn="ctr" indent="0" marL="0">
+            <a:pPr marL="0" indent="0" algn="ctr">
               <a:lnSpc>
                 <a:spcPct val="115000"/>
               </a:lnSpc>
@@ -4824,7 +6801,7 @@
             <a:endParaRPr lang="en-US" sz="1400" dirty="0"/>
           </a:p>
           <a:p>
-            <a:pPr algn="ctr" indent="0" marL="0">
+            <a:pPr marL="0" indent="0" algn="ctr">
               <a:lnSpc>
                 <a:spcPct val="115000"/>
               </a:lnSpc>
@@ -4866,7 +6843,7 @@
           <a:bodyPr wrap="square" lIns="0" tIns="0" rIns="0" bIns="0" rtlCol="0" anchor="ctr"/>
           <a:lstStyle/>
           <a:p>
-            <a:pPr algn="ctr" indent="0" marL="0">
+            <a:pPr marL="0" indent="0" algn="ctr">
               <a:buNone/>
             </a:pPr>
             <a:r>
@@ -4905,7 +6882,7 @@
           <a:bodyPr wrap="square" lIns="0" tIns="0" rIns="0" bIns="0" rtlCol="0" anchor="t"/>
           <a:lstStyle/>
           <a:p>
-            <a:pPr algn="ctr" indent="0" marL="0">
+            <a:pPr marL="0" indent="0" algn="ctr">
               <a:lnSpc>
                 <a:spcPct val="135000"/>
               </a:lnSpc>
@@ -4922,36 +6899,30 @@
               </a:rPr>
               <a:t>Bunga</a:t>
             </a:r>
-            <a:pPr algn="ctr" indent="0" marL="0">
+            <a:r>
+              <a:rPr lang="en-US" sz="1000" dirty="0">
+                <a:solidFill>
+                  <a:srgbClr val="4A4640"/>
+                </a:solidFill>
+                <a:latin typeface="Calibri" pitchFamily="34" charset="0"/>
+                <a:ea typeface="Calibri" pitchFamily="34" charset="-122"/>
+                <a:cs typeface="Calibri" pitchFamily="34" charset="-120"/>
+              </a:rPr>
+              <a:t> — buong buhay = worship.</a:t>
+            </a:r>
+            <a:endParaRPr lang="en-US" sz="1000" dirty="0"/>
+          </a:p>
+          <a:p>
+            <a:pPr marL="0" indent="0" algn="ctr">
               <a:lnSpc>
                 <a:spcPct val="135000"/>
               </a:lnSpc>
               <a:buNone/>
             </a:pPr>
-            <a:r>
-              <a:rPr lang="en-US" sz="1000" dirty="0">
-                <a:solidFill>
-                  <a:srgbClr val="4A4640"/>
-                </a:solidFill>
-                <a:latin typeface="Calibri" pitchFamily="34" charset="0"/>
-                <a:ea typeface="Calibri" pitchFamily="34" charset="-122"/>
-                <a:cs typeface="Calibri" pitchFamily="34" charset="-120"/>
-              </a:rPr>
-              <a:t> — buong buhay = worship.</a:t>
-            </a:r>
             <a:endParaRPr lang="en-US" sz="1000" dirty="0"/>
           </a:p>
           <a:p>
-            <a:pPr algn="ctr" indent="0" marL="0">
-              <a:lnSpc>
-                <a:spcPct val="135000"/>
-              </a:lnSpc>
-              <a:buNone/>
-            </a:pPr>
-            <a:endParaRPr lang="en-US" sz="1000" dirty="0"/>
-          </a:p>
-          <a:p>
-            <a:pPr algn="ctr" indent="0" marL="0">
+            <a:pPr marL="0" indent="0" algn="ctr">
               <a:lnSpc>
                 <a:spcPct val="135000"/>
               </a:lnSpc>
@@ -5033,7 +7004,7 @@
 </p:sld>
 </file>
 
-<file path=ppt/slides/slide14.xml><?xml version="1.0" encoding="utf-8"?>
+<file path=ppt/slides/slide15.xml><?xml version="1.0" encoding="utf-8"?>
 <p:sld xmlns:a="http://schemas.openxmlformats.org/drawingml/2006/main" xmlns:r="http://schemas.openxmlformats.org/officeDocument/2006/relationships" xmlns:p="http://schemas.openxmlformats.org/presentationml/2006/main">
   <p:cSld name="Slide 14">
     <p:bg>
@@ -5041,6 +7012,7 @@
         <a:solidFill>
           <a:srgbClr val="FFF4E0"/>
         </a:solidFill>
+        <a:effectLst/>
       </p:bgPr>
     </p:bg>
     <p:spTree>
@@ -5078,11 +7050,11 @@
           <a:bodyPr wrap="square" lIns="0" tIns="0" rIns="0" bIns="0" rtlCol="0" anchor="ctr"/>
           <a:lstStyle/>
           <a:p>
-            <a:pPr indent="0" marL="0">
-              <a:buNone/>
-            </a:pPr>
-            <a:r>
-              <a:rPr lang="en-US" sz="800" b="1" spc="300" kern="0" dirty="0">
+            <a:pPr marL="0" indent="0">
+              <a:buNone/>
+            </a:pPr>
+            <a:r>
+              <a:rPr lang="en-US" sz="800" b="1" kern="0" spc="300" dirty="0">
                 <a:solidFill>
                   <a:srgbClr val="666666"/>
                 </a:solidFill>
@@ -5117,7 +7089,7 @@
           <a:bodyPr wrap="square" lIns="0" tIns="0" rIns="0" bIns="0" rtlCol="0" anchor="ctr"/>
           <a:lstStyle/>
           <a:p>
-            <a:pPr algn="r" indent="0" marL="0">
+            <a:pPr marL="0" indent="0" algn="r">
               <a:buNone/>
             </a:pPr>
             <a:r>
@@ -5156,11 +7128,11 @@
           <a:bodyPr wrap="square" rtlCol="0" anchor="ctr"/>
           <a:lstStyle/>
           <a:p>
-            <a:pPr algn="ctr" indent="0" marL="0">
-              <a:buNone/>
-            </a:pPr>
-            <a:r>
-              <a:rPr lang="en-US" sz="1200" b="1" spc="400" kern="0" dirty="0">
+            <a:pPr marL="0" indent="0" algn="ctr">
+              <a:buNone/>
+            </a:pPr>
+            <a:r>
+              <a:rPr lang="en-US" sz="1200" b="1" kern="0" spc="400" dirty="0">
                 <a:solidFill>
                   <a:srgbClr val="C97A1A"/>
                 </a:solidFill>
@@ -5195,7 +7167,7 @@
           <a:bodyPr wrap="square" rtlCol="0" anchor="t"/>
           <a:lstStyle/>
           <a:p>
-            <a:pPr algn="ctr" indent="0" marL="0">
+            <a:pPr marL="0" indent="0" algn="ctr">
               <a:lnSpc>
                 <a:spcPct val="150000"/>
               </a:lnSpc>
@@ -5212,7 +7184,21 @@
               </a:rPr>
               <a:t>Minsan may isang batang babae na nagtanong sa kanyang Sunday School teacher kung ano ba ang ibig sabihin ng pagsuko.</a:t>
             </a:r>
-            <a:pPr algn="ctr" indent="0" marL="0">
+            <a:r>
+              <a:rPr lang="en-US" sz="1600" i="1" dirty="0">
+                <a:solidFill>
+                  <a:srgbClr val="000000"/>
+                </a:solidFill>
+                <a:latin typeface="Georgia" pitchFamily="34" charset="0"/>
+                <a:ea typeface="Georgia" pitchFamily="34" charset="-122"/>
+                <a:cs typeface="Georgia" pitchFamily="34" charset="-120"/>
+              </a:rPr>
+              <a:t> </a:t>
+            </a:r>
+            <a:endParaRPr lang="en-US" sz="1600" dirty="0"/>
+          </a:p>
+          <a:p>
+            <a:pPr marL="0" indent="0" algn="ctr">
               <a:lnSpc>
                 <a:spcPct val="150000"/>
               </a:lnSpc>
@@ -5232,7 +7218,7 @@
             <a:endParaRPr lang="en-US" sz="1600" dirty="0"/>
           </a:p>
           <a:p>
-            <a:pPr algn="ctr" indent="0" marL="0">
+            <a:pPr marL="0" indent="0" algn="ctr">
               <a:lnSpc>
                 <a:spcPct val="150000"/>
               </a:lnSpc>
@@ -5241,49 +7227,23 @@
             <a:r>
               <a:rPr lang="en-US" sz="1600" i="1" dirty="0">
                 <a:solidFill>
-                  <a:srgbClr val="000000"/>
+                  <a:srgbClr val="4A3A18"/>
                 </a:solidFill>
                 <a:latin typeface="Georgia" pitchFamily="34" charset="0"/>
                 <a:ea typeface="Georgia" pitchFamily="34" charset="-122"/>
                 <a:cs typeface="Georgia" pitchFamily="34" charset="-120"/>
               </a:rPr>
-              <a:t> </a:t>
-            </a:r>
-            <a:endParaRPr lang="en-US" sz="1600" dirty="0"/>
-          </a:p>
-          <a:p>
-            <a:pPr algn="ctr" indent="0" marL="0">
-              <a:lnSpc>
-                <a:spcPct val="150000"/>
-              </a:lnSpc>
-              <a:buNone/>
-            </a:pPr>
-            <a:r>
-              <a:rPr lang="en-US" sz="1600" i="1" dirty="0">
-                <a:solidFill>
-                  <a:srgbClr val="4A3A18"/>
+              <a:t>Kumuha ang teacher ng </a:t>
+            </a:r>
+            <a:r>
+              <a:rPr lang="en-US" sz="1600" b="1" i="1" dirty="0">
+                <a:solidFill>
+                  <a:srgbClr val="C97A1A"/>
                 </a:solidFill>
                 <a:latin typeface="Georgia" pitchFamily="34" charset="0"/>
                 <a:ea typeface="Georgia" pitchFamily="34" charset="-122"/>
                 <a:cs typeface="Georgia" pitchFamily="34" charset="-120"/>
               </a:rPr>
-              <a:t>Kumuha ang teacher ng </a:t>
-            </a:r>
-            <a:pPr algn="ctr" indent="0" marL="0">
-              <a:lnSpc>
-                <a:spcPct val="150000"/>
-              </a:lnSpc>
-              <a:buNone/>
-            </a:pPr>
-            <a:r>
-              <a:rPr lang="en-US" sz="1600" b="1" i="1" dirty="0">
-                <a:solidFill>
-                  <a:srgbClr val="C97A1A"/>
-                </a:solidFill>
-                <a:latin typeface="Georgia" pitchFamily="34" charset="0"/>
-                <a:ea typeface="Georgia" pitchFamily="34" charset="-122"/>
-                <a:cs typeface="Georgia" pitchFamily="34" charset="-120"/>
-              </a:rPr>
               <a:t>blangkong papel.</a:t>
             </a:r>
             <a:endParaRPr lang="en-US" sz="1600" dirty="0"/>
@@ -5311,7 +7271,7 @@
           <a:bodyPr wrap="square" rtlCol="0" anchor="ctr"/>
           <a:lstStyle/>
           <a:p>
-            <a:pPr algn="ctr" indent="0" marL="0">
+            <a:pPr marL="0" indent="0" algn="ctr">
               <a:lnSpc>
                 <a:spcPct val="135000"/>
               </a:lnSpc>
@@ -5332,12 +7292,6 @@
 ng gusto Niyang isulat dito —
 </a:t>
             </a:r>
-            <a:pPr algn="ctr" indent="0" marL="0">
-              <a:lnSpc>
-                <a:spcPct val="135000"/>
-              </a:lnSpc>
-              <a:buNone/>
-            </a:pPr>
             <a:r>
               <a:rPr lang="en-US" sz="2200" b="1" i="1" dirty="0">
                 <a:solidFill>
@@ -5414,7 +7368,7 @@
 </p:sld>
 </file>
 
-<file path=ppt/slides/slide15.xml><?xml version="1.0" encoding="utf-8"?>
+<file path=ppt/slides/slide16.xml><?xml version="1.0" encoding="utf-8"?>
 <p:sld xmlns:a="http://schemas.openxmlformats.org/drawingml/2006/main" xmlns:r="http://schemas.openxmlformats.org/officeDocument/2006/relationships" xmlns:p="http://schemas.openxmlformats.org/presentationml/2006/main">
   <p:cSld name="Slide 15">
     <p:bg>
@@ -5422,6 +7376,7 @@
         <a:solidFill>
           <a:srgbClr val="FFF4E0"/>
         </a:solidFill>
+        <a:effectLst/>
       </p:bgPr>
     </p:bg>
     <p:spTree>
@@ -5459,11 +7414,11 @@
           <a:bodyPr wrap="square" lIns="0" tIns="0" rIns="0" bIns="0" rtlCol="0" anchor="ctr"/>
           <a:lstStyle/>
           <a:p>
-            <a:pPr indent="0" marL="0">
-              <a:buNone/>
-            </a:pPr>
-            <a:r>
-              <a:rPr lang="en-US" sz="800" b="1" spc="300" kern="0" dirty="0">
+            <a:pPr marL="0" indent="0">
+              <a:buNone/>
+            </a:pPr>
+            <a:r>
+              <a:rPr lang="en-US" sz="800" b="1" kern="0" spc="300" dirty="0">
                 <a:solidFill>
                   <a:srgbClr val="666666"/>
                 </a:solidFill>
@@ -5498,7 +7453,7 @@
           <a:bodyPr wrap="square" lIns="0" tIns="0" rIns="0" bIns="0" rtlCol="0" anchor="ctr"/>
           <a:lstStyle/>
           <a:p>
-            <a:pPr algn="r" indent="0" marL="0">
+            <a:pPr marL="0" indent="0" algn="r">
               <a:buNone/>
             </a:pPr>
             <a:r>
@@ -5537,11 +7492,11 @@
           <a:bodyPr wrap="square" rtlCol="0" anchor="ctr"/>
           <a:lstStyle/>
           <a:p>
-            <a:pPr algn="ctr" indent="0" marL="0">
-              <a:buNone/>
-            </a:pPr>
-            <a:r>
-              <a:rPr lang="en-US" sz="1200" b="1" spc="400" kern="0" dirty="0">
+            <a:pPr marL="0" indent="0" algn="ctr">
+              <a:buNone/>
+            </a:pPr>
+            <a:r>
+              <a:rPr lang="en-US" sz="1200" b="1" kern="0" spc="400" dirty="0">
                 <a:solidFill>
                   <a:srgbClr val="C97A1A"/>
                 </a:solidFill>
@@ -5576,11 +7531,11 @@
           <a:bodyPr wrap="square" rtlCol="0" anchor="ctr"/>
           <a:lstStyle/>
           <a:p>
-            <a:pPr algn="ctr" indent="0" marL="0">
-              <a:buNone/>
-            </a:pPr>
-            <a:r>
-              <a:rPr lang="en-US" sz="1100" b="1" spc="400" kern="0" dirty="0">
+            <a:pPr marL="0" indent="0" algn="ctr">
+              <a:buNone/>
+            </a:pPr>
+            <a:r>
+              <a:rPr lang="en-US" sz="1100" b="1" kern="0" spc="400" dirty="0">
                 <a:solidFill>
                   <a:srgbClr val="C97A1A"/>
                 </a:solidFill>
@@ -5620,6 +7575,13 @@
             <a:prstDash val="solid"/>
           </a:ln>
         </p:spPr>
+        <p:txBody>
+          <a:bodyPr/>
+          <a:lstStyle/>
+          <a:p>
+            <a:endParaRPr lang="en-PH"/>
+          </a:p>
+        </p:txBody>
       </p:sp>
       <p:sp>
         <p:nvSpPr>
@@ -5647,6 +7609,13 @@
             <a:prstDash val="dash"/>
           </a:ln>
         </p:spPr>
+        <p:txBody>
+          <a:bodyPr/>
+          <a:lstStyle/>
+          <a:p>
+            <a:endParaRPr lang="en-PH"/>
+          </a:p>
+        </p:txBody>
       </p:sp>
       <p:sp>
         <p:nvSpPr>
@@ -5669,7 +7638,7 @@
           <a:bodyPr wrap="square" lIns="0" tIns="0" rIns="0" bIns="0" rtlCol="0" anchor="ctr"/>
           <a:lstStyle/>
           <a:p>
-            <a:pPr algn="ctr" indent="0" marL="0">
+            <a:pPr marL="0" indent="0" algn="ctr">
               <a:lnSpc>
                 <a:spcPct val="145000"/>
               </a:lnSpc>
@@ -5689,7 +7658,7 @@
             <a:endParaRPr lang="en-US" sz="1700" dirty="0"/>
           </a:p>
           <a:p>
-            <a:pPr algn="ctr" indent="0" marL="0">
+            <a:pPr marL="0" indent="0" algn="ctr">
               <a:lnSpc>
                 <a:spcPct val="145000"/>
               </a:lnSpc>
@@ -5709,7 +7678,7 @@
             <a:endParaRPr lang="en-US" sz="1700" dirty="0"/>
           </a:p>
           <a:p>
-            <a:pPr algn="ctr" indent="0" marL="0">
+            <a:pPr marL="0" indent="0" algn="ctr">
               <a:lnSpc>
                 <a:spcPct val="145000"/>
               </a:lnSpc>
@@ -5752,6 +7721,13 @@
             <a:prstDash val="solid"/>
           </a:ln>
         </p:spPr>
+        <p:txBody>
+          <a:bodyPr/>
+          <a:lstStyle/>
+          <a:p>
+            <a:endParaRPr lang="en-PH"/>
+          </a:p>
+        </p:txBody>
       </p:sp>
       <p:sp>
         <p:nvSpPr>
@@ -5774,11 +7750,11 @@
           <a:bodyPr wrap="square" lIns="0" tIns="0" rIns="0" bIns="0" rtlCol="0" anchor="ctr"/>
           <a:lstStyle/>
           <a:p>
-            <a:pPr algn="ctr" indent="0" marL="0">
-              <a:buNone/>
-            </a:pPr>
-            <a:r>
-              <a:rPr lang="en-US" sz="1000" b="1" spc="400" kern="0" dirty="0">
+            <a:pPr marL="0" indent="0" algn="ctr">
+              <a:buNone/>
+            </a:pPr>
+            <a:r>
+              <a:rPr lang="en-US" sz="1000" b="1" kern="0" spc="400" dirty="0">
                 <a:solidFill>
                   <a:srgbClr val="7A6540"/>
                 </a:solidFill>
@@ -5813,7 +7789,7 @@
           <a:bodyPr wrap="square" rtlCol="0" anchor="ctr"/>
           <a:lstStyle/>
           <a:p>
-            <a:pPr algn="ctr" indent="0" marL="0">
+            <a:pPr marL="0" indent="0" algn="ctr">
               <a:buNone/>
             </a:pPr>
             <a:r>
@@ -5827,9 +7803,6 @@
               </a:rPr>
               <a:t>Fold the paper. Place in your Bible at </a:t>
             </a:r>
-            <a:pPr algn="ctr" indent="0" marL="0">
-              <a:buNone/>
-            </a:pPr>
             <a:r>
               <a:rPr lang="en-US" sz="1200" b="1" i="1" dirty="0">
                 <a:solidFill>
@@ -5841,9 +7814,6 @@
               </a:rPr>
               <a:t>Roma 12:1.</a:t>
             </a:r>
-            <a:pPr algn="ctr" indent="0" marL="0">
-              <a:buNone/>
-            </a:pPr>
             <a:r>
               <a:rPr lang="en-US" sz="1200" i="1" dirty="0">
                 <a:solidFill>
@@ -5920,7 +7890,7 @@
 </p:sld>
 </file>
 
-<file path=ppt/slides/slide16.xml><?xml version="1.0" encoding="utf-8"?>
+<file path=ppt/slides/slide17.xml><?xml version="1.0" encoding="utf-8"?>
 <p:sld xmlns:a="http://schemas.openxmlformats.org/drawingml/2006/main" xmlns:r="http://schemas.openxmlformats.org/officeDocument/2006/relationships" xmlns:p="http://schemas.openxmlformats.org/presentationml/2006/main">
   <p:cSld name="Slide 16">
     <p:bg>
@@ -5928,6 +7898,7 @@
         <a:solidFill>
           <a:srgbClr val="0F1C34"/>
         </a:solidFill>
+        <a:effectLst/>
       </p:bgPr>
     </p:bg>
     <p:spTree>
@@ -5965,11 +7936,11 @@
           <a:bodyPr wrap="square" lIns="0" tIns="0" rIns="0" bIns="0" rtlCol="0" anchor="ctr"/>
           <a:lstStyle/>
           <a:p>
-            <a:pPr indent="0" marL="0">
-              <a:buNone/>
-            </a:pPr>
-            <a:r>
-              <a:rPr lang="en-US" sz="800" b="1" spc="300" kern="0" dirty="0">
+            <a:pPr marL="0" indent="0">
+              <a:buNone/>
+            </a:pPr>
+            <a:r>
+              <a:rPr lang="en-US" sz="800" b="1" kern="0" spc="300" dirty="0">
                 <a:solidFill>
                   <a:srgbClr val="D4A84A"/>
                 </a:solidFill>
@@ -6004,7 +7975,7 @@
           <a:bodyPr wrap="square" lIns="0" tIns="0" rIns="0" bIns="0" rtlCol="0" anchor="ctr"/>
           <a:lstStyle/>
           <a:p>
-            <a:pPr algn="r" indent="0" marL="0">
+            <a:pPr marL="0" indent="0" algn="r">
               <a:buNone/>
             </a:pPr>
             <a:r>
@@ -6043,11 +8014,11 @@
           <a:bodyPr wrap="square" rtlCol="0" anchor="ctr"/>
           <a:lstStyle/>
           <a:p>
-            <a:pPr algn="ctr" indent="0" marL="0">
-              <a:buNone/>
-            </a:pPr>
-            <a:r>
-              <a:rPr lang="en-US" sz="1100" b="1" spc="400" kern="0" dirty="0">
+            <a:pPr marL="0" indent="0" algn="ctr">
+              <a:buNone/>
+            </a:pPr>
+            <a:r>
+              <a:rPr lang="en-US" sz="1100" b="1" kern="0" spc="400" dirty="0">
                 <a:solidFill>
                   <a:srgbClr val="D4A84A"/>
                 </a:solidFill>
@@ -6082,7 +8053,7 @@
           <a:bodyPr wrap="square" rtlCol="0" anchor="ctr"/>
           <a:lstStyle/>
           <a:p>
-            <a:pPr algn="ctr" indent="0" marL="0">
+            <a:pPr marL="0" indent="0" algn="ctr">
               <a:buNone/>
             </a:pPr>
             <a:r>
@@ -6093,6 +8064,7 @@
                 <a:latin typeface="Georgia" pitchFamily="34" charset="0"/>
                 <a:ea typeface="Georgia" pitchFamily="34" charset="-122"/>
                 <a:cs typeface="Georgia" pitchFamily="34" charset="-120"/>
+                <a:hlinkClick r:id="rId3"/>
               </a:rPr>
               <a:t>I Surrender All</a:t>
             </a:r>
@@ -6121,7 +8093,7 @@
           <a:bodyPr wrap="square" rtlCol="0" anchor="ctr"/>
           <a:lstStyle/>
           <a:p>
-            <a:pPr algn="ctr" indent="0" marL="0">
+            <a:pPr marL="0" indent="0" algn="ctr">
               <a:buNone/>
             </a:pPr>
             <a:r>
@@ -6160,7 +8132,7 @@
           <a:bodyPr wrap="square" rtlCol="0" anchor="ctr"/>
           <a:lstStyle/>
           <a:p>
-            <a:pPr algn="ctr" indent="0" marL="0">
+            <a:pPr marL="0" indent="0" algn="ctr">
               <a:lnSpc>
                 <a:spcPct val="145000"/>
               </a:lnSpc>
@@ -6177,7 +8149,21 @@
               </a:rPr>
               <a:t>I surrender all,</a:t>
             </a:r>
-            <a:pPr algn="ctr" indent="0" marL="0">
+            <a:r>
+              <a:rPr lang="en-US" sz="2200" i="1" dirty="0">
+                <a:solidFill>
+                  <a:srgbClr val="FFFFFF"/>
+                </a:solidFill>
+                <a:latin typeface="Georgia" pitchFamily="34" charset="0"/>
+                <a:ea typeface="Georgia" pitchFamily="34" charset="-122"/>
+                <a:cs typeface="Georgia" pitchFamily="34" charset="-120"/>
+              </a:rPr>
+              <a:t> I surrender all,</a:t>
+            </a:r>
+            <a:endParaRPr lang="en-US" sz="2200" dirty="0"/>
+          </a:p>
+          <a:p>
+            <a:pPr marL="0" indent="0" algn="ctr">
               <a:lnSpc>
                 <a:spcPct val="145000"/>
               </a:lnSpc>
@@ -6192,46 +8178,26 @@
                 <a:ea typeface="Georgia" pitchFamily="34" charset="-122"/>
                 <a:cs typeface="Georgia" pitchFamily="34" charset="-120"/>
               </a:rPr>
-              <a:t> I surrender all,</a:t>
+              <a:t>All to Thee, my blessed Savior,</a:t>
             </a:r>
             <a:endParaRPr lang="en-US" sz="2200" dirty="0"/>
           </a:p>
           <a:p>
-            <a:pPr algn="ctr" indent="0" marL="0">
+            <a:pPr marL="0" indent="0" algn="ctr">
               <a:lnSpc>
                 <a:spcPct val="145000"/>
               </a:lnSpc>
               <a:buNone/>
             </a:pPr>
             <a:r>
-              <a:rPr lang="en-US" sz="2200" i="1" dirty="0">
-                <a:solidFill>
-                  <a:srgbClr val="FFFFFF"/>
+              <a:rPr lang="en-US" sz="2200" b="1" i="1" dirty="0">
+                <a:solidFill>
+                  <a:srgbClr val="F5D97A"/>
                 </a:solidFill>
                 <a:latin typeface="Georgia" pitchFamily="34" charset="0"/>
                 <a:ea typeface="Georgia" pitchFamily="34" charset="-122"/>
                 <a:cs typeface="Georgia" pitchFamily="34" charset="-120"/>
               </a:rPr>
-              <a:t>All to Thee, my blessed Savior,</a:t>
-            </a:r>
-            <a:endParaRPr lang="en-US" sz="2200" dirty="0"/>
-          </a:p>
-          <a:p>
-            <a:pPr algn="ctr" indent="0" marL="0">
-              <a:lnSpc>
-                <a:spcPct val="145000"/>
-              </a:lnSpc>
-              <a:buNone/>
-            </a:pPr>
-            <a:r>
-              <a:rPr lang="en-US" sz="2200" b="1" i="1" dirty="0">
-                <a:solidFill>
-                  <a:srgbClr val="F5D97A"/>
-                </a:solidFill>
-                <a:latin typeface="Georgia" pitchFamily="34" charset="0"/>
-                <a:ea typeface="Georgia" pitchFamily="34" charset="-122"/>
-                <a:cs typeface="Georgia" pitchFamily="34" charset="-120"/>
-              </a:rPr>
               <a:t>I surrender all.</a:t>
             </a:r>
             <a:endParaRPr lang="en-US" sz="2200" dirty="0"/>
@@ -6259,7 +8225,7 @@
           <a:bodyPr wrap="square" rtlCol="0" anchor="ctr"/>
           <a:lstStyle/>
           <a:p>
-            <a:pPr algn="ctr" indent="0" marL="0">
+            <a:pPr marL="0" indent="0" algn="ctr">
               <a:buNone/>
             </a:pPr>
             <a:r>
@@ -6338,7 +8304,348 @@
 </p:sld>
 </file>
 
-<file path=ppt/slides/slide17.xml><?xml version="1.0" encoding="utf-8"?>
+<file path=ppt/slides/slide18.xml><?xml version="1.0" encoding="utf-8"?>
+<p:sld xmlns:a="http://schemas.openxmlformats.org/drawingml/2006/main" xmlns:r="http://schemas.openxmlformats.org/officeDocument/2006/relationships" xmlns:p="http://schemas.openxmlformats.org/presentationml/2006/main">
+  <p:cSld>
+    <p:spTree>
+      <p:nvGrpSpPr>
+        <p:cNvPr id="1" name=""/>
+        <p:cNvGrpSpPr/>
+        <p:nvPr/>
+      </p:nvGrpSpPr>
+      <p:grpSpPr>
+        <a:xfrm>
+          <a:off x="0" y="0"/>
+          <a:ext cx="0" cy="0"/>
+          <a:chOff x="0" y="0"/>
+          <a:chExt cx="0" cy="0"/>
+        </a:xfrm>
+      </p:grpSpPr>
+      <p:sp>
+        <p:nvSpPr>
+          <p:cNvPr id="2" name="BG"/>
+          <p:cNvSpPr/>
+          <p:nvPr/>
+        </p:nvSpPr>
+        <p:spPr>
+          <a:xfrm>
+            <a:off x="0" y="0"/>
+            <a:ext cx="9144000" cy="5143500"/>
+          </a:xfrm>
+          <a:prstGeom prst="rect">
+            <a:avLst/>
+          </a:prstGeom>
+          <a:solidFill>
+            <a:srgbClr val="0F1C34"/>
+          </a:solidFill>
+          <a:ln>
+            <a:noFill/>
+          </a:ln>
+          <a:effectLst/>
+        </p:spPr>
+        <p:style>
+          <a:lnRef idx="1">
+            <a:schemeClr val="accent1"/>
+          </a:lnRef>
+          <a:fillRef idx="3">
+            <a:schemeClr val="accent1"/>
+          </a:fillRef>
+          <a:effectRef idx="2">
+            <a:schemeClr val="accent1"/>
+          </a:effectRef>
+          <a:fontRef idx="minor">
+            <a:schemeClr val="lt1"/>
+          </a:fontRef>
+        </p:style>
+        <p:txBody>
+          <a:bodyPr rtlCol="0" anchor="ctr"/>
+          <a:lstStyle/>
+          <a:p>
+            <a:pPr algn="ctr"/>
+            <a:endParaRPr/>
+          </a:p>
+        </p:txBody>
+      </p:sp>
+      <p:sp>
+        <p:nvSpPr>
+          <p:cNvPr id="3" name="MULTIPLY"/>
+          <p:cNvSpPr txBox="1"/>
+          <p:nvPr/>
+        </p:nvSpPr>
+        <p:spPr>
+          <a:xfrm>
+            <a:off x="365760" y="137160"/>
+            <a:ext cx="5486400" cy="228600"/>
+          </a:xfrm>
+          <a:prstGeom prst="rect">
+            <a:avLst/>
+          </a:prstGeom>
+          <a:noFill/>
+        </p:spPr>
+        <p:txBody>
+          <a:bodyPr wrap="square"/>
+          <a:lstStyle/>
+          <a:p>
+            <a:pPr algn="l"/>
+            <a:r>
+              <a:rPr sz="900" b="1" i="0">
+                <a:solidFill>
+                  <a:srgbClr val="808080"/>
+                </a:solidFill>
+                <a:latin typeface="Calibri"/>
+              </a:rPr>
+              <a:t>MULTIPLY · DISCIPLE-MAKING PIPELINE</a:t>
+            </a:r>
+          </a:p>
+        </p:txBody>
+      </p:sp>
+      <p:sp>
+        <p:nvSpPr>
+          <p:cNvPr id="4" name="Footer"/>
+          <p:cNvSpPr txBox="1"/>
+          <p:nvPr/>
+        </p:nvSpPr>
+        <p:spPr>
+          <a:xfrm>
+            <a:off x="7772400" y="4846320"/>
+            <a:ext cx="1188720" cy="228600"/>
+          </a:xfrm>
+          <a:prstGeom prst="rect">
+            <a:avLst/>
+          </a:prstGeom>
+          <a:noFill/>
+        </p:spPr>
+        <p:txBody>
+          <a:bodyPr wrap="square"/>
+          <a:lstStyle/>
+          <a:p>
+            <a:pPr algn="r"/>
+            <a:r>
+              <a:rPr sz="900" b="0" i="0">
+                <a:solidFill>
+                  <a:srgbClr val="808080"/>
+                </a:solidFill>
+                <a:latin typeface="Calibri"/>
+              </a:rPr>
+              <a:t>18 / 20</a:t>
+            </a:r>
+          </a:p>
+        </p:txBody>
+      </p:sp>
+      <p:sp>
+        <p:nvSpPr>
+          <p:cNvPr id="5" name="Header"/>
+          <p:cNvSpPr txBox="1"/>
+          <p:nvPr/>
+        </p:nvSpPr>
+        <p:spPr>
+          <a:xfrm>
+            <a:off x="457200" y="457200"/>
+            <a:ext cx="8229600" cy="365760"/>
+          </a:xfrm>
+          <a:prstGeom prst="rect">
+            <a:avLst/>
+          </a:prstGeom>
+          <a:noFill/>
+        </p:spPr>
+        <p:txBody>
+          <a:bodyPr wrap="square"/>
+          <a:lstStyle/>
+          <a:p>
+            <a:pPr algn="ctr"/>
+            <a:r>
+              <a:rPr sz="1500" b="1" i="0">
+                <a:solidFill>
+                  <a:srgbClr val="D4A84A"/>
+                </a:solidFill>
+                <a:latin typeface="Calibri"/>
+              </a:rPr>
+              <a:t>🎵 DALHIN · TANONG</a:t>
+            </a:r>
+          </a:p>
+        </p:txBody>
+      </p:sp>
+      <p:sp>
+        <p:nvSpPr>
+          <p:cNvPr id="6" name="PGBadge"/>
+          <p:cNvSpPr/>
+          <p:nvPr/>
+        </p:nvSpPr>
+        <p:spPr>
+          <a:xfrm>
+            <a:off x="2788920" y="1024128"/>
+            <a:ext cx="3566160" cy="329184"/>
+          </a:xfrm>
+          <a:prstGeom prst="roundRect">
+            <a:avLst/>
+          </a:prstGeom>
+          <a:solidFill>
+            <a:srgbClr val="D4A84A"/>
+          </a:solidFill>
+          <a:ln>
+            <a:noFill/>
+          </a:ln>
+          <a:effectLst/>
+        </p:spPr>
+        <p:style>
+          <a:lnRef idx="1">
+            <a:schemeClr val="accent1"/>
+          </a:lnRef>
+          <a:fillRef idx="3">
+            <a:schemeClr val="accent1"/>
+          </a:fillRef>
+          <a:effectRef idx="2">
+            <a:schemeClr val="accent1"/>
+          </a:effectRef>
+          <a:fontRef idx="minor">
+            <a:schemeClr val="lt1"/>
+          </a:fontRef>
+        </p:style>
+        <p:txBody>
+          <a:bodyPr tIns="0" bIns="0" rtlCol="0" anchor="ctr"/>
+          <a:lstStyle/>
+          <a:p>
+            <a:pPr algn="ctr"/>
+            <a:r>
+              <a:rPr sz="1100" b="1" i="0">
+                <a:solidFill>
+                  <a:srgbClr val="141628"/>
+                </a:solidFill>
+                <a:latin typeface="Calibri"/>
+              </a:rPr>
+              <a:t>📋 Participant Guide Question</a:t>
+            </a:r>
+          </a:p>
+        </p:txBody>
+      </p:sp>
+      <p:sp>
+        <p:nvSpPr>
+          <p:cNvPr id="7" name="Question"/>
+          <p:cNvSpPr txBox="1"/>
+          <p:nvPr/>
+        </p:nvSpPr>
+        <p:spPr>
+          <a:xfrm>
+            <a:off x="731520" y="1783080"/>
+            <a:ext cx="7680960" cy="2194560"/>
+          </a:xfrm>
+          <a:prstGeom prst="rect">
+            <a:avLst/>
+          </a:prstGeom>
+          <a:noFill/>
+        </p:spPr>
+        <p:txBody>
+          <a:bodyPr wrap="square" anchor="ctr"/>
+          <a:lstStyle/>
+          <a:p>
+            <a:pPr algn="ctr"/>
+            <a:r>
+              <a:rPr sz="3000" b="1" i="0">
+                <a:solidFill>
+                  <a:srgbClr val="FEFCF8"/>
+                </a:solidFill>
+                <a:latin typeface="Calibri"/>
+              </a:rPr>
+              <a:t>Anong linya ng himno ang pinakatumama sa'yo? Bakit?</a:t>
+            </a:r>
+          </a:p>
+        </p:txBody>
+      </p:sp>
+      <p:sp>
+        <p:nvSpPr>
+          <p:cNvPr id="8" name="AnswerMode"/>
+          <p:cNvSpPr txBox="1"/>
+          <p:nvPr/>
+        </p:nvSpPr>
+        <p:spPr>
+          <a:xfrm>
+            <a:off x="731520" y="4160520"/>
+            <a:ext cx="7680960" cy="548640"/>
+          </a:xfrm>
+          <a:prstGeom prst="rect">
+            <a:avLst/>
+          </a:prstGeom>
+          <a:noFill/>
+        </p:spPr>
+        <p:txBody>
+          <a:bodyPr wrap="square"/>
+          <a:lstStyle/>
+          <a:p>
+            <a:pPr algn="ctr"/>
+            <a:r>
+              <a:rPr sz="1450" b="0" i="1">
+                <a:solidFill>
+                  <a:srgbClr val="D4A84A"/>
+                </a:solidFill>
+                <a:latin typeface="Calibri"/>
+              </a:rPr>
+              <a:t>I-underline sa Participant Guide — tapos 1–2 boluntaryong share.</a:t>
+            </a:r>
+          </a:p>
+        </p:txBody>
+      </p:sp>
+      <p:sp>
+        <p:nvSpPr>
+          <p:cNvPr id="9" name="TimerPill"/>
+          <p:cNvSpPr/>
+          <p:nvPr/>
+        </p:nvSpPr>
+        <p:spPr>
+          <a:xfrm>
+            <a:off x="7205472" y="118872"/>
+            <a:ext cx="1828800" cy="365760"/>
+          </a:xfrm>
+          <a:prstGeom prst="roundRect">
+            <a:avLst/>
+          </a:prstGeom>
+          <a:solidFill>
+            <a:srgbClr val="D4AF37"/>
+          </a:solidFill>
+          <a:ln>
+            <a:noFill/>
+          </a:ln>
+          <a:effectLst/>
+        </p:spPr>
+        <p:style>
+          <a:lnRef idx="1">
+            <a:schemeClr val="accent1"/>
+          </a:lnRef>
+          <a:fillRef idx="3">
+            <a:schemeClr val="accent1"/>
+          </a:fillRef>
+          <a:effectRef idx="2">
+            <a:schemeClr val="accent1"/>
+          </a:effectRef>
+          <a:fontRef idx="minor">
+            <a:schemeClr val="lt1"/>
+          </a:fontRef>
+        </p:style>
+        <p:txBody>
+          <a:bodyPr wrap="none" lIns="45720" tIns="0" rIns="45720" bIns="0" rtlCol="0" anchor="ctr"/>
+          <a:lstStyle/>
+          <a:p>
+            <a:pPr algn="ctr"/>
+            <a:r>
+              <a:rPr sz="1100" b="1">
+                <a:solidFill>
+                  <a:srgbClr val="141628"/>
+                </a:solidFill>
+                <a:latin typeface="Calibri"/>
+              </a:rPr>
+              <a:t>⏱ 2 min · ⌛53:00</a:t>
+            </a:r>
+          </a:p>
+        </p:txBody>
+      </p:sp>
+    </p:spTree>
+  </p:cSld>
+  <p:clrMapOvr>
+    <a:masterClrMapping/>
+  </p:clrMapOvr>
+</p:sld>
+</file>
+
+<file path=ppt/slides/slide19.xml><?xml version="1.0" encoding="utf-8"?>
 <p:sld xmlns:a="http://schemas.openxmlformats.org/drawingml/2006/main" xmlns:r="http://schemas.openxmlformats.org/officeDocument/2006/relationships" xmlns:p="http://schemas.openxmlformats.org/presentationml/2006/main">
   <p:cSld name="Slide 17">
     <p:bg>
@@ -6346,6 +8653,7 @@
         <a:solidFill>
           <a:srgbClr val="0F1C34"/>
         </a:solidFill>
+        <a:effectLst/>
       </p:bgPr>
     </p:bg>
     <p:spTree>
@@ -6383,11 +8691,11 @@
           <a:bodyPr wrap="square" lIns="0" tIns="0" rIns="0" bIns="0" rtlCol="0" anchor="ctr"/>
           <a:lstStyle/>
           <a:p>
-            <a:pPr indent="0" marL="0">
-              <a:buNone/>
-            </a:pPr>
-            <a:r>
-              <a:rPr lang="en-US" sz="800" b="1" spc="300" kern="0" dirty="0">
+            <a:pPr marL="0" indent="0">
+              <a:buNone/>
+            </a:pPr>
+            <a:r>
+              <a:rPr lang="en-US" sz="800" b="1" kern="0" spc="300" dirty="0">
                 <a:solidFill>
                   <a:srgbClr val="D4A84A"/>
                 </a:solidFill>
@@ -6422,7 +8730,7 @@
           <a:bodyPr wrap="square" lIns="0" tIns="0" rIns="0" bIns="0" rtlCol="0" anchor="ctr"/>
           <a:lstStyle/>
           <a:p>
-            <a:pPr algn="r" indent="0" marL="0">
+            <a:pPr marL="0" indent="0" algn="r">
               <a:buNone/>
             </a:pPr>
             <a:r>
@@ -6461,11 +8769,11 @@
           <a:bodyPr wrap="square" rtlCol="0" anchor="ctr"/>
           <a:lstStyle/>
           <a:p>
-            <a:pPr algn="ctr" indent="0" marL="0">
-              <a:buNone/>
-            </a:pPr>
-            <a:r>
-              <a:rPr lang="en-US" sz="1200" b="1" spc="400" kern="0" dirty="0">
+            <a:pPr marL="0" indent="0" algn="ctr">
+              <a:buNone/>
+            </a:pPr>
+            <a:r>
+              <a:rPr lang="en-US" sz="1200" b="1" kern="0" spc="400" dirty="0">
                 <a:solidFill>
                   <a:srgbClr val="E8941A"/>
                 </a:solidFill>
@@ -6500,11 +8808,11 @@
           <a:bodyPr wrap="square" rtlCol="0" anchor="ctr"/>
           <a:lstStyle/>
           <a:p>
-            <a:pPr algn="ctr" indent="0" marL="0">
-              <a:buNone/>
-            </a:pPr>
-            <a:r>
-              <a:rPr lang="en-US" sz="1200" b="1" spc="400" kern="0" dirty="0">
+            <a:pPr marL="0" indent="0" algn="ctr">
+              <a:buNone/>
+            </a:pPr>
+            <a:r>
+              <a:rPr lang="en-US" sz="1200" b="1" kern="0" spc="400" dirty="0">
                 <a:solidFill>
                   <a:srgbClr val="E8941A"/>
                 </a:solidFill>
@@ -6539,7 +8847,7 @@
           <a:bodyPr wrap="square" rtlCol="0" anchor="ctr"/>
           <a:lstStyle/>
           <a:p>
-            <a:pPr algn="ctr" indent="0" marL="0">
+            <a:pPr marL="0" indent="0" algn="ctr">
               <a:lnSpc>
                 <a:spcPct val="150000"/>
               </a:lnSpc>
@@ -6556,47 +8864,86 @@
               </a:rPr>
               <a:t>"A surrendered life is the </a:t>
             </a:r>
-            <a:pPr algn="ctr" indent="0" marL="0">
+            <a:r>
+              <a:rPr lang="en-US" sz="2200" b="1" i="1" dirty="0">
+                <a:solidFill>
+                  <a:srgbClr val="F5D97A"/>
+                </a:solidFill>
+                <a:latin typeface="Georgia" pitchFamily="34" charset="0"/>
+                <a:ea typeface="Georgia" pitchFamily="34" charset="-122"/>
+                <a:cs typeface="Georgia" pitchFamily="34" charset="-120"/>
+              </a:rPr>
+              <a:t>most evangelistic life.</a:t>
+            </a:r>
+            <a:endParaRPr lang="en-US" sz="2200" dirty="0"/>
+          </a:p>
+          <a:p>
+            <a:pPr marL="0" indent="0" algn="ctr">
               <a:lnSpc>
                 <a:spcPct val="150000"/>
               </a:lnSpc>
               <a:buNone/>
             </a:pPr>
-            <a:r>
-              <a:rPr lang="en-US" sz="2200" b="1" i="1" dirty="0">
-                <a:solidFill>
-                  <a:srgbClr val="F5D97A"/>
+            <a:endParaRPr lang="en-US" sz="2200" dirty="0"/>
+          </a:p>
+          <a:p>
+            <a:pPr marL="0" indent="0" algn="ctr">
+              <a:lnSpc>
+                <a:spcPct val="150000"/>
+              </a:lnSpc>
+              <a:buNone/>
+            </a:pPr>
+            <a:r>
+              <a:rPr lang="en-US" sz="2200" i="1" dirty="0">
+                <a:solidFill>
+                  <a:srgbClr val="FFFFFF"/>
                 </a:solidFill>
                 <a:latin typeface="Georgia" pitchFamily="34" charset="0"/>
                 <a:ea typeface="Georgia" pitchFamily="34" charset="-122"/>
                 <a:cs typeface="Georgia" pitchFamily="34" charset="-120"/>
               </a:rPr>
-              <a:t>most evangelistic life.</a:t>
-            </a:r>
-            <a:pPr algn="ctr" indent="0" marL="0">
+              <a:t>Ang EOLO person mo ay nakatingin sa </a:t>
+            </a:r>
+            <a:endParaRPr lang="en-US" sz="2200" dirty="0"/>
+          </a:p>
+          <a:p>
+            <a:pPr marL="0" indent="0" algn="ctr">
               <a:lnSpc>
                 <a:spcPct val="150000"/>
               </a:lnSpc>
               <a:buNone/>
             </a:pPr>
+            <a:r>
+              <a:rPr lang="en-US" sz="2200" b="1" i="1" dirty="0">
+                <a:solidFill>
+                  <a:srgbClr val="F5D97A"/>
+                </a:solidFill>
+                <a:latin typeface="Georgia" pitchFamily="34" charset="0"/>
+                <a:ea typeface="Georgia" pitchFamily="34" charset="-122"/>
+                <a:cs typeface="Georgia" pitchFamily="34" charset="-120"/>
+              </a:rPr>
+              <a:t>Monday-Saturday</a:t>
+            </a:r>
+            <a:r>
+              <a:rPr lang="en-US" sz="2200" i="1" dirty="0">
+                <a:solidFill>
+                  <a:srgbClr val="FFFFFF"/>
+                </a:solidFill>
+                <a:latin typeface="Georgia" pitchFamily="34" charset="0"/>
+                <a:ea typeface="Georgia" pitchFamily="34" charset="-122"/>
+                <a:cs typeface="Georgia" pitchFamily="34" charset="-120"/>
+              </a:rPr>
+              <a:t> mo,</a:t>
+            </a:r>
             <a:endParaRPr lang="en-US" sz="2200" dirty="0"/>
           </a:p>
           <a:p>
-            <a:pPr algn="ctr" indent="0" marL="0">
+            <a:pPr marL="0" indent="0" algn="ctr">
               <a:lnSpc>
                 <a:spcPct val="150000"/>
               </a:lnSpc>
               <a:buNone/>
             </a:pPr>
-            <a:endParaRPr lang="en-US" sz="2200" dirty="0"/>
-          </a:p>
-          <a:p>
-            <a:pPr algn="ctr" indent="0" marL="0">
-              <a:lnSpc>
-                <a:spcPct val="150000"/>
-              </a:lnSpc>
-              <a:buNone/>
-            </a:pPr>
             <a:r>
               <a:rPr lang="en-US" sz="2200" i="1" dirty="0">
                 <a:solidFill>
@@ -6606,111 +8953,54 @@
                 <a:ea typeface="Georgia" pitchFamily="34" charset="-122"/>
                 <a:cs typeface="Georgia" pitchFamily="34" charset="-120"/>
               </a:rPr>
-              <a:t>Ang EOLO person mo ay nakatingin sa </a:t>
+              <a:t>hindi sa Sunday lang."</a:t>
             </a:r>
             <a:endParaRPr lang="en-US" sz="2200" dirty="0"/>
           </a:p>
-          <a:p>
-            <a:pPr algn="ctr" indent="0" marL="0">
+        </p:txBody>
+      </p:sp>
+      <p:sp>
+        <p:nvSpPr>
+          <p:cNvPr id="7" name="Text 5"/>
+          <p:cNvSpPr/>
+          <p:nvPr/>
+        </p:nvSpPr>
+        <p:spPr>
+          <a:xfrm>
+            <a:off x="457200" y="4160520"/>
+            <a:ext cx="8229600" cy="685800"/>
+          </a:xfrm>
+          <a:prstGeom prst="rect">
+            <a:avLst/>
+          </a:prstGeom>
+          <a:noFill/>
+          <a:ln/>
+        </p:spPr>
+        <p:txBody>
+          <a:bodyPr wrap="square" rtlCol="0" anchor="ctr"/>
+          <a:lstStyle/>
+          <a:p>
+            <a:pPr marL="0" indent="0" algn="ctr">
               <a:lnSpc>
-                <a:spcPct val="150000"/>
+                <a:spcPct val="145000"/>
               </a:lnSpc>
               <a:buNone/>
             </a:pPr>
             <a:r>
-              <a:rPr lang="en-US" sz="2200" b="1" i="1" dirty="0">
-                <a:solidFill>
-                  <a:srgbClr val="F5D97A"/>
+              <a:rPr lang="en-US" sz="1200" i="1" dirty="0">
+                <a:solidFill>
+                  <a:srgbClr val="A0A0A0"/>
                 </a:solidFill>
                 <a:latin typeface="Georgia" pitchFamily="34" charset="0"/>
                 <a:ea typeface="Georgia" pitchFamily="34" charset="-122"/>
                 <a:cs typeface="Georgia" pitchFamily="34" charset="-120"/>
               </a:rPr>
-              <a:t>Monday-Saturday</a:t>
-            </a:r>
-            <a:pPr algn="ctr" indent="0" marL="0">
-              <a:lnSpc>
-                <a:spcPct val="150000"/>
-              </a:lnSpc>
-              <a:buNone/>
-            </a:pPr>
-            <a:r>
-              <a:rPr lang="en-US" sz="2200" i="1" dirty="0">
-                <a:solidFill>
-                  <a:srgbClr val="FFFFFF"/>
-                </a:solidFill>
-                <a:latin typeface="Georgia" pitchFamily="34" charset="0"/>
-                <a:ea typeface="Georgia" pitchFamily="34" charset="-122"/>
-                <a:cs typeface="Georgia" pitchFamily="34" charset="-120"/>
-              </a:rPr>
-              <a:t> mo,</a:t>
-            </a:r>
-            <a:endParaRPr lang="en-US" sz="2200" dirty="0"/>
-          </a:p>
-          <a:p>
-            <a:pPr algn="ctr" indent="0" marL="0">
-              <a:lnSpc>
-                <a:spcPct val="150000"/>
-              </a:lnSpc>
-              <a:buNone/>
-            </a:pPr>
-            <a:r>
-              <a:rPr lang="en-US" sz="2200" i="1" dirty="0">
-                <a:solidFill>
-                  <a:srgbClr val="FFFFFF"/>
-                </a:solidFill>
-                <a:latin typeface="Georgia" pitchFamily="34" charset="0"/>
-                <a:ea typeface="Georgia" pitchFamily="34" charset="-122"/>
-                <a:cs typeface="Georgia" pitchFamily="34" charset="-120"/>
-              </a:rPr>
-              <a:t>hindi sa Sunday lang."</a:t>
-            </a:r>
-            <a:endParaRPr lang="en-US" sz="2200" dirty="0"/>
-          </a:p>
-        </p:txBody>
-      </p:sp>
-      <p:sp>
-        <p:nvSpPr>
-          <p:cNvPr id="7" name="Text 5"/>
-          <p:cNvSpPr/>
-          <p:nvPr/>
-        </p:nvSpPr>
-        <p:spPr>
-          <a:xfrm>
-            <a:off x="457200" y="4160520"/>
-            <a:ext cx="8229600" cy="685800"/>
-          </a:xfrm>
-          <a:prstGeom prst="rect">
-            <a:avLst/>
-          </a:prstGeom>
-          <a:noFill/>
-          <a:ln/>
-        </p:spPr>
-        <p:txBody>
-          <a:bodyPr wrap="square" rtlCol="0" anchor="ctr"/>
-          <a:lstStyle/>
-          <a:p>
-            <a:pPr algn="ctr" indent="0" marL="0">
-              <a:lnSpc>
-                <a:spcPct val="145000"/>
-              </a:lnSpc>
-              <a:buNone/>
-            </a:pPr>
-            <a:r>
-              <a:rPr lang="en-US" sz="1200" i="1" dirty="0">
-                <a:solidFill>
-                  <a:srgbClr val="A0A0A0"/>
-                </a:solidFill>
-                <a:latin typeface="Georgia" pitchFamily="34" charset="0"/>
-                <a:ea typeface="Georgia" pitchFamily="34" charset="-122"/>
-                <a:cs typeface="Georgia" pitchFamily="34" charset="-120"/>
-              </a:rPr>
               <a:t>Sinong EOLO person ang malamang nag-oobserve ng buhay mo this week?</a:t>
             </a:r>
             <a:endParaRPr lang="en-US" sz="1200" dirty="0"/>
           </a:p>
           <a:p>
-            <a:pPr algn="ctr" indent="0" marL="0">
+            <a:pPr marL="0" indent="0" algn="ctr">
               <a:lnSpc>
                 <a:spcPct val="145000"/>
               </a:lnSpc>
@@ -6792,14 +9082,15 @@
 </p:sld>
 </file>
 
-<file path=ppt/slides/slide18.xml><?xml version="1.0" encoding="utf-8"?>
+<file path=ppt/slides/slide2.xml><?xml version="1.0" encoding="utf-8"?>
 <p:sld xmlns:a="http://schemas.openxmlformats.org/drawingml/2006/main" xmlns:r="http://schemas.openxmlformats.org/officeDocument/2006/relationships" xmlns:p="http://schemas.openxmlformats.org/presentationml/2006/main">
-  <p:cSld name="Slide 18">
+  <p:cSld name="Slide 2">
     <p:bg>
       <p:bgPr>
         <a:solidFill>
-          <a:srgbClr val="FFF4E0"/>
+          <a:srgbClr val="FEFCF8"/>
         </a:solidFill>
+        <a:effectLst/>
       </p:bgPr>
     </p:bg>
     <p:spTree>
@@ -6837,11 +9128,11 @@
           <a:bodyPr wrap="square" lIns="0" tIns="0" rIns="0" bIns="0" rtlCol="0" anchor="ctr"/>
           <a:lstStyle/>
           <a:p>
-            <a:pPr indent="0" marL="0">
-              <a:buNone/>
-            </a:pPr>
-            <a:r>
-              <a:rPr lang="en-US" sz="800" b="1" spc="300" kern="0" dirty="0">
+            <a:pPr marL="0" indent="0">
+              <a:buNone/>
+            </a:pPr>
+            <a:r>
+              <a:rPr lang="en-US" sz="800" b="1" kern="0" spc="300" dirty="0">
                 <a:solidFill>
                   <a:srgbClr val="666666"/>
                 </a:solidFill>
@@ -6876,7 +9167,7 @@
           <a:bodyPr wrap="square" lIns="0" tIns="0" rIns="0" bIns="0" rtlCol="0" anchor="ctr"/>
           <a:lstStyle/>
           <a:p>
-            <a:pPr algn="r" indent="0" marL="0">
+            <a:pPr marL="0" indent="0" algn="r">
               <a:buNone/>
             </a:pPr>
             <a:r>
@@ -6888,7 +9179,7 @@
                 <a:ea typeface="Calibri" pitchFamily="34" charset="-122"/>
                 <a:cs typeface="Calibri" pitchFamily="34" charset="-120"/>
               </a:rPr>
-              <a:t>20 / 20</a:t>
+              <a:t>2 / 20</a:t>
             </a:r>
             <a:endParaRPr lang="en-US" sz="800" dirty="0"/>
           </a:p>
@@ -6903,7 +9194,7 @@
         <p:spPr>
           <a:xfrm>
             <a:off x="457200" y="457200"/>
-            <a:ext cx="8229600" cy="274320"/>
+            <a:ext cx="8229600" cy="365760"/>
           </a:xfrm>
           <a:prstGeom prst="rect">
             <a:avLst/>
@@ -6915,11 +9206,11 @@
           <a:bodyPr wrap="square" rtlCol="0" anchor="ctr"/>
           <a:lstStyle/>
           <a:p>
-            <a:pPr algn="ctr" indent="0" marL="0">
-              <a:buNone/>
-            </a:pPr>
-            <a:r>
-              <a:rPr lang="en-US" sz="1200" b="1" spc="400" kern="0" dirty="0">
+            <a:pPr marL="0" indent="0" algn="ctr">
+              <a:buNone/>
+            </a:pPr>
+            <a:r>
+              <a:rPr lang="en-US" sz="1200" b="1" kern="0" spc="400" dirty="0">
                 <a:solidFill>
                   <a:srgbClr val="C97A1A"/>
                 </a:solidFill>
@@ -6927,7 +9218,7 @@
                 <a:ea typeface="Calibri" pitchFamily="34" charset="-122"/>
                 <a:cs typeface="Calibri" pitchFamily="34" charset="-120"/>
               </a:rPr>
-              <a:t>🏠 DALHIN · MEMORIZE</a:t>
+              <a:t>⚡ PUKAW · CALLBACK TO L2</a:t>
             </a:r>
             <a:endParaRPr lang="en-US" sz="1200" dirty="0"/>
           </a:p>
@@ -6941,8 +9232,8 @@
         </p:nvSpPr>
         <p:spPr>
           <a:xfrm>
-            <a:off x="457200" y="868680"/>
-            <a:ext cx="8229600" cy="365760"/>
+            <a:off x="457200" y="1188720"/>
+            <a:ext cx="8229600" cy="457200"/>
           </a:xfrm>
           <a:prstGeom prst="rect">
             <a:avLst/>
@@ -6954,21 +9245,21 @@
           <a:bodyPr wrap="square" rtlCol="0" anchor="ctr"/>
           <a:lstStyle/>
           <a:p>
-            <a:pPr algn="ctr" indent="0" marL="0">
-              <a:buNone/>
-            </a:pPr>
-            <a:r>
-              <a:rPr lang="en-US" sz="1200" b="1" spc="500" kern="0" dirty="0">
-                <a:solidFill>
-                  <a:srgbClr val="C97A1A"/>
+            <a:pPr marL="0" indent="0" algn="ctr">
+              <a:buNone/>
+            </a:pPr>
+            <a:r>
+              <a:rPr lang="en-US" sz="1600" i="1" dirty="0">
+                <a:solidFill>
+                  <a:srgbClr val="6A6660"/>
                 </a:solidFill>
                 <a:latin typeface="Calibri" pitchFamily="34" charset="0"/>
                 <a:ea typeface="Calibri" pitchFamily="34" charset="-122"/>
                 <a:cs typeface="Calibri" pitchFamily="34" charset="-120"/>
               </a:rPr>
-              <a:t>SA LOOB NG 2 LINGGO</a:t>
-            </a:r>
-            <a:endParaRPr lang="en-US" sz="1200" dirty="0"/>
+              <a:t>Bago tayo mag-umpisa...</a:t>
+            </a:r>
+            <a:endParaRPr lang="en-US" sz="1600" dirty="0"/>
           </a:p>
         </p:txBody>
       </p:sp>
@@ -6980,8 +9271,8 @@
         </p:nvSpPr>
         <p:spPr>
           <a:xfrm>
-            <a:off x="457200" y="1417320"/>
-            <a:ext cx="8229600" cy="914400"/>
+            <a:off x="457200" y="1828800"/>
+            <a:ext cx="8229600" cy="1828800"/>
           </a:xfrm>
           <a:prstGeom prst="rect">
             <a:avLst/>
@@ -6993,53 +9284,34 @@
           <a:bodyPr wrap="square" rtlCol="0" anchor="ctr"/>
           <a:lstStyle/>
           <a:p>
-            <a:pPr algn="ctr" indent="0" marL="0">
-              <a:buNone/>
-            </a:pPr>
-            <a:r>
-              <a:rPr lang="en-US" sz="6000" b="1" dirty="0">
-                <a:solidFill>
-                  <a:srgbClr val="C97A1A"/>
+            <a:pPr marL="0" indent="0" algn="ctr">
+              <a:lnSpc>
+                <a:spcPct val="120000"/>
+              </a:lnSpc>
+              <a:buNone/>
+            </a:pPr>
+            <a:r>
+              <a:rPr lang="en-US" sz="3800" b="1" dirty="0">
+                <a:solidFill>
+                  <a:srgbClr val="1B2A4A"/>
                 </a:solidFill>
                 <a:latin typeface="Georgia" pitchFamily="34" charset="0"/>
                 <a:ea typeface="Georgia" pitchFamily="34" charset="-122"/>
                 <a:cs typeface="Georgia" pitchFamily="34" charset="-120"/>
               </a:rPr>
-              <a:t>Roma 12:1</a:t>
-            </a:r>
-            <a:endParaRPr lang="en-US" sz="6000" dirty="0"/>
-          </a:p>
-        </p:txBody>
-      </p:sp>
-      <p:sp>
-        <p:nvSpPr>
-          <p:cNvPr id="7" name="Text 5"/>
-          <p:cNvSpPr/>
-          <p:nvPr/>
-        </p:nvSpPr>
-        <p:spPr>
-          <a:xfrm>
-            <a:off x="457200" y="2468880"/>
-            <a:ext cx="8229600" cy="1371600"/>
-          </a:xfrm>
-          <a:prstGeom prst="rect">
-            <a:avLst/>
-          </a:prstGeom>
-          <a:noFill/>
-          <a:ln/>
-        </p:spPr>
-        <p:txBody>
-          <a:bodyPr wrap="square" rtlCol="0" anchor="ctr"/>
-          <a:lstStyle/>
-          <a:p>
-            <a:pPr algn="ctr" indent="0" marL="0">
+              <a:t>Kumusta ang 30-day S.O.A.P.S?</a:t>
+            </a:r>
+            <a:endParaRPr lang="en-US" sz="3800" dirty="0"/>
+          </a:p>
+          <a:p>
+            <a:pPr marL="0" indent="0" algn="ctr">
               <a:lnSpc>
-                <a:spcPct val="145000"/>
+                <a:spcPct val="120000"/>
               </a:lnSpc>
               <a:buNone/>
             </a:pPr>
             <a:r>
-              <a:rPr lang="en-US" sz="1800" i="1" dirty="0">
+              <a:rPr lang="en-US" sz="3800" b="1" dirty="0">
                 <a:solidFill>
                   <a:srgbClr val="1B2A4A"/>
                 </a:solidFill>
@@ -7047,42 +9319,22 @@
                 <a:ea typeface="Georgia" pitchFamily="34" charset="-122"/>
                 <a:cs typeface="Georgia" pitchFamily="34" charset="-120"/>
               </a:rPr>
-              <a:t>"...alang-alang sa masaganang habag ng Diyos sa atin,</a:t>
-            </a:r>
-            <a:endParaRPr lang="en-US" sz="1800" dirty="0"/>
-          </a:p>
-          <a:p>
-            <a:pPr algn="ctr" indent="0" marL="0">
-              <a:lnSpc>
-                <a:spcPct val="145000"/>
-              </a:lnSpc>
-              <a:buNone/>
-            </a:pPr>
-            <a:r>
-              <a:rPr lang="en-US" sz="1800" i="1" dirty="0">
-                <a:solidFill>
-                  <a:srgbClr val="1B2A4A"/>
-                </a:solidFill>
-                <a:latin typeface="Georgia" pitchFamily="34" charset="0"/>
-                <a:ea typeface="Georgia" pitchFamily="34" charset="-122"/>
-                <a:cs typeface="Georgia" pitchFamily="34" charset="-120"/>
-              </a:rPr>
-              <a:t>ialay ninyo ang inyong sarili bilang isang handog na buháy..."</a:t>
-            </a:r>
-            <a:endParaRPr lang="en-US" sz="1800" dirty="0"/>
-          </a:p>
-        </p:txBody>
-      </p:sp>
-      <p:sp>
-        <p:nvSpPr>
-          <p:cNvPr id="8" name="Text 6"/>
-          <p:cNvSpPr/>
-          <p:nvPr/>
-        </p:nvSpPr>
-        <p:spPr>
-          <a:xfrm>
-            <a:off x="457200" y="3977640"/>
-            <a:ext cx="8229600" cy="640080"/>
+              <a:t>Sino dito ay nag-pick ng John?</a:t>
+            </a:r>
+            <a:endParaRPr lang="en-US" sz="3800" dirty="0"/>
+          </a:p>
+        </p:txBody>
+      </p:sp>
+      <p:sp>
+        <p:nvSpPr>
+          <p:cNvPr id="7" name="Text 5"/>
+          <p:cNvSpPr/>
+          <p:nvPr/>
+        </p:nvSpPr>
+        <p:spPr>
+          <a:xfrm>
+            <a:off x="914400" y="4114800"/>
+            <a:ext cx="7315200" cy="548640"/>
           </a:xfrm>
           <a:prstGeom prst="rect">
             <a:avLst/>
@@ -7094,21 +9346,21 @@
           <a:bodyPr wrap="square" rtlCol="0" anchor="ctr"/>
           <a:lstStyle/>
           <a:p>
-            <a:pPr algn="ctr" indent="0" marL="0">
-              <a:buNone/>
-            </a:pPr>
-            <a:r>
-              <a:rPr lang="en-US" sz="2800" b="1" i="1" dirty="0">
-                <a:solidFill>
-                  <a:srgbClr val="C97A1A"/>
-                </a:solidFill>
-                <a:latin typeface="Georgia" pitchFamily="34" charset="0"/>
-                <a:ea typeface="Georgia" pitchFamily="34" charset="-122"/>
-                <a:cs typeface="Georgia" pitchFamily="34" charset="-120"/>
-              </a:rPr>
-              <a:t>O the joy of full salvation!</a:t>
-            </a:r>
-            <a:endParaRPr lang="en-US" sz="2800" dirty="0"/>
+            <a:pPr marL="0" indent="0" algn="ctr">
+              <a:buNone/>
+            </a:pPr>
+            <a:r>
+              <a:rPr lang="en-US" sz="1400" i="1" dirty="0">
+                <a:solidFill>
+                  <a:srgbClr val="6A6660"/>
+                </a:solidFill>
+                <a:latin typeface="Calibri" pitchFamily="34" charset="0"/>
+                <a:ea typeface="Calibri" pitchFamily="34" charset="-122"/>
+                <a:cs typeface="Calibri" pitchFamily="34" charset="-120"/>
+              </a:rPr>
+              <a:t>Ilang chapters na kayo? Sino dito ay umabot ng Day 14?</a:t>
+            </a:r>
+            <a:endParaRPr lang="en-US" sz="1400" dirty="0"/>
           </a:p>
         </p:txBody>
       </p:sp>
@@ -7160,7 +9412,7 @@
                 </a:solidFill>
                 <a:latin typeface="Calibri"/>
               </a:rPr>
-              <a:t>⏱ 1 min · ⌛55:00</a:t>
+              <a:t>⏱ 2 min · ⌛2:00</a:t>
             </a:r>
           </a:p>
         </p:txBody>
@@ -7173,355 +9425,15 @@
 </p:sld>
 </file>
 
-<file path=ppt/slides/slide19.xml><?xml version="1.0" encoding="utf-8"?>
+<file path=ppt/slides/slide20.xml><?xml version="1.0" encoding="utf-8"?>
 <p:sld xmlns:a="http://schemas.openxmlformats.org/drawingml/2006/main" xmlns:r="http://schemas.openxmlformats.org/officeDocument/2006/relationships" xmlns:p="http://schemas.openxmlformats.org/presentationml/2006/main">
-  <p:cSld>
-    <p:spTree>
-      <p:nvGrpSpPr>
-        <p:cNvPr id="1" name=""/>
-        <p:cNvGrpSpPr/>
-        <p:nvPr/>
-      </p:nvGrpSpPr>
-      <p:grpSpPr>
-        <a:xfrm>
-          <a:off x="0" y="0"/>
-          <a:ext cx="0" cy="0"/>
-          <a:chOff x="0" y="0"/>
-          <a:chExt cx="0" cy="0"/>
-        </a:xfrm>
-      </p:grpSpPr>
-      <p:sp>
-        <p:nvSpPr>
-          <p:cNvPr id="2" name="BG"/>
-          <p:cNvSpPr/>
-          <p:nvPr/>
-        </p:nvSpPr>
-        <p:spPr>
-          <a:xfrm>
-            <a:off x="0" y="0"/>
-            <a:ext cx="9144000" cy="5143500"/>
-          </a:xfrm>
-          <a:prstGeom prst="rect">
-            <a:avLst/>
-          </a:prstGeom>
-          <a:solidFill>
-            <a:srgbClr val="FEFCF8"/>
-          </a:solidFill>
-          <a:ln>
-            <a:noFill/>
-          </a:ln>
-          <a:effectLst/>
-        </p:spPr>
-        <p:style>
-          <a:lnRef idx="1">
-            <a:schemeClr val="accent1"/>
-          </a:lnRef>
-          <a:fillRef idx="3">
-            <a:schemeClr val="accent1"/>
-          </a:fillRef>
-          <a:effectRef idx="2">
-            <a:schemeClr val="accent1"/>
-          </a:effectRef>
-          <a:fontRef idx="minor">
-            <a:schemeClr val="lt1"/>
-          </a:fontRef>
-        </p:style>
-        <p:txBody>
-          <a:bodyPr rtlCol="0" anchor="ctr"/>
-          <a:lstStyle/>
-          <a:p>
-            <a:pPr algn="ctr"/>
-            <a:endParaRPr/>
-          </a:p>
-        </p:txBody>
-      </p:sp>
-      <p:sp>
-        <p:nvSpPr>
-          <p:cNvPr id="3" name="MULTIPLY"/>
-          <p:cNvSpPr txBox="1"/>
-          <p:nvPr/>
-        </p:nvSpPr>
-        <p:spPr>
-          <a:xfrm>
-            <a:off x="365760" y="137160"/>
-            <a:ext cx="5486400" cy="228600"/>
-          </a:xfrm>
-          <a:prstGeom prst="rect">
-            <a:avLst/>
-          </a:prstGeom>
-          <a:noFill/>
-        </p:spPr>
-        <p:txBody>
-          <a:bodyPr wrap="square"/>
-          <a:lstStyle/>
-          <a:p>
-            <a:pPr algn="l"/>
-            <a:r>
-              <a:rPr sz="900" b="1" i="0">
-                <a:solidFill>
-                  <a:srgbClr val="808080"/>
-                </a:solidFill>
-                <a:latin typeface="Calibri"/>
-              </a:rPr>
-              <a:t>MULTIPLY · DISCIPLE-MAKING PIPELINE</a:t>
-            </a:r>
-          </a:p>
-        </p:txBody>
-      </p:sp>
-      <p:sp>
-        <p:nvSpPr>
-          <p:cNvPr id="4" name="Footer"/>
-          <p:cNvSpPr txBox="1"/>
-          <p:nvPr/>
-        </p:nvSpPr>
-        <p:spPr>
-          <a:xfrm>
-            <a:off x="7772400" y="4846320"/>
-            <a:ext cx="1188720" cy="228600"/>
-          </a:xfrm>
-          <a:prstGeom prst="rect">
-            <a:avLst/>
-          </a:prstGeom>
-          <a:noFill/>
-        </p:spPr>
-        <p:txBody>
-          <a:bodyPr wrap="square"/>
-          <a:lstStyle/>
-          <a:p>
-            <a:pPr algn="r"/>
-            <a:r>
-              <a:rPr sz="900" b="0" i="0">
-                <a:solidFill>
-                  <a:srgbClr val="808080"/>
-                </a:solidFill>
-                <a:latin typeface="Calibri"/>
-              </a:rPr>
-              <a:t>10 / 20</a:t>
-            </a:r>
-          </a:p>
-        </p:txBody>
-      </p:sp>
-      <p:sp>
-        <p:nvSpPr>
-          <p:cNvPr id="5" name="Header"/>
-          <p:cNvSpPr txBox="1"/>
-          <p:nvPr/>
-        </p:nvSpPr>
-        <p:spPr>
-          <a:xfrm>
-            <a:off x="457200" y="457200"/>
-            <a:ext cx="8229600" cy="365760"/>
-          </a:xfrm>
-          <a:prstGeom prst="rect">
-            <a:avLst/>
-          </a:prstGeom>
-          <a:noFill/>
-        </p:spPr>
-        <p:txBody>
-          <a:bodyPr wrap="square"/>
-          <a:lstStyle/>
-          <a:p>
-            <a:pPr algn="ctr"/>
-            <a:r>
-              <a:rPr sz="1500" b="1" i="0">
-                <a:solidFill>
-                  <a:srgbClr val="C97A1A"/>
-                </a:solidFill>
-                <a:latin typeface="Calibri"/>
-              </a:rPr>
-              <a:t>📖 TUKLAS · TANONG</a:t>
-            </a:r>
-          </a:p>
-        </p:txBody>
-      </p:sp>
-      <p:sp>
-        <p:nvSpPr>
-          <p:cNvPr id="6" name="PGBadge"/>
-          <p:cNvSpPr/>
-          <p:nvPr/>
-        </p:nvSpPr>
-        <p:spPr>
-          <a:xfrm>
-            <a:off x="2788920" y="1024128"/>
-            <a:ext cx="3566160" cy="329184"/>
-          </a:xfrm>
-          <a:prstGeom prst="roundRect">
-            <a:avLst/>
-          </a:prstGeom>
-          <a:solidFill>
-            <a:srgbClr val="D4A84A"/>
-          </a:solidFill>
-          <a:ln>
-            <a:noFill/>
-          </a:ln>
-          <a:effectLst/>
-        </p:spPr>
-        <p:style>
-          <a:lnRef idx="1">
-            <a:schemeClr val="accent1"/>
-          </a:lnRef>
-          <a:fillRef idx="3">
-            <a:schemeClr val="accent1"/>
-          </a:fillRef>
-          <a:effectRef idx="2">
-            <a:schemeClr val="accent1"/>
-          </a:effectRef>
-          <a:fontRef idx="minor">
-            <a:schemeClr val="lt1"/>
-          </a:fontRef>
-        </p:style>
-        <p:txBody>
-          <a:bodyPr tIns="0" bIns="0" rtlCol="0" anchor="ctr"/>
-          <a:lstStyle/>
-          <a:p>
-            <a:pPr algn="ctr"/>
-            <a:r>
-              <a:rPr sz="1100" b="1" i="0">
-                <a:solidFill>
-                  <a:srgbClr val="141628"/>
-                </a:solidFill>
-                <a:latin typeface="Calibri"/>
-              </a:rPr>
-              <a:t>📋 Participant Guide Question</a:t>
-            </a:r>
-          </a:p>
-        </p:txBody>
-      </p:sp>
-      <p:sp>
-        <p:nvSpPr>
-          <p:cNvPr id="7" name="Question"/>
-          <p:cNvSpPr txBox="1"/>
-          <p:nvPr/>
-        </p:nvSpPr>
-        <p:spPr>
-          <a:xfrm>
-            <a:off x="731520" y="1783080"/>
-            <a:ext cx="7680960" cy="2194560"/>
-          </a:xfrm>
-          <a:prstGeom prst="rect">
-            <a:avLst/>
-          </a:prstGeom>
-          <a:noFill/>
-        </p:spPr>
-        <p:txBody>
-          <a:bodyPr wrap="square" anchor="ctr"/>
-          <a:lstStyle/>
-          <a:p>
-            <a:pPr algn="ctr"/>
-            <a:r>
-              <a:rPr sz="3000" b="1" i="0">
-                <a:solidFill>
-                  <a:srgbClr val="1B2A4A"/>
-                </a:solidFill>
-                <a:latin typeface="Calibri"/>
-              </a:rPr>
-              <a:t>Ano ang pangunahing dahilan kung bakit hirap ang isang mananampalataya na sumuko sa Panginoon?</a:t>
-            </a:r>
-          </a:p>
-        </p:txBody>
-      </p:sp>
-      <p:sp>
-        <p:nvSpPr>
-          <p:cNvPr id="8" name="AnswerMode"/>
-          <p:cNvSpPr txBox="1"/>
-          <p:nvPr/>
-        </p:nvSpPr>
-        <p:spPr>
-          <a:xfrm>
-            <a:off x="731520" y="4160520"/>
-            <a:ext cx="7680960" cy="548640"/>
-          </a:xfrm>
-          <a:prstGeom prst="rect">
-            <a:avLst/>
-          </a:prstGeom>
-          <a:noFill/>
-        </p:spPr>
-        <p:txBody>
-          <a:bodyPr wrap="square"/>
-          <a:lstStyle/>
-          <a:p>
-            <a:pPr algn="ctr"/>
-            <a:r>
-              <a:rPr sz="1450" b="0" i="1">
-                <a:solidFill>
-                  <a:srgbClr val="B8882A"/>
-                </a:solidFill>
-                <a:latin typeface="Calibri"/>
-              </a:rPr>
-              <a:t>Tahimik na isulat sa Participant Guide — 90 segundo.</a:t>
-            </a:r>
-          </a:p>
-        </p:txBody>
-      </p:sp>
-      <p:sp>
-        <p:nvSpPr>
-          <p:cNvPr id="9" name="TimerPill"/>
-          <p:cNvSpPr/>
-          <p:nvPr/>
-        </p:nvSpPr>
-        <p:spPr>
-          <a:xfrm>
-            <a:off x="7205472" y="118872"/>
-            <a:ext cx="1828800" cy="365760"/>
-          </a:xfrm>
-          <a:prstGeom prst="roundRect">
-            <a:avLst/>
-          </a:prstGeom>
-          <a:solidFill>
-            <a:srgbClr val="D4AF37"/>
-          </a:solidFill>
-          <a:ln>
-            <a:noFill/>
-          </a:ln>
-          <a:effectLst/>
-        </p:spPr>
-        <p:style>
-          <a:lnRef idx="1">
-            <a:schemeClr val="accent1"/>
-          </a:lnRef>
-          <a:fillRef idx="3">
-            <a:schemeClr val="accent1"/>
-          </a:fillRef>
-          <a:effectRef idx="2">
-            <a:schemeClr val="accent1"/>
-          </a:effectRef>
-          <a:fontRef idx="minor">
-            <a:schemeClr val="lt1"/>
-          </a:fontRef>
-        </p:style>
-        <p:txBody>
-          <a:bodyPr wrap="none" lIns="45720" tIns="0" rIns="45720" bIns="0" rtlCol="0" anchor="ctr"/>
-          <a:lstStyle/>
-          <a:p>
-            <a:pPr algn="ctr"/>
-            <a:r>
-              <a:rPr sz="1100" b="1">
-                <a:solidFill>
-                  <a:srgbClr val="141628"/>
-                </a:solidFill>
-                <a:latin typeface="Calibri"/>
-              </a:rPr>
-              <a:t>⏱ 3 min · ⌛20:00</a:t>
-            </a:r>
-          </a:p>
-        </p:txBody>
-      </p:sp>
-    </p:spTree>
-  </p:cSld>
-  <p:clrMapOvr>
-    <a:masterClrMapping/>
-  </p:clrMapOvr>
-</p:sld>
-</file>
-
-<file path=ppt/slides/slide2.xml><?xml version="1.0" encoding="utf-8"?>
-<p:sld xmlns:a="http://schemas.openxmlformats.org/drawingml/2006/main" xmlns:r="http://schemas.openxmlformats.org/officeDocument/2006/relationships" xmlns:p="http://schemas.openxmlformats.org/presentationml/2006/main">
-  <p:cSld name="Slide 2">
+  <p:cSld name="Slide 18">
     <p:bg>
       <p:bgPr>
         <a:solidFill>
-          <a:srgbClr val="FEFCF8"/>
+          <a:srgbClr val="FFF4E0"/>
         </a:solidFill>
+        <a:effectLst/>
       </p:bgPr>
     </p:bg>
     <p:spTree>
@@ -7559,11 +9471,11 @@
           <a:bodyPr wrap="square" lIns="0" tIns="0" rIns="0" bIns="0" rtlCol="0" anchor="ctr"/>
           <a:lstStyle/>
           <a:p>
-            <a:pPr indent="0" marL="0">
-              <a:buNone/>
-            </a:pPr>
-            <a:r>
-              <a:rPr lang="en-US" sz="800" b="1" spc="300" kern="0" dirty="0">
+            <a:pPr marL="0" indent="0">
+              <a:buNone/>
+            </a:pPr>
+            <a:r>
+              <a:rPr lang="en-US" sz="800" b="1" kern="0" spc="300" dirty="0">
                 <a:solidFill>
                   <a:srgbClr val="666666"/>
                 </a:solidFill>
@@ -7598,7 +9510,7 @@
           <a:bodyPr wrap="square" lIns="0" tIns="0" rIns="0" bIns="0" rtlCol="0" anchor="ctr"/>
           <a:lstStyle/>
           <a:p>
-            <a:pPr algn="r" indent="0" marL="0">
+            <a:pPr marL="0" indent="0" algn="r">
               <a:buNone/>
             </a:pPr>
             <a:r>
@@ -7610,7 +9522,7 @@
                 <a:ea typeface="Calibri" pitchFamily="34" charset="-122"/>
                 <a:cs typeface="Calibri" pitchFamily="34" charset="-120"/>
               </a:rPr>
-              <a:t>2 / 20</a:t>
+              <a:t>20 / 20</a:t>
             </a:r>
             <a:endParaRPr lang="en-US" sz="800" dirty="0"/>
           </a:p>
@@ -7625,7 +9537,7 @@
         <p:spPr>
           <a:xfrm>
             <a:off x="457200" y="457200"/>
-            <a:ext cx="8229600" cy="365760"/>
+            <a:ext cx="8229600" cy="274320"/>
           </a:xfrm>
           <a:prstGeom prst="rect">
             <a:avLst/>
@@ -7637,11 +9549,11 @@
           <a:bodyPr wrap="square" rtlCol="0" anchor="ctr"/>
           <a:lstStyle/>
           <a:p>
-            <a:pPr algn="ctr" indent="0" marL="0">
-              <a:buNone/>
-            </a:pPr>
-            <a:r>
-              <a:rPr lang="en-US" sz="1200" b="1" spc="400" kern="0" dirty="0">
+            <a:pPr marL="0" indent="0" algn="ctr">
+              <a:buNone/>
+            </a:pPr>
+            <a:r>
+              <a:rPr lang="en-US" sz="1200" b="1" kern="0" spc="400" dirty="0">
                 <a:solidFill>
                   <a:srgbClr val="C97A1A"/>
                 </a:solidFill>
@@ -7649,7 +9561,7 @@
                 <a:ea typeface="Calibri" pitchFamily="34" charset="-122"/>
                 <a:cs typeface="Calibri" pitchFamily="34" charset="-120"/>
               </a:rPr>
-              <a:t>⚡ PUKAW · CALLBACK TO L2</a:t>
+              <a:t>🏠 DALHIN · MEMORIZE</a:t>
             </a:r>
             <a:endParaRPr lang="en-US" sz="1200" dirty="0"/>
           </a:p>
@@ -7663,8 +9575,8 @@
         </p:nvSpPr>
         <p:spPr>
           <a:xfrm>
-            <a:off x="457200" y="1188720"/>
-            <a:ext cx="8229600" cy="457200"/>
+            <a:off x="457200" y="868680"/>
+            <a:ext cx="8229600" cy="365760"/>
           </a:xfrm>
           <a:prstGeom prst="rect">
             <a:avLst/>
@@ -7676,21 +9588,21 @@
           <a:bodyPr wrap="square" rtlCol="0" anchor="ctr"/>
           <a:lstStyle/>
           <a:p>
-            <a:pPr algn="ctr" indent="0" marL="0">
-              <a:buNone/>
-            </a:pPr>
-            <a:r>
-              <a:rPr lang="en-US" sz="1600" i="1" dirty="0">
-                <a:solidFill>
-                  <a:srgbClr val="6A6660"/>
+            <a:pPr marL="0" indent="0" algn="ctr">
+              <a:buNone/>
+            </a:pPr>
+            <a:r>
+              <a:rPr lang="en-US" sz="1200" b="1" kern="0" spc="500" dirty="0">
+                <a:solidFill>
+                  <a:srgbClr val="C97A1A"/>
                 </a:solidFill>
                 <a:latin typeface="Calibri" pitchFamily="34" charset="0"/>
                 <a:ea typeface="Calibri" pitchFamily="34" charset="-122"/>
                 <a:cs typeface="Calibri" pitchFamily="34" charset="-120"/>
               </a:rPr>
-              <a:t>Bago tayo mag-umpisa...</a:t>
-            </a:r>
-            <a:endParaRPr lang="en-US" sz="1600" dirty="0"/>
+              <a:t>SA LOOB NG 2 LINGGO</a:t>
+            </a:r>
+            <a:endParaRPr lang="en-US" sz="1200" dirty="0"/>
           </a:p>
         </p:txBody>
       </p:sp>
@@ -7702,8 +9614,8 @@
         </p:nvSpPr>
         <p:spPr>
           <a:xfrm>
-            <a:off x="457200" y="1828800"/>
-            <a:ext cx="8229600" cy="1828800"/>
+            <a:off x="457200" y="1417320"/>
+            <a:ext cx="8229600" cy="914400"/>
           </a:xfrm>
           <a:prstGeom prst="rect">
             <a:avLst/>
@@ -7715,34 +9627,53 @@
           <a:bodyPr wrap="square" rtlCol="0" anchor="ctr"/>
           <a:lstStyle/>
           <a:p>
-            <a:pPr algn="ctr" indent="0" marL="0">
-              <a:lnSpc>
-                <a:spcPct val="120000"/>
-              </a:lnSpc>
-              <a:buNone/>
-            </a:pPr>
-            <a:r>
-              <a:rPr lang="en-US" sz="3800" b="1" dirty="0">
-                <a:solidFill>
-                  <a:srgbClr val="1B2A4A"/>
+            <a:pPr marL="0" indent="0" algn="ctr">
+              <a:buNone/>
+            </a:pPr>
+            <a:r>
+              <a:rPr lang="en-US" sz="6000" b="1" dirty="0">
+                <a:solidFill>
+                  <a:srgbClr val="C97A1A"/>
                 </a:solidFill>
                 <a:latin typeface="Georgia" pitchFamily="34" charset="0"/>
                 <a:ea typeface="Georgia" pitchFamily="34" charset="-122"/>
                 <a:cs typeface="Georgia" pitchFamily="34" charset="-120"/>
               </a:rPr>
-              <a:t>Kumusta ang 30-day S.O.A.P.S?</a:t>
-            </a:r>
-            <a:endParaRPr lang="en-US" sz="3800" dirty="0"/>
-          </a:p>
-          <a:p>
-            <a:pPr algn="ctr" indent="0" marL="0">
+              <a:t>Roma 12:1</a:t>
+            </a:r>
+            <a:endParaRPr lang="en-US" sz="6000" dirty="0"/>
+          </a:p>
+        </p:txBody>
+      </p:sp>
+      <p:sp>
+        <p:nvSpPr>
+          <p:cNvPr id="7" name="Text 5"/>
+          <p:cNvSpPr/>
+          <p:nvPr/>
+        </p:nvSpPr>
+        <p:spPr>
+          <a:xfrm>
+            <a:off x="457200" y="2468880"/>
+            <a:ext cx="8229600" cy="1371600"/>
+          </a:xfrm>
+          <a:prstGeom prst="rect">
+            <a:avLst/>
+          </a:prstGeom>
+          <a:noFill/>
+          <a:ln/>
+        </p:spPr>
+        <p:txBody>
+          <a:bodyPr wrap="square" rtlCol="0" anchor="ctr"/>
+          <a:lstStyle/>
+          <a:p>
+            <a:pPr marL="0" indent="0" algn="ctr">
               <a:lnSpc>
-                <a:spcPct val="120000"/>
+                <a:spcPct val="145000"/>
               </a:lnSpc>
               <a:buNone/>
             </a:pPr>
             <a:r>
-              <a:rPr lang="en-US" sz="3800" b="1" dirty="0">
+              <a:rPr lang="en-US" sz="1800" i="1" dirty="0">
                 <a:solidFill>
                   <a:srgbClr val="1B2A4A"/>
                 </a:solidFill>
@@ -7750,22 +9681,42 @@
                 <a:ea typeface="Georgia" pitchFamily="34" charset="-122"/>
                 <a:cs typeface="Georgia" pitchFamily="34" charset="-120"/>
               </a:rPr>
-              <a:t>Sino dito ay nag-pick ng John?</a:t>
-            </a:r>
-            <a:endParaRPr lang="en-US" sz="3800" dirty="0"/>
-          </a:p>
-        </p:txBody>
-      </p:sp>
-      <p:sp>
-        <p:nvSpPr>
-          <p:cNvPr id="7" name="Text 5"/>
-          <p:cNvSpPr/>
-          <p:nvPr/>
-        </p:nvSpPr>
-        <p:spPr>
-          <a:xfrm>
-            <a:off x="914400" y="4114800"/>
-            <a:ext cx="7315200" cy="548640"/>
+              <a:t>"...alang-alang sa masaganang habag ng Diyos sa atin,</a:t>
+            </a:r>
+            <a:endParaRPr lang="en-US" sz="1800" dirty="0"/>
+          </a:p>
+          <a:p>
+            <a:pPr marL="0" indent="0" algn="ctr">
+              <a:lnSpc>
+                <a:spcPct val="145000"/>
+              </a:lnSpc>
+              <a:buNone/>
+            </a:pPr>
+            <a:r>
+              <a:rPr lang="en-US" sz="1800" i="1" dirty="0">
+                <a:solidFill>
+                  <a:srgbClr val="1B2A4A"/>
+                </a:solidFill>
+                <a:latin typeface="Georgia" pitchFamily="34" charset="0"/>
+                <a:ea typeface="Georgia" pitchFamily="34" charset="-122"/>
+                <a:cs typeface="Georgia" pitchFamily="34" charset="-120"/>
+              </a:rPr>
+              <a:t>ialay ninyo ang inyong sarili bilang isang handog na buháy..."</a:t>
+            </a:r>
+            <a:endParaRPr lang="en-US" sz="1800" dirty="0"/>
+          </a:p>
+        </p:txBody>
+      </p:sp>
+      <p:sp>
+        <p:nvSpPr>
+          <p:cNvPr id="8" name="Text 6"/>
+          <p:cNvSpPr/>
+          <p:nvPr/>
+        </p:nvSpPr>
+        <p:spPr>
+          <a:xfrm>
+            <a:off x="457200" y="3977640"/>
+            <a:ext cx="8229600" cy="640080"/>
           </a:xfrm>
           <a:prstGeom prst="rect">
             <a:avLst/>
@@ -7777,21 +9728,21 @@
           <a:bodyPr wrap="square" rtlCol="0" anchor="ctr"/>
           <a:lstStyle/>
           <a:p>
-            <a:pPr algn="ctr" indent="0" marL="0">
-              <a:buNone/>
-            </a:pPr>
-            <a:r>
-              <a:rPr lang="en-US" sz="1400" i="1" dirty="0">
-                <a:solidFill>
-                  <a:srgbClr val="6A6660"/>
-                </a:solidFill>
-                <a:latin typeface="Calibri" pitchFamily="34" charset="0"/>
-                <a:ea typeface="Calibri" pitchFamily="34" charset="-122"/>
-                <a:cs typeface="Calibri" pitchFamily="34" charset="-120"/>
-              </a:rPr>
-              <a:t>Ilang chapters na kayo? Sino dito ay umabot ng Day 14?</a:t>
-            </a:r>
-            <a:endParaRPr lang="en-US" sz="1400" dirty="0"/>
+            <a:pPr marL="0" indent="0" algn="ctr">
+              <a:buNone/>
+            </a:pPr>
+            <a:r>
+              <a:rPr lang="en-US" sz="2800" b="1" i="1" dirty="0">
+                <a:solidFill>
+                  <a:srgbClr val="C97A1A"/>
+                </a:solidFill>
+                <a:latin typeface="Georgia" pitchFamily="34" charset="0"/>
+                <a:ea typeface="Georgia" pitchFamily="34" charset="-122"/>
+                <a:cs typeface="Georgia" pitchFamily="34" charset="-120"/>
+              </a:rPr>
+              <a:t>O the joy of full salvation!</a:t>
+            </a:r>
+            <a:endParaRPr lang="en-US" sz="2800" dirty="0"/>
           </a:p>
         </p:txBody>
       </p:sp>
@@ -7843,348 +9794,7 @@
                 </a:solidFill>
                 <a:latin typeface="Calibri"/>
               </a:rPr>
-              <a:t>⏱ 2 min · ⌛2:00</a:t>
-            </a:r>
-          </a:p>
-        </p:txBody>
-      </p:sp>
-    </p:spTree>
-  </p:cSld>
-  <p:clrMapOvr>
-    <a:masterClrMapping/>
-  </p:clrMapOvr>
-</p:sld>
-</file>
-
-<file path=ppt/slides/slide20.xml><?xml version="1.0" encoding="utf-8"?>
-<p:sld xmlns:a="http://schemas.openxmlformats.org/drawingml/2006/main" xmlns:r="http://schemas.openxmlformats.org/officeDocument/2006/relationships" xmlns:p="http://schemas.openxmlformats.org/presentationml/2006/main">
-  <p:cSld>
-    <p:spTree>
-      <p:nvGrpSpPr>
-        <p:cNvPr id="1" name=""/>
-        <p:cNvGrpSpPr/>
-        <p:nvPr/>
-      </p:nvGrpSpPr>
-      <p:grpSpPr>
-        <a:xfrm>
-          <a:off x="0" y="0"/>
-          <a:ext cx="0" cy="0"/>
-          <a:chOff x="0" y="0"/>
-          <a:chExt cx="0" cy="0"/>
-        </a:xfrm>
-      </p:grpSpPr>
-      <p:sp>
-        <p:nvSpPr>
-          <p:cNvPr id="2" name="BG"/>
-          <p:cNvSpPr/>
-          <p:nvPr/>
-        </p:nvSpPr>
-        <p:spPr>
-          <a:xfrm>
-            <a:off x="0" y="0"/>
-            <a:ext cx="9144000" cy="5143500"/>
-          </a:xfrm>
-          <a:prstGeom prst="rect">
-            <a:avLst/>
-          </a:prstGeom>
-          <a:solidFill>
-            <a:srgbClr val="0F1C34"/>
-          </a:solidFill>
-          <a:ln>
-            <a:noFill/>
-          </a:ln>
-          <a:effectLst/>
-        </p:spPr>
-        <p:style>
-          <a:lnRef idx="1">
-            <a:schemeClr val="accent1"/>
-          </a:lnRef>
-          <a:fillRef idx="3">
-            <a:schemeClr val="accent1"/>
-          </a:fillRef>
-          <a:effectRef idx="2">
-            <a:schemeClr val="accent1"/>
-          </a:effectRef>
-          <a:fontRef idx="minor">
-            <a:schemeClr val="lt1"/>
-          </a:fontRef>
-        </p:style>
-        <p:txBody>
-          <a:bodyPr rtlCol="0" anchor="ctr"/>
-          <a:lstStyle/>
-          <a:p>
-            <a:pPr algn="ctr"/>
-            <a:endParaRPr/>
-          </a:p>
-        </p:txBody>
-      </p:sp>
-      <p:sp>
-        <p:nvSpPr>
-          <p:cNvPr id="3" name="MULTIPLY"/>
-          <p:cNvSpPr txBox="1"/>
-          <p:nvPr/>
-        </p:nvSpPr>
-        <p:spPr>
-          <a:xfrm>
-            <a:off x="365760" y="137160"/>
-            <a:ext cx="5486400" cy="228600"/>
-          </a:xfrm>
-          <a:prstGeom prst="rect">
-            <a:avLst/>
-          </a:prstGeom>
-          <a:noFill/>
-        </p:spPr>
-        <p:txBody>
-          <a:bodyPr wrap="square"/>
-          <a:lstStyle/>
-          <a:p>
-            <a:pPr algn="l"/>
-            <a:r>
-              <a:rPr sz="900" b="1" i="0">
-                <a:solidFill>
-                  <a:srgbClr val="808080"/>
-                </a:solidFill>
-                <a:latin typeface="Calibri"/>
-              </a:rPr>
-              <a:t>MULTIPLY · DISCIPLE-MAKING PIPELINE</a:t>
-            </a:r>
-          </a:p>
-        </p:txBody>
-      </p:sp>
-      <p:sp>
-        <p:nvSpPr>
-          <p:cNvPr id="4" name="Footer"/>
-          <p:cNvSpPr txBox="1"/>
-          <p:nvPr/>
-        </p:nvSpPr>
-        <p:spPr>
-          <a:xfrm>
-            <a:off x="7772400" y="4846320"/>
-            <a:ext cx="1188720" cy="228600"/>
-          </a:xfrm>
-          <a:prstGeom prst="rect">
-            <a:avLst/>
-          </a:prstGeom>
-          <a:noFill/>
-        </p:spPr>
-        <p:txBody>
-          <a:bodyPr wrap="square"/>
-          <a:lstStyle/>
-          <a:p>
-            <a:pPr algn="r"/>
-            <a:r>
-              <a:rPr sz="900" b="0" i="0">
-                <a:solidFill>
-                  <a:srgbClr val="808080"/>
-                </a:solidFill>
-                <a:latin typeface="Calibri"/>
-              </a:rPr>
-              <a:t>18 / 20</a:t>
-            </a:r>
-          </a:p>
-        </p:txBody>
-      </p:sp>
-      <p:sp>
-        <p:nvSpPr>
-          <p:cNvPr id="5" name="Header"/>
-          <p:cNvSpPr txBox="1"/>
-          <p:nvPr/>
-        </p:nvSpPr>
-        <p:spPr>
-          <a:xfrm>
-            <a:off x="457200" y="457200"/>
-            <a:ext cx="8229600" cy="365760"/>
-          </a:xfrm>
-          <a:prstGeom prst="rect">
-            <a:avLst/>
-          </a:prstGeom>
-          <a:noFill/>
-        </p:spPr>
-        <p:txBody>
-          <a:bodyPr wrap="square"/>
-          <a:lstStyle/>
-          <a:p>
-            <a:pPr algn="ctr"/>
-            <a:r>
-              <a:rPr sz="1500" b="1" i="0">
-                <a:solidFill>
-                  <a:srgbClr val="D4A84A"/>
-                </a:solidFill>
-                <a:latin typeface="Calibri"/>
-              </a:rPr>
-              <a:t>🎵 DALHIN · TANONG</a:t>
-            </a:r>
-          </a:p>
-        </p:txBody>
-      </p:sp>
-      <p:sp>
-        <p:nvSpPr>
-          <p:cNvPr id="6" name="PGBadge"/>
-          <p:cNvSpPr/>
-          <p:nvPr/>
-        </p:nvSpPr>
-        <p:spPr>
-          <a:xfrm>
-            <a:off x="2788920" y="1024128"/>
-            <a:ext cx="3566160" cy="329184"/>
-          </a:xfrm>
-          <a:prstGeom prst="roundRect">
-            <a:avLst/>
-          </a:prstGeom>
-          <a:solidFill>
-            <a:srgbClr val="D4A84A"/>
-          </a:solidFill>
-          <a:ln>
-            <a:noFill/>
-          </a:ln>
-          <a:effectLst/>
-        </p:spPr>
-        <p:style>
-          <a:lnRef idx="1">
-            <a:schemeClr val="accent1"/>
-          </a:lnRef>
-          <a:fillRef idx="3">
-            <a:schemeClr val="accent1"/>
-          </a:fillRef>
-          <a:effectRef idx="2">
-            <a:schemeClr val="accent1"/>
-          </a:effectRef>
-          <a:fontRef idx="minor">
-            <a:schemeClr val="lt1"/>
-          </a:fontRef>
-        </p:style>
-        <p:txBody>
-          <a:bodyPr tIns="0" bIns="0" rtlCol="0" anchor="ctr"/>
-          <a:lstStyle/>
-          <a:p>
-            <a:pPr algn="ctr"/>
-            <a:r>
-              <a:rPr sz="1100" b="1" i="0">
-                <a:solidFill>
-                  <a:srgbClr val="141628"/>
-                </a:solidFill>
-                <a:latin typeface="Calibri"/>
-              </a:rPr>
-              <a:t>📋 Participant Guide Question</a:t>
-            </a:r>
-          </a:p>
-        </p:txBody>
-      </p:sp>
-      <p:sp>
-        <p:nvSpPr>
-          <p:cNvPr id="7" name="Question"/>
-          <p:cNvSpPr txBox="1"/>
-          <p:nvPr/>
-        </p:nvSpPr>
-        <p:spPr>
-          <a:xfrm>
-            <a:off x="731520" y="1783080"/>
-            <a:ext cx="7680960" cy="2194560"/>
-          </a:xfrm>
-          <a:prstGeom prst="rect">
-            <a:avLst/>
-          </a:prstGeom>
-          <a:noFill/>
-        </p:spPr>
-        <p:txBody>
-          <a:bodyPr wrap="square" anchor="ctr"/>
-          <a:lstStyle/>
-          <a:p>
-            <a:pPr algn="ctr"/>
-            <a:r>
-              <a:rPr sz="3000" b="1" i="0">
-                <a:solidFill>
-                  <a:srgbClr val="FEFCF8"/>
-                </a:solidFill>
-                <a:latin typeface="Calibri"/>
-              </a:rPr>
-              <a:t>Anong linya ng himno ang pinakatumama sa'yo? Bakit?</a:t>
-            </a:r>
-          </a:p>
-        </p:txBody>
-      </p:sp>
-      <p:sp>
-        <p:nvSpPr>
-          <p:cNvPr id="8" name="AnswerMode"/>
-          <p:cNvSpPr txBox="1"/>
-          <p:nvPr/>
-        </p:nvSpPr>
-        <p:spPr>
-          <a:xfrm>
-            <a:off x="731520" y="4160520"/>
-            <a:ext cx="7680960" cy="548640"/>
-          </a:xfrm>
-          <a:prstGeom prst="rect">
-            <a:avLst/>
-          </a:prstGeom>
-          <a:noFill/>
-        </p:spPr>
-        <p:txBody>
-          <a:bodyPr wrap="square"/>
-          <a:lstStyle/>
-          <a:p>
-            <a:pPr algn="ctr"/>
-            <a:r>
-              <a:rPr sz="1450" b="0" i="1">
-                <a:solidFill>
-                  <a:srgbClr val="D4A84A"/>
-                </a:solidFill>
-                <a:latin typeface="Calibri"/>
-              </a:rPr>
-              <a:t>I-underline sa Participant Guide — tapos 1–2 boluntaryong share.</a:t>
-            </a:r>
-          </a:p>
-        </p:txBody>
-      </p:sp>
-      <p:sp>
-        <p:nvSpPr>
-          <p:cNvPr id="9" name="TimerPill"/>
-          <p:cNvSpPr/>
-          <p:nvPr/>
-        </p:nvSpPr>
-        <p:spPr>
-          <a:xfrm>
-            <a:off x="7205472" y="118872"/>
-            <a:ext cx="1828800" cy="365760"/>
-          </a:xfrm>
-          <a:prstGeom prst="roundRect">
-            <a:avLst/>
-          </a:prstGeom>
-          <a:solidFill>
-            <a:srgbClr val="D4AF37"/>
-          </a:solidFill>
-          <a:ln>
-            <a:noFill/>
-          </a:ln>
-          <a:effectLst/>
-        </p:spPr>
-        <p:style>
-          <a:lnRef idx="1">
-            <a:schemeClr val="accent1"/>
-          </a:lnRef>
-          <a:fillRef idx="3">
-            <a:schemeClr val="accent1"/>
-          </a:fillRef>
-          <a:effectRef idx="2">
-            <a:schemeClr val="accent1"/>
-          </a:effectRef>
-          <a:fontRef idx="minor">
-            <a:schemeClr val="lt1"/>
-          </a:fontRef>
-        </p:style>
-        <p:txBody>
-          <a:bodyPr wrap="none" lIns="45720" tIns="0" rIns="45720" bIns="0" rtlCol="0" anchor="ctr"/>
-          <a:lstStyle/>
-          <a:p>
-            <a:pPr algn="ctr"/>
-            <a:r>
-              <a:rPr sz="1100" b="1">
-                <a:solidFill>
-                  <a:srgbClr val="141628"/>
-                </a:solidFill>
-                <a:latin typeface="Calibri"/>
-              </a:rPr>
-              <a:t>⏱ 2 min · ⌛53:00</a:t>
+              <a:t>⏱ 1 min · ⌛55:00</a:t>
             </a:r>
           </a:p>
         </p:txBody>
@@ -8205,6 +9815,7 @@
         <a:solidFill>
           <a:srgbClr val="1A1A1A"/>
         </a:solidFill>
+        <a:effectLst/>
       </p:bgPr>
     </p:bg>
     <p:spTree>
@@ -8242,11 +9853,11 @@
           <a:bodyPr wrap="square" lIns="0" tIns="0" rIns="0" bIns="0" rtlCol="0" anchor="ctr"/>
           <a:lstStyle/>
           <a:p>
-            <a:pPr indent="0" marL="0">
-              <a:buNone/>
-            </a:pPr>
-            <a:r>
-              <a:rPr lang="en-US" sz="800" b="1" spc="300" kern="0" dirty="0">
+            <a:pPr marL="0" indent="0">
+              <a:buNone/>
+            </a:pPr>
+            <a:r>
+              <a:rPr lang="en-US" sz="800" b="1" kern="0" spc="300" dirty="0">
                 <a:solidFill>
                   <a:srgbClr val="F0C060"/>
                 </a:solidFill>
@@ -8281,7 +9892,7 @@
           <a:bodyPr wrap="square" lIns="0" tIns="0" rIns="0" bIns="0" rtlCol="0" anchor="ctr"/>
           <a:lstStyle/>
           <a:p>
-            <a:pPr algn="r" indent="0" marL="0">
+            <a:pPr marL="0" indent="0" algn="r">
               <a:buNone/>
             </a:pPr>
             <a:r>
@@ -8320,11 +9931,11 @@
           <a:bodyPr wrap="square" rtlCol="0" anchor="ctr"/>
           <a:lstStyle/>
           <a:p>
-            <a:pPr algn="ctr" indent="0" marL="0">
-              <a:buNone/>
-            </a:pPr>
-            <a:r>
-              <a:rPr lang="en-US" sz="1200" b="1" spc="400" kern="0" dirty="0">
+            <a:pPr marL="0" indent="0" algn="ctr">
+              <a:buNone/>
+            </a:pPr>
+            <a:r>
+              <a:rPr lang="en-US" sz="1200" b="1" kern="0" spc="400" dirty="0">
                 <a:solidFill>
                   <a:srgbClr val="F0C060"/>
                 </a:solidFill>
@@ -8359,7 +9970,7 @@
           <a:bodyPr wrap="square" rtlCol="0" anchor="ctr"/>
           <a:lstStyle/>
           <a:p>
-            <a:pPr algn="ctr" indent="0" marL="0">
+            <a:pPr marL="0" indent="0" algn="ctr">
               <a:buNone/>
             </a:pPr>
             <a:r>
@@ -8398,7 +10009,7 @@
           <a:bodyPr wrap="square" rtlCol="0" anchor="ctr"/>
           <a:lstStyle/>
           <a:p>
-            <a:pPr algn="ctr" indent="0" marL="0">
+            <a:pPr marL="0" indent="0" algn="ctr">
               <a:lnSpc>
                 <a:spcPct val="140000"/>
               </a:lnSpc>
@@ -8418,7 +10029,7 @@
             <a:endParaRPr lang="en-US" sz="2200" dirty="0"/>
           </a:p>
           <a:p>
-            <a:pPr algn="ctr" indent="0" marL="0">
+            <a:pPr marL="0" indent="0" algn="ctr">
               <a:lnSpc>
                 <a:spcPct val="140000"/>
               </a:lnSpc>
@@ -8508,6 +10119,7 @@
         <a:solidFill>
           <a:srgbClr val="1A1A1A"/>
         </a:solidFill>
+        <a:effectLst/>
       </p:bgPr>
     </p:bg>
     <p:spTree>
@@ -8545,11 +10157,11 @@
           <a:bodyPr wrap="square" lIns="0" tIns="0" rIns="0" bIns="0" rtlCol="0" anchor="ctr"/>
           <a:lstStyle/>
           <a:p>
-            <a:pPr indent="0" marL="0">
-              <a:buNone/>
-            </a:pPr>
-            <a:r>
-              <a:rPr lang="en-US" sz="800" b="1" spc="300" kern="0" dirty="0">
+            <a:pPr marL="0" indent="0">
+              <a:buNone/>
+            </a:pPr>
+            <a:r>
+              <a:rPr lang="en-US" sz="800" b="1" kern="0" spc="300" dirty="0">
                 <a:solidFill>
                   <a:srgbClr val="F0C060"/>
                 </a:solidFill>
@@ -8584,7 +10196,7 @@
           <a:bodyPr wrap="square" lIns="0" tIns="0" rIns="0" bIns="0" rtlCol="0" anchor="ctr"/>
           <a:lstStyle/>
           <a:p>
-            <a:pPr algn="r" indent="0" marL="0">
+            <a:pPr marL="0" indent="0" algn="r">
               <a:buNone/>
             </a:pPr>
             <a:r>
@@ -8623,11 +10235,11 @@
           <a:bodyPr wrap="square" rtlCol="0" anchor="ctr"/>
           <a:lstStyle/>
           <a:p>
-            <a:pPr algn="ctr" indent="0" marL="0">
-              <a:buNone/>
-            </a:pPr>
-            <a:r>
-              <a:rPr lang="en-US" sz="1100" b="1" spc="400" kern="0" dirty="0">
+            <a:pPr marL="0" indent="0" algn="ctr">
+              <a:buNone/>
+            </a:pPr>
+            <a:r>
+              <a:rPr lang="en-US" sz="1100" b="1" kern="0" spc="400" dirty="0">
                 <a:solidFill>
                   <a:srgbClr val="F0C060"/>
                 </a:solidFill>
@@ -8662,7 +10274,7 @@
           <a:bodyPr wrap="square" rtlCol="0" anchor="t"/>
           <a:lstStyle/>
           <a:p>
-            <a:pPr algn="ctr" indent="0" marL="0">
+            <a:pPr marL="0" indent="0" algn="ctr">
               <a:lnSpc>
                 <a:spcPct val="155000"/>
               </a:lnSpc>
@@ -8679,24 +10291,74 @@
               </a:rPr>
               <a:t>Hiniling ng </a:t>
             </a:r>
-            <a:pPr algn="ctr" indent="0" marL="0">
+            <a:r>
+              <a:rPr lang="en-US" sz="1400" b="1" dirty="0">
+                <a:solidFill>
+                  <a:srgbClr val="F5D97A"/>
+                </a:solidFill>
+                <a:latin typeface="Calibri" pitchFamily="34" charset="0"/>
+                <a:ea typeface="Calibri" pitchFamily="34" charset="-122"/>
+                <a:cs typeface="Calibri" pitchFamily="34" charset="-120"/>
+              </a:rPr>
+              <a:t>Allied forces </a:t>
+            </a:r>
+            <a:r>
+              <a:rPr lang="en-US" sz="1400" dirty="0">
+                <a:solidFill>
+                  <a:srgbClr val="D8C890"/>
+                </a:solidFill>
+                <a:latin typeface="Calibri" pitchFamily="34" charset="0"/>
+                <a:ea typeface="Calibri" pitchFamily="34" charset="-122"/>
+                <a:cs typeface="Calibri" pitchFamily="34" charset="-120"/>
+              </a:rPr>
+              <a:t>(Truman) ang </a:t>
+            </a:r>
+            <a:r>
+              <a:rPr lang="en-US" sz="1400" b="1" dirty="0">
+                <a:solidFill>
+                  <a:srgbClr val="F5D97A"/>
+                </a:solidFill>
+                <a:latin typeface="Calibri" pitchFamily="34" charset="0"/>
+                <a:ea typeface="Calibri" pitchFamily="34" charset="-122"/>
+                <a:cs typeface="Calibri" pitchFamily="34" charset="-120"/>
+              </a:rPr>
+              <a:t>unconditional surrender </a:t>
+            </a:r>
+            <a:r>
+              <a:rPr lang="en-US" sz="1400" dirty="0">
+                <a:solidFill>
+                  <a:srgbClr val="D8C890"/>
+                </a:solidFill>
+                <a:latin typeface="Calibri" pitchFamily="34" charset="0"/>
+                <a:ea typeface="Calibri" pitchFamily="34" charset="-122"/>
+                <a:cs typeface="Calibri" pitchFamily="34" charset="-120"/>
+              </a:rPr>
+              <a:t>ng Japan.</a:t>
+            </a:r>
+            <a:endParaRPr lang="en-US" sz="1400" dirty="0"/>
+          </a:p>
+          <a:p>
+            <a:pPr marL="0" indent="0" algn="ctr">
               <a:lnSpc>
                 <a:spcPct val="155000"/>
               </a:lnSpc>
               <a:buNone/>
             </a:pPr>
             <a:r>
-              <a:rPr lang="en-US" sz="1400" b="1" dirty="0">
-                <a:solidFill>
-                  <a:srgbClr val="F5D97A"/>
+              <a:rPr lang="en-US" sz="1400" dirty="0">
+                <a:solidFill>
+                  <a:srgbClr val="000000"/>
                 </a:solidFill>
                 <a:latin typeface="Calibri" pitchFamily="34" charset="0"/>
                 <a:ea typeface="Calibri" pitchFamily="34" charset="-122"/>
                 <a:cs typeface="Calibri" pitchFamily="34" charset="-120"/>
               </a:rPr>
-              <a:t>Allied forces </a:t>
-            </a:r>
-            <a:pPr algn="ctr" indent="0" marL="0">
+              <a:t> </a:t>
+            </a:r>
+            <a:endParaRPr lang="en-US" sz="1400" dirty="0"/>
+          </a:p>
+          <a:p>
+            <a:pPr marL="0" indent="0" algn="ctr">
               <a:lnSpc>
                 <a:spcPct val="155000"/>
               </a:lnSpc>
@@ -8711,26 +10373,54 @@
                 <a:ea typeface="Calibri" pitchFamily="34" charset="-122"/>
                 <a:cs typeface="Calibri" pitchFamily="34" charset="-120"/>
               </a:rPr>
-              <a:t>(Truman) ang </a:t>
-            </a:r>
-            <a:pPr algn="ctr" indent="0" marL="0">
+              <a:t>Tinanong ng reporters si PM Suzuki — isang salita lang: </a:t>
+            </a:r>
+            <a:r>
+              <a:rPr lang="en-US" sz="1400" i="1" dirty="0">
+                <a:solidFill>
+                  <a:srgbClr val="F0C060"/>
+                </a:solidFill>
+                <a:latin typeface="Calibri" pitchFamily="34" charset="0"/>
+                <a:ea typeface="Calibri" pitchFamily="34" charset="-122"/>
+                <a:cs typeface="Calibri" pitchFamily="34" charset="-120"/>
+              </a:rPr>
+              <a:t>mokusatsu</a:t>
+            </a:r>
+            <a:r>
+              <a:rPr lang="en-US" sz="1400" dirty="0">
+                <a:solidFill>
+                  <a:srgbClr val="D8C890"/>
+                </a:solidFill>
+                <a:latin typeface="Calibri" pitchFamily="34" charset="0"/>
+                <a:ea typeface="Calibri" pitchFamily="34" charset="-122"/>
+                <a:cs typeface="Calibri" pitchFamily="34" charset="-120"/>
+              </a:rPr>
+              <a:t>.</a:t>
+            </a:r>
+            <a:endParaRPr lang="en-US" sz="1400" dirty="0"/>
+          </a:p>
+          <a:p>
+            <a:pPr marL="0" indent="0" algn="ctr">
               <a:lnSpc>
                 <a:spcPct val="155000"/>
               </a:lnSpc>
               <a:buNone/>
             </a:pPr>
             <a:r>
-              <a:rPr lang="en-US" sz="1400" b="1" dirty="0">
-                <a:solidFill>
-                  <a:srgbClr val="F5D97A"/>
+              <a:rPr lang="en-US" sz="1400" dirty="0">
+                <a:solidFill>
+                  <a:srgbClr val="000000"/>
                 </a:solidFill>
                 <a:latin typeface="Calibri" pitchFamily="34" charset="0"/>
                 <a:ea typeface="Calibri" pitchFamily="34" charset="-122"/>
                 <a:cs typeface="Calibri" pitchFamily="34" charset="-120"/>
               </a:rPr>
-              <a:t>unconditional surrender </a:t>
-            </a:r>
-            <a:pPr algn="ctr" indent="0" marL="0">
+              <a:t> </a:t>
+            </a:r>
+            <a:endParaRPr lang="en-US" sz="1400" dirty="0"/>
+          </a:p>
+          <a:p>
+            <a:pPr marL="0" indent="0" algn="ctr">
               <a:lnSpc>
                 <a:spcPct val="155000"/>
               </a:lnSpc>
@@ -8745,12 +10435,56 @@
                 <a:ea typeface="Calibri" pitchFamily="34" charset="-122"/>
                 <a:cs typeface="Calibri" pitchFamily="34" charset="-120"/>
               </a:rPr>
-              <a:t>ng Japan.</a:t>
+              <a:t>Maaaring </a:t>
+            </a:r>
+            <a:r>
+              <a:rPr lang="en-US" sz="1400" i="1" dirty="0">
+                <a:solidFill>
+                  <a:srgbClr val="D8C890"/>
+                </a:solidFill>
+                <a:latin typeface="Calibri" pitchFamily="34" charset="0"/>
+                <a:ea typeface="Calibri" pitchFamily="34" charset="-122"/>
+                <a:cs typeface="Calibri" pitchFamily="34" charset="-120"/>
+              </a:rPr>
+              <a:t>"no comment muna"</a:t>
+            </a:r>
+            <a:r>
+              <a:rPr lang="en-US" sz="1400" dirty="0">
+                <a:solidFill>
+                  <a:srgbClr val="D8C890"/>
+                </a:solidFill>
+                <a:latin typeface="Calibri" pitchFamily="34" charset="0"/>
+                <a:ea typeface="Calibri" pitchFamily="34" charset="-122"/>
+                <a:cs typeface="Calibri" pitchFamily="34" charset="-120"/>
+              </a:rPr>
+              <a:t>... o </a:t>
+            </a:r>
+            <a:r>
+              <a:rPr lang="en-US" sz="1400" i="1" dirty="0">
+                <a:solidFill>
+                  <a:srgbClr val="D8C890"/>
+                </a:solidFill>
+                <a:latin typeface="Calibri" pitchFamily="34" charset="0"/>
+                <a:ea typeface="Calibri" pitchFamily="34" charset="-122"/>
+                <a:cs typeface="Calibri" pitchFamily="34" charset="-120"/>
+              </a:rPr>
+              <a:t>"I disregard."</a:t>
+            </a:r>
+            <a:r>
+              <a:rPr lang="en-US" sz="1400" dirty="0">
+                <a:solidFill>
+                  <a:srgbClr val="D8C890"/>
+                </a:solidFill>
+                <a:latin typeface="Calibri" pitchFamily="34" charset="0"/>
+                <a:ea typeface="Calibri" pitchFamily="34" charset="-122"/>
+                <a:cs typeface="Calibri" pitchFamily="34" charset="-120"/>
+              </a:rPr>
+              <a:t> Pinili ng translators ang second.</a:t>
             </a:r>
             <a:endParaRPr lang="en-US" sz="1400" dirty="0"/>
           </a:p>
           <a:p>
-            <a:pPr algn="ctr" indent="0" marL="0">
+            <a:pPr marL="0" indent="0" algn="ctr">
               <a:lnSpc>
                 <a:spcPct val="155000"/>
               </a:lnSpc>
@@ -8770,203 +10504,21 @@
             <a:endParaRPr lang="en-US" sz="1400" dirty="0"/>
           </a:p>
           <a:p>
-            <a:pPr algn="ctr" indent="0" marL="0">
+            <a:pPr marL="0" indent="0" algn="ctr">
               <a:lnSpc>
                 <a:spcPct val="155000"/>
               </a:lnSpc>
               <a:buNone/>
             </a:pPr>
             <a:r>
-              <a:rPr lang="en-US" sz="1400" dirty="0">
-                <a:solidFill>
-                  <a:srgbClr val="D8C890"/>
+              <a:rPr lang="en-US" sz="1400" b="1" dirty="0">
+                <a:solidFill>
+                  <a:srgbClr val="F5D97A"/>
                 </a:solidFill>
                 <a:latin typeface="Calibri" pitchFamily="34" charset="0"/>
                 <a:ea typeface="Calibri" pitchFamily="34" charset="-122"/>
                 <a:cs typeface="Calibri" pitchFamily="34" charset="-120"/>
               </a:rPr>
-              <a:t>Tinanong ng reporters si PM Suzuki — isang salita lang: </a:t>
-            </a:r>
-            <a:pPr algn="ctr" indent="0" marL="0">
-              <a:lnSpc>
-                <a:spcPct val="155000"/>
-              </a:lnSpc>
-              <a:buNone/>
-            </a:pPr>
-            <a:r>
-              <a:rPr lang="en-US" sz="1400" i="1" dirty="0">
-                <a:solidFill>
-                  <a:srgbClr val="F0C060"/>
-                </a:solidFill>
-                <a:latin typeface="Calibri" pitchFamily="34" charset="0"/>
-                <a:ea typeface="Calibri" pitchFamily="34" charset="-122"/>
-                <a:cs typeface="Calibri" pitchFamily="34" charset="-120"/>
-              </a:rPr>
-              <a:t>mokusatsu</a:t>
-            </a:r>
-            <a:pPr algn="ctr" indent="0" marL="0">
-              <a:lnSpc>
-                <a:spcPct val="155000"/>
-              </a:lnSpc>
-              <a:buNone/>
-            </a:pPr>
-            <a:r>
-              <a:rPr lang="en-US" sz="1400" dirty="0">
-                <a:solidFill>
-                  <a:srgbClr val="D8C890"/>
-                </a:solidFill>
-                <a:latin typeface="Calibri" pitchFamily="34" charset="0"/>
-                <a:ea typeface="Calibri" pitchFamily="34" charset="-122"/>
-                <a:cs typeface="Calibri" pitchFamily="34" charset="-120"/>
-              </a:rPr>
-              <a:t>.</a:t>
-            </a:r>
-            <a:endParaRPr lang="en-US" sz="1400" dirty="0"/>
-          </a:p>
-          <a:p>
-            <a:pPr algn="ctr" indent="0" marL="0">
-              <a:lnSpc>
-                <a:spcPct val="155000"/>
-              </a:lnSpc>
-              <a:buNone/>
-            </a:pPr>
-            <a:r>
-              <a:rPr lang="en-US" sz="1400" dirty="0">
-                <a:solidFill>
-                  <a:srgbClr val="000000"/>
-                </a:solidFill>
-                <a:latin typeface="Calibri" pitchFamily="34" charset="0"/>
-                <a:ea typeface="Calibri" pitchFamily="34" charset="-122"/>
-                <a:cs typeface="Calibri" pitchFamily="34" charset="-120"/>
-              </a:rPr>
-              <a:t> </a:t>
-            </a:r>
-            <a:endParaRPr lang="en-US" sz="1400" dirty="0"/>
-          </a:p>
-          <a:p>
-            <a:pPr algn="ctr" indent="0" marL="0">
-              <a:lnSpc>
-                <a:spcPct val="155000"/>
-              </a:lnSpc>
-              <a:buNone/>
-            </a:pPr>
-            <a:r>
-              <a:rPr lang="en-US" sz="1400" dirty="0">
-                <a:solidFill>
-                  <a:srgbClr val="D8C890"/>
-                </a:solidFill>
-                <a:latin typeface="Calibri" pitchFamily="34" charset="0"/>
-                <a:ea typeface="Calibri" pitchFamily="34" charset="-122"/>
-                <a:cs typeface="Calibri" pitchFamily="34" charset="-120"/>
-              </a:rPr>
-              <a:t>Maaaring </a:t>
-            </a:r>
-            <a:pPr algn="ctr" indent="0" marL="0">
-              <a:lnSpc>
-                <a:spcPct val="155000"/>
-              </a:lnSpc>
-              <a:buNone/>
-            </a:pPr>
-            <a:r>
-              <a:rPr lang="en-US" sz="1400" i="1" dirty="0">
-                <a:solidFill>
-                  <a:srgbClr val="D8C890"/>
-                </a:solidFill>
-                <a:latin typeface="Calibri" pitchFamily="34" charset="0"/>
-                <a:ea typeface="Calibri" pitchFamily="34" charset="-122"/>
-                <a:cs typeface="Calibri" pitchFamily="34" charset="-120"/>
-              </a:rPr>
-              <a:t>"no comment muna"</a:t>
-            </a:r>
-            <a:pPr algn="ctr" indent="0" marL="0">
-              <a:lnSpc>
-                <a:spcPct val="155000"/>
-              </a:lnSpc>
-              <a:buNone/>
-            </a:pPr>
-            <a:r>
-              <a:rPr lang="en-US" sz="1400" dirty="0">
-                <a:solidFill>
-                  <a:srgbClr val="D8C890"/>
-                </a:solidFill>
-                <a:latin typeface="Calibri" pitchFamily="34" charset="0"/>
-                <a:ea typeface="Calibri" pitchFamily="34" charset="-122"/>
-                <a:cs typeface="Calibri" pitchFamily="34" charset="-120"/>
-              </a:rPr>
-              <a:t>... o </a:t>
-            </a:r>
-            <a:pPr algn="ctr" indent="0" marL="0">
-              <a:lnSpc>
-                <a:spcPct val="155000"/>
-              </a:lnSpc>
-              <a:buNone/>
-            </a:pPr>
-            <a:r>
-              <a:rPr lang="en-US" sz="1400" i="1" dirty="0">
-                <a:solidFill>
-                  <a:srgbClr val="D8C890"/>
-                </a:solidFill>
-                <a:latin typeface="Calibri" pitchFamily="34" charset="0"/>
-                <a:ea typeface="Calibri" pitchFamily="34" charset="-122"/>
-                <a:cs typeface="Calibri" pitchFamily="34" charset="-120"/>
-              </a:rPr>
-              <a:t>"I disregard."</a:t>
-            </a:r>
-            <a:pPr algn="ctr" indent="0" marL="0">
-              <a:lnSpc>
-                <a:spcPct val="155000"/>
-              </a:lnSpc>
-              <a:buNone/>
-            </a:pPr>
-            <a:r>
-              <a:rPr lang="en-US" sz="1400" dirty="0">
-                <a:solidFill>
-                  <a:srgbClr val="D8C890"/>
-                </a:solidFill>
-                <a:latin typeface="Calibri" pitchFamily="34" charset="0"/>
-                <a:ea typeface="Calibri" pitchFamily="34" charset="-122"/>
-                <a:cs typeface="Calibri" pitchFamily="34" charset="-120"/>
-              </a:rPr>
-              <a:t> Pinili ng translators ang second.</a:t>
-            </a:r>
-            <a:endParaRPr lang="en-US" sz="1400" dirty="0"/>
-          </a:p>
-          <a:p>
-            <a:pPr algn="ctr" indent="0" marL="0">
-              <a:lnSpc>
-                <a:spcPct val="155000"/>
-              </a:lnSpc>
-              <a:buNone/>
-            </a:pPr>
-            <a:r>
-              <a:rPr lang="en-US" sz="1400" dirty="0">
-                <a:solidFill>
-                  <a:srgbClr val="000000"/>
-                </a:solidFill>
-                <a:latin typeface="Calibri" pitchFamily="34" charset="0"/>
-                <a:ea typeface="Calibri" pitchFamily="34" charset="-122"/>
-                <a:cs typeface="Calibri" pitchFamily="34" charset="-120"/>
-              </a:rPr>
-              <a:t> </a:t>
-            </a:r>
-            <a:endParaRPr lang="en-US" sz="1400" dirty="0"/>
-          </a:p>
-          <a:p>
-            <a:pPr algn="ctr" indent="0" marL="0">
-              <a:lnSpc>
-                <a:spcPct val="155000"/>
-              </a:lnSpc>
-              <a:buNone/>
-            </a:pPr>
-            <a:r>
-              <a:rPr lang="en-US" sz="1400" b="1" dirty="0">
-                <a:solidFill>
-                  <a:srgbClr val="F5D97A"/>
-                </a:solidFill>
-                <a:latin typeface="Calibri" pitchFamily="34" charset="0"/>
-                <a:ea typeface="Calibri" pitchFamily="34" charset="-122"/>
-                <a:cs typeface="Calibri" pitchFamily="34" charset="-120"/>
-              </a:rPr>
               <a:t>Hiroshima. Nagasaki.</a:t>
             </a:r>
             <a:endParaRPr lang="en-US" sz="1400" dirty="0"/>
@@ -8994,7 +10546,7 @@
           <a:bodyPr wrap="square" rtlCol="0" anchor="ctr"/>
           <a:lstStyle/>
           <a:p>
-            <a:pPr algn="ctr" indent="0" marL="0">
+            <a:pPr marL="0" indent="0" algn="ctr">
               <a:buNone/>
             </a:pPr>
             <a:r>
@@ -9033,7 +10585,7 @@
           <a:bodyPr wrap="square" rtlCol="0" anchor="ctr"/>
           <a:lstStyle/>
           <a:p>
-            <a:pPr algn="ctr" indent="0" marL="0">
+            <a:pPr marL="0" indent="0" algn="ctr">
               <a:buNone/>
             </a:pPr>
             <a:r>
@@ -9461,6 +11013,7 @@
         <a:solidFill>
           <a:srgbClr val="FEFCF8"/>
         </a:solidFill>
+        <a:effectLst/>
       </p:bgPr>
     </p:bg>
     <p:spTree>
@@ -9498,11 +11051,11 @@
           <a:bodyPr wrap="square" lIns="0" tIns="0" rIns="0" bIns="0" rtlCol="0" anchor="ctr"/>
           <a:lstStyle/>
           <a:p>
-            <a:pPr indent="0" marL="0">
-              <a:buNone/>
-            </a:pPr>
-            <a:r>
-              <a:rPr lang="en-US" sz="800" b="1" spc="300" kern="0" dirty="0">
+            <a:pPr marL="0" indent="0">
+              <a:buNone/>
+            </a:pPr>
+            <a:r>
+              <a:rPr lang="en-US" sz="800" b="1" kern="0" spc="300" dirty="0">
                 <a:solidFill>
                   <a:srgbClr val="666666"/>
                 </a:solidFill>
@@ -9537,7 +11090,7 @@
           <a:bodyPr wrap="square" lIns="0" tIns="0" rIns="0" bIns="0" rtlCol="0" anchor="ctr"/>
           <a:lstStyle/>
           <a:p>
-            <a:pPr algn="r" indent="0" marL="0">
+            <a:pPr marL="0" indent="0" algn="r">
               <a:buNone/>
             </a:pPr>
             <a:r>
@@ -9576,11 +11129,11 @@
           <a:bodyPr wrap="square" rtlCol="0" anchor="ctr"/>
           <a:lstStyle/>
           <a:p>
-            <a:pPr algn="ctr" indent="0" marL="0">
-              <a:buNone/>
-            </a:pPr>
-            <a:r>
-              <a:rPr lang="en-US" sz="1200" b="1" spc="400" kern="0" dirty="0">
+            <a:pPr marL="0" indent="0" algn="ctr">
+              <a:buNone/>
+            </a:pPr>
+            <a:r>
+              <a:rPr lang="en-US" sz="1200" b="1" kern="0" spc="400" dirty="0">
                 <a:solidFill>
                   <a:srgbClr val="C97A1A"/>
                 </a:solidFill>
@@ -9615,11 +11168,11 @@
           <a:bodyPr wrap="square" rtlCol="0" anchor="ctr"/>
           <a:lstStyle/>
           <a:p>
-            <a:pPr algn="ctr" indent="0" marL="0">
-              <a:buNone/>
-            </a:pPr>
-            <a:r>
-              <a:rPr lang="en-US" sz="1200" b="1" spc="300" kern="0" dirty="0">
+            <a:pPr marL="0" indent="0" algn="ctr">
+              <a:buNone/>
+            </a:pPr>
+            <a:r>
+              <a:rPr lang="en-US" sz="1200" b="1" kern="0" spc="300" dirty="0">
                 <a:solidFill>
                   <a:srgbClr val="C97A1A"/>
                 </a:solidFill>
@@ -9654,7 +11207,7 @@
           <a:bodyPr wrap="square" rtlCol="0" anchor="ctr"/>
           <a:lstStyle/>
           <a:p>
-            <a:pPr algn="ctr" indent="0" marL="0">
+            <a:pPr marL="0" indent="0" algn="ctr">
               <a:lnSpc>
                 <a:spcPct val="135000"/>
               </a:lnSpc>
@@ -9671,12 +11224,6 @@
               </a:rPr>
               <a:t>"Kung gusto nating pag-usapan ang </a:t>
             </a:r>
-            <a:pPr algn="ctr" indent="0" marL="0">
-              <a:lnSpc>
-                <a:spcPct val="135000"/>
-              </a:lnSpc>
-              <a:buNone/>
-            </a:pPr>
             <a:r>
               <a:rPr lang="en-US" sz="3200" b="1" i="1" dirty="0">
                 <a:solidFill>
@@ -9688,12 +11235,6 @@
               </a:rPr>
               <a:t>Kaniyang pagsukob</a:t>
             </a:r>
-            <a:pPr algn="ctr" indent="0" marL="0">
-              <a:lnSpc>
-                <a:spcPct val="135000"/>
-              </a:lnSpc>
-              <a:buNone/>
-            </a:pPr>
             <a:r>
               <a:rPr lang="en-US" sz="3200" b="1" dirty="0">
                 <a:solidFill>
@@ -9705,12 +11246,6 @@
               </a:rPr>
               <a:t>, dapat handa rin tayong talakayin ang </a:t>
             </a:r>
-            <a:pPr algn="ctr" indent="0" marL="0">
-              <a:lnSpc>
-                <a:spcPct val="135000"/>
-              </a:lnSpc>
-              <a:buNone/>
-            </a:pPr>
             <a:r>
               <a:rPr lang="en-US" sz="3200" b="1" i="1" dirty="0">
                 <a:solidFill>
@@ -9722,12 +11257,6 @@
               </a:rPr>
               <a:t>ating pagsuko</a:t>
             </a:r>
-            <a:pPr algn="ctr" indent="0" marL="0">
-              <a:lnSpc>
-                <a:spcPct val="135000"/>
-              </a:lnSpc>
-              <a:buNone/>
-            </a:pPr>
             <a:r>
               <a:rPr lang="en-US" sz="3200" b="1" dirty="0">
                 <a:solidFill>
@@ -9812,6 +11341,7 @@
         <a:solidFill>
           <a:srgbClr val="FFF4E0"/>
         </a:solidFill>
+        <a:effectLst/>
       </p:bgPr>
     </p:bg>
     <p:spTree>
@@ -9849,11 +11379,11 @@
           <a:bodyPr wrap="square" lIns="0" tIns="0" rIns="0" bIns="0" rtlCol="0" anchor="ctr"/>
           <a:lstStyle/>
           <a:p>
-            <a:pPr indent="0" marL="0">
-              <a:buNone/>
-            </a:pPr>
-            <a:r>
-              <a:rPr lang="en-US" sz="800" b="1" spc="300" kern="0" dirty="0">
+            <a:pPr marL="0" indent="0">
+              <a:buNone/>
+            </a:pPr>
+            <a:r>
+              <a:rPr lang="en-US" sz="800" b="1" kern="0" spc="300" dirty="0">
                 <a:solidFill>
                   <a:srgbClr val="666666"/>
                 </a:solidFill>
@@ -9888,7 +11418,7 @@
           <a:bodyPr wrap="square" lIns="0" tIns="0" rIns="0" bIns="0" rtlCol="0" anchor="ctr"/>
           <a:lstStyle/>
           <a:p>
-            <a:pPr algn="r" indent="0" marL="0">
+            <a:pPr marL="0" indent="0" algn="r">
               <a:buNone/>
             </a:pPr>
             <a:r>
@@ -9927,11 +11457,11 @@
           <a:bodyPr wrap="square" rtlCol="0" anchor="ctr"/>
           <a:lstStyle/>
           <a:p>
-            <a:pPr algn="ctr" indent="0" marL="0">
-              <a:buNone/>
-            </a:pPr>
-            <a:r>
-              <a:rPr lang="en-US" sz="1200" b="1" spc="400" kern="0" dirty="0">
+            <a:pPr marL="0" indent="0" algn="ctr">
+              <a:buNone/>
+            </a:pPr>
+            <a:r>
+              <a:rPr lang="en-US" sz="1200" b="1" kern="0" spc="400" dirty="0">
                 <a:solidFill>
                   <a:srgbClr val="C97A1A"/>
                 </a:solidFill>
@@ -9966,11 +11496,11 @@
           <a:bodyPr wrap="square" rtlCol="0" anchor="ctr"/>
           <a:lstStyle/>
           <a:p>
-            <a:pPr algn="ctr" indent="0" marL="0">
-              <a:buNone/>
-            </a:pPr>
-            <a:r>
-              <a:rPr lang="en-US" sz="1200" b="1" spc="300" kern="0" dirty="0">
+            <a:pPr marL="0" indent="0" algn="ctr">
+              <a:buNone/>
+            </a:pPr>
+            <a:r>
+              <a:rPr lang="en-US" sz="1200" b="1" kern="0" spc="300" dirty="0">
                 <a:solidFill>
                   <a:srgbClr val="C97A1A"/>
                 </a:solidFill>
@@ -10005,7 +11535,7 @@
           <a:bodyPr wrap="square" rtlCol="0" anchor="ctr"/>
           <a:lstStyle/>
           <a:p>
-            <a:pPr algn="ctr" indent="0" marL="0">
+            <a:pPr marL="0" indent="0" algn="ctr">
               <a:buNone/>
             </a:pPr>
             <a:r>
@@ -10044,7 +11574,7 @@
           <a:bodyPr wrap="square" rtlCol="0" anchor="ctr"/>
           <a:lstStyle/>
           <a:p>
-            <a:pPr algn="ctr" indent="0" marL="0">
+            <a:pPr marL="0" indent="0" algn="ctr">
               <a:lnSpc>
                 <a:spcPct val="140000"/>
               </a:lnSpc>
@@ -10064,7 +11594,7 @@
             <a:endParaRPr lang="en-US" sz="1800" dirty="0"/>
           </a:p>
           <a:p>
-            <a:pPr algn="ctr" indent="0" marL="0">
+            <a:pPr marL="0" indent="0" algn="ctr">
               <a:lnSpc>
                 <a:spcPct val="140000"/>
               </a:lnSpc>
@@ -10106,11 +11636,11 @@
           <a:bodyPr wrap="square" rtlCol="0" anchor="ctr"/>
           <a:lstStyle/>
           <a:p>
-            <a:pPr algn="ctr" indent="0" marL="0">
-              <a:buNone/>
-            </a:pPr>
-            <a:r>
-              <a:rPr lang="en-US" sz="1700" b="1" spc="300" kern="0" dirty="0">
+            <a:pPr marL="0" indent="0" algn="ctr">
+              <a:buNone/>
+            </a:pPr>
+            <a:r>
+              <a:rPr lang="en-US" sz="1700" b="1" kern="0" spc="300" dirty="0">
                 <a:solidFill>
                   <a:srgbClr val="C97A1A"/>
                 </a:solidFill>
@@ -10120,11 +11650,8 @@
               </a:rPr>
               <a:t>ABSOLUTELY</a:t>
             </a:r>
-            <a:pPr algn="ctr" indent="0" marL="0">
-              <a:buNone/>
-            </a:pPr>
-            <a:r>
-              <a:rPr lang="en-US" sz="1700" spc="300" kern="0" dirty="0">
+            <a:r>
+              <a:rPr lang="en-US" sz="1700" kern="0" spc="300" dirty="0">
                 <a:solidFill>
                   <a:srgbClr val="888888"/>
                 </a:solidFill>
@@ -10134,11 +11661,8 @@
               </a:rPr>
               <a:t>   ·   </a:t>
             </a:r>
-            <a:pPr algn="ctr" indent="0" marL="0">
-              <a:buNone/>
-            </a:pPr>
-            <a:r>
-              <a:rPr lang="en-US" sz="1700" b="1" spc="300" kern="0" dirty="0">
+            <a:r>
+              <a:rPr lang="en-US" sz="1700" b="1" kern="0" spc="300" dirty="0">
                 <a:solidFill>
                   <a:srgbClr val="C97A1A"/>
                 </a:solidFill>
@@ -10148,11 +11672,8 @@
               </a:rPr>
               <a:t>COMPLETELY</a:t>
             </a:r>
-            <a:pPr algn="ctr" indent="0" marL="0">
-              <a:buNone/>
-            </a:pPr>
-            <a:r>
-              <a:rPr lang="en-US" sz="1700" spc="300" kern="0" dirty="0">
+            <a:r>
+              <a:rPr lang="en-US" sz="1700" kern="0" spc="300" dirty="0">
                 <a:solidFill>
                   <a:srgbClr val="888888"/>
                 </a:solidFill>
@@ -10162,11 +11683,8 @@
               </a:rPr>
               <a:t>   ·   </a:t>
             </a:r>
-            <a:pPr algn="ctr" indent="0" marL="0">
-              <a:buNone/>
-            </a:pPr>
-            <a:r>
-              <a:rPr lang="en-US" sz="1700" b="1" spc="300" kern="0" dirty="0">
+            <a:r>
+              <a:rPr lang="en-US" sz="1700" b="1" kern="0" spc="300" dirty="0">
                 <a:solidFill>
                   <a:srgbClr val="C97A1A"/>
                 </a:solidFill>
@@ -10249,6 +11767,7 @@
         <a:solidFill>
           <a:srgbClr val="0F1C34"/>
         </a:solidFill>
+        <a:effectLst/>
       </p:bgPr>
     </p:bg>
     <p:spTree>
@@ -10286,11 +11805,11 @@
           <a:bodyPr wrap="square" lIns="0" tIns="0" rIns="0" bIns="0" rtlCol="0" anchor="ctr"/>
           <a:lstStyle/>
           <a:p>
-            <a:pPr indent="0" marL="0">
-              <a:buNone/>
-            </a:pPr>
-            <a:r>
-              <a:rPr lang="en-US" sz="800" b="1" spc="300" kern="0" dirty="0">
+            <a:pPr marL="0" indent="0">
+              <a:buNone/>
+            </a:pPr>
+            <a:r>
+              <a:rPr lang="en-US" sz="800" b="1" kern="0" spc="300" dirty="0">
                 <a:solidFill>
                   <a:srgbClr val="D4A84A"/>
                 </a:solidFill>
@@ -10325,7 +11844,7 @@
           <a:bodyPr wrap="square" lIns="0" tIns="0" rIns="0" bIns="0" rtlCol="0" anchor="ctr"/>
           <a:lstStyle/>
           <a:p>
-            <a:pPr algn="r" indent="0" marL="0">
+            <a:pPr marL="0" indent="0" algn="r">
               <a:buNone/>
             </a:pPr>
             <a:r>
@@ -10364,11 +11883,11 @@
           <a:bodyPr wrap="square" rtlCol="0" anchor="ctr"/>
           <a:lstStyle/>
           <a:p>
-            <a:pPr algn="ctr" indent="0" marL="0">
-              <a:buNone/>
-            </a:pPr>
-            <a:r>
-              <a:rPr lang="en-US" sz="1200" b="1" spc="400" kern="0" dirty="0">
+            <a:pPr marL="0" indent="0" algn="ctr">
+              <a:buNone/>
+            </a:pPr>
+            <a:r>
+              <a:rPr lang="en-US" sz="1200" b="1" kern="0" spc="400" dirty="0">
                 <a:solidFill>
                   <a:srgbClr val="D4A84A"/>
                 </a:solidFill>
@@ -10403,11 +11922,11 @@
           <a:bodyPr wrap="square" rtlCol="0" anchor="ctr"/>
           <a:lstStyle/>
           <a:p>
-            <a:pPr algn="ctr" indent="0" marL="0">
-              <a:buNone/>
-            </a:pPr>
-            <a:r>
-              <a:rPr lang="en-US" sz="1200" b="1" spc="400" kern="0" dirty="0">
+            <a:pPr marL="0" indent="0" algn="ctr">
+              <a:buNone/>
+            </a:pPr>
+            <a:r>
+              <a:rPr lang="en-US" sz="1200" b="1" kern="0" spc="400" dirty="0">
                 <a:solidFill>
                   <a:srgbClr val="D4A84A"/>
                 </a:solidFill>
@@ -10442,7 +11961,7 @@
           <a:bodyPr wrap="square" rtlCol="0" anchor="ctr"/>
           <a:lstStyle/>
           <a:p>
-            <a:pPr algn="ctr" indent="0" marL="0">
+            <a:pPr marL="0" indent="0" algn="ctr">
               <a:buNone/>
             </a:pPr>
             <a:r>
@@ -10481,7 +12000,7 @@
           <a:bodyPr wrap="square" rtlCol="0" anchor="ctr"/>
           <a:lstStyle/>
           <a:p>
-            <a:pPr algn="ctr" indent="0" marL="0">
+            <a:pPr marL="0" indent="0" algn="ctr">
               <a:lnSpc>
                 <a:spcPct val="145000"/>
               </a:lnSpc>
@@ -10498,12 +12017,6 @@
               </a:rPr>
               <a:t>"Hindi ninyo pag-aari ang inyong katawan; sapagkat </a:t>
             </a:r>
-            <a:pPr algn="ctr" indent="0" marL="0">
-              <a:lnSpc>
-                <a:spcPct val="145000"/>
-              </a:lnSpc>
-              <a:buNone/>
-            </a:pPr>
             <a:r>
               <a:rPr lang="en-US" sz="2200" b="1" i="1" dirty="0">
                 <a:solidFill>
@@ -10515,12 +12028,6 @@
               </a:rPr>
               <a:t>binili na kayo sa isang halaga.</a:t>
             </a:r>
-            <a:pPr algn="ctr" indent="0" marL="0">
-              <a:lnSpc>
-                <a:spcPct val="145000"/>
-              </a:lnSpc>
-              <a:buNone/>
-            </a:pPr>
             <a:r>
               <a:rPr lang="en-US" sz="2200" i="1" dirty="0">
                 <a:solidFill>
@@ -10605,6 +12112,7 @@
         <a:solidFill>
           <a:srgbClr val="FEFCF8"/>
         </a:solidFill>
+        <a:effectLst/>
       </p:bgPr>
     </p:bg>
     <p:spTree>
@@ -10642,11 +12150,11 @@
           <a:bodyPr wrap="square" lIns="0" tIns="0" rIns="0" bIns="0" rtlCol="0" anchor="ctr"/>
           <a:lstStyle/>
           <a:p>
-            <a:pPr indent="0" marL="0">
-              <a:buNone/>
-            </a:pPr>
-            <a:r>
-              <a:rPr lang="en-US" sz="800" b="1" spc="300" kern="0" dirty="0">
+            <a:pPr marL="0" indent="0">
+              <a:buNone/>
+            </a:pPr>
+            <a:r>
+              <a:rPr lang="en-US" sz="800" b="1" kern="0" spc="300" dirty="0">
                 <a:solidFill>
                   <a:srgbClr val="666666"/>
                 </a:solidFill>
@@ -10681,7 +12189,7 @@
           <a:bodyPr wrap="square" lIns="0" tIns="0" rIns="0" bIns="0" rtlCol="0" anchor="ctr"/>
           <a:lstStyle/>
           <a:p>
-            <a:pPr algn="r" indent="0" marL="0">
+            <a:pPr marL="0" indent="0" algn="r">
               <a:buNone/>
             </a:pPr>
             <a:r>
@@ -10720,11 +12228,11 @@
           <a:bodyPr wrap="square" rtlCol="0" anchor="ctr"/>
           <a:lstStyle/>
           <a:p>
-            <a:pPr algn="ctr" indent="0" marL="0">
-              <a:buNone/>
-            </a:pPr>
-            <a:r>
-              <a:rPr lang="en-US" sz="1100" b="1" spc="400" kern="0" dirty="0">
+            <a:pPr marL="0" indent="0" algn="ctr">
+              <a:buNone/>
+            </a:pPr>
+            <a:r>
+              <a:rPr lang="en-US" sz="1100" b="1" kern="0" spc="400" dirty="0">
                 <a:solidFill>
                   <a:srgbClr val="C97A1A"/>
                 </a:solidFill>
@@ -10759,7 +12267,7 @@
           <a:bodyPr wrap="square" rtlCol="0" anchor="ctr"/>
           <a:lstStyle/>
           <a:p>
-            <a:pPr algn="ctr" indent="0" marL="0">
+            <a:pPr marL="0" indent="0" algn="ctr">
               <a:lnSpc>
                 <a:spcPct val="140000"/>
               </a:lnSpc>
@@ -10806,6 +12314,13 @@
             <a:prstDash val="solid"/>
           </a:ln>
         </p:spPr>
+        <p:txBody>
+          <a:bodyPr/>
+          <a:lstStyle/>
+          <a:p>
+            <a:endParaRPr lang="en-PH"/>
+          </a:p>
+        </p:txBody>
       </p:sp>
       <p:sp>
         <p:nvSpPr>
@@ -10828,11 +12343,11 @@
           <a:bodyPr wrap="square" lIns="0" tIns="0" rIns="0" bIns="0" rtlCol="0" anchor="ctr"/>
           <a:lstStyle/>
           <a:p>
-            <a:pPr algn="ctr" indent="0" marL="0">
-              <a:buNone/>
-            </a:pPr>
-            <a:r>
-              <a:rPr lang="en-US" sz="1100" b="1" spc="400" kern="0" dirty="0">
+            <a:pPr marL="0" indent="0" algn="ctr">
+              <a:buNone/>
+            </a:pPr>
+            <a:r>
+              <a:rPr lang="en-US" sz="1100" b="1" kern="0" spc="400" dirty="0">
                 <a:solidFill>
                   <a:srgbClr val="C97A1A"/>
                 </a:solidFill>
@@ -10867,7 +12382,7 @@
           <a:bodyPr wrap="square" lIns="0" tIns="0" rIns="0" bIns="0" rtlCol="0" anchor="ctr"/>
           <a:lstStyle/>
           <a:p>
-            <a:pPr algn="ctr" indent="0" marL="0">
+            <a:pPr marL="0" indent="0" algn="ctr">
               <a:buNone/>
             </a:pPr>
             <a:r>
@@ -10906,7 +12421,7 @@
           <a:bodyPr wrap="square" lIns="0" tIns="0" rIns="0" bIns="0" rtlCol="0" anchor="ctr"/>
           <a:lstStyle/>
           <a:p>
-            <a:pPr algn="ctr" indent="0" marL="0">
+            <a:pPr marL="0" indent="0" algn="ctr">
               <a:buNone/>
             </a:pPr>
             <a:r>
@@ -10950,6 +12465,13 @@
             <a:prstDash val="solid"/>
           </a:ln>
         </p:spPr>
+        <p:txBody>
+          <a:bodyPr/>
+          <a:lstStyle/>
+          <a:p>
+            <a:endParaRPr lang="en-PH"/>
+          </a:p>
+        </p:txBody>
       </p:sp>
       <p:sp>
         <p:nvSpPr>
@@ -10972,11 +12494,11 @@
           <a:bodyPr wrap="square" lIns="0" tIns="0" rIns="0" bIns="0" rtlCol="0" anchor="ctr"/>
           <a:lstStyle/>
           <a:p>
-            <a:pPr algn="ctr" indent="0" marL="0">
-              <a:buNone/>
-            </a:pPr>
-            <a:r>
-              <a:rPr lang="en-US" sz="1100" b="1" spc="400" kern="0" dirty="0">
+            <a:pPr marL="0" indent="0" algn="ctr">
+              <a:buNone/>
+            </a:pPr>
+            <a:r>
+              <a:rPr lang="en-US" sz="1100" b="1" kern="0" spc="400" dirty="0">
                 <a:solidFill>
                   <a:srgbClr val="C97A1A"/>
                 </a:solidFill>
@@ -11011,7 +12533,7 @@
           <a:bodyPr wrap="square" lIns="0" tIns="0" rIns="0" bIns="0" rtlCol="0" anchor="ctr"/>
           <a:lstStyle/>
           <a:p>
-            <a:pPr algn="ctr" indent="0" marL="0">
+            <a:pPr marL="0" indent="0" algn="ctr">
               <a:buNone/>
             </a:pPr>
             <a:r>
@@ -11050,7 +12572,7 @@
           <a:bodyPr wrap="square" rtlCol="0" anchor="ctr"/>
           <a:lstStyle/>
           <a:p>
-            <a:pPr algn="ctr" indent="0" marL="0">
+            <a:pPr marL="0" indent="0" algn="ctr">
               <a:buNone/>
             </a:pPr>
             <a:r>
@@ -11422,4 +12944,319 @@
     </a:ext>
   </a:extLst>
 </a:theme>
+</file>
+
+<file path=ppt/theme/theme2.xml><?xml version="1.0" encoding="utf-8"?>
+<a:theme xmlns:a="http://schemas.openxmlformats.org/drawingml/2006/main" name="Office Theme">
+  <a:themeElements>
+    <a:clrScheme name="Office">
+      <a:dk1>
+        <a:sysClr val="windowText" lastClr="000000"/>
+      </a:dk1>
+      <a:lt1>
+        <a:sysClr val="window" lastClr="FFFFFF"/>
+      </a:lt1>
+      <a:dk2>
+        <a:srgbClr val="0E2841"/>
+      </a:dk2>
+      <a:lt2>
+        <a:srgbClr val="E8E8E8"/>
+      </a:lt2>
+      <a:accent1>
+        <a:srgbClr val="156082"/>
+      </a:accent1>
+      <a:accent2>
+        <a:srgbClr val="E97132"/>
+      </a:accent2>
+      <a:accent3>
+        <a:srgbClr val="196B24"/>
+      </a:accent3>
+      <a:accent4>
+        <a:srgbClr val="0F9ED5"/>
+      </a:accent4>
+      <a:accent5>
+        <a:srgbClr val="A02B93"/>
+      </a:accent5>
+      <a:accent6>
+        <a:srgbClr val="4EA72E"/>
+      </a:accent6>
+      <a:hlink>
+        <a:srgbClr val="467886"/>
+      </a:hlink>
+      <a:folHlink>
+        <a:srgbClr val="96607D"/>
+      </a:folHlink>
+    </a:clrScheme>
+    <a:fontScheme name="Office">
+      <a:majorFont>
+        <a:latin typeface="Aptos Display" panose="02110004020202020204"/>
+        <a:ea typeface=""/>
+        <a:cs typeface=""/>
+        <a:font script="Jpan" typeface="游ゴシック Light"/>
+        <a:font script="Hang" typeface="맑은 고딕"/>
+        <a:font script="Hans" typeface="等线 Light"/>
+        <a:font script="Hant" typeface="新細明體"/>
+        <a:font script="Arab" typeface="Times New Roman"/>
+        <a:font script="Hebr" typeface="Times New Roman"/>
+        <a:font script="Thai" typeface="Angsana New"/>
+        <a:font script="Ethi" typeface="Nyala"/>
+        <a:font script="Beng" typeface="Vrinda"/>
+        <a:font script="Gujr" typeface="Shruti"/>
+        <a:font script="Khmr" typeface="MoolBoran"/>
+        <a:font script="Knda" typeface="Tunga"/>
+        <a:font script="Guru" typeface="Raavi"/>
+        <a:font script="Cans" typeface="Euphemia"/>
+        <a:font script="Cher" typeface="Plantagenet Cherokee"/>
+        <a:font script="Yiii" typeface="Microsoft Yi Baiti"/>
+        <a:font script="Tibt" typeface="Microsoft Himalaya"/>
+        <a:font script="Thaa" typeface="MV Boli"/>
+        <a:font script="Deva" typeface="Mangal"/>
+        <a:font script="Telu" typeface="Gautami"/>
+        <a:font script="Taml" typeface="Latha"/>
+        <a:font script="Syrc" typeface="Estrangelo Edessa"/>
+        <a:font script="Orya" typeface="Kalinga"/>
+        <a:font script="Mlym" typeface="Kartika"/>
+        <a:font script="Laoo" typeface="DokChampa"/>
+        <a:font script="Sinh" typeface="Iskoola Pota"/>
+        <a:font script="Mong" typeface="Mongolian Baiti"/>
+        <a:font script="Viet" typeface="Times New Roman"/>
+        <a:font script="Uigh" typeface="Microsoft Uighur"/>
+        <a:font script="Geor" typeface="Sylfaen"/>
+        <a:font script="Armn" typeface="Arial"/>
+        <a:font script="Bugi" typeface="Leelawadee UI"/>
+        <a:font script="Bopo" typeface="Microsoft JhengHei"/>
+        <a:font script="Java" typeface="Javanese Text"/>
+        <a:font script="Lisu" typeface="Segoe UI"/>
+        <a:font script="Mymr" typeface="Myanmar Text"/>
+        <a:font script="Nkoo" typeface="Ebrima"/>
+        <a:font script="Olck" typeface="Nirmala UI"/>
+        <a:font script="Osma" typeface="Ebrima"/>
+        <a:font script="Phag" typeface="Phagspa"/>
+        <a:font script="Syrn" typeface="Estrangelo Edessa"/>
+        <a:font script="Syrj" typeface="Estrangelo Edessa"/>
+        <a:font script="Syre" typeface="Estrangelo Edessa"/>
+        <a:font script="Sora" typeface="Nirmala UI"/>
+        <a:font script="Tale" typeface="Microsoft Tai Le"/>
+        <a:font script="Talu" typeface="Microsoft New Tai Lue"/>
+        <a:font script="Tfng" typeface="Ebrima"/>
+      </a:majorFont>
+      <a:minorFont>
+        <a:latin typeface="Aptos" panose="02110004020202020204"/>
+        <a:ea typeface=""/>
+        <a:cs typeface=""/>
+        <a:font script="Jpan" typeface="游ゴシック"/>
+        <a:font script="Hang" typeface="맑은 고딕"/>
+        <a:font script="Hans" typeface="等线"/>
+        <a:font script="Hant" typeface="新細明體"/>
+        <a:font script="Arab" typeface="Arial"/>
+        <a:font script="Hebr" typeface="Arial"/>
+        <a:font script="Thai" typeface="Cordia New"/>
+        <a:font script="Ethi" typeface="Nyala"/>
+        <a:font script="Beng" typeface="Vrinda"/>
+        <a:font script="Gujr" typeface="Shruti"/>
+        <a:font script="Khmr" typeface="DaunPenh"/>
+        <a:font script="Knda" typeface="Tunga"/>
+        <a:font script="Guru" typeface="Raavi"/>
+        <a:font script="Cans" typeface="Euphemia"/>
+        <a:font script="Cher" typeface="Plantagenet Cherokee"/>
+        <a:font script="Yiii" typeface="Microsoft Yi Baiti"/>
+        <a:font script="Tibt" typeface="Microsoft Himalaya"/>
+        <a:font script="Thaa" typeface="MV Boli"/>
+        <a:font script="Deva" typeface="Mangal"/>
+        <a:font script="Telu" typeface="Gautami"/>
+        <a:font script="Taml" typeface="Latha"/>
+        <a:font script="Syrc" typeface="Estrangelo Edessa"/>
+        <a:font script="Orya" typeface="Kalinga"/>
+        <a:font script="Mlym" typeface="Kartika"/>
+        <a:font script="Laoo" typeface="DokChampa"/>
+        <a:font script="Sinh" typeface="Iskoola Pota"/>
+        <a:font script="Mong" typeface="Mongolian Baiti"/>
+        <a:font script="Viet" typeface="Arial"/>
+        <a:font script="Uigh" typeface="Microsoft Uighur"/>
+        <a:font script="Geor" typeface="Sylfaen"/>
+        <a:font script="Armn" typeface="Arial"/>
+        <a:font script="Bugi" typeface="Leelawadee UI"/>
+        <a:font script="Bopo" typeface="Microsoft JhengHei"/>
+        <a:font script="Java" typeface="Javanese Text"/>
+        <a:font script="Lisu" typeface="Segoe UI"/>
+        <a:font script="Mymr" typeface="Myanmar Text"/>
+        <a:font script="Nkoo" typeface="Ebrima"/>
+        <a:font script="Olck" typeface="Nirmala UI"/>
+        <a:font script="Osma" typeface="Ebrima"/>
+        <a:font script="Phag" typeface="Phagspa"/>
+        <a:font script="Syrn" typeface="Estrangelo Edessa"/>
+        <a:font script="Syrj" typeface="Estrangelo Edessa"/>
+        <a:font script="Syre" typeface="Estrangelo Edessa"/>
+        <a:font script="Sora" typeface="Nirmala UI"/>
+        <a:font script="Tale" typeface="Microsoft Tai Le"/>
+        <a:font script="Talu" typeface="Microsoft New Tai Lue"/>
+        <a:font script="Tfng" typeface="Ebrima"/>
+      </a:minorFont>
+    </a:fontScheme>
+    <a:fmtScheme name="Office">
+      <a:fillStyleLst>
+        <a:solidFill>
+          <a:schemeClr val="phClr"/>
+        </a:solidFill>
+        <a:gradFill rotWithShape="1">
+          <a:gsLst>
+            <a:gs pos="0">
+              <a:schemeClr val="phClr">
+                <a:lumMod val="110000"/>
+                <a:satMod val="105000"/>
+                <a:tint val="67000"/>
+              </a:schemeClr>
+            </a:gs>
+            <a:gs pos="50000">
+              <a:schemeClr val="phClr">
+                <a:lumMod val="105000"/>
+                <a:satMod val="103000"/>
+                <a:tint val="73000"/>
+              </a:schemeClr>
+            </a:gs>
+            <a:gs pos="100000">
+              <a:schemeClr val="phClr">
+                <a:lumMod val="105000"/>
+                <a:satMod val="109000"/>
+                <a:tint val="81000"/>
+              </a:schemeClr>
+            </a:gs>
+          </a:gsLst>
+          <a:lin ang="5400000" scaled="0"/>
+        </a:gradFill>
+        <a:gradFill rotWithShape="1">
+          <a:gsLst>
+            <a:gs pos="0">
+              <a:schemeClr val="phClr">
+                <a:satMod val="103000"/>
+                <a:lumMod val="102000"/>
+                <a:tint val="94000"/>
+              </a:schemeClr>
+            </a:gs>
+            <a:gs pos="50000">
+              <a:schemeClr val="phClr">
+                <a:satMod val="110000"/>
+                <a:lumMod val="100000"/>
+                <a:shade val="100000"/>
+              </a:schemeClr>
+            </a:gs>
+            <a:gs pos="100000">
+              <a:schemeClr val="phClr">
+                <a:lumMod val="99000"/>
+                <a:satMod val="120000"/>
+                <a:shade val="78000"/>
+              </a:schemeClr>
+            </a:gs>
+          </a:gsLst>
+          <a:lin ang="5400000" scaled="0"/>
+        </a:gradFill>
+      </a:fillStyleLst>
+      <a:lnStyleLst>
+        <a:ln w="12700" cap="flat" cmpd="sng" algn="ctr">
+          <a:solidFill>
+            <a:schemeClr val="phClr"/>
+          </a:solidFill>
+          <a:prstDash val="solid"/>
+          <a:miter lim="800000"/>
+        </a:ln>
+        <a:ln w="19050" cap="flat" cmpd="sng" algn="ctr">
+          <a:solidFill>
+            <a:schemeClr val="phClr"/>
+          </a:solidFill>
+          <a:prstDash val="solid"/>
+          <a:miter lim="800000"/>
+        </a:ln>
+        <a:ln w="25400" cap="flat" cmpd="sng" algn="ctr">
+          <a:solidFill>
+            <a:schemeClr val="phClr"/>
+          </a:solidFill>
+          <a:prstDash val="solid"/>
+          <a:miter lim="800000"/>
+        </a:ln>
+      </a:lnStyleLst>
+      <a:effectStyleLst>
+        <a:effectStyle>
+          <a:effectLst/>
+        </a:effectStyle>
+        <a:effectStyle>
+          <a:effectLst/>
+        </a:effectStyle>
+        <a:effectStyle>
+          <a:effectLst>
+            <a:outerShdw blurRad="57150" dist="19050" dir="5400000" algn="ctr" rotWithShape="0">
+              <a:srgbClr val="000000">
+                <a:alpha val="63000"/>
+              </a:srgbClr>
+            </a:outerShdw>
+          </a:effectLst>
+        </a:effectStyle>
+      </a:effectStyleLst>
+      <a:bgFillStyleLst>
+        <a:solidFill>
+          <a:schemeClr val="phClr"/>
+        </a:solidFill>
+        <a:solidFill>
+          <a:schemeClr val="phClr">
+            <a:tint val="95000"/>
+            <a:satMod val="170000"/>
+          </a:schemeClr>
+        </a:solidFill>
+        <a:gradFill rotWithShape="1">
+          <a:gsLst>
+            <a:gs pos="0">
+              <a:schemeClr val="phClr">
+                <a:tint val="93000"/>
+                <a:satMod val="150000"/>
+                <a:shade val="98000"/>
+                <a:lumMod val="102000"/>
+              </a:schemeClr>
+            </a:gs>
+            <a:gs pos="50000">
+              <a:schemeClr val="phClr">
+                <a:tint val="98000"/>
+                <a:satMod val="130000"/>
+                <a:shade val="90000"/>
+                <a:lumMod val="103000"/>
+              </a:schemeClr>
+            </a:gs>
+            <a:gs pos="100000">
+              <a:schemeClr val="phClr">
+                <a:shade val="63000"/>
+                <a:satMod val="120000"/>
+              </a:schemeClr>
+            </a:gs>
+          </a:gsLst>
+          <a:lin ang="5400000" scaled="0"/>
+        </a:gradFill>
+      </a:bgFillStyleLst>
+    </a:fmtScheme>
+  </a:themeElements>
+  <a:objectDefaults>
+    <a:lnDef>
+      <a:spPr/>
+      <a:bodyPr/>
+      <a:lstStyle/>
+      <a:style>
+        <a:lnRef idx="2">
+          <a:schemeClr val="accent1"/>
+        </a:lnRef>
+        <a:fillRef idx="0">
+          <a:schemeClr val="accent1"/>
+        </a:fillRef>
+        <a:effectRef idx="1">
+          <a:schemeClr val="accent1"/>
+        </a:effectRef>
+        <a:fontRef idx="minor">
+          <a:schemeClr val="tx1"/>
+        </a:fontRef>
+      </a:style>
+    </a:lnDef>
+  </a:objectDefaults>
+  <a:extraClrSchemeLst/>
+  <a:extLst>
+    <a:ext uri="{05A4C25C-085E-4340-85A3-A5531E510DB2}">
+      <thm15:themeFamily xmlns:thm15="http://schemas.microsoft.com/office/thememl/2012/main" name="Office Theme" id="{2E142A2C-CD16-42D6-873A-C26D2A0506FA}" vid="{1BDDFF52-6CD6-40A5-AB3C-68EB2F1E4D0A}"/>
+    </a:ext>
+  </a:extLst>
+</a:theme>
 </file>